--- a/NUMEX_pre_RStudio/NUMEX results.pptx
+++ b/NUMEX_pre_RStudio/NUMEX results.pptx
@@ -5,7 +5,7 @@
     <p:sldMasterId id="2147483648" r:id="rId1"/>
   </p:sldMasterIdLst>
   <p:notesMasterIdLst>
-    <p:notesMasterId r:id="rId30"/>
+    <p:notesMasterId r:id="rId32"/>
   </p:notesMasterIdLst>
   <p:sldIdLst>
     <p:sldId id="266" r:id="rId2"/>
@@ -13,29 +13,31 @@
     <p:sldId id="268" r:id="rId4"/>
     <p:sldId id="285" r:id="rId5"/>
     <p:sldId id="271" r:id="rId6"/>
-    <p:sldId id="283" r:id="rId7"/>
-    <p:sldId id="269" r:id="rId8"/>
-    <p:sldId id="272" r:id="rId9"/>
-    <p:sldId id="259" r:id="rId10"/>
-    <p:sldId id="286" r:id="rId11"/>
-    <p:sldId id="287" r:id="rId12"/>
-    <p:sldId id="284" r:id="rId13"/>
-    <p:sldId id="261" r:id="rId14"/>
-    <p:sldId id="260" r:id="rId15"/>
-    <p:sldId id="273" r:id="rId16"/>
-    <p:sldId id="274" r:id="rId17"/>
-    <p:sldId id="275" r:id="rId18"/>
-    <p:sldId id="288" r:id="rId19"/>
-    <p:sldId id="276" r:id="rId20"/>
-    <p:sldId id="277" r:id="rId21"/>
-    <p:sldId id="281" r:id="rId22"/>
-    <p:sldId id="278" r:id="rId23"/>
-    <p:sldId id="289" r:id="rId24"/>
-    <p:sldId id="290" r:id="rId25"/>
-    <p:sldId id="270" r:id="rId26"/>
-    <p:sldId id="257" r:id="rId27"/>
-    <p:sldId id="256" r:id="rId28"/>
-    <p:sldId id="280" r:id="rId29"/>
+    <p:sldId id="292" r:id="rId7"/>
+    <p:sldId id="291" r:id="rId8"/>
+    <p:sldId id="283" r:id="rId9"/>
+    <p:sldId id="269" r:id="rId10"/>
+    <p:sldId id="272" r:id="rId11"/>
+    <p:sldId id="259" r:id="rId12"/>
+    <p:sldId id="286" r:id="rId13"/>
+    <p:sldId id="287" r:id="rId14"/>
+    <p:sldId id="284" r:id="rId15"/>
+    <p:sldId id="261" r:id="rId16"/>
+    <p:sldId id="260" r:id="rId17"/>
+    <p:sldId id="273" r:id="rId18"/>
+    <p:sldId id="274" r:id="rId19"/>
+    <p:sldId id="275" r:id="rId20"/>
+    <p:sldId id="288" r:id="rId21"/>
+    <p:sldId id="276" r:id="rId22"/>
+    <p:sldId id="277" r:id="rId23"/>
+    <p:sldId id="281" r:id="rId24"/>
+    <p:sldId id="278" r:id="rId25"/>
+    <p:sldId id="289" r:id="rId26"/>
+    <p:sldId id="290" r:id="rId27"/>
+    <p:sldId id="270" r:id="rId28"/>
+    <p:sldId id="257" r:id="rId29"/>
+    <p:sldId id="256" r:id="rId30"/>
+    <p:sldId id="280" r:id="rId31"/>
   </p:sldIdLst>
   <p:sldSz cx="12192000" cy="6858000"/>
   <p:notesSz cx="6858000" cy="9144000"/>
@@ -235,7 +237,7 @@
           <a:p>
             <a:fld id="{99ADAB2D-2438-4DAF-8EF0-78196AA5F544}" type="datetimeFigureOut">
               <a:rPr lang="en-US" smtClean="0"/>
-              <a:t>2/9/2026</a:t>
+              <a:t>2/18/2026</a:t>
             </a:fld>
             <a:endParaRPr lang="en-US"/>
           </a:p>
@@ -664,7 +666,7 @@
           <a:p>
             <a:fld id="{FB953BC2-43C1-4767-ADF3-5E906A4AA839}" type="slidenum">
               <a:rPr lang="en-US" smtClean="0"/>
-              <a:t>17</a:t>
+              <a:t>19</a:t>
             </a:fld>
             <a:endParaRPr lang="en-US"/>
           </a:p>
@@ -790,7 +792,7 @@
           <a:p>
             <a:fld id="{FB953BC2-43C1-4767-ADF3-5E906A4AA839}" type="slidenum">
               <a:rPr lang="en-US" smtClean="0"/>
-              <a:t>19</a:t>
+              <a:t>21</a:t>
             </a:fld>
             <a:endParaRPr lang="en-US"/>
           </a:p>
@@ -878,7 +880,7 @@
           <a:p>
             <a:fld id="{FB953BC2-43C1-4767-ADF3-5E906A4AA839}" type="slidenum">
               <a:rPr lang="en-US" smtClean="0"/>
-              <a:t>20</a:t>
+              <a:t>22</a:t>
             </a:fld>
             <a:endParaRPr lang="en-US"/>
           </a:p>
@@ -1054,7 +1056,7 @@
           <a:p>
             <a:fld id="{FB953BC2-43C1-4767-ADF3-5E906A4AA839}" type="slidenum">
               <a:rPr lang="en-US" smtClean="0"/>
-              <a:t>26</a:t>
+              <a:t>28</a:t>
             </a:fld>
             <a:endParaRPr lang="en-US"/>
           </a:p>
@@ -1314,7 +1316,7 @@
           <a:p>
             <a:fld id="{FB953BC2-43C1-4767-ADF3-5E906A4AA839}" type="slidenum">
               <a:rPr lang="en-US" smtClean="0"/>
-              <a:t>27</a:t>
+              <a:t>29</a:t>
             </a:fld>
             <a:endParaRPr lang="en-US"/>
           </a:p>
@@ -1530,7 +1532,7 @@
           <a:p>
             <a:fld id="{FB953BC2-43C1-4767-ADF3-5E906A4AA839}" type="slidenum">
               <a:rPr lang="en-US" smtClean="0"/>
-              <a:t>7</a:t>
+              <a:t>9</a:t>
             </a:fld>
             <a:endParaRPr lang="en-US"/>
           </a:p>
@@ -1614,7 +1616,7 @@
           <a:p>
             <a:fld id="{FB953BC2-43C1-4767-ADF3-5E906A4AA839}" type="slidenum">
               <a:rPr lang="en-US" smtClean="0"/>
-              <a:t>8</a:t>
+              <a:t>10</a:t>
             </a:fld>
             <a:endParaRPr lang="en-US"/>
           </a:p>
@@ -2080,7 +2082,7 @@
           <a:p>
             <a:fld id="{FB953BC2-43C1-4767-ADF3-5E906A4AA839}" type="slidenum">
               <a:rPr lang="en-US" smtClean="0"/>
-              <a:t>9</a:t>
+              <a:t>11</a:t>
             </a:fld>
             <a:endParaRPr lang="en-US"/>
           </a:p>
@@ -2546,7 +2548,7 @@
           <a:p>
             <a:fld id="{FB953BC2-43C1-4767-ADF3-5E906A4AA839}" type="slidenum">
               <a:rPr lang="en-US" smtClean="0"/>
-              <a:t>10</a:t>
+              <a:t>12</a:t>
             </a:fld>
             <a:endParaRPr lang="en-US"/>
           </a:p>
@@ -2712,7 +2714,7 @@
           <a:p>
             <a:fld id="{FB953BC2-43C1-4767-ADF3-5E906A4AA839}" type="slidenum">
               <a:rPr lang="en-US" smtClean="0"/>
-              <a:t>13</a:t>
+              <a:t>15</a:t>
             </a:fld>
             <a:endParaRPr lang="en-US"/>
           </a:p>
@@ -2796,7 +2798,7 @@
           <a:p>
             <a:fld id="{FB953BC2-43C1-4767-ADF3-5E906A4AA839}" type="slidenum">
               <a:rPr lang="en-US" smtClean="0"/>
-              <a:t>14</a:t>
+              <a:t>16</a:t>
             </a:fld>
             <a:endParaRPr lang="en-US"/>
           </a:p>
@@ -3106,7 +3108,7 @@
           <a:p>
             <a:fld id="{FB953BC2-43C1-4767-ADF3-5E906A4AA839}" type="slidenum">
               <a:rPr lang="en-US" smtClean="0"/>
-              <a:t>15</a:t>
+              <a:t>17</a:t>
             </a:fld>
             <a:endParaRPr lang="en-US"/>
           </a:p>
@@ -3256,7 +3258,7 @@
           <a:p>
             <a:fld id="{742CBFA1-BD22-4292-9851-D341668FFB9E}" type="datetimeFigureOut">
               <a:rPr lang="en-US" smtClean="0"/>
-              <a:t>2/9/2026</a:t>
+              <a:t>2/18/2026</a:t>
             </a:fld>
             <a:endParaRPr lang="en-US"/>
           </a:p>
@@ -3426,7 +3428,7 @@
           <a:p>
             <a:fld id="{742CBFA1-BD22-4292-9851-D341668FFB9E}" type="datetimeFigureOut">
               <a:rPr lang="en-US" smtClean="0"/>
-              <a:t>2/9/2026</a:t>
+              <a:t>2/18/2026</a:t>
             </a:fld>
             <a:endParaRPr lang="en-US"/>
           </a:p>
@@ -3606,7 +3608,7 @@
           <a:p>
             <a:fld id="{742CBFA1-BD22-4292-9851-D341668FFB9E}" type="datetimeFigureOut">
               <a:rPr lang="en-US" smtClean="0"/>
-              <a:t>2/9/2026</a:t>
+              <a:t>2/18/2026</a:t>
             </a:fld>
             <a:endParaRPr lang="en-US"/>
           </a:p>
@@ -3776,7 +3778,7 @@
           <a:p>
             <a:fld id="{742CBFA1-BD22-4292-9851-D341668FFB9E}" type="datetimeFigureOut">
               <a:rPr lang="en-US" smtClean="0"/>
-              <a:t>2/9/2026</a:t>
+              <a:t>2/18/2026</a:t>
             </a:fld>
             <a:endParaRPr lang="en-US"/>
           </a:p>
@@ -4022,7 +4024,7 @@
           <a:p>
             <a:fld id="{742CBFA1-BD22-4292-9851-D341668FFB9E}" type="datetimeFigureOut">
               <a:rPr lang="en-US" smtClean="0"/>
-              <a:t>2/9/2026</a:t>
+              <a:t>2/18/2026</a:t>
             </a:fld>
             <a:endParaRPr lang="en-US"/>
           </a:p>
@@ -4254,7 +4256,7 @@
           <a:p>
             <a:fld id="{742CBFA1-BD22-4292-9851-D341668FFB9E}" type="datetimeFigureOut">
               <a:rPr lang="en-US" smtClean="0"/>
-              <a:t>2/9/2026</a:t>
+              <a:t>2/18/2026</a:t>
             </a:fld>
             <a:endParaRPr lang="en-US"/>
           </a:p>
@@ -4621,7 +4623,7 @@
           <a:p>
             <a:fld id="{742CBFA1-BD22-4292-9851-D341668FFB9E}" type="datetimeFigureOut">
               <a:rPr lang="en-US" smtClean="0"/>
-              <a:t>2/9/2026</a:t>
+              <a:t>2/18/2026</a:t>
             </a:fld>
             <a:endParaRPr lang="en-US"/>
           </a:p>
@@ -4739,7 +4741,7 @@
           <a:p>
             <a:fld id="{742CBFA1-BD22-4292-9851-D341668FFB9E}" type="datetimeFigureOut">
               <a:rPr lang="en-US" smtClean="0"/>
-              <a:t>2/9/2026</a:t>
+              <a:t>2/18/2026</a:t>
             </a:fld>
             <a:endParaRPr lang="en-US"/>
           </a:p>
@@ -4834,7 +4836,7 @@
           <a:p>
             <a:fld id="{742CBFA1-BD22-4292-9851-D341668FFB9E}" type="datetimeFigureOut">
               <a:rPr lang="en-US" smtClean="0"/>
-              <a:t>2/9/2026</a:t>
+              <a:t>2/18/2026</a:t>
             </a:fld>
             <a:endParaRPr lang="en-US"/>
           </a:p>
@@ -5111,7 +5113,7 @@
           <a:p>
             <a:fld id="{742CBFA1-BD22-4292-9851-D341668FFB9E}" type="datetimeFigureOut">
               <a:rPr lang="en-US" smtClean="0"/>
-              <a:t>2/9/2026</a:t>
+              <a:t>2/18/2026</a:t>
             </a:fld>
             <a:endParaRPr lang="en-US"/>
           </a:p>
@@ -5364,7 +5366,7 @@
           <a:p>
             <a:fld id="{742CBFA1-BD22-4292-9851-D341668FFB9E}" type="datetimeFigureOut">
               <a:rPr lang="en-US" smtClean="0"/>
-              <a:t>2/9/2026</a:t>
+              <a:t>2/18/2026</a:t>
             </a:fld>
             <a:endParaRPr lang="en-US"/>
           </a:p>
@@ -5577,7 +5579,7 @@
           <a:p>
             <a:fld id="{742CBFA1-BD22-4292-9851-D341668FFB9E}" type="datetimeFigureOut">
               <a:rPr lang="en-US" smtClean="0"/>
-              <a:t>2/9/2026</a:t>
+              <a:t>2/18/2026</a:t>
             </a:fld>
             <a:endParaRPr lang="en-US"/>
           </a:p>
@@ -6071,47 +6073,6 @@
           </a:p>
         </p:txBody>
       </p:sp>
-      <p:pic>
-        <p:nvPicPr>
-          <p:cNvPr id="3074" name="Picture 2" descr="https://vhrz669.hrz.uni-marburg.de/tmf_respect/UserFiles/Image/RESPECT/studyarea/studyarea.png"/>
-          <p:cNvPicPr>
-            <a:picLocks noChangeAspect="1" noChangeArrowheads="1"/>
-          </p:cNvPicPr>
-          <p:nvPr/>
-        </p:nvPicPr>
-        <p:blipFill>
-          <a:blip r:embed="rId3">
-            <a:extLst>
-              <a:ext uri="{28A0092B-C50C-407E-A947-70E740481C1C}">
-                <a14:useLocalDpi xmlns:a14="http://schemas.microsoft.com/office/drawing/2010/main" val="0"/>
-              </a:ext>
-            </a:extLst>
-          </a:blip>
-          <a:srcRect/>
-          <a:stretch>
-            <a:fillRect/>
-          </a:stretch>
-        </p:blipFill>
-        <p:spPr bwMode="auto">
-          <a:xfrm>
-            <a:off x="2997513" y="1653160"/>
-            <a:ext cx="6334990" cy="4987120"/>
-          </a:xfrm>
-          <a:prstGeom prst="rect">
-            <a:avLst/>
-          </a:prstGeom>
-          <a:noFill/>
-          <a:extLst>
-            <a:ext uri="{909E8E84-426E-40DD-AFC4-6F175D3DCCD1}">
-              <a14:hiddenFill xmlns:a14="http://schemas.microsoft.com/office/drawing/2010/main">
-                <a:solidFill>
-                  <a:srgbClr val="FFFFFF"/>
-                </a:solidFill>
-              </a14:hiddenFill>
-            </a:ext>
-          </a:extLst>
-        </p:spPr>
-      </p:pic>
     </p:spTree>
     <p:extLst>
       <p:ext uri="{BB962C8B-B14F-4D97-AF65-F5344CB8AC3E}">
@@ -6133,6 +6094,600 @@
 </file>
 
 <file path=ppt/slides/slide10.xml><?xml version="1.0" encoding="utf-8"?>
+<p:sld xmlns:a="http://schemas.openxmlformats.org/drawingml/2006/main" xmlns:r="http://schemas.openxmlformats.org/officeDocument/2006/relationships" xmlns:p="http://schemas.openxmlformats.org/presentationml/2006/main">
+  <p:cSld>
+    <p:spTree>
+      <p:nvGrpSpPr>
+        <p:cNvPr id="1" name=""/>
+        <p:cNvGrpSpPr/>
+        <p:nvPr/>
+      </p:nvGrpSpPr>
+      <p:grpSpPr>
+        <a:xfrm>
+          <a:off x="0" y="0"/>
+          <a:ext cx="0" cy="0"/>
+          <a:chOff x="0" y="0"/>
+          <a:chExt cx="0" cy="0"/>
+        </a:xfrm>
+      </p:grpSpPr>
+      <p:sp>
+        <p:nvSpPr>
+          <p:cNvPr id="2" name="Título 1"/>
+          <p:cNvSpPr>
+            <a:spLocks noGrp="1"/>
+          </p:cNvSpPr>
+          <p:nvPr>
+            <p:ph type="title"/>
+          </p:nvPr>
+        </p:nvSpPr>
+        <p:spPr/>
+        <p:txBody>
+          <a:bodyPr/>
+          <a:lstStyle/>
+          <a:p>
+            <a:r>
+              <a:rPr lang="es-MX" dirty="0" smtClean="0"/>
+              <a:t>ANALYSIS PER SPECIE</a:t>
+            </a:r>
+            <a:endParaRPr lang="en-US" dirty="0"/>
+          </a:p>
+        </p:txBody>
+      </p:sp>
+      <p:sp>
+        <p:nvSpPr>
+          <p:cNvPr id="3" name="Marcador de contenido 2"/>
+          <p:cNvSpPr>
+            <a:spLocks noGrp="1"/>
+          </p:cNvSpPr>
+          <p:nvPr>
+            <p:ph idx="1"/>
+          </p:nvPr>
+        </p:nvSpPr>
+        <p:spPr/>
+        <p:txBody>
+          <a:bodyPr>
+            <a:normAutofit/>
+          </a:bodyPr>
+          <a:lstStyle/>
+          <a:p>
+            <a:r>
+              <a:rPr lang="es-MX" dirty="0" smtClean="0"/>
+              <a:t>I </a:t>
+            </a:r>
+            <a:r>
+              <a:rPr lang="es-MX" dirty="0" err="1" smtClean="0"/>
+              <a:t>ran</a:t>
+            </a:r>
+            <a:r>
+              <a:rPr lang="es-MX" dirty="0" smtClean="0"/>
+              <a:t> ANOVA </a:t>
+            </a:r>
+            <a:r>
+              <a:rPr lang="es-MX" dirty="0" err="1" smtClean="0"/>
+              <a:t>interaction</a:t>
+            </a:r>
+            <a:r>
+              <a:rPr lang="es-MX" dirty="0" smtClean="0"/>
+              <a:t> </a:t>
+            </a:r>
+            <a:r>
+              <a:rPr lang="es-MX" dirty="0" err="1" smtClean="0"/>
+              <a:t>tests</a:t>
+            </a:r>
+            <a:r>
+              <a:rPr lang="es-MX" dirty="0" smtClean="0"/>
+              <a:t> per </a:t>
+            </a:r>
+            <a:r>
+              <a:rPr lang="es-MX" dirty="0" err="1" smtClean="0"/>
+              <a:t>species</a:t>
+            </a:r>
+            <a:r>
+              <a:rPr lang="es-MX" dirty="0" smtClean="0"/>
+              <a:t> – </a:t>
+            </a:r>
+            <a:r>
+              <a:rPr lang="es-MX" dirty="0" err="1" smtClean="0"/>
+              <a:t>not</a:t>
+            </a:r>
+            <a:r>
+              <a:rPr lang="es-MX" dirty="0" smtClean="0"/>
+              <a:t> </a:t>
+            </a:r>
+            <a:r>
+              <a:rPr lang="es-MX" dirty="0" err="1" smtClean="0"/>
+              <a:t>showed</a:t>
+            </a:r>
+            <a:r>
+              <a:rPr lang="es-MX" dirty="0" smtClean="0"/>
+              <a:t>- </a:t>
+            </a:r>
+            <a:r>
+              <a:rPr lang="es-MX" dirty="0" err="1" smtClean="0"/>
+              <a:t>but</a:t>
+            </a:r>
+            <a:r>
+              <a:rPr lang="es-MX" dirty="0" smtClean="0"/>
+              <a:t> </a:t>
+            </a:r>
+            <a:r>
+              <a:rPr lang="es-MX" dirty="0" err="1" smtClean="0"/>
+              <a:t>decided</a:t>
+            </a:r>
+            <a:r>
+              <a:rPr lang="es-MX" dirty="0" smtClean="0"/>
+              <a:t> to </a:t>
+            </a:r>
+            <a:r>
+              <a:rPr lang="es-MX" dirty="0" err="1" smtClean="0"/>
+              <a:t>go</a:t>
+            </a:r>
+            <a:r>
+              <a:rPr lang="es-MX" dirty="0" smtClean="0"/>
+              <a:t> </a:t>
+            </a:r>
+            <a:r>
+              <a:rPr lang="es-MX" dirty="0" err="1" smtClean="0"/>
+              <a:t>with</a:t>
+            </a:r>
+            <a:r>
+              <a:rPr lang="es-MX" dirty="0" smtClean="0"/>
+              <a:t> </a:t>
+            </a:r>
+            <a:r>
+              <a:rPr lang="es-MX" dirty="0" err="1" smtClean="0"/>
+              <a:t>glmm</a:t>
+            </a:r>
+            <a:r>
+              <a:rPr lang="es-MX" dirty="0" smtClean="0"/>
+              <a:t> </a:t>
+            </a:r>
+            <a:r>
+              <a:rPr lang="es-MX" dirty="0" err="1" smtClean="0"/>
+              <a:t>for</a:t>
+            </a:r>
+            <a:r>
+              <a:rPr lang="es-MX" dirty="0" smtClean="0"/>
+              <a:t> </a:t>
+            </a:r>
+            <a:r>
+              <a:rPr lang="es-MX" dirty="0" err="1" smtClean="0"/>
+              <a:t>their</a:t>
+            </a:r>
+            <a:r>
+              <a:rPr lang="es-MX" dirty="0" smtClean="0"/>
+              <a:t> </a:t>
+            </a:r>
+            <a:r>
+              <a:rPr lang="es-MX" dirty="0" err="1" smtClean="0"/>
+              <a:t>statistic</a:t>
+            </a:r>
+            <a:r>
+              <a:rPr lang="es-MX" dirty="0" smtClean="0"/>
+              <a:t> </a:t>
+            </a:r>
+            <a:r>
+              <a:rPr lang="es-MX" dirty="0" err="1" smtClean="0"/>
+              <a:t>power</a:t>
+            </a:r>
+            <a:r>
+              <a:rPr lang="es-MX" dirty="0" smtClean="0"/>
+              <a:t>. </a:t>
+            </a:r>
+          </a:p>
+          <a:p>
+            <a:endParaRPr lang="es-MX" dirty="0" smtClean="0"/>
+          </a:p>
+          <a:p>
+            <a:pPr marL="0" indent="0">
+              <a:buNone/>
+            </a:pPr>
+            <a:r>
+              <a:rPr lang="es-MX" sz="4000" dirty="0" err="1" smtClean="0">
+                <a:solidFill>
+                  <a:schemeClr val="accent1"/>
+                </a:solidFill>
+              </a:rPr>
+              <a:t>lmer</a:t>
+            </a:r>
+            <a:r>
+              <a:rPr lang="es-MX" sz="4000" dirty="0" smtClean="0">
+                <a:solidFill>
+                  <a:schemeClr val="accent1"/>
+                </a:solidFill>
+              </a:rPr>
+              <a:t>(Response </a:t>
+            </a:r>
+            <a:r>
+              <a:rPr lang="es-MX" sz="4000" dirty="0">
+                <a:solidFill>
+                  <a:schemeClr val="accent1"/>
+                </a:solidFill>
+              </a:rPr>
+              <a:t>variable~ N * P + (1 | Block/</a:t>
+            </a:r>
+            <a:r>
+              <a:rPr lang="es-MX" sz="4000" dirty="0" err="1">
+                <a:solidFill>
+                  <a:schemeClr val="accent1"/>
+                </a:solidFill>
+              </a:rPr>
+              <a:t>Plot</a:t>
+            </a:r>
+            <a:r>
+              <a:rPr lang="es-MX" sz="4000" dirty="0" smtClean="0">
+                <a:solidFill>
+                  <a:schemeClr val="accent1"/>
+                </a:solidFill>
+              </a:rPr>
+              <a:t>))</a:t>
+            </a:r>
+          </a:p>
+          <a:p>
+            <a:pPr marL="0" indent="0">
+              <a:buNone/>
+            </a:pPr>
+            <a:endParaRPr lang="es-MX" sz="4000" b="1" dirty="0">
+              <a:solidFill>
+                <a:schemeClr val="accent1"/>
+              </a:solidFill>
+            </a:endParaRPr>
+          </a:p>
+          <a:p>
+            <a:r>
+              <a:rPr lang="es-MX" b="1" dirty="0" smtClean="0"/>
+              <a:t>Q-Q </a:t>
+            </a:r>
+            <a:r>
+              <a:rPr lang="es-MX" b="1" dirty="0" err="1" smtClean="0"/>
+              <a:t>plots</a:t>
+            </a:r>
+            <a:r>
+              <a:rPr lang="es-MX" b="1" dirty="0" smtClean="0"/>
+              <a:t> </a:t>
+            </a:r>
+            <a:r>
+              <a:rPr lang="es-MX" b="1" dirty="0" err="1" smtClean="0"/>
+              <a:t>evaluation</a:t>
+            </a:r>
+            <a:r>
+              <a:rPr lang="es-MX" b="1" dirty="0" smtClean="0"/>
+              <a:t> </a:t>
+            </a:r>
+            <a:r>
+              <a:rPr lang="es-MX" b="1" dirty="0" err="1" smtClean="0"/>
+              <a:t>but</a:t>
+            </a:r>
+            <a:r>
+              <a:rPr lang="es-MX" b="1" dirty="0" smtClean="0"/>
+              <a:t> </a:t>
+            </a:r>
+            <a:r>
+              <a:rPr lang="es-MX" b="1" dirty="0" err="1" smtClean="0"/>
+              <a:t>also</a:t>
+            </a:r>
+            <a:r>
+              <a:rPr lang="es-MX" b="1" dirty="0" smtClean="0"/>
+              <a:t> </a:t>
+            </a:r>
+            <a:r>
+              <a:rPr lang="es-MX" b="1" dirty="0" err="1" smtClean="0"/>
+              <a:t>integrating</a:t>
+            </a:r>
+            <a:r>
+              <a:rPr lang="es-MX" b="1" dirty="0" smtClean="0"/>
+              <a:t> </a:t>
+            </a:r>
+            <a:r>
+              <a:rPr lang="es-MX" b="1" dirty="0" err="1" smtClean="0"/>
+              <a:t>DHARMa</a:t>
+            </a:r>
+            <a:r>
+              <a:rPr lang="es-MX" b="1" dirty="0" smtClean="0"/>
+              <a:t> </a:t>
+            </a:r>
+            <a:r>
+              <a:rPr lang="es-MX" b="1" dirty="0" err="1" smtClean="0"/>
+              <a:t>analysis</a:t>
+            </a:r>
+            <a:r>
+              <a:rPr lang="es-MX" b="1" dirty="0" smtClean="0"/>
+              <a:t>- more </a:t>
+            </a:r>
+            <a:r>
+              <a:rPr lang="es-MX" b="1" dirty="0" err="1" smtClean="0"/>
+              <a:t>strict</a:t>
+            </a:r>
+            <a:r>
+              <a:rPr lang="es-MX" b="1" dirty="0" smtClean="0"/>
+              <a:t>. </a:t>
+            </a:r>
+            <a:endParaRPr lang="es-MX" dirty="0" smtClean="0"/>
+          </a:p>
+        </p:txBody>
+      </p:sp>
+    </p:spTree>
+    <p:extLst>
+      <p:ext uri="{BB962C8B-B14F-4D97-AF65-F5344CB8AC3E}">
+        <p14:creationId xmlns:p14="http://schemas.microsoft.com/office/powerpoint/2010/main" val="4267299257"/>
+      </p:ext>
+    </p:extLst>
+  </p:cSld>
+  <p:clrMapOvr>
+    <a:masterClrMapping/>
+  </p:clrMapOvr>
+  <p:timing>
+    <p:tnLst>
+      <p:par>
+        <p:cTn id="1" dur="indefinite" restart="never" nodeType="tmRoot"/>
+      </p:par>
+    </p:tnLst>
+  </p:timing>
+</p:sld>
+</file>
+
+<file path=ppt/slides/slide11.xml><?xml version="1.0" encoding="utf-8"?>
+<p:sld xmlns:a="http://schemas.openxmlformats.org/drawingml/2006/main" xmlns:r="http://schemas.openxmlformats.org/officeDocument/2006/relationships" xmlns:p="http://schemas.openxmlformats.org/presentationml/2006/main">
+  <p:cSld>
+    <p:spTree>
+      <p:nvGrpSpPr>
+        <p:cNvPr id="1" name=""/>
+        <p:cNvGrpSpPr/>
+        <p:nvPr/>
+      </p:nvGrpSpPr>
+      <p:grpSpPr>
+        <a:xfrm>
+          <a:off x="0" y="0"/>
+          <a:ext cx="0" cy="0"/>
+          <a:chOff x="0" y="0"/>
+          <a:chExt cx="0" cy="0"/>
+        </a:xfrm>
+      </p:grpSpPr>
+      <p:sp>
+        <p:nvSpPr>
+          <p:cNvPr id="5" name="Rectángulo 4"/>
+          <p:cNvSpPr/>
+          <p:nvPr/>
+        </p:nvSpPr>
+        <p:spPr>
+          <a:xfrm>
+            <a:off x="667512" y="164030"/>
+            <a:ext cx="1691640" cy="402898"/>
+          </a:xfrm>
+          <a:prstGeom prst="rect">
+            <a:avLst/>
+          </a:prstGeom>
+        </p:spPr>
+        <p:style>
+          <a:lnRef idx="2">
+            <a:schemeClr val="accent1">
+              <a:shade val="50000"/>
+            </a:schemeClr>
+          </a:lnRef>
+          <a:fillRef idx="1">
+            <a:schemeClr val="accent1"/>
+          </a:fillRef>
+          <a:effectRef idx="0">
+            <a:schemeClr val="accent1"/>
+          </a:effectRef>
+          <a:fontRef idx="minor">
+            <a:schemeClr val="lt1"/>
+          </a:fontRef>
+        </p:style>
+        <p:txBody>
+          <a:bodyPr rtlCol="0" anchor="ctr"/>
+          <a:lstStyle/>
+          <a:p>
+            <a:pPr algn="ctr"/>
+            <a:r>
+              <a:rPr lang="es-MX" dirty="0" smtClean="0"/>
+              <a:t>*</a:t>
+            </a:r>
+            <a:r>
+              <a:rPr lang="es-MX" dirty="0" err="1" smtClean="0"/>
+              <a:t>Missing</a:t>
+            </a:r>
+            <a:r>
+              <a:rPr lang="es-MX" dirty="0" smtClean="0"/>
+              <a:t> </a:t>
+            </a:r>
+            <a:r>
+              <a:rPr lang="es-MX" dirty="0" err="1" smtClean="0"/>
+              <a:t>values</a:t>
+            </a:r>
+            <a:endParaRPr lang="en-US" dirty="0"/>
+          </a:p>
+        </p:txBody>
+      </p:sp>
+      <p:pic>
+        <p:nvPicPr>
+          <p:cNvPr id="17" name="Imagen 16"/>
+          <p:cNvPicPr>
+            <a:picLocks noChangeAspect="1"/>
+          </p:cNvPicPr>
+          <p:nvPr/>
+        </p:nvPicPr>
+        <p:blipFill>
+          <a:blip r:embed="rId3"/>
+          <a:stretch>
+            <a:fillRect/>
+          </a:stretch>
+        </p:blipFill>
+        <p:spPr>
+          <a:xfrm>
+            <a:off x="327089" y="1108708"/>
+            <a:ext cx="5662232" cy="4640584"/>
+          </a:xfrm>
+          <a:prstGeom prst="rect">
+            <a:avLst/>
+          </a:prstGeom>
+        </p:spPr>
+      </p:pic>
+      <p:pic>
+        <p:nvPicPr>
+          <p:cNvPr id="21" name="Imagen 20"/>
+          <p:cNvPicPr>
+            <a:picLocks noChangeAspect="1"/>
+          </p:cNvPicPr>
+          <p:nvPr/>
+        </p:nvPicPr>
+        <p:blipFill>
+          <a:blip r:embed="rId4"/>
+          <a:stretch>
+            <a:fillRect/>
+          </a:stretch>
+        </p:blipFill>
+        <p:spPr>
+          <a:xfrm>
+            <a:off x="6096000" y="1200148"/>
+            <a:ext cx="5680746" cy="4661681"/>
+          </a:xfrm>
+          <a:prstGeom prst="rect">
+            <a:avLst/>
+          </a:prstGeom>
+        </p:spPr>
+      </p:pic>
+      <p:sp>
+        <p:nvSpPr>
+          <p:cNvPr id="22" name="CuadroTexto 21"/>
+          <p:cNvSpPr txBox="1"/>
+          <p:nvPr/>
+        </p:nvSpPr>
+        <p:spPr>
+          <a:xfrm>
+            <a:off x="1068801" y="3793116"/>
+            <a:ext cx="274320" cy="369332"/>
+          </a:xfrm>
+          <a:prstGeom prst="rect">
+            <a:avLst/>
+          </a:prstGeom>
+          <a:noFill/>
+        </p:spPr>
+        <p:txBody>
+          <a:bodyPr wrap="square" rtlCol="0">
+            <a:spAutoFit/>
+          </a:bodyPr>
+          <a:lstStyle/>
+          <a:p>
+            <a:r>
+              <a:rPr lang="es-MX" dirty="0" smtClean="0"/>
+              <a:t>*</a:t>
+            </a:r>
+            <a:endParaRPr lang="en-US" dirty="0"/>
+          </a:p>
+        </p:txBody>
+      </p:sp>
+      <p:sp>
+        <p:nvSpPr>
+          <p:cNvPr id="23" name="CuadroTexto 22"/>
+          <p:cNvSpPr txBox="1"/>
+          <p:nvPr/>
+        </p:nvSpPr>
+        <p:spPr>
+          <a:xfrm>
+            <a:off x="2359152" y="3793116"/>
+            <a:ext cx="274320" cy="369332"/>
+          </a:xfrm>
+          <a:prstGeom prst="rect">
+            <a:avLst/>
+          </a:prstGeom>
+          <a:noFill/>
+        </p:spPr>
+        <p:txBody>
+          <a:bodyPr wrap="square" rtlCol="0">
+            <a:spAutoFit/>
+          </a:bodyPr>
+          <a:lstStyle/>
+          <a:p>
+            <a:r>
+              <a:rPr lang="es-MX" dirty="0" smtClean="0"/>
+              <a:t>*</a:t>
+            </a:r>
+            <a:endParaRPr lang="en-US" dirty="0"/>
+          </a:p>
+        </p:txBody>
+      </p:sp>
+      <p:sp>
+        <p:nvSpPr>
+          <p:cNvPr id="24" name="CuadroTexto 23"/>
+          <p:cNvSpPr txBox="1"/>
+          <p:nvPr/>
+        </p:nvSpPr>
+        <p:spPr>
+          <a:xfrm>
+            <a:off x="7641336" y="3977782"/>
+            <a:ext cx="274320" cy="369332"/>
+          </a:xfrm>
+          <a:prstGeom prst="rect">
+            <a:avLst/>
+          </a:prstGeom>
+          <a:noFill/>
+        </p:spPr>
+        <p:txBody>
+          <a:bodyPr wrap="square" rtlCol="0">
+            <a:spAutoFit/>
+          </a:bodyPr>
+          <a:lstStyle/>
+          <a:p>
+            <a:r>
+              <a:rPr lang="es-MX" dirty="0" smtClean="0"/>
+              <a:t>*</a:t>
+            </a:r>
+            <a:endParaRPr lang="en-US" dirty="0"/>
+          </a:p>
+        </p:txBody>
+      </p:sp>
+      <p:sp>
+        <p:nvSpPr>
+          <p:cNvPr id="25" name="CuadroTexto 24"/>
+          <p:cNvSpPr txBox="1"/>
+          <p:nvPr/>
+        </p:nvSpPr>
+        <p:spPr>
+          <a:xfrm>
+            <a:off x="8936373" y="1688734"/>
+            <a:ext cx="274320" cy="369332"/>
+          </a:xfrm>
+          <a:prstGeom prst="rect">
+            <a:avLst/>
+          </a:prstGeom>
+          <a:noFill/>
+        </p:spPr>
+        <p:txBody>
+          <a:bodyPr wrap="square" rtlCol="0">
+            <a:spAutoFit/>
+          </a:bodyPr>
+          <a:lstStyle/>
+          <a:p>
+            <a:r>
+              <a:rPr lang="es-MX" dirty="0" smtClean="0"/>
+              <a:t>*</a:t>
+            </a:r>
+            <a:endParaRPr lang="en-US" dirty="0"/>
+          </a:p>
+        </p:txBody>
+      </p:sp>
+    </p:spTree>
+    <p:extLst>
+      <p:ext uri="{BB962C8B-B14F-4D97-AF65-F5344CB8AC3E}">
+        <p14:creationId xmlns:p14="http://schemas.microsoft.com/office/powerpoint/2010/main" val="2380233219"/>
+      </p:ext>
+    </p:extLst>
+  </p:cSld>
+  <p:clrMapOvr>
+    <a:masterClrMapping/>
+  </p:clrMapOvr>
+  <p:timing>
+    <p:tnLst>
+      <p:par>
+        <p:cTn id="1" dur="indefinite" restart="never" nodeType="tmRoot"/>
+      </p:par>
+    </p:tnLst>
+  </p:timing>
+</p:sld>
+</file>
+
+<file path=ppt/slides/slide12.xml><?xml version="1.0" encoding="utf-8"?>
 <p:sld xmlns:a="http://schemas.openxmlformats.org/drawingml/2006/main" xmlns:r="http://schemas.openxmlformats.org/officeDocument/2006/relationships" xmlns:p="http://schemas.openxmlformats.org/presentationml/2006/main" show="0">
   <p:cSld>
     <p:spTree>
@@ -6258,11 +6813,11 @@
   <p:clrMapOvr>
     <a:masterClrMapping/>
   </p:clrMapOvr>
-  <mc:AlternateContent xmlns:mc="http://schemas.openxmlformats.org/markup-compatibility/2006">
-    <mc:Choice xmlns:p14="http://schemas.microsoft.com/office/powerpoint/2010/main" Requires="p14">
+  <mc:AlternateContent xmlns:mc="http://schemas.openxmlformats.org/markup-compatibility/2006" xmlns:p14="http://schemas.microsoft.com/office/powerpoint/2010/main">
+    <mc:Choice Requires="p14">
       <p:transition spd="slow" p14:dur="2000"/>
     </mc:Choice>
-    <mc:Fallback>
+    <mc:Fallback xmlns="">
       <p:transition spd="slow"/>
     </mc:Fallback>
   </mc:AlternateContent>
@@ -6276,7 +6831,7 @@
 </p:sld>
 </file>
 
-<file path=ppt/slides/slide11.xml><?xml version="1.0" encoding="utf-8"?>
+<file path=ppt/slides/slide13.xml><?xml version="1.0" encoding="utf-8"?>
 <p:sld xmlns:a="http://schemas.openxmlformats.org/drawingml/2006/main" xmlns:r="http://schemas.openxmlformats.org/officeDocument/2006/relationships" xmlns:p="http://schemas.openxmlformats.org/presentationml/2006/main">
   <p:cSld>
     <p:spTree>
@@ -7518,12 +8073,12 @@
                     <a:p>
                       <a:pPr algn="l" fontAlgn="ctr"/>
                       <a:r>
-                        <a:rPr lang="en-US" sz="900" u="none" strike="noStrike">
+                        <a:rPr lang="en-US" sz="900" u="none" strike="noStrike" dirty="0">
                           <a:effectLst/>
                         </a:rPr>
                         <a:t>-9.566</a:t>
                       </a:r>
-                      <a:endParaRPr lang="en-US" sz="900" b="0" i="0" u="none" strike="noStrike">
+                      <a:endParaRPr lang="en-US" sz="900" b="0" i="0" u="none" strike="noStrike" dirty="0">
                         <a:solidFill>
                           <a:srgbClr val="000000"/>
                         </a:solidFill>
@@ -11486,7 +12041,7 @@
 </p:sld>
 </file>
 
-<file path=ppt/slides/slide12.xml><?xml version="1.0" encoding="utf-8"?>
+<file path=ppt/slides/slide14.xml><?xml version="1.0" encoding="utf-8"?>
 <p:sld xmlns:a="http://schemas.openxmlformats.org/drawingml/2006/main" xmlns:r="http://schemas.openxmlformats.org/officeDocument/2006/relationships" xmlns:p="http://schemas.openxmlformats.org/presentationml/2006/main">
   <p:cSld>
     <p:spTree>
@@ -11764,7 +12319,7 @@
 </p:sld>
 </file>
 
-<file path=ppt/slides/slide13.xml><?xml version="1.0" encoding="utf-8"?>
+<file path=ppt/slides/slide15.xml><?xml version="1.0" encoding="utf-8"?>
 <p:sld xmlns:a="http://schemas.openxmlformats.org/drawingml/2006/main" xmlns:r="http://schemas.openxmlformats.org/officeDocument/2006/relationships" xmlns:p="http://schemas.openxmlformats.org/presentationml/2006/main" show="0">
   <p:cSld>
     <p:spTree>
@@ -11839,11 +12394,11 @@
   <p:clrMapOvr>
     <a:masterClrMapping/>
   </p:clrMapOvr>
-  <mc:AlternateContent xmlns:mc="http://schemas.openxmlformats.org/markup-compatibility/2006">
-    <mc:Choice xmlns:p14="http://schemas.microsoft.com/office/powerpoint/2010/main" Requires="p14">
+  <mc:AlternateContent xmlns:mc="http://schemas.openxmlformats.org/markup-compatibility/2006" xmlns:p14="http://schemas.microsoft.com/office/powerpoint/2010/main">
+    <mc:Choice Requires="p14">
       <p:transition spd="slow" p14:dur="2000"/>
     </mc:Choice>
-    <mc:Fallback>
+    <mc:Fallback xmlns="">
       <p:transition spd="slow"/>
     </mc:Fallback>
   </mc:AlternateContent>
@@ -11857,7 +12412,7 @@
 </p:sld>
 </file>
 
-<file path=ppt/slides/slide14.xml><?xml version="1.0" encoding="utf-8"?>
+<file path=ppt/slides/slide16.xml><?xml version="1.0" encoding="utf-8"?>
 <p:sld xmlns:a="http://schemas.openxmlformats.org/drawingml/2006/main" xmlns:r="http://schemas.openxmlformats.org/officeDocument/2006/relationships" xmlns:p="http://schemas.openxmlformats.org/presentationml/2006/main" show="0">
   <p:cSld>
     <p:spTree>
@@ -11932,11 +12487,11 @@
   <p:clrMapOvr>
     <a:masterClrMapping/>
   </p:clrMapOvr>
-  <mc:AlternateContent xmlns:mc="http://schemas.openxmlformats.org/markup-compatibility/2006">
-    <mc:Choice xmlns:p14="http://schemas.microsoft.com/office/powerpoint/2010/main" Requires="p14">
+  <mc:AlternateContent xmlns:mc="http://schemas.openxmlformats.org/markup-compatibility/2006" xmlns:p14="http://schemas.microsoft.com/office/powerpoint/2010/main">
+    <mc:Choice Requires="p14">
       <p:transition spd="slow" p14:dur="2000"/>
     </mc:Choice>
-    <mc:Fallback>
+    <mc:Fallback xmlns="">
       <p:transition spd="slow"/>
     </mc:Fallback>
   </mc:AlternateContent>
@@ -11950,7 +12505,7 @@
 </p:sld>
 </file>
 
-<file path=ppt/slides/slide15.xml><?xml version="1.0" encoding="utf-8"?>
+<file path=ppt/slides/slide17.xml><?xml version="1.0" encoding="utf-8"?>
 <p:sld xmlns:a="http://schemas.openxmlformats.org/drawingml/2006/main" xmlns:r="http://schemas.openxmlformats.org/officeDocument/2006/relationships" xmlns:p="http://schemas.openxmlformats.org/presentationml/2006/main" show="0">
   <p:cSld>
     <p:spTree>
@@ -12103,11 +12658,11 @@
   <p:clrMapOvr>
     <a:masterClrMapping/>
   </p:clrMapOvr>
-  <mc:AlternateContent xmlns:mc="http://schemas.openxmlformats.org/markup-compatibility/2006">
-    <mc:Choice xmlns:p14="http://schemas.microsoft.com/office/powerpoint/2010/main" Requires="p14">
+  <mc:AlternateContent xmlns:mc="http://schemas.openxmlformats.org/markup-compatibility/2006" xmlns:p14="http://schemas.microsoft.com/office/powerpoint/2010/main">
+    <mc:Choice Requires="p14">
       <p:transition spd="slow" p14:dur="2000"/>
     </mc:Choice>
-    <mc:Fallback>
+    <mc:Fallback xmlns="">
       <p:transition spd="slow"/>
     </mc:Fallback>
   </mc:AlternateContent>
@@ -12121,7 +12676,7 @@
 </p:sld>
 </file>
 
-<file path=ppt/slides/slide16.xml><?xml version="1.0" encoding="utf-8"?>
+<file path=ppt/slides/slide18.xml><?xml version="1.0" encoding="utf-8"?>
 <p:sld xmlns:a="http://schemas.openxmlformats.org/drawingml/2006/main" xmlns:r="http://schemas.openxmlformats.org/officeDocument/2006/relationships" xmlns:p="http://schemas.openxmlformats.org/presentationml/2006/main">
   <p:cSld>
     <p:spTree>
@@ -12211,7 +12766,7 @@
                   <a:schemeClr val="accent1"/>
                 </a:solidFill>
               </a:rPr>
-              <a:t>N+P+N </a:t>
+              <a:t>N </a:t>
             </a:r>
             <a:r>
               <a:rPr lang="es-MX" sz="3600" dirty="0">
@@ -12224,7 +12779,7 @@
             <a:r>
               <a:rPr lang="es-MX" sz="3600" dirty="0" err="1" smtClean="0">
                 <a:solidFill>
-                  <a:schemeClr val="accent1"/>
+                  <a:srgbClr val="FF0000"/>
                 </a:solidFill>
               </a:rPr>
               <a:t>specie</a:t>
@@ -12266,132 +12821,39 @@
             <a:pPr marL="0" indent="0">
               <a:buNone/>
             </a:pPr>
-            <a:endParaRPr lang="es-MX" dirty="0"/>
+            <a:endParaRPr lang="es-MX" dirty="0" smtClean="0"/>
           </a:p>
           <a:p>
+            <a:pPr marL="0" indent="0">
+              <a:buNone/>
+            </a:pPr>
             <a:r>
               <a:rPr lang="es-MX" dirty="0" err="1" smtClean="0"/>
-              <a:t>Again</a:t>
-            </a:r>
-            <a:r>
-              <a:rPr lang="es-MX" dirty="0" smtClean="0"/>
-              <a:t>, I </a:t>
-            </a:r>
-            <a:r>
-              <a:rPr lang="es-MX" dirty="0" err="1" smtClean="0"/>
-              <a:t>used</a:t>
+              <a:t>Specie</a:t>
             </a:r>
             <a:r>
               <a:rPr lang="es-MX" dirty="0" smtClean="0"/>
               <a:t> </a:t>
             </a:r>
             <a:r>
-              <a:rPr lang="es-MX" dirty="0" err="1"/>
-              <a:t>DHARMa</a:t>
-            </a:r>
-            <a:r>
-              <a:rPr lang="es-MX" dirty="0"/>
+              <a:rPr lang="es-MX" dirty="0" err="1" smtClean="0"/>
+              <a:t>only</a:t>
+            </a:r>
+            <a:r>
+              <a:rPr lang="es-MX" dirty="0" smtClean="0"/>
               <a:t> </a:t>
             </a:r>
             <a:r>
-              <a:rPr lang="es-MX" dirty="0" err="1"/>
-              <a:t>package</a:t>
-            </a:r>
-            <a:r>
-              <a:rPr lang="es-MX" dirty="0"/>
-              <a:t> </a:t>
-            </a:r>
-            <a:r>
-              <a:rPr lang="es-MX" dirty="0" err="1"/>
-              <a:t>for</a:t>
-            </a:r>
-            <a:r>
-              <a:rPr lang="es-MX" dirty="0"/>
-              <a:t> diagnosis </a:t>
-            </a:r>
-            <a:r>
-              <a:rPr lang="es-MX" dirty="0" err="1"/>
-              <a:t>interpretation</a:t>
-            </a:r>
-            <a:r>
-              <a:rPr lang="es-MX" dirty="0"/>
-              <a:t> </a:t>
-            </a:r>
-            <a:r>
-              <a:rPr lang="es-MX" dirty="0" err="1"/>
-              <a:t>but</a:t>
-            </a:r>
-            <a:r>
-              <a:rPr lang="es-MX" dirty="0"/>
-              <a:t> I </a:t>
-            </a:r>
-            <a:r>
-              <a:rPr lang="es-MX" dirty="0" err="1"/>
-              <a:t>need</a:t>
-            </a:r>
-            <a:r>
-              <a:rPr lang="es-MX" dirty="0"/>
-              <a:t> to </a:t>
-            </a:r>
-            <a:r>
-              <a:rPr lang="es-MX" dirty="0" err="1"/>
-              <a:t>know</a:t>
-            </a:r>
-            <a:r>
-              <a:rPr lang="es-MX" dirty="0"/>
-              <a:t> </a:t>
-            </a:r>
-            <a:r>
-              <a:rPr lang="es-MX" dirty="0" err="1"/>
-              <a:t>when</a:t>
-            </a:r>
-            <a:r>
-              <a:rPr lang="es-MX" dirty="0"/>
-              <a:t> </a:t>
-            </a:r>
-            <a:r>
-              <a:rPr lang="es-MX" dirty="0" err="1"/>
-              <a:t>it</a:t>
-            </a:r>
-            <a:r>
-              <a:rPr lang="es-MX" dirty="0"/>
-              <a:t> </a:t>
-            </a:r>
-            <a:r>
-              <a:rPr lang="es-MX" dirty="0" err="1"/>
-              <a:t>is</a:t>
-            </a:r>
-            <a:r>
-              <a:rPr lang="es-MX" dirty="0"/>
-              <a:t> </a:t>
-            </a:r>
-            <a:r>
-              <a:rPr lang="es-MX" dirty="0" err="1"/>
-              <a:t>okay</a:t>
-            </a:r>
-            <a:r>
-              <a:rPr lang="es-MX" dirty="0"/>
-              <a:t> to </a:t>
-            </a:r>
-            <a:r>
-              <a:rPr lang="es-MX" dirty="0" err="1"/>
-              <a:t>dismiss</a:t>
-            </a:r>
-            <a:r>
-              <a:rPr lang="es-MX" dirty="0"/>
-              <a:t> </a:t>
-            </a:r>
-            <a:r>
-              <a:rPr lang="es-MX" dirty="0" err="1"/>
-              <a:t>some</a:t>
-            </a:r>
-            <a:r>
-              <a:rPr lang="es-MX" dirty="0"/>
-              <a:t> </a:t>
-            </a:r>
-            <a:r>
               <a:rPr lang="es-MX" dirty="0" err="1" smtClean="0"/>
-              <a:t>trends</a:t>
+              <a:t>two</a:t>
+            </a:r>
+            <a:r>
+              <a:rPr lang="es-MX" dirty="0" smtClean="0"/>
+              <a:t> per </a:t>
+            </a:r>
+            <a:r>
+              <a:rPr lang="es-MX" dirty="0" err="1" smtClean="0"/>
+              <a:t>elevation</a:t>
             </a:r>
             <a:r>
               <a:rPr lang="es-MX" dirty="0" smtClean="0"/>
@@ -12399,7 +12861,7 @@
             </a:r>
             <a:r>
               <a:rPr lang="es-MX" dirty="0" err="1" smtClean="0"/>
-              <a:t>DHARMs</a:t>
+              <a:t>Model</a:t>
             </a:r>
             <a:r>
               <a:rPr lang="es-MX" dirty="0" smtClean="0"/>
@@ -12407,7 +12869,7 @@
             </a:r>
             <a:r>
               <a:rPr lang="es-MX" dirty="0" err="1" smtClean="0"/>
-              <a:t>is</a:t>
+              <a:t>too</a:t>
             </a:r>
             <a:r>
               <a:rPr lang="es-MX" dirty="0" smtClean="0"/>
@@ -12415,13 +12877,13 @@
             </a:r>
             <a:r>
               <a:rPr lang="es-MX" dirty="0" err="1" smtClean="0"/>
-              <a:t>harsh</a:t>
-            </a:r>
-            <a:r>
-              <a:rPr lang="es-MX" dirty="0" smtClean="0"/>
-              <a:t>.</a:t>
-            </a:r>
-            <a:endParaRPr lang="en-US" dirty="0"/>
+              <a:t>complex</a:t>
+            </a:r>
+            <a:r>
+              <a:rPr lang="es-MX" smtClean="0"/>
+              <a:t>. </a:t>
+            </a:r>
+            <a:endParaRPr lang="es-MX" dirty="0"/>
           </a:p>
         </p:txBody>
       </p:sp>
@@ -12445,7 +12907,7 @@
 </p:sld>
 </file>
 
-<file path=ppt/slides/slide17.xml><?xml version="1.0" encoding="utf-8"?>
+<file path=ppt/slides/slide19.xml><?xml version="1.0" encoding="utf-8"?>
 <p:sld xmlns:a="http://schemas.openxmlformats.org/drawingml/2006/main" xmlns:r="http://schemas.openxmlformats.org/officeDocument/2006/relationships" xmlns:p="http://schemas.openxmlformats.org/presentationml/2006/main">
   <p:cSld>
     <p:spTree>
@@ -12673,7 +13135,590 @@
 </p:sld>
 </file>
 
-<file path=ppt/slides/slide18.xml><?xml version="1.0" encoding="utf-8"?>
+<file path=ppt/slides/slide2.xml><?xml version="1.0" encoding="utf-8"?>
+<p:sld xmlns:a="http://schemas.openxmlformats.org/drawingml/2006/main" xmlns:r="http://schemas.openxmlformats.org/officeDocument/2006/relationships" xmlns:p="http://schemas.openxmlformats.org/presentationml/2006/main">
+  <p:cSld>
+    <p:spTree>
+      <p:nvGrpSpPr>
+        <p:cNvPr id="1" name=""/>
+        <p:cNvGrpSpPr/>
+        <p:nvPr/>
+      </p:nvGrpSpPr>
+      <p:grpSpPr>
+        <a:xfrm>
+          <a:off x="0" y="0"/>
+          <a:ext cx="0" cy="0"/>
+          <a:chOff x="0" y="0"/>
+          <a:chExt cx="0" cy="0"/>
+        </a:xfrm>
+      </p:grpSpPr>
+      <p:sp>
+        <p:nvSpPr>
+          <p:cNvPr id="10" name="Rectángulo 9"/>
+          <p:cNvSpPr/>
+          <p:nvPr/>
+        </p:nvSpPr>
+        <p:spPr>
+          <a:xfrm>
+            <a:off x="731520" y="3291840"/>
+            <a:ext cx="11082528" cy="3374136"/>
+          </a:xfrm>
+          <a:prstGeom prst="rect">
+            <a:avLst/>
+          </a:prstGeom>
+        </p:spPr>
+        <p:style>
+          <a:lnRef idx="2">
+            <a:schemeClr val="accent1">
+              <a:shade val="50000"/>
+            </a:schemeClr>
+          </a:lnRef>
+          <a:fillRef idx="1">
+            <a:schemeClr val="accent1"/>
+          </a:fillRef>
+          <a:effectRef idx="0">
+            <a:schemeClr val="accent1"/>
+          </a:effectRef>
+          <a:fontRef idx="minor">
+            <a:schemeClr val="lt1"/>
+          </a:fontRef>
+        </p:style>
+        <p:txBody>
+          <a:bodyPr rtlCol="0" anchor="ctr"/>
+          <a:lstStyle/>
+          <a:p>
+            <a:pPr algn="ctr"/>
+            <a:endParaRPr lang="en-US"/>
+          </a:p>
+        </p:txBody>
+      </p:sp>
+      <p:sp>
+        <p:nvSpPr>
+          <p:cNvPr id="2" name="Título 1"/>
+          <p:cNvSpPr>
+            <a:spLocks noGrp="1"/>
+          </p:cNvSpPr>
+          <p:nvPr>
+            <p:ph type="title"/>
+          </p:nvPr>
+        </p:nvSpPr>
+        <p:spPr/>
+        <p:txBody>
+          <a:bodyPr/>
+          <a:lstStyle/>
+          <a:p>
+            <a:endParaRPr lang="en-US" dirty="0"/>
+          </a:p>
+        </p:txBody>
+      </p:sp>
+      <p:pic>
+        <p:nvPicPr>
+          <p:cNvPr id="7" name="Marcador de contenido 6"/>
+          <p:cNvPicPr>
+            <a:picLocks noGrp="1" noChangeAspect="1"/>
+          </p:cNvPicPr>
+          <p:nvPr>
+            <p:ph idx="1"/>
+          </p:nvPr>
+        </p:nvPicPr>
+        <p:blipFill>
+          <a:blip r:embed="rId2">
+            <a:extLst>
+              <a:ext uri="{28A0092B-C50C-407E-A947-70E740481C1C}">
+                <a14:useLocalDpi xmlns:a14="http://schemas.microsoft.com/office/drawing/2010/main" val="0"/>
+              </a:ext>
+            </a:extLst>
+          </a:blip>
+          <a:stretch>
+            <a:fillRect/>
+          </a:stretch>
+        </p:blipFill>
+        <p:spPr>
+          <a:xfrm>
+            <a:off x="2157997" y="4143772"/>
+            <a:ext cx="2076056" cy="1905633"/>
+          </a:xfrm>
+        </p:spPr>
+      </p:pic>
+      <p:sp>
+        <p:nvSpPr>
+          <p:cNvPr id="4" name="Elipse 3"/>
+          <p:cNvSpPr/>
+          <p:nvPr/>
+        </p:nvSpPr>
+        <p:spPr>
+          <a:xfrm>
+            <a:off x="594360" y="337376"/>
+            <a:ext cx="2926080" cy="2579560"/>
+          </a:xfrm>
+          <a:prstGeom prst="ellipse">
+            <a:avLst/>
+          </a:prstGeom>
+        </p:spPr>
+        <p:style>
+          <a:lnRef idx="2">
+            <a:schemeClr val="accent2">
+              <a:shade val="50000"/>
+            </a:schemeClr>
+          </a:lnRef>
+          <a:fillRef idx="1">
+            <a:schemeClr val="accent2"/>
+          </a:fillRef>
+          <a:effectRef idx="0">
+            <a:schemeClr val="accent2"/>
+          </a:effectRef>
+          <a:fontRef idx="minor">
+            <a:schemeClr val="lt1"/>
+          </a:fontRef>
+        </p:style>
+        <p:txBody>
+          <a:bodyPr rtlCol="0" anchor="ctr"/>
+          <a:lstStyle/>
+          <a:p>
+            <a:pPr algn="ctr"/>
+            <a:r>
+              <a:rPr lang="es-MX" dirty="0" err="1" smtClean="0"/>
+              <a:t>Nutrient</a:t>
+            </a:r>
+            <a:r>
+              <a:rPr lang="es-MX" dirty="0" smtClean="0"/>
+              <a:t> </a:t>
+            </a:r>
+            <a:r>
+              <a:rPr lang="es-MX" dirty="0" err="1" smtClean="0"/>
+              <a:t>addition</a:t>
+            </a:r>
+            <a:r>
+              <a:rPr lang="es-MX" dirty="0" smtClean="0"/>
+              <a:t> </a:t>
+            </a:r>
+            <a:r>
+              <a:rPr lang="es-MX" dirty="0" err="1" smtClean="0"/>
+              <a:t>experiment</a:t>
+            </a:r>
+            <a:endParaRPr lang="es-MX" dirty="0" smtClean="0"/>
+          </a:p>
+          <a:p>
+            <a:pPr algn="ctr"/>
+            <a:endParaRPr lang="es-MX" dirty="0"/>
+          </a:p>
+          <a:p>
+            <a:pPr algn="ctr"/>
+            <a:r>
+              <a:rPr lang="es-MX" dirty="0" smtClean="0"/>
+              <a:t>N, P, N*P</a:t>
+            </a:r>
+            <a:endParaRPr lang="en-US" dirty="0"/>
+          </a:p>
+        </p:txBody>
+      </p:sp>
+      <p:sp>
+        <p:nvSpPr>
+          <p:cNvPr id="5" name="Elipse 4"/>
+          <p:cNvSpPr/>
+          <p:nvPr/>
+        </p:nvSpPr>
+        <p:spPr>
+          <a:xfrm>
+            <a:off x="4581144" y="337375"/>
+            <a:ext cx="2795016" cy="2491993"/>
+          </a:xfrm>
+          <a:prstGeom prst="ellipse">
+            <a:avLst/>
+          </a:prstGeom>
+        </p:spPr>
+        <p:style>
+          <a:lnRef idx="2">
+            <a:schemeClr val="accent6">
+              <a:shade val="50000"/>
+            </a:schemeClr>
+          </a:lnRef>
+          <a:fillRef idx="1">
+            <a:schemeClr val="accent6"/>
+          </a:fillRef>
+          <a:effectRef idx="0">
+            <a:schemeClr val="accent6"/>
+          </a:effectRef>
+          <a:fontRef idx="minor">
+            <a:schemeClr val="lt1"/>
+          </a:fontRef>
+        </p:style>
+        <p:txBody>
+          <a:bodyPr rtlCol="0" anchor="ctr"/>
+          <a:lstStyle/>
+          <a:p>
+            <a:pPr algn="ctr"/>
+            <a:r>
+              <a:rPr lang="es-MX" dirty="0" err="1" smtClean="0"/>
+              <a:t>Leaf</a:t>
+            </a:r>
+            <a:r>
+              <a:rPr lang="es-MX" dirty="0" smtClean="0"/>
+              <a:t> </a:t>
+            </a:r>
+            <a:r>
+              <a:rPr lang="es-MX" dirty="0" err="1" smtClean="0"/>
+              <a:t>functional</a:t>
+            </a:r>
+            <a:r>
+              <a:rPr lang="es-MX" dirty="0" smtClean="0"/>
+              <a:t> </a:t>
+            </a:r>
+            <a:r>
+              <a:rPr lang="es-MX" dirty="0" err="1" smtClean="0"/>
+              <a:t>traits</a:t>
+            </a:r>
+            <a:endParaRPr lang="es-MX" dirty="0" smtClean="0"/>
+          </a:p>
+          <a:p>
+            <a:pPr marL="285750" indent="-285750" algn="ctr">
+              <a:buFontTx/>
+              <a:buChar char="-"/>
+            </a:pPr>
+            <a:r>
+              <a:rPr lang="es-MX" sz="1200" dirty="0" err="1" smtClean="0"/>
+              <a:t>Thoughness</a:t>
+            </a:r>
+            <a:endParaRPr lang="es-MX" sz="1200" dirty="0" smtClean="0"/>
+          </a:p>
+          <a:p>
+            <a:pPr marL="285750" indent="-285750" algn="ctr">
+              <a:buFontTx/>
+              <a:buChar char="-"/>
+            </a:pPr>
+            <a:r>
+              <a:rPr lang="es-MX" sz="1200" dirty="0" err="1" smtClean="0"/>
+              <a:t>Thickness</a:t>
+            </a:r>
+            <a:endParaRPr lang="es-MX" sz="1200" dirty="0" smtClean="0"/>
+          </a:p>
+          <a:p>
+            <a:pPr marL="285750" indent="-285750" algn="ctr">
+              <a:buFontTx/>
+              <a:buChar char="-"/>
+            </a:pPr>
+            <a:r>
+              <a:rPr lang="es-MX" sz="1200" dirty="0" smtClean="0"/>
+              <a:t>SLA / LA</a:t>
+            </a:r>
+          </a:p>
+          <a:p>
+            <a:pPr marL="285750" indent="-285750" algn="ctr">
+              <a:buFontTx/>
+              <a:buChar char="-"/>
+            </a:pPr>
+            <a:r>
+              <a:rPr lang="es-MX" sz="1200" dirty="0" smtClean="0"/>
+              <a:t>Carea / </a:t>
+            </a:r>
+            <a:r>
+              <a:rPr lang="es-MX" sz="1200" dirty="0" err="1" smtClean="0"/>
+              <a:t>Narea</a:t>
+            </a:r>
+            <a:endParaRPr lang="es-MX" sz="1200" dirty="0" smtClean="0"/>
+          </a:p>
+          <a:p>
+            <a:pPr marL="285750" indent="-285750" algn="ctr">
+              <a:buFontTx/>
+              <a:buChar char="-"/>
+            </a:pPr>
+            <a:r>
+              <a:rPr lang="es-MX" sz="1200" dirty="0" err="1" smtClean="0"/>
+              <a:t>Leat</a:t>
+            </a:r>
+            <a:r>
+              <a:rPr lang="es-MX" sz="1200" dirty="0" smtClean="0"/>
+              <a:t> </a:t>
+            </a:r>
+            <a:r>
+              <a:rPr lang="es-MX" sz="1200" dirty="0" err="1" smtClean="0"/>
+              <a:t>water</a:t>
+            </a:r>
+            <a:r>
+              <a:rPr lang="es-MX" sz="1200" dirty="0" smtClean="0"/>
+              <a:t> </a:t>
+            </a:r>
+            <a:r>
+              <a:rPr lang="es-MX" sz="1200" dirty="0" err="1" smtClean="0"/>
+              <a:t>content</a:t>
+            </a:r>
+            <a:endParaRPr lang="en-US" sz="1200" dirty="0"/>
+          </a:p>
+        </p:txBody>
+      </p:sp>
+      <p:sp>
+        <p:nvSpPr>
+          <p:cNvPr id="6" name="Elipse 5"/>
+          <p:cNvSpPr/>
+          <p:nvPr/>
+        </p:nvSpPr>
+        <p:spPr>
+          <a:xfrm>
+            <a:off x="8357616" y="337375"/>
+            <a:ext cx="2896248" cy="2491993"/>
+          </a:xfrm>
+          <a:prstGeom prst="ellipse">
+            <a:avLst/>
+          </a:prstGeom>
+        </p:spPr>
+        <p:style>
+          <a:lnRef idx="2">
+            <a:schemeClr val="accent2">
+              <a:shade val="50000"/>
+            </a:schemeClr>
+          </a:lnRef>
+          <a:fillRef idx="1">
+            <a:schemeClr val="accent2"/>
+          </a:fillRef>
+          <a:effectRef idx="0">
+            <a:schemeClr val="accent2"/>
+          </a:effectRef>
+          <a:fontRef idx="minor">
+            <a:schemeClr val="lt1"/>
+          </a:fontRef>
+        </p:style>
+        <p:txBody>
+          <a:bodyPr rtlCol="0" anchor="ctr"/>
+          <a:lstStyle/>
+          <a:p>
+            <a:pPr algn="ctr"/>
+            <a:r>
+              <a:rPr lang="es-MX" dirty="0" err="1" smtClean="0"/>
+              <a:t>Climatic</a:t>
+            </a:r>
+            <a:r>
+              <a:rPr lang="es-MX" dirty="0" smtClean="0"/>
+              <a:t> – </a:t>
+            </a:r>
+            <a:r>
+              <a:rPr lang="es-MX" dirty="0" err="1" smtClean="0"/>
+              <a:t>Using</a:t>
+            </a:r>
+            <a:r>
+              <a:rPr lang="es-MX" dirty="0" smtClean="0"/>
+              <a:t> </a:t>
+            </a:r>
+            <a:r>
+              <a:rPr lang="es-MX" dirty="0" err="1" smtClean="0"/>
+              <a:t>Elevation</a:t>
+            </a:r>
+            <a:r>
+              <a:rPr lang="es-MX" dirty="0" smtClean="0"/>
+              <a:t> as proxy</a:t>
+            </a:r>
+          </a:p>
+          <a:p>
+            <a:pPr algn="ctr"/>
+            <a:r>
+              <a:rPr lang="es-MX" dirty="0" smtClean="0"/>
+              <a:t>1000, 2000, 3000</a:t>
+            </a:r>
+          </a:p>
+          <a:p>
+            <a:pPr algn="ctr"/>
+            <a:endParaRPr lang="en-US" dirty="0"/>
+          </a:p>
+        </p:txBody>
+      </p:sp>
+      <p:pic>
+        <p:nvPicPr>
+          <p:cNvPr id="8" name="Imagen 7"/>
+          <p:cNvPicPr>
+            <a:picLocks noChangeAspect="1"/>
+          </p:cNvPicPr>
+          <p:nvPr/>
+        </p:nvPicPr>
+        <p:blipFill>
+          <a:blip r:embed="rId3" cstate="print">
+            <a:extLst>
+              <a:ext uri="{28A0092B-C50C-407E-A947-70E740481C1C}">
+                <a14:useLocalDpi xmlns:a14="http://schemas.microsoft.com/office/drawing/2010/main" val="0"/>
+              </a:ext>
+            </a:extLst>
+          </a:blip>
+          <a:stretch>
+            <a:fillRect/>
+          </a:stretch>
+        </p:blipFill>
+        <p:spPr>
+          <a:xfrm>
+            <a:off x="6606264" y="3721896"/>
+            <a:ext cx="4887792" cy="2749383"/>
+          </a:xfrm>
+          <a:prstGeom prst="rect">
+            <a:avLst/>
+          </a:prstGeom>
+        </p:spPr>
+      </p:pic>
+      <p:sp>
+        <p:nvSpPr>
+          <p:cNvPr id="9" name="CuadroTexto 8"/>
+          <p:cNvSpPr txBox="1"/>
+          <p:nvPr/>
+        </p:nvSpPr>
+        <p:spPr>
+          <a:xfrm>
+            <a:off x="4953000" y="4727256"/>
+            <a:ext cx="1389888" cy="369332"/>
+          </a:xfrm>
+          <a:prstGeom prst="rect">
+            <a:avLst/>
+          </a:prstGeom>
+          <a:noFill/>
+        </p:spPr>
+        <p:txBody>
+          <a:bodyPr wrap="square" rtlCol="0">
+            <a:spAutoFit/>
+          </a:bodyPr>
+          <a:lstStyle/>
+          <a:p>
+            <a:r>
+              <a:rPr lang="es-MX" dirty="0" err="1" smtClean="0"/>
+              <a:t>iWUE</a:t>
+            </a:r>
+            <a:r>
+              <a:rPr lang="es-MX" dirty="0" smtClean="0"/>
+              <a:t> = A/g</a:t>
+            </a:r>
+            <a:endParaRPr lang="en-US" dirty="0"/>
+          </a:p>
+        </p:txBody>
+      </p:sp>
+      <p:sp>
+        <p:nvSpPr>
+          <p:cNvPr id="13" name="Flecha abajo 12"/>
+          <p:cNvSpPr/>
+          <p:nvPr/>
+        </p:nvSpPr>
+        <p:spPr>
+          <a:xfrm>
+            <a:off x="1476756" y="2462924"/>
+            <a:ext cx="1161288" cy="1305944"/>
+          </a:xfrm>
+          <a:prstGeom prst="downArrow">
+            <a:avLst/>
+          </a:prstGeom>
+        </p:spPr>
+        <p:style>
+          <a:lnRef idx="2">
+            <a:schemeClr val="dk1"/>
+          </a:lnRef>
+          <a:fillRef idx="1">
+            <a:schemeClr val="lt1"/>
+          </a:fillRef>
+          <a:effectRef idx="0">
+            <a:schemeClr val="dk1"/>
+          </a:effectRef>
+          <a:fontRef idx="minor">
+            <a:schemeClr val="dk1"/>
+          </a:fontRef>
+        </p:style>
+        <p:txBody>
+          <a:bodyPr rtlCol="0" anchor="ctr"/>
+          <a:lstStyle/>
+          <a:p>
+            <a:pPr algn="ctr"/>
+            <a:endParaRPr lang="en-US"/>
+          </a:p>
+        </p:txBody>
+      </p:sp>
+      <p:sp>
+        <p:nvSpPr>
+          <p:cNvPr id="14" name="Flecha abajo 13"/>
+          <p:cNvSpPr/>
+          <p:nvPr/>
+        </p:nvSpPr>
+        <p:spPr>
+          <a:xfrm>
+            <a:off x="5515356" y="2537104"/>
+            <a:ext cx="1161288" cy="1305944"/>
+          </a:xfrm>
+          <a:prstGeom prst="downArrow">
+            <a:avLst/>
+          </a:prstGeom>
+        </p:spPr>
+        <p:style>
+          <a:lnRef idx="2">
+            <a:schemeClr val="dk1"/>
+          </a:lnRef>
+          <a:fillRef idx="1">
+            <a:schemeClr val="lt1"/>
+          </a:fillRef>
+          <a:effectRef idx="0">
+            <a:schemeClr val="dk1"/>
+          </a:effectRef>
+          <a:fontRef idx="minor">
+            <a:schemeClr val="dk1"/>
+          </a:fontRef>
+        </p:style>
+        <p:txBody>
+          <a:bodyPr rtlCol="0" anchor="ctr"/>
+          <a:lstStyle/>
+          <a:p>
+            <a:pPr algn="ctr"/>
+            <a:endParaRPr lang="en-US"/>
+          </a:p>
+        </p:txBody>
+      </p:sp>
+      <p:sp>
+        <p:nvSpPr>
+          <p:cNvPr id="15" name="Flecha abajo 14"/>
+          <p:cNvSpPr/>
+          <p:nvPr/>
+        </p:nvSpPr>
+        <p:spPr>
+          <a:xfrm>
+            <a:off x="9261372" y="2324000"/>
+            <a:ext cx="1161288" cy="1305944"/>
+          </a:xfrm>
+          <a:prstGeom prst="downArrow">
+            <a:avLst/>
+          </a:prstGeom>
+        </p:spPr>
+        <p:style>
+          <a:lnRef idx="2">
+            <a:schemeClr val="dk1"/>
+          </a:lnRef>
+          <a:fillRef idx="1">
+            <a:schemeClr val="lt1"/>
+          </a:fillRef>
+          <a:effectRef idx="0">
+            <a:schemeClr val="dk1"/>
+          </a:effectRef>
+          <a:fontRef idx="minor">
+            <a:schemeClr val="dk1"/>
+          </a:fontRef>
+        </p:style>
+        <p:txBody>
+          <a:bodyPr rtlCol="0" anchor="ctr"/>
+          <a:lstStyle/>
+          <a:p>
+            <a:pPr algn="ctr"/>
+            <a:endParaRPr lang="en-US"/>
+          </a:p>
+        </p:txBody>
+      </p:sp>
+    </p:spTree>
+    <p:extLst>
+      <p:ext uri="{BB962C8B-B14F-4D97-AF65-F5344CB8AC3E}">
+        <p14:creationId xmlns:p14="http://schemas.microsoft.com/office/powerpoint/2010/main" val="1733027128"/>
+      </p:ext>
+    </p:extLst>
+  </p:cSld>
+  <p:clrMapOvr>
+    <a:masterClrMapping/>
+  </p:clrMapOvr>
+  <p:timing>
+    <p:tnLst>
+      <p:par>
+        <p:cTn id="1" dur="indefinite" restart="never" nodeType="tmRoot"/>
+      </p:par>
+    </p:tnLst>
+  </p:timing>
+</p:sld>
+</file>
+
+<file path=ppt/slides/slide20.xml><?xml version="1.0" encoding="utf-8"?>
 <p:sld xmlns:a="http://schemas.openxmlformats.org/drawingml/2006/main" xmlns:r="http://schemas.openxmlformats.org/officeDocument/2006/relationships" xmlns:p="http://schemas.openxmlformats.org/presentationml/2006/main">
   <p:cSld>
     <p:spTree>
@@ -15878,7 +16923,7 @@
 </p:sld>
 </file>
 
-<file path=ppt/slides/slide19.xml><?xml version="1.0" encoding="utf-8"?>
+<file path=ppt/slides/slide21.xml><?xml version="1.0" encoding="utf-8"?>
 <p:sld xmlns:a="http://schemas.openxmlformats.org/drawingml/2006/main" xmlns:r="http://schemas.openxmlformats.org/officeDocument/2006/relationships" xmlns:p="http://schemas.openxmlformats.org/presentationml/2006/main" show="0">
   <p:cSld>
     <p:spTree>
@@ -15973,11 +17018,11 @@
   <p:clrMapOvr>
     <a:masterClrMapping/>
   </p:clrMapOvr>
-  <mc:AlternateContent xmlns:mc="http://schemas.openxmlformats.org/markup-compatibility/2006">
-    <mc:Choice xmlns:p14="http://schemas.microsoft.com/office/powerpoint/2010/main" Requires="p14">
+  <mc:AlternateContent xmlns:mc="http://schemas.openxmlformats.org/markup-compatibility/2006" xmlns:p14="http://schemas.microsoft.com/office/powerpoint/2010/main">
+    <mc:Choice Requires="p14">
       <p:transition spd="slow" p14:dur="2000"/>
     </mc:Choice>
-    <mc:Fallback>
+    <mc:Fallback xmlns="">
       <p:transition spd="slow"/>
     </mc:Fallback>
   </mc:AlternateContent>
@@ -15991,590 +17036,7 @@
 </p:sld>
 </file>
 
-<file path=ppt/slides/slide2.xml><?xml version="1.0" encoding="utf-8"?>
-<p:sld xmlns:a="http://schemas.openxmlformats.org/drawingml/2006/main" xmlns:r="http://schemas.openxmlformats.org/officeDocument/2006/relationships" xmlns:p="http://schemas.openxmlformats.org/presentationml/2006/main">
-  <p:cSld>
-    <p:spTree>
-      <p:nvGrpSpPr>
-        <p:cNvPr id="1" name=""/>
-        <p:cNvGrpSpPr/>
-        <p:nvPr/>
-      </p:nvGrpSpPr>
-      <p:grpSpPr>
-        <a:xfrm>
-          <a:off x="0" y="0"/>
-          <a:ext cx="0" cy="0"/>
-          <a:chOff x="0" y="0"/>
-          <a:chExt cx="0" cy="0"/>
-        </a:xfrm>
-      </p:grpSpPr>
-      <p:sp>
-        <p:nvSpPr>
-          <p:cNvPr id="10" name="Rectángulo 9"/>
-          <p:cNvSpPr/>
-          <p:nvPr/>
-        </p:nvSpPr>
-        <p:spPr>
-          <a:xfrm>
-            <a:off x="731520" y="3291840"/>
-            <a:ext cx="11082528" cy="3374136"/>
-          </a:xfrm>
-          <a:prstGeom prst="rect">
-            <a:avLst/>
-          </a:prstGeom>
-        </p:spPr>
-        <p:style>
-          <a:lnRef idx="2">
-            <a:schemeClr val="accent1">
-              <a:shade val="50000"/>
-            </a:schemeClr>
-          </a:lnRef>
-          <a:fillRef idx="1">
-            <a:schemeClr val="accent1"/>
-          </a:fillRef>
-          <a:effectRef idx="0">
-            <a:schemeClr val="accent1"/>
-          </a:effectRef>
-          <a:fontRef idx="minor">
-            <a:schemeClr val="lt1"/>
-          </a:fontRef>
-        </p:style>
-        <p:txBody>
-          <a:bodyPr rtlCol="0" anchor="ctr"/>
-          <a:lstStyle/>
-          <a:p>
-            <a:pPr algn="ctr"/>
-            <a:endParaRPr lang="en-US"/>
-          </a:p>
-        </p:txBody>
-      </p:sp>
-      <p:sp>
-        <p:nvSpPr>
-          <p:cNvPr id="2" name="Título 1"/>
-          <p:cNvSpPr>
-            <a:spLocks noGrp="1"/>
-          </p:cNvSpPr>
-          <p:nvPr>
-            <p:ph type="title"/>
-          </p:nvPr>
-        </p:nvSpPr>
-        <p:spPr/>
-        <p:txBody>
-          <a:bodyPr/>
-          <a:lstStyle/>
-          <a:p>
-            <a:endParaRPr lang="en-US" dirty="0"/>
-          </a:p>
-        </p:txBody>
-      </p:sp>
-      <p:pic>
-        <p:nvPicPr>
-          <p:cNvPr id="7" name="Marcador de contenido 6"/>
-          <p:cNvPicPr>
-            <a:picLocks noGrp="1" noChangeAspect="1"/>
-          </p:cNvPicPr>
-          <p:nvPr>
-            <p:ph idx="1"/>
-          </p:nvPr>
-        </p:nvPicPr>
-        <p:blipFill>
-          <a:blip r:embed="rId2">
-            <a:extLst>
-              <a:ext uri="{28A0092B-C50C-407E-A947-70E740481C1C}">
-                <a14:useLocalDpi xmlns:a14="http://schemas.microsoft.com/office/drawing/2010/main" val="0"/>
-              </a:ext>
-            </a:extLst>
-          </a:blip>
-          <a:stretch>
-            <a:fillRect/>
-          </a:stretch>
-        </p:blipFill>
-        <p:spPr>
-          <a:xfrm>
-            <a:off x="2157997" y="4143772"/>
-            <a:ext cx="2076056" cy="1905633"/>
-          </a:xfrm>
-        </p:spPr>
-      </p:pic>
-      <p:sp>
-        <p:nvSpPr>
-          <p:cNvPr id="4" name="Elipse 3"/>
-          <p:cNvSpPr/>
-          <p:nvPr/>
-        </p:nvSpPr>
-        <p:spPr>
-          <a:xfrm>
-            <a:off x="594360" y="337376"/>
-            <a:ext cx="2926080" cy="2579560"/>
-          </a:xfrm>
-          <a:prstGeom prst="ellipse">
-            <a:avLst/>
-          </a:prstGeom>
-        </p:spPr>
-        <p:style>
-          <a:lnRef idx="2">
-            <a:schemeClr val="accent2">
-              <a:shade val="50000"/>
-            </a:schemeClr>
-          </a:lnRef>
-          <a:fillRef idx="1">
-            <a:schemeClr val="accent2"/>
-          </a:fillRef>
-          <a:effectRef idx="0">
-            <a:schemeClr val="accent2"/>
-          </a:effectRef>
-          <a:fontRef idx="minor">
-            <a:schemeClr val="lt1"/>
-          </a:fontRef>
-        </p:style>
-        <p:txBody>
-          <a:bodyPr rtlCol="0" anchor="ctr"/>
-          <a:lstStyle/>
-          <a:p>
-            <a:pPr algn="ctr"/>
-            <a:r>
-              <a:rPr lang="es-MX" dirty="0" err="1" smtClean="0"/>
-              <a:t>Nutrient</a:t>
-            </a:r>
-            <a:r>
-              <a:rPr lang="es-MX" dirty="0" smtClean="0"/>
-              <a:t> </a:t>
-            </a:r>
-            <a:r>
-              <a:rPr lang="es-MX" dirty="0" err="1" smtClean="0"/>
-              <a:t>addition</a:t>
-            </a:r>
-            <a:r>
-              <a:rPr lang="es-MX" dirty="0" smtClean="0"/>
-              <a:t> </a:t>
-            </a:r>
-            <a:r>
-              <a:rPr lang="es-MX" dirty="0" err="1" smtClean="0"/>
-              <a:t>experiment</a:t>
-            </a:r>
-            <a:endParaRPr lang="es-MX" dirty="0" smtClean="0"/>
-          </a:p>
-          <a:p>
-            <a:pPr algn="ctr"/>
-            <a:endParaRPr lang="es-MX" dirty="0"/>
-          </a:p>
-          <a:p>
-            <a:pPr algn="ctr"/>
-            <a:r>
-              <a:rPr lang="es-MX" dirty="0" smtClean="0"/>
-              <a:t>N, P, N*P</a:t>
-            </a:r>
-            <a:endParaRPr lang="en-US" dirty="0"/>
-          </a:p>
-        </p:txBody>
-      </p:sp>
-      <p:sp>
-        <p:nvSpPr>
-          <p:cNvPr id="5" name="Elipse 4"/>
-          <p:cNvSpPr/>
-          <p:nvPr/>
-        </p:nvSpPr>
-        <p:spPr>
-          <a:xfrm>
-            <a:off x="4581144" y="337375"/>
-            <a:ext cx="2795016" cy="2491993"/>
-          </a:xfrm>
-          <a:prstGeom prst="ellipse">
-            <a:avLst/>
-          </a:prstGeom>
-        </p:spPr>
-        <p:style>
-          <a:lnRef idx="2">
-            <a:schemeClr val="accent6">
-              <a:shade val="50000"/>
-            </a:schemeClr>
-          </a:lnRef>
-          <a:fillRef idx="1">
-            <a:schemeClr val="accent6"/>
-          </a:fillRef>
-          <a:effectRef idx="0">
-            <a:schemeClr val="accent6"/>
-          </a:effectRef>
-          <a:fontRef idx="minor">
-            <a:schemeClr val="lt1"/>
-          </a:fontRef>
-        </p:style>
-        <p:txBody>
-          <a:bodyPr rtlCol="0" anchor="ctr"/>
-          <a:lstStyle/>
-          <a:p>
-            <a:pPr algn="ctr"/>
-            <a:r>
-              <a:rPr lang="es-MX" dirty="0" err="1" smtClean="0"/>
-              <a:t>Leaf</a:t>
-            </a:r>
-            <a:r>
-              <a:rPr lang="es-MX" dirty="0" smtClean="0"/>
-              <a:t> </a:t>
-            </a:r>
-            <a:r>
-              <a:rPr lang="es-MX" dirty="0" err="1" smtClean="0"/>
-              <a:t>functional</a:t>
-            </a:r>
-            <a:r>
-              <a:rPr lang="es-MX" dirty="0" smtClean="0"/>
-              <a:t> </a:t>
-            </a:r>
-            <a:r>
-              <a:rPr lang="es-MX" dirty="0" err="1" smtClean="0"/>
-              <a:t>traits</a:t>
-            </a:r>
-            <a:endParaRPr lang="es-MX" dirty="0" smtClean="0"/>
-          </a:p>
-          <a:p>
-            <a:pPr marL="285750" indent="-285750" algn="ctr">
-              <a:buFontTx/>
-              <a:buChar char="-"/>
-            </a:pPr>
-            <a:r>
-              <a:rPr lang="es-MX" sz="1200" dirty="0" err="1" smtClean="0"/>
-              <a:t>Thoughness</a:t>
-            </a:r>
-            <a:endParaRPr lang="es-MX" sz="1200" dirty="0" smtClean="0"/>
-          </a:p>
-          <a:p>
-            <a:pPr marL="285750" indent="-285750" algn="ctr">
-              <a:buFontTx/>
-              <a:buChar char="-"/>
-            </a:pPr>
-            <a:r>
-              <a:rPr lang="es-MX" sz="1200" dirty="0" err="1" smtClean="0"/>
-              <a:t>Thickness</a:t>
-            </a:r>
-            <a:endParaRPr lang="es-MX" sz="1200" dirty="0" smtClean="0"/>
-          </a:p>
-          <a:p>
-            <a:pPr marL="285750" indent="-285750" algn="ctr">
-              <a:buFontTx/>
-              <a:buChar char="-"/>
-            </a:pPr>
-            <a:r>
-              <a:rPr lang="es-MX" sz="1200" dirty="0" smtClean="0"/>
-              <a:t>SLA / LA</a:t>
-            </a:r>
-          </a:p>
-          <a:p>
-            <a:pPr marL="285750" indent="-285750" algn="ctr">
-              <a:buFontTx/>
-              <a:buChar char="-"/>
-            </a:pPr>
-            <a:r>
-              <a:rPr lang="es-MX" sz="1200" dirty="0" smtClean="0"/>
-              <a:t>Carea / </a:t>
-            </a:r>
-            <a:r>
-              <a:rPr lang="es-MX" sz="1200" dirty="0" err="1" smtClean="0"/>
-              <a:t>Narea</a:t>
-            </a:r>
-            <a:endParaRPr lang="es-MX" sz="1200" dirty="0" smtClean="0"/>
-          </a:p>
-          <a:p>
-            <a:pPr marL="285750" indent="-285750" algn="ctr">
-              <a:buFontTx/>
-              <a:buChar char="-"/>
-            </a:pPr>
-            <a:r>
-              <a:rPr lang="es-MX" sz="1200" dirty="0" err="1" smtClean="0"/>
-              <a:t>Leat</a:t>
-            </a:r>
-            <a:r>
-              <a:rPr lang="es-MX" sz="1200" dirty="0" smtClean="0"/>
-              <a:t> </a:t>
-            </a:r>
-            <a:r>
-              <a:rPr lang="es-MX" sz="1200" dirty="0" err="1" smtClean="0"/>
-              <a:t>water</a:t>
-            </a:r>
-            <a:r>
-              <a:rPr lang="es-MX" sz="1200" dirty="0" smtClean="0"/>
-              <a:t> </a:t>
-            </a:r>
-            <a:r>
-              <a:rPr lang="es-MX" sz="1200" dirty="0" err="1" smtClean="0"/>
-              <a:t>content</a:t>
-            </a:r>
-            <a:endParaRPr lang="en-US" sz="1200" dirty="0"/>
-          </a:p>
-        </p:txBody>
-      </p:sp>
-      <p:sp>
-        <p:nvSpPr>
-          <p:cNvPr id="6" name="Elipse 5"/>
-          <p:cNvSpPr/>
-          <p:nvPr/>
-        </p:nvSpPr>
-        <p:spPr>
-          <a:xfrm>
-            <a:off x="8357616" y="337375"/>
-            <a:ext cx="2896248" cy="2491993"/>
-          </a:xfrm>
-          <a:prstGeom prst="ellipse">
-            <a:avLst/>
-          </a:prstGeom>
-        </p:spPr>
-        <p:style>
-          <a:lnRef idx="2">
-            <a:schemeClr val="accent2">
-              <a:shade val="50000"/>
-            </a:schemeClr>
-          </a:lnRef>
-          <a:fillRef idx="1">
-            <a:schemeClr val="accent2"/>
-          </a:fillRef>
-          <a:effectRef idx="0">
-            <a:schemeClr val="accent2"/>
-          </a:effectRef>
-          <a:fontRef idx="minor">
-            <a:schemeClr val="lt1"/>
-          </a:fontRef>
-        </p:style>
-        <p:txBody>
-          <a:bodyPr rtlCol="0" anchor="ctr"/>
-          <a:lstStyle/>
-          <a:p>
-            <a:pPr algn="ctr"/>
-            <a:r>
-              <a:rPr lang="es-MX" dirty="0" err="1" smtClean="0"/>
-              <a:t>Climatic</a:t>
-            </a:r>
-            <a:r>
-              <a:rPr lang="es-MX" dirty="0" smtClean="0"/>
-              <a:t> – </a:t>
-            </a:r>
-            <a:r>
-              <a:rPr lang="es-MX" dirty="0" err="1" smtClean="0"/>
-              <a:t>Using</a:t>
-            </a:r>
-            <a:r>
-              <a:rPr lang="es-MX" dirty="0" smtClean="0"/>
-              <a:t> </a:t>
-            </a:r>
-            <a:r>
-              <a:rPr lang="es-MX" dirty="0" err="1" smtClean="0"/>
-              <a:t>Elevation</a:t>
-            </a:r>
-            <a:r>
-              <a:rPr lang="es-MX" dirty="0" smtClean="0"/>
-              <a:t> as proxy</a:t>
-            </a:r>
-          </a:p>
-          <a:p>
-            <a:pPr algn="ctr"/>
-            <a:r>
-              <a:rPr lang="es-MX" dirty="0" smtClean="0"/>
-              <a:t>1000, 2000, 3000</a:t>
-            </a:r>
-          </a:p>
-          <a:p>
-            <a:pPr algn="ctr"/>
-            <a:endParaRPr lang="en-US" dirty="0"/>
-          </a:p>
-        </p:txBody>
-      </p:sp>
-      <p:pic>
-        <p:nvPicPr>
-          <p:cNvPr id="8" name="Imagen 7"/>
-          <p:cNvPicPr>
-            <a:picLocks noChangeAspect="1"/>
-          </p:cNvPicPr>
-          <p:nvPr/>
-        </p:nvPicPr>
-        <p:blipFill>
-          <a:blip r:embed="rId3" cstate="print">
-            <a:extLst>
-              <a:ext uri="{28A0092B-C50C-407E-A947-70E740481C1C}">
-                <a14:useLocalDpi xmlns:a14="http://schemas.microsoft.com/office/drawing/2010/main" val="0"/>
-              </a:ext>
-            </a:extLst>
-          </a:blip>
-          <a:stretch>
-            <a:fillRect/>
-          </a:stretch>
-        </p:blipFill>
-        <p:spPr>
-          <a:xfrm>
-            <a:off x="6606264" y="3721896"/>
-            <a:ext cx="4887792" cy="2749383"/>
-          </a:xfrm>
-          <a:prstGeom prst="rect">
-            <a:avLst/>
-          </a:prstGeom>
-        </p:spPr>
-      </p:pic>
-      <p:sp>
-        <p:nvSpPr>
-          <p:cNvPr id="9" name="CuadroTexto 8"/>
-          <p:cNvSpPr txBox="1"/>
-          <p:nvPr/>
-        </p:nvSpPr>
-        <p:spPr>
-          <a:xfrm>
-            <a:off x="4953000" y="4727256"/>
-            <a:ext cx="1389888" cy="369332"/>
-          </a:xfrm>
-          <a:prstGeom prst="rect">
-            <a:avLst/>
-          </a:prstGeom>
-          <a:noFill/>
-        </p:spPr>
-        <p:txBody>
-          <a:bodyPr wrap="square" rtlCol="0">
-            <a:spAutoFit/>
-          </a:bodyPr>
-          <a:lstStyle/>
-          <a:p>
-            <a:r>
-              <a:rPr lang="es-MX" dirty="0" err="1" smtClean="0"/>
-              <a:t>iWUE</a:t>
-            </a:r>
-            <a:r>
-              <a:rPr lang="es-MX" dirty="0" smtClean="0"/>
-              <a:t> = A/g</a:t>
-            </a:r>
-            <a:endParaRPr lang="en-US" dirty="0"/>
-          </a:p>
-        </p:txBody>
-      </p:sp>
-      <p:sp>
-        <p:nvSpPr>
-          <p:cNvPr id="13" name="Flecha abajo 12"/>
-          <p:cNvSpPr/>
-          <p:nvPr/>
-        </p:nvSpPr>
-        <p:spPr>
-          <a:xfrm>
-            <a:off x="1476756" y="2462924"/>
-            <a:ext cx="1161288" cy="1305944"/>
-          </a:xfrm>
-          <a:prstGeom prst="downArrow">
-            <a:avLst/>
-          </a:prstGeom>
-        </p:spPr>
-        <p:style>
-          <a:lnRef idx="2">
-            <a:schemeClr val="dk1"/>
-          </a:lnRef>
-          <a:fillRef idx="1">
-            <a:schemeClr val="lt1"/>
-          </a:fillRef>
-          <a:effectRef idx="0">
-            <a:schemeClr val="dk1"/>
-          </a:effectRef>
-          <a:fontRef idx="minor">
-            <a:schemeClr val="dk1"/>
-          </a:fontRef>
-        </p:style>
-        <p:txBody>
-          <a:bodyPr rtlCol="0" anchor="ctr"/>
-          <a:lstStyle/>
-          <a:p>
-            <a:pPr algn="ctr"/>
-            <a:endParaRPr lang="en-US"/>
-          </a:p>
-        </p:txBody>
-      </p:sp>
-      <p:sp>
-        <p:nvSpPr>
-          <p:cNvPr id="14" name="Flecha abajo 13"/>
-          <p:cNvSpPr/>
-          <p:nvPr/>
-        </p:nvSpPr>
-        <p:spPr>
-          <a:xfrm>
-            <a:off x="5515356" y="2537104"/>
-            <a:ext cx="1161288" cy="1305944"/>
-          </a:xfrm>
-          <a:prstGeom prst="downArrow">
-            <a:avLst/>
-          </a:prstGeom>
-        </p:spPr>
-        <p:style>
-          <a:lnRef idx="2">
-            <a:schemeClr val="dk1"/>
-          </a:lnRef>
-          <a:fillRef idx="1">
-            <a:schemeClr val="lt1"/>
-          </a:fillRef>
-          <a:effectRef idx="0">
-            <a:schemeClr val="dk1"/>
-          </a:effectRef>
-          <a:fontRef idx="minor">
-            <a:schemeClr val="dk1"/>
-          </a:fontRef>
-        </p:style>
-        <p:txBody>
-          <a:bodyPr rtlCol="0" anchor="ctr"/>
-          <a:lstStyle/>
-          <a:p>
-            <a:pPr algn="ctr"/>
-            <a:endParaRPr lang="en-US"/>
-          </a:p>
-        </p:txBody>
-      </p:sp>
-      <p:sp>
-        <p:nvSpPr>
-          <p:cNvPr id="15" name="Flecha abajo 14"/>
-          <p:cNvSpPr/>
-          <p:nvPr/>
-        </p:nvSpPr>
-        <p:spPr>
-          <a:xfrm>
-            <a:off x="9261372" y="2324000"/>
-            <a:ext cx="1161288" cy="1305944"/>
-          </a:xfrm>
-          <a:prstGeom prst="downArrow">
-            <a:avLst/>
-          </a:prstGeom>
-        </p:spPr>
-        <p:style>
-          <a:lnRef idx="2">
-            <a:schemeClr val="dk1"/>
-          </a:lnRef>
-          <a:fillRef idx="1">
-            <a:schemeClr val="lt1"/>
-          </a:fillRef>
-          <a:effectRef idx="0">
-            <a:schemeClr val="dk1"/>
-          </a:effectRef>
-          <a:fontRef idx="minor">
-            <a:schemeClr val="dk1"/>
-          </a:fontRef>
-        </p:style>
-        <p:txBody>
-          <a:bodyPr rtlCol="0" anchor="ctr"/>
-          <a:lstStyle/>
-          <a:p>
-            <a:pPr algn="ctr"/>
-            <a:endParaRPr lang="en-US"/>
-          </a:p>
-        </p:txBody>
-      </p:sp>
-    </p:spTree>
-    <p:extLst>
-      <p:ext uri="{BB962C8B-B14F-4D97-AF65-F5344CB8AC3E}">
-        <p14:creationId xmlns:p14="http://schemas.microsoft.com/office/powerpoint/2010/main" val="1733027128"/>
-      </p:ext>
-    </p:extLst>
-  </p:cSld>
-  <p:clrMapOvr>
-    <a:masterClrMapping/>
-  </p:clrMapOvr>
-  <p:timing>
-    <p:tnLst>
-      <p:par>
-        <p:cTn id="1" dur="indefinite" restart="never" nodeType="tmRoot"/>
-      </p:par>
-    </p:tnLst>
-  </p:timing>
-</p:sld>
-</file>
-
-<file path=ppt/slides/slide20.xml><?xml version="1.0" encoding="utf-8"?>
+<file path=ppt/slides/slide22.xml><?xml version="1.0" encoding="utf-8"?>
 <p:sld xmlns:a="http://schemas.openxmlformats.org/drawingml/2006/main" xmlns:r="http://schemas.openxmlformats.org/officeDocument/2006/relationships" xmlns:p="http://schemas.openxmlformats.org/presentationml/2006/main" show="0">
   <p:cSld>
     <p:spTree>
@@ -16665,11 +17127,11 @@
   <p:clrMapOvr>
     <a:masterClrMapping/>
   </p:clrMapOvr>
-  <mc:AlternateContent xmlns:mc="http://schemas.openxmlformats.org/markup-compatibility/2006">
-    <mc:Choice xmlns:p14="http://schemas.microsoft.com/office/powerpoint/2010/main" Requires="p14">
+  <mc:AlternateContent xmlns:mc="http://schemas.openxmlformats.org/markup-compatibility/2006" xmlns:p14="http://schemas.microsoft.com/office/powerpoint/2010/main">
+    <mc:Choice Requires="p14">
       <p:transition spd="slow" p14:dur="2000"/>
     </mc:Choice>
-    <mc:Fallback>
+    <mc:Fallback xmlns="">
       <p:transition spd="slow"/>
     </mc:Fallback>
   </mc:AlternateContent>
@@ -16683,7 +17145,7 @@
 </p:sld>
 </file>
 
-<file path=ppt/slides/slide21.xml><?xml version="1.0" encoding="utf-8"?>
+<file path=ppt/slides/slide23.xml><?xml version="1.0" encoding="utf-8"?>
 <p:sld xmlns:a="http://schemas.openxmlformats.org/drawingml/2006/main" xmlns:r="http://schemas.openxmlformats.org/officeDocument/2006/relationships" xmlns:p="http://schemas.openxmlformats.org/presentationml/2006/main">
   <p:cSld>
     <p:spTree>
@@ -17209,11 +17671,7 @@
           <a:p>
             <a:r>
               <a:rPr lang="es-MX" dirty="0" smtClean="0"/>
-              <a:t>A </a:t>
-            </a:r>
-            <a:r>
-              <a:rPr lang="es-MX" dirty="0" smtClean="0"/>
-              <a:t>I </a:t>
+              <a:t>A I </a:t>
             </a:r>
             <a:r>
               <a:rPr lang="es-MX" dirty="0" err="1" smtClean="0"/>
@@ -17278,7 +17736,7 @@
 </p:sld>
 </file>
 
-<file path=ppt/slides/slide22.xml><?xml version="1.0" encoding="utf-8"?>
+<file path=ppt/slides/slide24.xml><?xml version="1.0" encoding="utf-8"?>
 <p:sld xmlns:a="http://schemas.openxmlformats.org/drawingml/2006/main" xmlns:r="http://schemas.openxmlformats.org/officeDocument/2006/relationships" xmlns:p="http://schemas.openxmlformats.org/presentationml/2006/main">
   <p:cSld>
     <p:spTree>
@@ -17644,7 +18102,7 @@
 </p:sld>
 </file>
 
-<file path=ppt/slides/slide23.xml><?xml version="1.0" encoding="utf-8"?>
+<file path=ppt/slides/slide25.xml><?xml version="1.0" encoding="utf-8"?>
 <p:sld xmlns:a="http://schemas.openxmlformats.org/drawingml/2006/main" xmlns:r="http://schemas.openxmlformats.org/officeDocument/2006/relationships" xmlns:p="http://schemas.openxmlformats.org/presentationml/2006/main">
   <p:cSld>
     <p:spTree>
@@ -17747,7 +18205,7 @@
 </p:sld>
 </file>
 
-<file path=ppt/slides/slide24.xml><?xml version="1.0" encoding="utf-8"?>
+<file path=ppt/slides/slide26.xml><?xml version="1.0" encoding="utf-8"?>
 <p:sld xmlns:a="http://schemas.openxmlformats.org/drawingml/2006/main" xmlns:r="http://schemas.openxmlformats.org/officeDocument/2006/relationships" xmlns:p="http://schemas.openxmlformats.org/presentationml/2006/main">
   <p:cSld>
     <p:spTree>
@@ -17894,7 +18352,7 @@
 </p:sld>
 </file>
 
-<file path=ppt/slides/slide25.xml><?xml version="1.0" encoding="utf-8"?>
+<file path=ppt/slides/slide27.xml><?xml version="1.0" encoding="utf-8"?>
 <p:sld xmlns:a="http://schemas.openxmlformats.org/drawingml/2006/main" xmlns:r="http://schemas.openxmlformats.org/officeDocument/2006/relationships" xmlns:p="http://schemas.openxmlformats.org/presentationml/2006/main">
   <p:cSld>
     <p:spTree>
@@ -17935,11 +18393,7 @@
             </a:br>
             <a:r>
               <a:rPr lang="es-MX" dirty="0" smtClean="0"/>
-              <a:t>DUAL </a:t>
-            </a:r>
-            <a:r>
-              <a:rPr lang="es-MX" dirty="0" smtClean="0"/>
-              <a:t>ISOTOPE C AND O</a:t>
+              <a:t>DUAL ISOTOPE C AND O</a:t>
             </a:r>
             <a:endParaRPr lang="en-US" dirty="0"/>
           </a:p>
@@ -18252,7 +18706,7 @@
 </p:sld>
 </file>
 
-<file path=ppt/slides/slide26.xml><?xml version="1.0" encoding="utf-8"?>
+<file path=ppt/slides/slide28.xml><?xml version="1.0" encoding="utf-8"?>
 <p:sld xmlns:a="http://schemas.openxmlformats.org/drawingml/2006/main" xmlns:r="http://schemas.openxmlformats.org/officeDocument/2006/relationships" xmlns:p="http://schemas.openxmlformats.org/presentationml/2006/main">
   <p:cSld>
     <p:spTree>
@@ -18358,7 +18812,7 @@
 </p:sld>
 </file>
 
-<file path=ppt/slides/slide27.xml><?xml version="1.0" encoding="utf-8"?>
+<file path=ppt/slides/slide29.xml><?xml version="1.0" encoding="utf-8"?>
 <p:sld xmlns:a="http://schemas.openxmlformats.org/drawingml/2006/main" xmlns:r="http://schemas.openxmlformats.org/officeDocument/2006/relationships" xmlns:p="http://schemas.openxmlformats.org/presentationml/2006/main" show="0">
   <p:cSld>
     <p:spTree>
@@ -18713,11 +19167,11 @@
   <p:clrMapOvr>
     <a:masterClrMapping/>
   </p:clrMapOvr>
-  <mc:AlternateContent xmlns:mc="http://schemas.openxmlformats.org/markup-compatibility/2006">
-    <mc:Choice xmlns:p14="http://schemas.microsoft.com/office/powerpoint/2010/main" Requires="p14">
+  <mc:AlternateContent xmlns:mc="http://schemas.openxmlformats.org/markup-compatibility/2006" xmlns:p14="http://schemas.microsoft.com/office/powerpoint/2010/main">
+    <mc:Choice Requires="p14">
       <p:transition spd="slow" p14:dur="2000"/>
     </mc:Choice>
-    <mc:Fallback>
+    <mc:Fallback xmlns="">
       <p:transition spd="slow"/>
     </mc:Fallback>
   </mc:AlternateContent>
@@ -18731,119 +19185,8 @@
 </p:sld>
 </file>
 
-<file path=ppt/slides/slide28.xml><?xml version="1.0" encoding="utf-8"?>
-<p:sld xmlns:a="http://schemas.openxmlformats.org/drawingml/2006/main" xmlns:r="http://schemas.openxmlformats.org/officeDocument/2006/relationships" xmlns:p="http://schemas.openxmlformats.org/presentationml/2006/main">
-  <p:cSld>
-    <p:spTree>
-      <p:nvGrpSpPr>
-        <p:cNvPr id="1" name=""/>
-        <p:cNvGrpSpPr/>
-        <p:nvPr/>
-      </p:nvGrpSpPr>
-      <p:grpSpPr>
-        <a:xfrm>
-          <a:off x="0" y="0"/>
-          <a:ext cx="0" cy="0"/>
-          <a:chOff x="0" y="0"/>
-          <a:chExt cx="0" cy="0"/>
-        </a:xfrm>
-      </p:grpSpPr>
-      <p:sp>
-        <p:nvSpPr>
-          <p:cNvPr id="2" name="Título 1"/>
-          <p:cNvSpPr>
-            <a:spLocks noGrp="1"/>
-          </p:cNvSpPr>
-          <p:nvPr>
-            <p:ph type="title"/>
-          </p:nvPr>
-        </p:nvSpPr>
-        <p:spPr/>
-        <p:txBody>
-          <a:bodyPr/>
-          <a:lstStyle/>
-          <a:p>
-            <a:r>
-              <a:rPr lang="es-MX" dirty="0" smtClean="0"/>
-              <a:t>NEXT STEPS AND QUESTIONS</a:t>
-            </a:r>
-            <a:endParaRPr lang="en-US" dirty="0"/>
-          </a:p>
-        </p:txBody>
-      </p:sp>
-      <p:sp>
-        <p:nvSpPr>
-          <p:cNvPr id="3" name="Marcador de contenido 2"/>
-          <p:cNvSpPr>
-            <a:spLocks noGrp="1"/>
-          </p:cNvSpPr>
-          <p:nvPr>
-            <p:ph idx="1"/>
-          </p:nvPr>
-        </p:nvSpPr>
-        <p:spPr/>
-        <p:txBody>
-          <a:bodyPr>
-            <a:normAutofit/>
-          </a:bodyPr>
-          <a:lstStyle/>
-          <a:p>
-            <a:r>
-              <a:rPr lang="en-US" sz="2200" dirty="0" smtClean="0"/>
-              <a:t>Refining – how better integrate traits. PCA?</a:t>
-            </a:r>
-          </a:p>
-          <a:p>
-            <a:r>
-              <a:rPr lang="en-US" sz="2200" dirty="0" smtClean="0"/>
-              <a:t>The </a:t>
-            </a:r>
-            <a:r>
-              <a:rPr lang="en-US" sz="2200" dirty="0"/>
-              <a:t>experimental controls from 2009 (n = 9) would be used mainly as a baseline reference due to their limited sample size.</a:t>
-            </a:r>
-          </a:p>
-          <a:p>
-            <a:r>
-              <a:rPr lang="en-US" sz="2200" dirty="0"/>
-              <a:t>Regarding environmental drivers, elevation has been useful as an integrative gradient, but I would like to discuss the incorporation of explicit climatic variables to improve </a:t>
-            </a:r>
-            <a:r>
-              <a:rPr lang="en-US" sz="2200" dirty="0" smtClean="0"/>
-              <a:t>interpretability or TPI?. </a:t>
-            </a:r>
-            <a:r>
-              <a:rPr lang="en-US" sz="2200" dirty="0" smtClean="0"/>
-              <a:t>I thought on working with PCA dimensions. </a:t>
-            </a:r>
-          </a:p>
-          <a:p>
-            <a:endParaRPr lang="en-US" dirty="0"/>
-          </a:p>
-        </p:txBody>
-      </p:sp>
-    </p:spTree>
-    <p:extLst>
-      <p:ext uri="{BB962C8B-B14F-4D97-AF65-F5344CB8AC3E}">
-        <p14:creationId xmlns:p14="http://schemas.microsoft.com/office/powerpoint/2010/main" val="2759048454"/>
-      </p:ext>
-    </p:extLst>
-  </p:cSld>
-  <p:clrMapOvr>
-    <a:masterClrMapping/>
-  </p:clrMapOvr>
-  <p:timing>
-    <p:tnLst>
-      <p:par>
-        <p:cTn id="1" dur="indefinite" restart="never" nodeType="tmRoot"/>
-      </p:par>
-    </p:tnLst>
-  </p:timing>
-</p:sld>
-</file>
-
 <file path=ppt/slides/slide3.xml><?xml version="1.0" encoding="utf-8"?>
-<p:sld xmlns:a="http://schemas.openxmlformats.org/drawingml/2006/main" xmlns:r="http://schemas.openxmlformats.org/officeDocument/2006/relationships" xmlns:p="http://schemas.openxmlformats.org/presentationml/2006/main">
+<p:sld xmlns:a="http://schemas.openxmlformats.org/drawingml/2006/main" xmlns:r="http://schemas.openxmlformats.org/officeDocument/2006/relationships" xmlns:p="http://schemas.openxmlformats.org/presentationml/2006/main" show="0">
   <p:cSld>
     <p:spTree>
       <p:nvGrpSpPr>
@@ -19720,19 +20063,7 @@
                           <a:ea typeface="Calibri" panose="020F0502020204030204" pitchFamily="34" charset="0"/>
                           <a:cs typeface="Times New Roman" panose="02020603050405020304" pitchFamily="18" charset="0"/>
                         </a:rPr>
-                        <a:t>C:N, 15N, 13C, </a:t>
-                      </a:r>
-                      <a:r>
-                        <a:rPr lang="es-MX" sz="2000" b="1" baseline="0" dirty="0" smtClean="0">
-                          <a:solidFill>
-                            <a:schemeClr val="accent6"/>
-                          </a:solidFill>
-                          <a:effectLst/>
-                          <a:latin typeface="Calibri" panose="020F0502020204030204" pitchFamily="34" charset="0"/>
-                          <a:ea typeface="Calibri" panose="020F0502020204030204" pitchFamily="34" charset="0"/>
-                          <a:cs typeface="Times New Roman" panose="02020603050405020304" pitchFamily="18" charset="0"/>
-                        </a:rPr>
-                        <a:t>18º, </a:t>
+                        <a:t>C:N, 15N, 13C, 18º, </a:t>
                       </a:r>
                       <a:r>
                         <a:rPr lang="es-MX" sz="2000" b="1" baseline="0" dirty="0" err="1" smtClean="0">
@@ -20258,6 +20589,121 @@
     <p:extLst>
       <p:ext uri="{BB962C8B-B14F-4D97-AF65-F5344CB8AC3E}">
         <p14:creationId xmlns:p14="http://schemas.microsoft.com/office/powerpoint/2010/main" val="4124735697"/>
+      </p:ext>
+    </p:extLst>
+  </p:cSld>
+  <p:clrMapOvr>
+    <a:masterClrMapping/>
+  </p:clrMapOvr>
+  <mc:AlternateContent xmlns:mc="http://schemas.openxmlformats.org/markup-compatibility/2006">
+    <mc:Choice xmlns:p14="http://schemas.microsoft.com/office/powerpoint/2010/main" Requires="p14">
+      <p:transition spd="slow" p14:dur="2000"/>
+    </mc:Choice>
+    <mc:Fallback>
+      <p:transition spd="slow"/>
+    </mc:Fallback>
+  </mc:AlternateContent>
+  <p:timing>
+    <p:tnLst>
+      <p:par>
+        <p:cTn id="1" dur="indefinite" restart="never" nodeType="tmRoot"/>
+      </p:par>
+    </p:tnLst>
+  </p:timing>
+</p:sld>
+</file>
+
+<file path=ppt/slides/slide30.xml><?xml version="1.0" encoding="utf-8"?>
+<p:sld xmlns:a="http://schemas.openxmlformats.org/drawingml/2006/main" xmlns:r="http://schemas.openxmlformats.org/officeDocument/2006/relationships" xmlns:p="http://schemas.openxmlformats.org/presentationml/2006/main">
+  <p:cSld>
+    <p:spTree>
+      <p:nvGrpSpPr>
+        <p:cNvPr id="1" name=""/>
+        <p:cNvGrpSpPr/>
+        <p:nvPr/>
+      </p:nvGrpSpPr>
+      <p:grpSpPr>
+        <a:xfrm>
+          <a:off x="0" y="0"/>
+          <a:ext cx="0" cy="0"/>
+          <a:chOff x="0" y="0"/>
+          <a:chExt cx="0" cy="0"/>
+        </a:xfrm>
+      </p:grpSpPr>
+      <p:sp>
+        <p:nvSpPr>
+          <p:cNvPr id="2" name="Título 1"/>
+          <p:cNvSpPr>
+            <a:spLocks noGrp="1"/>
+          </p:cNvSpPr>
+          <p:nvPr>
+            <p:ph type="title"/>
+          </p:nvPr>
+        </p:nvSpPr>
+        <p:spPr/>
+        <p:txBody>
+          <a:bodyPr/>
+          <a:lstStyle/>
+          <a:p>
+            <a:r>
+              <a:rPr lang="es-MX" dirty="0" smtClean="0"/>
+              <a:t>NEXT STEPS AND QUESTIONS</a:t>
+            </a:r>
+            <a:endParaRPr lang="en-US" dirty="0"/>
+          </a:p>
+        </p:txBody>
+      </p:sp>
+      <p:sp>
+        <p:nvSpPr>
+          <p:cNvPr id="3" name="Marcador de contenido 2"/>
+          <p:cNvSpPr>
+            <a:spLocks noGrp="1"/>
+          </p:cNvSpPr>
+          <p:nvPr>
+            <p:ph idx="1"/>
+          </p:nvPr>
+        </p:nvSpPr>
+        <p:spPr/>
+        <p:txBody>
+          <a:bodyPr>
+            <a:normAutofit/>
+          </a:bodyPr>
+          <a:lstStyle/>
+          <a:p>
+            <a:r>
+              <a:rPr lang="en-US" sz="2200" dirty="0" smtClean="0"/>
+              <a:t>Refining – how better integrate traits. PCA?</a:t>
+            </a:r>
+          </a:p>
+          <a:p>
+            <a:r>
+              <a:rPr lang="en-US" sz="2200" dirty="0" smtClean="0"/>
+              <a:t>The </a:t>
+            </a:r>
+            <a:r>
+              <a:rPr lang="en-US" sz="2200" dirty="0"/>
+              <a:t>experimental controls from 2009 (n = 9) would be used mainly as a baseline reference due to their limited sample size.</a:t>
+            </a:r>
+          </a:p>
+          <a:p>
+            <a:r>
+              <a:rPr lang="en-US" sz="2200" dirty="0"/>
+              <a:t>Regarding environmental drivers, elevation has been useful as an integrative gradient, but I would like to discuss the incorporation of explicit climatic variables to improve </a:t>
+            </a:r>
+            <a:r>
+              <a:rPr lang="en-US" sz="2200" dirty="0" smtClean="0"/>
+              <a:t>interpretability or TPI?. I thought on working with PCA dimensions. </a:t>
+            </a:r>
+          </a:p>
+          <a:p>
+            <a:endParaRPr lang="en-US" dirty="0"/>
+          </a:p>
+        </p:txBody>
+      </p:sp>
+    </p:spTree>
+    <p:extLst>
+      <p:ext uri="{BB962C8B-B14F-4D97-AF65-F5344CB8AC3E}">
+        <p14:creationId xmlns:p14="http://schemas.microsoft.com/office/powerpoint/2010/main" val="2759048454"/>
       </p:ext>
     </p:extLst>
   </p:cSld>
@@ -20452,30 +20898,17 @@
             <p:ph idx="1"/>
           </p:nvPr>
         </p:nvSpPr>
-        <p:spPr/>
+        <p:spPr>
+          <a:xfrm>
+            <a:off x="838200" y="1340993"/>
+            <a:ext cx="10515600" cy="4351338"/>
+          </a:xfrm>
+        </p:spPr>
         <p:txBody>
           <a:bodyPr>
-            <a:normAutofit fontScale="92500" lnSpcReduction="20000"/>
+            <a:normAutofit lnSpcReduction="10000"/>
           </a:bodyPr>
           <a:lstStyle/>
-          <a:p>
-            <a:r>
-              <a:rPr lang="es-MX" dirty="0" err="1" smtClean="0"/>
-              <a:t>Main</a:t>
-            </a:r>
-            <a:r>
-              <a:rPr lang="es-MX" dirty="0" smtClean="0"/>
-              <a:t> </a:t>
-            </a:r>
-            <a:r>
-              <a:rPr lang="es-MX" dirty="0" err="1" smtClean="0"/>
-              <a:t>question</a:t>
-            </a:r>
-            <a:r>
-              <a:rPr lang="es-MX" dirty="0" smtClean="0"/>
-              <a:t>: </a:t>
-            </a:r>
-          </a:p>
           <a:p>
             <a:pPr marL="0" indent="0">
               <a:buNone/>
@@ -20522,11 +20955,7 @@
             </a:r>
             <a:r>
               <a:rPr lang="es-MX" dirty="0" smtClean="0"/>
-              <a:t> </a:t>
-            </a:r>
-            <a:r>
-              <a:rPr lang="es-MX" dirty="0" smtClean="0"/>
-              <a:t>– </a:t>
+              <a:t> – </a:t>
             </a:r>
             <a:r>
               <a:rPr lang="es-MX" dirty="0" err="1" smtClean="0"/>
@@ -20550,7 +20979,39 @@
             </a:r>
             <a:r>
               <a:rPr lang="es-MX" dirty="0" smtClean="0"/>
-              <a:t>?</a:t>
+              <a:t> </a:t>
+            </a:r>
+            <a:r>
+              <a:rPr lang="es-MX" dirty="0" err="1" smtClean="0"/>
+              <a:t>on</a:t>
+            </a:r>
+            <a:r>
+              <a:rPr lang="es-MX" dirty="0" smtClean="0"/>
+              <a:t> al </a:t>
+            </a:r>
+            <a:r>
+              <a:rPr lang="es-MX" dirty="0" err="1" smtClean="0"/>
+              <a:t>elevational</a:t>
+            </a:r>
+            <a:r>
+              <a:rPr lang="es-MX" dirty="0" smtClean="0"/>
+              <a:t> </a:t>
+            </a:r>
+            <a:r>
+              <a:rPr lang="es-MX" dirty="0" err="1" smtClean="0"/>
+              <a:t>gradient</a:t>
+            </a:r>
+            <a:r>
+              <a:rPr lang="es-MX" dirty="0" smtClean="0"/>
+              <a:t> (temperatura and N-</a:t>
+            </a:r>
+            <a:r>
+              <a:rPr lang="es-MX" dirty="0" err="1" smtClean="0"/>
+              <a:t>limitation</a:t>
+            </a:r>
+            <a:r>
+              <a:rPr lang="es-MX" dirty="0" smtClean="0"/>
+              <a:t>)?</a:t>
             </a:r>
             <a:endParaRPr lang="es-MX" dirty="0" smtClean="0"/>
           </a:p>
@@ -20625,12 +21086,154 @@
             </a:r>
             <a:r>
               <a:rPr lang="es-MX" dirty="0" err="1" smtClean="0"/>
-              <a:t>ecophysiological</a:t>
+              <a:t>photosyntethic</a:t>
             </a:r>
             <a:r>
               <a:rPr lang="es-MX" dirty="0" smtClean="0"/>
-              <a:t> responses.</a:t>
-            </a:r>
+              <a:t> </a:t>
+            </a:r>
+            <a:r>
+              <a:rPr lang="es-MX" dirty="0" err="1" smtClean="0"/>
+              <a:t>capacity</a:t>
+            </a:r>
+            <a:r>
+              <a:rPr lang="es-MX" dirty="0" smtClean="0"/>
+              <a:t> to </a:t>
+            </a:r>
+            <a:r>
+              <a:rPr lang="es-MX" dirty="0" err="1" smtClean="0"/>
+              <a:t>increase</a:t>
+            </a:r>
+            <a:r>
+              <a:rPr lang="es-MX" dirty="0" smtClean="0"/>
+              <a:t> </a:t>
+            </a:r>
+            <a:r>
+              <a:rPr lang="es-MX" dirty="0" err="1" smtClean="0"/>
+              <a:t>iWUE</a:t>
+            </a:r>
+            <a:r>
+              <a:rPr lang="es-MX" dirty="0" smtClean="0"/>
+              <a:t> </a:t>
+            </a:r>
+            <a:r>
+              <a:rPr lang="es-MX" dirty="0" err="1" smtClean="0"/>
+              <a:t>specially</a:t>
+            </a:r>
+            <a:r>
+              <a:rPr lang="es-MX" dirty="0" smtClean="0"/>
+              <a:t> in N </a:t>
+            </a:r>
+            <a:r>
+              <a:rPr lang="es-MX" dirty="0" err="1" smtClean="0"/>
+              <a:t>limited</a:t>
+            </a:r>
+            <a:r>
+              <a:rPr lang="es-MX" dirty="0" smtClean="0"/>
+              <a:t> </a:t>
+            </a:r>
+            <a:r>
+              <a:rPr lang="es-MX" dirty="0" err="1" smtClean="0"/>
+              <a:t>areas</a:t>
+            </a:r>
+            <a:r>
+              <a:rPr lang="es-MX" dirty="0" smtClean="0"/>
+              <a:t> (</a:t>
+            </a:r>
+            <a:r>
+              <a:rPr lang="es-MX" dirty="0" err="1" smtClean="0"/>
+              <a:t>higher</a:t>
+            </a:r>
+            <a:r>
+              <a:rPr lang="es-MX" dirty="0" smtClean="0"/>
+              <a:t> </a:t>
+            </a:r>
+            <a:r>
+              <a:rPr lang="es-MX" dirty="0" err="1" smtClean="0"/>
+              <a:t>elevation</a:t>
+            </a:r>
+            <a:r>
+              <a:rPr lang="es-MX" dirty="0" smtClean="0"/>
+              <a:t>)</a:t>
+            </a:r>
+            <a:r>
+              <a:rPr lang="es-MX" dirty="0" smtClean="0"/>
+              <a:t>.</a:t>
+            </a:r>
+          </a:p>
+          <a:p>
+            <a:pPr marL="0" indent="0">
+              <a:buNone/>
+            </a:pPr>
+            <a:r>
+              <a:rPr lang="es-MX" sz="2400" dirty="0" smtClean="0"/>
+              <a:t>- </a:t>
+            </a:r>
+            <a:r>
+              <a:rPr lang="es-MX" sz="2400" dirty="0" err="1" smtClean="0"/>
+              <a:t>Nitrogen</a:t>
+            </a:r>
+            <a:r>
+              <a:rPr lang="es-MX" sz="2400" dirty="0" smtClean="0"/>
+              <a:t> </a:t>
+            </a:r>
+            <a:r>
+              <a:rPr lang="es-MX" sz="2400" dirty="0" err="1" smtClean="0"/>
+              <a:t>addition</a:t>
+            </a:r>
+            <a:r>
+              <a:rPr lang="es-MX" sz="2400" dirty="0" smtClean="0"/>
+              <a:t> </a:t>
+            </a:r>
+            <a:r>
+              <a:rPr lang="es-MX" sz="2400" dirty="0" err="1" smtClean="0"/>
+              <a:t>decreases</a:t>
+            </a:r>
+            <a:r>
+              <a:rPr lang="es-MX" sz="2400" dirty="0" smtClean="0"/>
+              <a:t> </a:t>
+            </a:r>
+            <a:r>
+              <a:rPr lang="es-MX" sz="2400" dirty="0" err="1" smtClean="0"/>
+              <a:t>iWUE</a:t>
+            </a:r>
+            <a:r>
+              <a:rPr lang="es-MX" sz="2400" dirty="0" smtClean="0"/>
+              <a:t> </a:t>
+            </a:r>
+            <a:r>
+              <a:rPr lang="es-MX" sz="2400" dirty="0" err="1" smtClean="0"/>
+              <a:t>on</a:t>
+            </a:r>
+            <a:r>
+              <a:rPr lang="es-MX" sz="2400" dirty="0" smtClean="0"/>
+              <a:t> P-</a:t>
+            </a:r>
+            <a:r>
+              <a:rPr lang="es-MX" sz="2400" dirty="0" err="1" smtClean="0"/>
+              <a:t>limitated</a:t>
+            </a:r>
+            <a:r>
+              <a:rPr lang="es-MX" sz="2400" dirty="0" smtClean="0"/>
+              <a:t> </a:t>
+            </a:r>
+            <a:r>
+              <a:rPr lang="es-MX" sz="2400" dirty="0" err="1" smtClean="0"/>
+              <a:t>areas</a:t>
+            </a:r>
+            <a:r>
+              <a:rPr lang="es-MX" sz="2400" dirty="0" smtClean="0"/>
+              <a:t> (</a:t>
+            </a:r>
+            <a:r>
+              <a:rPr lang="es-MX" sz="2400" dirty="0" err="1" smtClean="0"/>
+              <a:t>Huang</a:t>
+            </a:r>
+            <a:r>
+              <a:rPr lang="es-MX" sz="2400" dirty="0" smtClean="0"/>
+              <a:t> et al, 2016).</a:t>
+            </a:r>
+            <a:endParaRPr lang="es-MX" sz="2400" dirty="0" smtClean="0"/>
           </a:p>
           <a:p>
             <a:pPr marL="0" indent="0" algn="just">
@@ -20646,11 +21249,11 @@
             </a:r>
             <a:r>
               <a:rPr lang="es-MX" dirty="0" smtClean="0"/>
-              <a:t> of WUE </a:t>
+              <a:t> of </a:t>
             </a:r>
             <a:r>
               <a:rPr lang="es-MX" dirty="0" err="1" smtClean="0"/>
-              <a:t>by</a:t>
+              <a:t>water</a:t>
             </a:r>
             <a:r>
               <a:rPr lang="es-MX" dirty="0" smtClean="0"/>
@@ -20658,15 +21261,7 @@
             </a:r>
             <a:r>
               <a:rPr lang="es-MX" dirty="0" err="1" smtClean="0"/>
-              <a:t>enhacement</a:t>
-            </a:r>
-            <a:r>
-              <a:rPr lang="es-MX" dirty="0" smtClean="0"/>
-              <a:t> of </a:t>
-            </a:r>
-            <a:r>
-              <a:rPr lang="es-MX" dirty="0" err="1" smtClean="0"/>
-              <a:t>photosynthesis</a:t>
+              <a:t>transpiration</a:t>
             </a:r>
             <a:r>
               <a:rPr lang="es-MX" dirty="0" smtClean="0"/>
@@ -20674,56 +21269,6 @@
             </a:r>
             <a:r>
               <a:rPr lang="es-MX" dirty="0" err="1" smtClean="0"/>
-              <a:t>when</a:t>
-            </a:r>
-            <a:r>
-              <a:rPr lang="es-MX" dirty="0" smtClean="0"/>
-              <a:t> </a:t>
-            </a:r>
-            <a:r>
-              <a:rPr lang="es-MX" dirty="0" err="1" smtClean="0"/>
-              <a:t>adding</a:t>
-            </a:r>
-            <a:r>
-              <a:rPr lang="es-MX" dirty="0" smtClean="0"/>
-              <a:t> N.</a:t>
-            </a:r>
-            <a:endParaRPr lang="es-MX" dirty="0" smtClean="0"/>
-          </a:p>
-          <a:p>
-            <a:pPr marL="0" indent="0" algn="just">
-              <a:buNone/>
-            </a:pPr>
-            <a:r>
-              <a:rPr lang="es-MX" dirty="0" smtClean="0"/>
-              <a:t>- </a:t>
-            </a:r>
-            <a:r>
-              <a:rPr lang="es-MX" dirty="0" err="1" smtClean="0"/>
-              <a:t>Increase</a:t>
-            </a:r>
-            <a:r>
-              <a:rPr lang="es-MX" dirty="0" smtClean="0"/>
-              <a:t> of </a:t>
-            </a:r>
-            <a:r>
-              <a:rPr lang="es-MX" dirty="0" err="1" smtClean="0"/>
-              <a:t>water</a:t>
-            </a:r>
-            <a:r>
-              <a:rPr lang="es-MX" dirty="0" smtClean="0"/>
-              <a:t> </a:t>
-            </a:r>
-            <a:r>
-              <a:rPr lang="es-MX" dirty="0" err="1" smtClean="0"/>
-              <a:t>transpiration</a:t>
-            </a:r>
-            <a:r>
-              <a:rPr lang="es-MX" dirty="0" smtClean="0"/>
-              <a:t> </a:t>
-            </a:r>
-            <a:r>
-              <a:rPr lang="es-MX" dirty="0" err="1" smtClean="0"/>
               <a:t>with</a:t>
             </a:r>
             <a:r>
@@ -20748,70 +21293,13 @@
             </a:r>
             <a:r>
               <a:rPr lang="es-MX" dirty="0" smtClean="0"/>
-              <a:t>of dO18.</a:t>
-            </a:r>
-          </a:p>
-          <a:p>
-            <a:pPr marL="0" indent="0" algn="just">
-              <a:buNone/>
-            </a:pPr>
-            <a:r>
-              <a:rPr lang="es-MX" dirty="0" smtClean="0"/>
-              <a:t>- </a:t>
-            </a:r>
-            <a:r>
-              <a:rPr lang="es-MX" dirty="0" err="1" smtClean="0"/>
-              <a:t>Interaction</a:t>
-            </a:r>
-            <a:r>
-              <a:rPr lang="es-MX" dirty="0" smtClean="0"/>
-              <a:t> of </a:t>
-            </a:r>
-            <a:r>
-              <a:rPr lang="es-MX" dirty="0" err="1" smtClean="0"/>
-              <a:t>nutrients</a:t>
-            </a:r>
-            <a:r>
-              <a:rPr lang="es-MX" dirty="0"/>
-              <a:t> </a:t>
-            </a:r>
-            <a:r>
-              <a:rPr lang="es-MX" dirty="0" smtClean="0"/>
-              <a:t>N*P </a:t>
-            </a:r>
-            <a:r>
-              <a:rPr lang="es-MX" dirty="0" err="1" smtClean="0"/>
-              <a:t>will</a:t>
-            </a:r>
-            <a:r>
-              <a:rPr lang="es-MX" dirty="0" smtClean="0"/>
-              <a:t> posible lead to </a:t>
-            </a:r>
-            <a:r>
-              <a:rPr lang="es-MX" dirty="0" err="1" smtClean="0"/>
-              <a:t>increase</a:t>
-            </a:r>
-            <a:r>
-              <a:rPr lang="es-MX" dirty="0" smtClean="0"/>
-              <a:t>/</a:t>
-            </a:r>
-            <a:r>
-              <a:rPr lang="es-MX" dirty="0" err="1" smtClean="0"/>
-              <a:t>decreases</a:t>
-            </a:r>
-            <a:r>
-              <a:rPr lang="es-MX" dirty="0" smtClean="0"/>
-              <a:t> of </a:t>
-            </a:r>
-            <a:r>
-              <a:rPr lang="es-MX" dirty="0" err="1" smtClean="0"/>
-              <a:t>iWUE</a:t>
+              <a:t>of dO18</a:t>
             </a:r>
             <a:r>
               <a:rPr lang="es-MX" dirty="0" smtClean="0"/>
               <a:t>.</a:t>
             </a:r>
-            <a:endParaRPr lang="en-US" dirty="0"/>
+            <a:endParaRPr lang="es-MX" dirty="0" smtClean="0"/>
           </a:p>
         </p:txBody>
       </p:sp>
@@ -20837,6 +21325,1879 @@
 
 <file path=ppt/slides/slide6.xml><?xml version="1.0" encoding="utf-8"?>
 <p:sld xmlns:a="http://schemas.openxmlformats.org/drawingml/2006/main" xmlns:r="http://schemas.openxmlformats.org/officeDocument/2006/relationships" xmlns:p="http://schemas.openxmlformats.org/presentationml/2006/main">
+  <p:cSld>
+    <p:spTree>
+      <p:nvGrpSpPr>
+        <p:cNvPr id="1" name=""/>
+        <p:cNvGrpSpPr/>
+        <p:nvPr/>
+      </p:nvGrpSpPr>
+      <p:grpSpPr>
+        <a:xfrm>
+          <a:off x="0" y="0"/>
+          <a:ext cx="0" cy="0"/>
+          <a:chOff x="0" y="0"/>
+          <a:chExt cx="0" cy="0"/>
+        </a:xfrm>
+      </p:grpSpPr>
+      <p:sp>
+        <p:nvSpPr>
+          <p:cNvPr id="2" name="Título 1"/>
+          <p:cNvSpPr>
+            <a:spLocks noGrp="1"/>
+          </p:cNvSpPr>
+          <p:nvPr>
+            <p:ph type="title"/>
+          </p:nvPr>
+        </p:nvSpPr>
+        <p:spPr/>
+        <p:txBody>
+          <a:bodyPr/>
+          <a:lstStyle/>
+          <a:p>
+            <a:endParaRPr lang="en-US"/>
+          </a:p>
+        </p:txBody>
+      </p:sp>
+      <p:sp>
+        <p:nvSpPr>
+          <p:cNvPr id="3" name="Marcador de contenido 2"/>
+          <p:cNvSpPr>
+            <a:spLocks noGrp="1"/>
+          </p:cNvSpPr>
+          <p:nvPr>
+            <p:ph idx="1"/>
+          </p:nvPr>
+        </p:nvSpPr>
+        <p:spPr>
+          <a:xfrm>
+            <a:off x="838200" y="1825625"/>
+            <a:ext cx="10738104" cy="4351338"/>
+          </a:xfrm>
+        </p:spPr>
+        <p:txBody>
+          <a:bodyPr/>
+          <a:lstStyle/>
+          <a:p>
+            <a:endParaRPr lang="en-US" dirty="0"/>
+          </a:p>
+        </p:txBody>
+      </p:sp>
+      <p:pic>
+        <p:nvPicPr>
+          <p:cNvPr id="4" name="Imagen 3"/>
+          <p:cNvPicPr>
+            <a:picLocks noChangeAspect="1"/>
+          </p:cNvPicPr>
+          <p:nvPr/>
+        </p:nvPicPr>
+        <p:blipFill rotWithShape="1">
+          <a:blip r:embed="rId2"/>
+          <a:srcRect l="25004" t="34055" r="17929" b="285"/>
+          <a:stretch/>
+        </p:blipFill>
+        <p:spPr>
+          <a:xfrm>
+            <a:off x="-178269" y="0"/>
+            <a:ext cx="7067042" cy="4333510"/>
+          </a:xfrm>
+          <a:prstGeom prst="rect">
+            <a:avLst/>
+          </a:prstGeom>
+        </p:spPr>
+      </p:pic>
+      <p:pic>
+        <p:nvPicPr>
+          <p:cNvPr id="5" name="Imagen 4"/>
+          <p:cNvPicPr>
+            <a:picLocks noChangeAspect="1"/>
+          </p:cNvPicPr>
+          <p:nvPr/>
+        </p:nvPicPr>
+        <p:blipFill rotWithShape="1">
+          <a:blip r:embed="rId3"/>
+          <a:srcRect l="18539" t="37341" r="15541" b="3055"/>
+          <a:stretch/>
+        </p:blipFill>
+        <p:spPr>
+          <a:xfrm>
+            <a:off x="5263896" y="3352816"/>
+            <a:ext cx="6818612" cy="3285728"/>
+          </a:xfrm>
+          <a:prstGeom prst="rect">
+            <a:avLst/>
+          </a:prstGeom>
+        </p:spPr>
+      </p:pic>
+    </p:spTree>
+    <p:extLst>
+      <p:ext uri="{BB962C8B-B14F-4D97-AF65-F5344CB8AC3E}">
+        <p14:creationId xmlns:p14="http://schemas.microsoft.com/office/powerpoint/2010/main" val="187121878"/>
+      </p:ext>
+    </p:extLst>
+  </p:cSld>
+  <p:clrMapOvr>
+    <a:masterClrMapping/>
+  </p:clrMapOvr>
+</p:sld>
+</file>
+
+<file path=ppt/slides/slide7.xml><?xml version="1.0" encoding="utf-8"?>
+<p:sld xmlns:a="http://schemas.openxmlformats.org/drawingml/2006/main" xmlns:r="http://schemas.openxmlformats.org/officeDocument/2006/relationships" xmlns:p="http://schemas.openxmlformats.org/presentationml/2006/main">
+  <p:cSld>
+    <p:spTree>
+      <p:nvGrpSpPr>
+        <p:cNvPr id="1" name=""/>
+        <p:cNvGrpSpPr/>
+        <p:nvPr/>
+      </p:nvGrpSpPr>
+      <p:grpSpPr>
+        <a:xfrm>
+          <a:off x="0" y="0"/>
+          <a:ext cx="0" cy="0"/>
+          <a:chOff x="0" y="0"/>
+          <a:chExt cx="0" cy="0"/>
+        </a:xfrm>
+      </p:grpSpPr>
+      <p:sp>
+        <p:nvSpPr>
+          <p:cNvPr id="2" name="Título 1"/>
+          <p:cNvSpPr>
+            <a:spLocks noGrp="1"/>
+          </p:cNvSpPr>
+          <p:nvPr>
+            <p:ph type="title"/>
+          </p:nvPr>
+        </p:nvSpPr>
+        <p:spPr/>
+        <p:txBody>
+          <a:bodyPr/>
+          <a:lstStyle/>
+          <a:p>
+            <a:r>
+              <a:rPr lang="es-MX" dirty="0" err="1" smtClean="0"/>
+              <a:t>Overview</a:t>
+            </a:r>
+            <a:endParaRPr lang="en-US" dirty="0"/>
+          </a:p>
+        </p:txBody>
+      </p:sp>
+      <p:graphicFrame>
+        <p:nvGraphicFramePr>
+          <p:cNvPr id="6" name="Marcador de contenido 5"/>
+          <p:cNvGraphicFramePr>
+            <a:graphicFrameLocks noGrp="1"/>
+          </p:cNvGraphicFramePr>
+          <p:nvPr>
+            <p:ph idx="1"/>
+            <p:extLst>
+              <p:ext uri="{D42A27DB-BD31-4B8C-83A1-F6EECF244321}">
+                <p14:modId xmlns:p14="http://schemas.microsoft.com/office/powerpoint/2010/main" val="3952438916"/>
+              </p:ext>
+            </p:extLst>
+          </p:nvPr>
+        </p:nvGraphicFramePr>
+        <p:xfrm>
+          <a:off x="838200" y="2050574"/>
+          <a:ext cx="10515600" cy="2956560"/>
+        </p:xfrm>
+        <a:graphic>
+          <a:graphicData uri="http://schemas.openxmlformats.org/drawingml/2006/table">
+            <a:tbl>
+              <a:tblPr>
+                <a:tableStyleId>{6E25E649-3F16-4E02-A733-19D2CDBF48F0}</a:tableStyleId>
+              </a:tblPr>
+              <a:tblGrid>
+                <a:gridCol w="1752600">
+                  <a:extLst>
+                    <a:ext uri="{9D8B030D-6E8A-4147-A177-3AD203B41FA5}">
+                      <a16:colId xmlns:a16="http://schemas.microsoft.com/office/drawing/2014/main" val="3949033211"/>
+                    </a:ext>
+                  </a:extLst>
+                </a:gridCol>
+                <a:gridCol w="1752600">
+                  <a:extLst>
+                    <a:ext uri="{9D8B030D-6E8A-4147-A177-3AD203B41FA5}">
+                      <a16:colId xmlns:a16="http://schemas.microsoft.com/office/drawing/2014/main" val="2466839100"/>
+                    </a:ext>
+                  </a:extLst>
+                </a:gridCol>
+                <a:gridCol w="1752600">
+                  <a:extLst>
+                    <a:ext uri="{9D8B030D-6E8A-4147-A177-3AD203B41FA5}">
+                      <a16:colId xmlns:a16="http://schemas.microsoft.com/office/drawing/2014/main" val="400463557"/>
+                    </a:ext>
+                  </a:extLst>
+                </a:gridCol>
+                <a:gridCol w="1752600">
+                  <a:extLst>
+                    <a:ext uri="{9D8B030D-6E8A-4147-A177-3AD203B41FA5}">
+                      <a16:colId xmlns:a16="http://schemas.microsoft.com/office/drawing/2014/main" val="881038700"/>
+                    </a:ext>
+                  </a:extLst>
+                </a:gridCol>
+                <a:gridCol w="1752600">
+                  <a:extLst>
+                    <a:ext uri="{9D8B030D-6E8A-4147-A177-3AD203B41FA5}">
+                      <a16:colId xmlns:a16="http://schemas.microsoft.com/office/drawing/2014/main" val="998413679"/>
+                    </a:ext>
+                  </a:extLst>
+                </a:gridCol>
+                <a:gridCol w="1752600">
+                  <a:extLst>
+                    <a:ext uri="{9D8B030D-6E8A-4147-A177-3AD203B41FA5}">
+                      <a16:colId xmlns:a16="http://schemas.microsoft.com/office/drawing/2014/main" val="1449677075"/>
+                    </a:ext>
+                  </a:extLst>
+                </a:gridCol>
+              </a:tblGrid>
+              <a:tr h="0">
+                <a:tc>
+                  <a:txBody>
+                    <a:bodyPr/>
+                    <a:lstStyle/>
+                    <a:p>
+                      <a:pPr algn="l" fontAlgn="ctr"/>
+                      <a:endParaRPr lang="en-US" dirty="0">
+                        <a:effectLst/>
+                      </a:endParaRPr>
+                    </a:p>
+                  </a:txBody>
+                  <a:tcPr marL="76200" marR="76200" marT="38100" marB="38100" anchor="ctr">
+                    <a:lnB w="12700" cap="flat" cmpd="sng" algn="ctr">
+                      <a:solidFill>
+                        <a:schemeClr val="tx1"/>
+                      </a:solidFill>
+                      <a:prstDash val="solid"/>
+                      <a:round/>
+                      <a:headEnd type="none" w="med" len="med"/>
+                      <a:tailEnd type="none" w="med" len="med"/>
+                    </a:lnB>
+                  </a:tcPr>
+                </a:tc>
+                <a:tc>
+                  <a:txBody>
+                    <a:bodyPr/>
+                    <a:lstStyle/>
+                    <a:p>
+                      <a:pPr algn="l" fontAlgn="ctr"/>
+                      <a:endParaRPr lang="en-US">
+                        <a:effectLst/>
+                      </a:endParaRPr>
+                    </a:p>
+                  </a:txBody>
+                  <a:tcPr marL="76200" marR="76200" marT="38100" marB="38100" anchor="ctr">
+                    <a:lnB w="12700" cap="flat" cmpd="sng" algn="ctr">
+                      <a:solidFill>
+                        <a:schemeClr val="tx1"/>
+                      </a:solidFill>
+                      <a:prstDash val="solid"/>
+                      <a:round/>
+                      <a:headEnd type="none" w="med" len="med"/>
+                      <a:tailEnd type="none" w="med" len="med"/>
+                    </a:lnB>
+                  </a:tcPr>
+                </a:tc>
+                <a:tc>
+                  <a:txBody>
+                    <a:bodyPr/>
+                    <a:lstStyle/>
+                    <a:p>
+                      <a:pPr algn="l" fontAlgn="ctr"/>
+                      <a:r>
+                        <a:rPr lang="en-US">
+                          <a:effectLst/>
+                        </a:rPr>
+                        <a:t>C</a:t>
+                      </a:r>
+                    </a:p>
+                  </a:txBody>
+                  <a:tcPr marL="76200" marR="76200" marT="38100" marB="38100" anchor="ctr">
+                    <a:lnB w="12700" cap="flat" cmpd="sng" algn="ctr">
+                      <a:solidFill>
+                        <a:schemeClr val="tx1"/>
+                      </a:solidFill>
+                      <a:prstDash val="solid"/>
+                      <a:round/>
+                      <a:headEnd type="none" w="med" len="med"/>
+                      <a:tailEnd type="none" w="med" len="med"/>
+                    </a:lnB>
+                  </a:tcPr>
+                </a:tc>
+                <a:tc>
+                  <a:txBody>
+                    <a:bodyPr/>
+                    <a:lstStyle/>
+                    <a:p>
+                      <a:pPr algn="l" fontAlgn="ctr"/>
+                      <a:r>
+                        <a:rPr lang="en-US">
+                          <a:effectLst/>
+                        </a:rPr>
+                        <a:t>N</a:t>
+                      </a:r>
+                    </a:p>
+                  </a:txBody>
+                  <a:tcPr marL="76200" marR="76200" marT="38100" marB="38100" anchor="ctr">
+                    <a:lnB w="12700" cap="flat" cmpd="sng" algn="ctr">
+                      <a:solidFill>
+                        <a:schemeClr val="tx1"/>
+                      </a:solidFill>
+                      <a:prstDash val="solid"/>
+                      <a:round/>
+                      <a:headEnd type="none" w="med" len="med"/>
+                      <a:tailEnd type="none" w="med" len="med"/>
+                    </a:lnB>
+                  </a:tcPr>
+                </a:tc>
+                <a:tc>
+                  <a:txBody>
+                    <a:bodyPr/>
+                    <a:lstStyle/>
+                    <a:p>
+                      <a:pPr algn="l" fontAlgn="ctr"/>
+                      <a:r>
+                        <a:rPr lang="en-US">
+                          <a:effectLst/>
+                        </a:rPr>
+                        <a:t>NxP</a:t>
+                      </a:r>
+                    </a:p>
+                  </a:txBody>
+                  <a:tcPr marL="76200" marR="76200" marT="38100" marB="38100" anchor="ctr">
+                    <a:lnB w="12700" cap="flat" cmpd="sng" algn="ctr">
+                      <a:solidFill>
+                        <a:schemeClr val="tx1"/>
+                      </a:solidFill>
+                      <a:prstDash val="solid"/>
+                      <a:round/>
+                      <a:headEnd type="none" w="med" len="med"/>
+                      <a:tailEnd type="none" w="med" len="med"/>
+                    </a:lnB>
+                  </a:tcPr>
+                </a:tc>
+                <a:tc>
+                  <a:txBody>
+                    <a:bodyPr/>
+                    <a:lstStyle/>
+                    <a:p>
+                      <a:pPr algn="l" fontAlgn="ctr"/>
+                      <a:r>
+                        <a:rPr lang="en-US">
+                          <a:effectLst/>
+                        </a:rPr>
+                        <a:t>P</a:t>
+                      </a:r>
+                    </a:p>
+                  </a:txBody>
+                  <a:tcPr marL="76200" marR="76200" marT="38100" marB="38100" anchor="ctr">
+                    <a:lnB w="12700" cap="flat" cmpd="sng" algn="ctr">
+                      <a:solidFill>
+                        <a:schemeClr val="tx1"/>
+                      </a:solidFill>
+                      <a:prstDash val="solid"/>
+                      <a:round/>
+                      <a:headEnd type="none" w="med" len="med"/>
+                      <a:tailEnd type="none" w="med" len="med"/>
+                    </a:lnB>
+                  </a:tcPr>
+                </a:tc>
+                <a:extLst>
+                  <a:ext uri="{0D108BD9-81ED-4DB2-BD59-A6C34878D82A}">
+                    <a16:rowId xmlns:a16="http://schemas.microsoft.com/office/drawing/2014/main" val="4089108874"/>
+                  </a:ext>
+                </a:extLst>
+              </a:tr>
+              <a:tr h="0">
+                <a:tc>
+                  <a:txBody>
+                    <a:bodyPr/>
+                    <a:lstStyle/>
+                    <a:p>
+                      <a:pPr algn="r" fontAlgn="ctr"/>
+                      <a:r>
+                        <a:rPr lang="en-US" dirty="0" smtClean="0">
+                          <a:effectLst/>
+                        </a:rPr>
+                        <a:t>elevation</a:t>
+                      </a:r>
+                      <a:endParaRPr lang="en-US" dirty="0">
+                        <a:effectLst/>
+                      </a:endParaRPr>
+                    </a:p>
+                  </a:txBody>
+                  <a:tcPr marL="76200" marR="76200" marT="38100" marB="38100" anchor="ctr">
+                    <a:lnT w="12700" cap="flat" cmpd="sng" algn="ctr">
+                      <a:solidFill>
+                        <a:schemeClr val="tx1"/>
+                      </a:solidFill>
+                      <a:prstDash val="solid"/>
+                      <a:round/>
+                      <a:headEnd type="none" w="med" len="med"/>
+                      <a:tailEnd type="none" w="med" len="med"/>
+                    </a:lnT>
+                    <a:lnB w="12700" cap="flat" cmpd="sng" algn="ctr">
+                      <a:solidFill>
+                        <a:schemeClr val="tx1"/>
+                      </a:solidFill>
+                      <a:prstDash val="solid"/>
+                      <a:round/>
+                      <a:headEnd type="none" w="med" len="med"/>
+                      <a:tailEnd type="none" w="med" len="med"/>
+                    </a:lnB>
+                  </a:tcPr>
+                </a:tc>
+                <a:tc>
+                  <a:txBody>
+                    <a:bodyPr/>
+                    <a:lstStyle/>
+                    <a:p>
+                      <a:pPr algn="r" fontAlgn="ctr"/>
+                      <a:r>
+                        <a:rPr lang="es-MX" dirty="0" smtClean="0">
+                          <a:effectLst/>
+                        </a:rPr>
+                        <a:t>especie</a:t>
+                      </a:r>
+                      <a:endParaRPr lang="en-US" dirty="0">
+                        <a:effectLst/>
+                      </a:endParaRPr>
+                    </a:p>
+                  </a:txBody>
+                  <a:tcPr marL="76200" marR="76200" marT="38100" marB="38100" anchor="ctr">
+                    <a:lnT w="12700" cap="flat" cmpd="sng" algn="ctr">
+                      <a:solidFill>
+                        <a:schemeClr val="tx1"/>
+                      </a:solidFill>
+                      <a:prstDash val="solid"/>
+                      <a:round/>
+                      <a:headEnd type="none" w="med" len="med"/>
+                      <a:tailEnd type="none" w="med" len="med"/>
+                    </a:lnT>
+                    <a:lnB w="12700" cap="flat" cmpd="sng" algn="ctr">
+                      <a:solidFill>
+                        <a:schemeClr val="tx1"/>
+                      </a:solidFill>
+                      <a:prstDash val="solid"/>
+                      <a:round/>
+                      <a:headEnd type="none" w="med" len="med"/>
+                      <a:tailEnd type="none" w="med" len="med"/>
+                    </a:lnB>
+                  </a:tcPr>
+                </a:tc>
+                <a:tc>
+                  <a:txBody>
+                    <a:bodyPr/>
+                    <a:lstStyle/>
+                    <a:p>
+                      <a:pPr algn="r" fontAlgn="ctr"/>
+                      <a:endParaRPr lang="en-US" dirty="0">
+                        <a:effectLst/>
+                      </a:endParaRPr>
+                    </a:p>
+                  </a:txBody>
+                  <a:tcPr marL="76200" marR="76200" marT="38100" marB="38100" anchor="ctr">
+                    <a:lnT w="12700" cap="flat" cmpd="sng" algn="ctr">
+                      <a:solidFill>
+                        <a:schemeClr val="tx1"/>
+                      </a:solidFill>
+                      <a:prstDash val="solid"/>
+                      <a:round/>
+                      <a:headEnd type="none" w="med" len="med"/>
+                      <a:tailEnd type="none" w="med" len="med"/>
+                    </a:lnT>
+                    <a:lnB w="12700" cap="flat" cmpd="sng" algn="ctr">
+                      <a:solidFill>
+                        <a:schemeClr val="tx1"/>
+                      </a:solidFill>
+                      <a:prstDash val="solid"/>
+                      <a:round/>
+                      <a:headEnd type="none" w="med" len="med"/>
+                      <a:tailEnd type="none" w="med" len="med"/>
+                    </a:lnB>
+                  </a:tcPr>
+                </a:tc>
+                <a:tc>
+                  <a:txBody>
+                    <a:bodyPr/>
+                    <a:lstStyle/>
+                    <a:p>
+                      <a:pPr algn="r" fontAlgn="ctr"/>
+                      <a:endParaRPr lang="en-US">
+                        <a:effectLst/>
+                      </a:endParaRPr>
+                    </a:p>
+                  </a:txBody>
+                  <a:tcPr marL="76200" marR="76200" marT="38100" marB="38100" anchor="ctr">
+                    <a:lnT w="12700" cap="flat" cmpd="sng" algn="ctr">
+                      <a:solidFill>
+                        <a:schemeClr val="tx1"/>
+                      </a:solidFill>
+                      <a:prstDash val="solid"/>
+                      <a:round/>
+                      <a:headEnd type="none" w="med" len="med"/>
+                      <a:tailEnd type="none" w="med" len="med"/>
+                    </a:lnT>
+                    <a:lnB w="12700" cap="flat" cmpd="sng" algn="ctr">
+                      <a:solidFill>
+                        <a:schemeClr val="tx1"/>
+                      </a:solidFill>
+                      <a:prstDash val="solid"/>
+                      <a:round/>
+                      <a:headEnd type="none" w="med" len="med"/>
+                      <a:tailEnd type="none" w="med" len="med"/>
+                    </a:lnB>
+                  </a:tcPr>
+                </a:tc>
+                <a:tc>
+                  <a:txBody>
+                    <a:bodyPr/>
+                    <a:lstStyle/>
+                    <a:p>
+                      <a:pPr algn="r" fontAlgn="ctr"/>
+                      <a:endParaRPr lang="en-US">
+                        <a:effectLst/>
+                      </a:endParaRPr>
+                    </a:p>
+                  </a:txBody>
+                  <a:tcPr marL="76200" marR="76200" marT="38100" marB="38100" anchor="ctr">
+                    <a:lnT w="12700" cap="flat" cmpd="sng" algn="ctr">
+                      <a:solidFill>
+                        <a:schemeClr val="tx1"/>
+                      </a:solidFill>
+                      <a:prstDash val="solid"/>
+                      <a:round/>
+                      <a:headEnd type="none" w="med" len="med"/>
+                      <a:tailEnd type="none" w="med" len="med"/>
+                    </a:lnT>
+                    <a:lnB w="12700" cap="flat" cmpd="sng" algn="ctr">
+                      <a:solidFill>
+                        <a:schemeClr val="tx1"/>
+                      </a:solidFill>
+                      <a:prstDash val="solid"/>
+                      <a:round/>
+                      <a:headEnd type="none" w="med" len="med"/>
+                      <a:tailEnd type="none" w="med" len="med"/>
+                    </a:lnB>
+                  </a:tcPr>
+                </a:tc>
+                <a:tc>
+                  <a:txBody>
+                    <a:bodyPr/>
+                    <a:lstStyle/>
+                    <a:p>
+                      <a:pPr algn="r" fontAlgn="ctr"/>
+                      <a:endParaRPr lang="en-US">
+                        <a:effectLst/>
+                      </a:endParaRPr>
+                    </a:p>
+                  </a:txBody>
+                  <a:tcPr marL="76200" marR="76200" marT="38100" marB="38100" anchor="ctr">
+                    <a:lnT w="12700" cap="flat" cmpd="sng" algn="ctr">
+                      <a:solidFill>
+                        <a:schemeClr val="tx1"/>
+                      </a:solidFill>
+                      <a:prstDash val="solid"/>
+                      <a:round/>
+                      <a:headEnd type="none" w="med" len="med"/>
+                      <a:tailEnd type="none" w="med" len="med"/>
+                    </a:lnT>
+                    <a:lnB w="12700" cap="flat" cmpd="sng" algn="ctr">
+                      <a:solidFill>
+                        <a:schemeClr val="tx1"/>
+                      </a:solidFill>
+                      <a:prstDash val="solid"/>
+                      <a:round/>
+                      <a:headEnd type="none" w="med" len="med"/>
+                      <a:tailEnd type="none" w="med" len="med"/>
+                    </a:lnB>
+                  </a:tcPr>
+                </a:tc>
+                <a:extLst>
+                  <a:ext uri="{0D108BD9-81ED-4DB2-BD59-A6C34878D82A}">
+                    <a16:rowId xmlns:a16="http://schemas.microsoft.com/office/drawing/2014/main" val="2585003848"/>
+                  </a:ext>
+                </a:extLst>
+              </a:tr>
+              <a:tr h="0">
+                <a:tc rowSpan="2">
+                  <a:txBody>
+                    <a:bodyPr/>
+                    <a:lstStyle/>
+                    <a:p>
+                      <a:pPr algn="r" fontAlgn="t"/>
+                      <a:r>
+                        <a:rPr lang="en-US" dirty="0">
+                          <a:effectLst/>
+                        </a:rPr>
+                        <a:t>1000</a:t>
+                      </a:r>
+                      <a:endParaRPr lang="en-US" b="0" dirty="0">
+                        <a:effectLst/>
+                      </a:endParaRPr>
+                    </a:p>
+                  </a:txBody>
+                  <a:tcPr marL="76200" marR="76200" marT="38100" marB="38100">
+                    <a:lnT w="12700" cap="flat" cmpd="sng" algn="ctr">
+                      <a:solidFill>
+                        <a:schemeClr val="tx1"/>
+                      </a:solidFill>
+                      <a:prstDash val="solid"/>
+                      <a:round/>
+                      <a:headEnd type="none" w="med" len="med"/>
+                      <a:tailEnd type="none" w="med" len="med"/>
+                    </a:lnT>
+                    <a:lnB w="12700" cap="flat" cmpd="sng" algn="ctr">
+                      <a:solidFill>
+                        <a:schemeClr val="tx1"/>
+                      </a:solidFill>
+                      <a:prstDash val="solid"/>
+                      <a:round/>
+                      <a:headEnd type="none" w="med" len="med"/>
+                      <a:tailEnd type="none" w="med" len="med"/>
+                    </a:lnB>
+                  </a:tcPr>
+                </a:tc>
+                <a:tc>
+                  <a:txBody>
+                    <a:bodyPr/>
+                    <a:lstStyle/>
+                    <a:p>
+                      <a:pPr algn="r" fontAlgn="t"/>
+                      <a:r>
+                        <a:rPr lang="en-US" sz="1400" i="1" dirty="0" err="1">
+                          <a:effectLst/>
+                        </a:rPr>
+                        <a:t>Clarisia</a:t>
+                      </a:r>
+                      <a:r>
+                        <a:rPr lang="en-US" sz="1400" i="1" dirty="0">
+                          <a:effectLst/>
+                        </a:rPr>
+                        <a:t> </a:t>
+                      </a:r>
+                      <a:r>
+                        <a:rPr lang="en-US" sz="1400" i="1" dirty="0" err="1">
+                          <a:effectLst/>
+                        </a:rPr>
+                        <a:t>racemosa</a:t>
+                      </a:r>
+                      <a:endParaRPr lang="en-US" sz="1400" b="0" i="1" dirty="0">
+                        <a:effectLst/>
+                      </a:endParaRPr>
+                    </a:p>
+                  </a:txBody>
+                  <a:tcPr marL="76200" marR="76200" marT="38100" marB="38100">
+                    <a:lnT w="12700" cap="flat" cmpd="sng" algn="ctr">
+                      <a:solidFill>
+                        <a:schemeClr val="tx1"/>
+                      </a:solidFill>
+                      <a:prstDash val="solid"/>
+                      <a:round/>
+                      <a:headEnd type="none" w="med" len="med"/>
+                      <a:tailEnd type="none" w="med" len="med"/>
+                    </a:lnT>
+                    <a:lnB w="12700" cap="flat" cmpd="sng" algn="ctr">
+                      <a:solidFill>
+                        <a:schemeClr val="tx1"/>
+                      </a:solidFill>
+                      <a:prstDash val="solid"/>
+                      <a:round/>
+                      <a:headEnd type="none" w="med" len="med"/>
+                      <a:tailEnd type="none" w="med" len="med"/>
+                    </a:lnB>
+                  </a:tcPr>
+                </a:tc>
+                <a:tc>
+                  <a:txBody>
+                    <a:bodyPr/>
+                    <a:lstStyle/>
+                    <a:p>
+                      <a:r>
+                        <a:rPr lang="en-US">
+                          <a:effectLst/>
+                        </a:rPr>
+                        <a:t>3</a:t>
+                      </a:r>
+                    </a:p>
+                  </a:txBody>
+                  <a:tcPr marL="76200" marR="76200" marT="38100" marB="38100" anchor="ctr">
+                    <a:lnT w="12700" cap="flat" cmpd="sng" algn="ctr">
+                      <a:solidFill>
+                        <a:schemeClr val="tx1"/>
+                      </a:solidFill>
+                      <a:prstDash val="solid"/>
+                      <a:round/>
+                      <a:headEnd type="none" w="med" len="med"/>
+                      <a:tailEnd type="none" w="med" len="med"/>
+                    </a:lnT>
+                    <a:lnB w="12700" cap="flat" cmpd="sng" algn="ctr">
+                      <a:solidFill>
+                        <a:schemeClr val="tx1"/>
+                      </a:solidFill>
+                      <a:prstDash val="solid"/>
+                      <a:round/>
+                      <a:headEnd type="none" w="med" len="med"/>
+                      <a:tailEnd type="none" w="med" len="med"/>
+                    </a:lnB>
+                  </a:tcPr>
+                </a:tc>
+                <a:tc>
+                  <a:txBody>
+                    <a:bodyPr/>
+                    <a:lstStyle/>
+                    <a:p>
+                      <a:r>
+                        <a:rPr lang="en-US" dirty="0">
+                          <a:effectLst/>
+                        </a:rPr>
+                        <a:t>1</a:t>
+                      </a:r>
+                    </a:p>
+                  </a:txBody>
+                  <a:tcPr marL="76200" marR="76200" marT="38100" marB="38100" anchor="ctr">
+                    <a:lnT w="12700" cap="flat" cmpd="sng" algn="ctr">
+                      <a:solidFill>
+                        <a:schemeClr val="tx1"/>
+                      </a:solidFill>
+                      <a:prstDash val="solid"/>
+                      <a:round/>
+                      <a:headEnd type="none" w="med" len="med"/>
+                      <a:tailEnd type="none" w="med" len="med"/>
+                    </a:lnT>
+                    <a:lnB w="12700" cap="flat" cmpd="sng" algn="ctr">
+                      <a:solidFill>
+                        <a:schemeClr val="tx1"/>
+                      </a:solidFill>
+                      <a:prstDash val="solid"/>
+                      <a:round/>
+                      <a:headEnd type="none" w="med" len="med"/>
+                      <a:tailEnd type="none" w="med" len="med"/>
+                    </a:lnB>
+                  </a:tcPr>
+                </a:tc>
+                <a:tc>
+                  <a:txBody>
+                    <a:bodyPr/>
+                    <a:lstStyle/>
+                    <a:p>
+                      <a:r>
+                        <a:rPr lang="en-US" dirty="0">
+                          <a:effectLst/>
+                        </a:rPr>
+                        <a:t>4</a:t>
+                      </a:r>
+                    </a:p>
+                  </a:txBody>
+                  <a:tcPr marL="76200" marR="76200" marT="38100" marB="38100" anchor="ctr">
+                    <a:lnT w="12700" cap="flat" cmpd="sng" algn="ctr">
+                      <a:solidFill>
+                        <a:schemeClr val="tx1"/>
+                      </a:solidFill>
+                      <a:prstDash val="solid"/>
+                      <a:round/>
+                      <a:headEnd type="none" w="med" len="med"/>
+                      <a:tailEnd type="none" w="med" len="med"/>
+                    </a:lnT>
+                    <a:lnB w="12700" cap="flat" cmpd="sng" algn="ctr">
+                      <a:solidFill>
+                        <a:schemeClr val="tx1"/>
+                      </a:solidFill>
+                      <a:prstDash val="solid"/>
+                      <a:round/>
+                      <a:headEnd type="none" w="med" len="med"/>
+                      <a:tailEnd type="none" w="med" len="med"/>
+                    </a:lnB>
+                  </a:tcPr>
+                </a:tc>
+                <a:tc>
+                  <a:txBody>
+                    <a:bodyPr/>
+                    <a:lstStyle/>
+                    <a:p>
+                      <a:r>
+                        <a:rPr lang="en-US" dirty="0">
+                          <a:effectLst/>
+                        </a:rPr>
+                        <a:t>4</a:t>
+                      </a:r>
+                    </a:p>
+                  </a:txBody>
+                  <a:tcPr marL="76200" marR="76200" marT="38100" marB="38100" anchor="ctr">
+                    <a:lnT w="12700" cap="flat" cmpd="sng" algn="ctr">
+                      <a:solidFill>
+                        <a:schemeClr val="tx1"/>
+                      </a:solidFill>
+                      <a:prstDash val="solid"/>
+                      <a:round/>
+                      <a:headEnd type="none" w="med" len="med"/>
+                      <a:tailEnd type="none" w="med" len="med"/>
+                    </a:lnT>
+                    <a:lnB w="12700" cap="flat" cmpd="sng" algn="ctr">
+                      <a:solidFill>
+                        <a:schemeClr val="tx1"/>
+                      </a:solidFill>
+                      <a:prstDash val="solid"/>
+                      <a:round/>
+                      <a:headEnd type="none" w="med" len="med"/>
+                      <a:tailEnd type="none" w="med" len="med"/>
+                    </a:lnB>
+                  </a:tcPr>
+                </a:tc>
+                <a:extLst>
+                  <a:ext uri="{0D108BD9-81ED-4DB2-BD59-A6C34878D82A}">
+                    <a16:rowId xmlns:a16="http://schemas.microsoft.com/office/drawing/2014/main" val="3144650574"/>
+                  </a:ext>
+                </a:extLst>
+              </a:tr>
+              <a:tr h="0">
+                <a:tc vMerge="1">
+                  <a:txBody>
+                    <a:bodyPr/>
+                    <a:lstStyle/>
+                    <a:p>
+                      <a:endParaRPr lang="en-US"/>
+                    </a:p>
+                  </a:txBody>
+                  <a:tcPr/>
+                </a:tc>
+                <a:tc>
+                  <a:txBody>
+                    <a:bodyPr/>
+                    <a:lstStyle/>
+                    <a:p>
+                      <a:pPr algn="r" fontAlgn="ctr"/>
+                      <a:r>
+                        <a:rPr lang="en-US" sz="1400" i="1" dirty="0" err="1">
+                          <a:effectLst/>
+                        </a:rPr>
+                        <a:t>Pouteria</a:t>
+                      </a:r>
+                      <a:r>
+                        <a:rPr lang="en-US" sz="1400" i="1" dirty="0">
+                          <a:effectLst/>
+                        </a:rPr>
+                        <a:t> </a:t>
+                      </a:r>
+                      <a:r>
+                        <a:rPr lang="en-US" sz="1400" i="1" dirty="0" err="1">
+                          <a:effectLst/>
+                        </a:rPr>
+                        <a:t>torta</a:t>
+                      </a:r>
+                      <a:endParaRPr lang="en-US" sz="1400" b="0" i="1" dirty="0">
+                        <a:effectLst/>
+                      </a:endParaRPr>
+                    </a:p>
+                  </a:txBody>
+                  <a:tcPr marL="76200" marR="76200" marT="38100" marB="38100" anchor="ctr">
+                    <a:lnT w="12700" cap="flat" cmpd="sng" algn="ctr">
+                      <a:solidFill>
+                        <a:schemeClr val="tx1"/>
+                      </a:solidFill>
+                      <a:prstDash val="solid"/>
+                      <a:round/>
+                      <a:headEnd type="none" w="med" len="med"/>
+                      <a:tailEnd type="none" w="med" len="med"/>
+                    </a:lnT>
+                    <a:lnB w="12700" cap="flat" cmpd="sng" algn="ctr">
+                      <a:solidFill>
+                        <a:schemeClr val="tx1"/>
+                      </a:solidFill>
+                      <a:prstDash val="solid"/>
+                      <a:round/>
+                      <a:headEnd type="none" w="med" len="med"/>
+                      <a:tailEnd type="none" w="med" len="med"/>
+                    </a:lnB>
+                  </a:tcPr>
+                </a:tc>
+                <a:tc>
+                  <a:txBody>
+                    <a:bodyPr/>
+                    <a:lstStyle/>
+                    <a:p>
+                      <a:r>
+                        <a:rPr lang="en-US" dirty="0">
+                          <a:effectLst/>
+                        </a:rPr>
+                        <a:t>11</a:t>
+                      </a:r>
+                    </a:p>
+                  </a:txBody>
+                  <a:tcPr marL="76200" marR="76200" marT="38100" marB="38100" anchor="ctr">
+                    <a:lnT w="12700" cap="flat" cmpd="sng" algn="ctr">
+                      <a:solidFill>
+                        <a:schemeClr val="tx1"/>
+                      </a:solidFill>
+                      <a:prstDash val="solid"/>
+                      <a:round/>
+                      <a:headEnd type="none" w="med" len="med"/>
+                      <a:tailEnd type="none" w="med" len="med"/>
+                    </a:lnT>
+                    <a:lnB w="12700" cap="flat" cmpd="sng" algn="ctr">
+                      <a:solidFill>
+                        <a:schemeClr val="tx1"/>
+                      </a:solidFill>
+                      <a:prstDash val="solid"/>
+                      <a:round/>
+                      <a:headEnd type="none" w="med" len="med"/>
+                      <a:tailEnd type="none" w="med" len="med"/>
+                    </a:lnB>
+                  </a:tcPr>
+                </a:tc>
+                <a:tc>
+                  <a:txBody>
+                    <a:bodyPr/>
+                    <a:lstStyle/>
+                    <a:p>
+                      <a:r>
+                        <a:rPr lang="en-US">
+                          <a:effectLst/>
+                        </a:rPr>
+                        <a:t>10</a:t>
+                      </a:r>
+                    </a:p>
+                  </a:txBody>
+                  <a:tcPr marL="76200" marR="76200" marT="38100" marB="38100" anchor="ctr">
+                    <a:lnT w="12700" cap="flat" cmpd="sng" algn="ctr">
+                      <a:solidFill>
+                        <a:schemeClr val="tx1"/>
+                      </a:solidFill>
+                      <a:prstDash val="solid"/>
+                      <a:round/>
+                      <a:headEnd type="none" w="med" len="med"/>
+                      <a:tailEnd type="none" w="med" len="med"/>
+                    </a:lnT>
+                    <a:lnB w="12700" cap="flat" cmpd="sng" algn="ctr">
+                      <a:solidFill>
+                        <a:schemeClr val="tx1"/>
+                      </a:solidFill>
+                      <a:prstDash val="solid"/>
+                      <a:round/>
+                      <a:headEnd type="none" w="med" len="med"/>
+                      <a:tailEnd type="none" w="med" len="med"/>
+                    </a:lnB>
+                  </a:tcPr>
+                </a:tc>
+                <a:tc>
+                  <a:txBody>
+                    <a:bodyPr/>
+                    <a:lstStyle/>
+                    <a:p>
+                      <a:r>
+                        <a:rPr lang="en-US">
+                          <a:effectLst/>
+                        </a:rPr>
+                        <a:t>7</a:t>
+                      </a:r>
+                    </a:p>
+                  </a:txBody>
+                  <a:tcPr marL="76200" marR="76200" marT="38100" marB="38100" anchor="ctr">
+                    <a:lnT w="12700" cap="flat" cmpd="sng" algn="ctr">
+                      <a:solidFill>
+                        <a:schemeClr val="tx1"/>
+                      </a:solidFill>
+                      <a:prstDash val="solid"/>
+                      <a:round/>
+                      <a:headEnd type="none" w="med" len="med"/>
+                      <a:tailEnd type="none" w="med" len="med"/>
+                    </a:lnT>
+                    <a:lnB w="12700" cap="flat" cmpd="sng" algn="ctr">
+                      <a:solidFill>
+                        <a:schemeClr val="tx1"/>
+                      </a:solidFill>
+                      <a:prstDash val="solid"/>
+                      <a:round/>
+                      <a:headEnd type="none" w="med" len="med"/>
+                      <a:tailEnd type="none" w="med" len="med"/>
+                    </a:lnB>
+                  </a:tcPr>
+                </a:tc>
+                <a:tc>
+                  <a:txBody>
+                    <a:bodyPr/>
+                    <a:lstStyle/>
+                    <a:p>
+                      <a:r>
+                        <a:rPr lang="en-US" dirty="0">
+                          <a:effectLst/>
+                        </a:rPr>
+                        <a:t>8</a:t>
+                      </a:r>
+                    </a:p>
+                  </a:txBody>
+                  <a:tcPr marL="76200" marR="76200" marT="38100" marB="38100" anchor="ctr">
+                    <a:lnT w="12700" cap="flat" cmpd="sng" algn="ctr">
+                      <a:solidFill>
+                        <a:schemeClr val="tx1"/>
+                      </a:solidFill>
+                      <a:prstDash val="solid"/>
+                      <a:round/>
+                      <a:headEnd type="none" w="med" len="med"/>
+                      <a:tailEnd type="none" w="med" len="med"/>
+                    </a:lnT>
+                    <a:lnB w="12700" cap="flat" cmpd="sng" algn="ctr">
+                      <a:solidFill>
+                        <a:schemeClr val="tx1"/>
+                      </a:solidFill>
+                      <a:prstDash val="solid"/>
+                      <a:round/>
+                      <a:headEnd type="none" w="med" len="med"/>
+                      <a:tailEnd type="none" w="med" len="med"/>
+                    </a:lnB>
+                  </a:tcPr>
+                </a:tc>
+                <a:extLst>
+                  <a:ext uri="{0D108BD9-81ED-4DB2-BD59-A6C34878D82A}">
+                    <a16:rowId xmlns:a16="http://schemas.microsoft.com/office/drawing/2014/main" val="3127182306"/>
+                  </a:ext>
+                </a:extLst>
+              </a:tr>
+              <a:tr h="0">
+                <a:tc rowSpan="2">
+                  <a:txBody>
+                    <a:bodyPr/>
+                    <a:lstStyle/>
+                    <a:p>
+                      <a:pPr algn="r" fontAlgn="t"/>
+                      <a:r>
+                        <a:rPr lang="en-US">
+                          <a:effectLst/>
+                        </a:rPr>
+                        <a:t>2000</a:t>
+                      </a:r>
+                      <a:endParaRPr lang="en-US" b="0">
+                        <a:effectLst/>
+                      </a:endParaRPr>
+                    </a:p>
+                  </a:txBody>
+                  <a:tcPr marL="76200" marR="76200" marT="38100" marB="38100">
+                    <a:lnT w="12700" cap="flat" cmpd="sng" algn="ctr">
+                      <a:solidFill>
+                        <a:schemeClr val="tx1"/>
+                      </a:solidFill>
+                      <a:prstDash val="solid"/>
+                      <a:round/>
+                      <a:headEnd type="none" w="med" len="med"/>
+                      <a:tailEnd type="none" w="med" len="med"/>
+                    </a:lnT>
+                    <a:lnB w="12700" cap="flat" cmpd="sng" algn="ctr">
+                      <a:solidFill>
+                        <a:schemeClr val="tx1"/>
+                      </a:solidFill>
+                      <a:prstDash val="solid"/>
+                      <a:round/>
+                      <a:headEnd type="none" w="med" len="med"/>
+                      <a:tailEnd type="none" w="med" len="med"/>
+                    </a:lnB>
+                  </a:tcPr>
+                </a:tc>
+                <a:tc>
+                  <a:txBody>
+                    <a:bodyPr/>
+                    <a:lstStyle/>
+                    <a:p>
+                      <a:pPr algn="r" fontAlgn="t"/>
+                      <a:r>
+                        <a:rPr lang="en-US" sz="1400" i="1" dirty="0" err="1">
+                          <a:effectLst/>
+                        </a:rPr>
+                        <a:t>Alchornea</a:t>
+                      </a:r>
+                      <a:r>
+                        <a:rPr lang="en-US" sz="1400" i="1" dirty="0">
+                          <a:effectLst/>
+                        </a:rPr>
+                        <a:t> </a:t>
+                      </a:r>
+                      <a:r>
+                        <a:rPr lang="en-US" sz="1400" i="1" dirty="0" err="1">
+                          <a:effectLst/>
+                        </a:rPr>
+                        <a:t>lojaensis</a:t>
+                      </a:r>
+                      <a:endParaRPr lang="en-US" sz="1400" b="0" i="1" dirty="0">
+                        <a:effectLst/>
+                      </a:endParaRPr>
+                    </a:p>
+                  </a:txBody>
+                  <a:tcPr marL="76200" marR="76200" marT="38100" marB="38100">
+                    <a:lnT w="12700" cap="flat" cmpd="sng" algn="ctr">
+                      <a:solidFill>
+                        <a:schemeClr val="tx1"/>
+                      </a:solidFill>
+                      <a:prstDash val="solid"/>
+                      <a:round/>
+                      <a:headEnd type="none" w="med" len="med"/>
+                      <a:tailEnd type="none" w="med" len="med"/>
+                    </a:lnT>
+                    <a:lnB w="12700" cap="flat" cmpd="sng" algn="ctr">
+                      <a:solidFill>
+                        <a:schemeClr val="tx1"/>
+                      </a:solidFill>
+                      <a:prstDash val="solid"/>
+                      <a:round/>
+                      <a:headEnd type="none" w="med" len="med"/>
+                      <a:tailEnd type="none" w="med" len="med"/>
+                    </a:lnB>
+                  </a:tcPr>
+                </a:tc>
+                <a:tc>
+                  <a:txBody>
+                    <a:bodyPr/>
+                    <a:lstStyle/>
+                    <a:p>
+                      <a:r>
+                        <a:rPr lang="en-US" dirty="0">
+                          <a:effectLst/>
+                        </a:rPr>
+                        <a:t>12</a:t>
+                      </a:r>
+                    </a:p>
+                  </a:txBody>
+                  <a:tcPr marL="76200" marR="76200" marT="38100" marB="38100" anchor="ctr">
+                    <a:lnT w="12700" cap="flat" cmpd="sng" algn="ctr">
+                      <a:solidFill>
+                        <a:schemeClr val="tx1"/>
+                      </a:solidFill>
+                      <a:prstDash val="solid"/>
+                      <a:round/>
+                      <a:headEnd type="none" w="med" len="med"/>
+                      <a:tailEnd type="none" w="med" len="med"/>
+                    </a:lnT>
+                    <a:lnB w="12700" cap="flat" cmpd="sng" algn="ctr">
+                      <a:solidFill>
+                        <a:schemeClr val="tx1"/>
+                      </a:solidFill>
+                      <a:prstDash val="solid"/>
+                      <a:round/>
+                      <a:headEnd type="none" w="med" len="med"/>
+                      <a:tailEnd type="none" w="med" len="med"/>
+                    </a:lnB>
+                  </a:tcPr>
+                </a:tc>
+                <a:tc>
+                  <a:txBody>
+                    <a:bodyPr/>
+                    <a:lstStyle/>
+                    <a:p>
+                      <a:r>
+                        <a:rPr lang="en-US">
+                          <a:effectLst/>
+                        </a:rPr>
+                        <a:t>9</a:t>
+                      </a:r>
+                    </a:p>
+                  </a:txBody>
+                  <a:tcPr marL="76200" marR="76200" marT="38100" marB="38100" anchor="ctr">
+                    <a:lnT w="12700" cap="flat" cmpd="sng" algn="ctr">
+                      <a:solidFill>
+                        <a:schemeClr val="tx1"/>
+                      </a:solidFill>
+                      <a:prstDash val="solid"/>
+                      <a:round/>
+                      <a:headEnd type="none" w="med" len="med"/>
+                      <a:tailEnd type="none" w="med" len="med"/>
+                    </a:lnT>
+                    <a:lnB w="12700" cap="flat" cmpd="sng" algn="ctr">
+                      <a:solidFill>
+                        <a:schemeClr val="tx1"/>
+                      </a:solidFill>
+                      <a:prstDash val="solid"/>
+                      <a:round/>
+                      <a:headEnd type="none" w="med" len="med"/>
+                      <a:tailEnd type="none" w="med" len="med"/>
+                    </a:lnB>
+                  </a:tcPr>
+                </a:tc>
+                <a:tc>
+                  <a:txBody>
+                    <a:bodyPr/>
+                    <a:lstStyle/>
+                    <a:p>
+                      <a:r>
+                        <a:rPr lang="en-US">
+                          <a:effectLst/>
+                        </a:rPr>
+                        <a:t>8</a:t>
+                      </a:r>
+                    </a:p>
+                  </a:txBody>
+                  <a:tcPr marL="76200" marR="76200" marT="38100" marB="38100" anchor="ctr">
+                    <a:lnT w="12700" cap="flat" cmpd="sng" algn="ctr">
+                      <a:solidFill>
+                        <a:schemeClr val="tx1"/>
+                      </a:solidFill>
+                      <a:prstDash val="solid"/>
+                      <a:round/>
+                      <a:headEnd type="none" w="med" len="med"/>
+                      <a:tailEnd type="none" w="med" len="med"/>
+                    </a:lnT>
+                    <a:lnB w="12700" cap="flat" cmpd="sng" algn="ctr">
+                      <a:solidFill>
+                        <a:schemeClr val="tx1"/>
+                      </a:solidFill>
+                      <a:prstDash val="solid"/>
+                      <a:round/>
+                      <a:headEnd type="none" w="med" len="med"/>
+                      <a:tailEnd type="none" w="med" len="med"/>
+                    </a:lnB>
+                  </a:tcPr>
+                </a:tc>
+                <a:tc>
+                  <a:txBody>
+                    <a:bodyPr/>
+                    <a:lstStyle/>
+                    <a:p>
+                      <a:r>
+                        <a:rPr lang="en-US">
+                          <a:effectLst/>
+                        </a:rPr>
+                        <a:t>15</a:t>
+                      </a:r>
+                    </a:p>
+                  </a:txBody>
+                  <a:tcPr marL="76200" marR="76200" marT="38100" marB="38100" anchor="ctr">
+                    <a:lnT w="12700" cap="flat" cmpd="sng" algn="ctr">
+                      <a:solidFill>
+                        <a:schemeClr val="tx1"/>
+                      </a:solidFill>
+                      <a:prstDash val="solid"/>
+                      <a:round/>
+                      <a:headEnd type="none" w="med" len="med"/>
+                      <a:tailEnd type="none" w="med" len="med"/>
+                    </a:lnT>
+                    <a:lnB w="12700" cap="flat" cmpd="sng" algn="ctr">
+                      <a:solidFill>
+                        <a:schemeClr val="tx1"/>
+                      </a:solidFill>
+                      <a:prstDash val="solid"/>
+                      <a:round/>
+                      <a:headEnd type="none" w="med" len="med"/>
+                      <a:tailEnd type="none" w="med" len="med"/>
+                    </a:lnB>
+                  </a:tcPr>
+                </a:tc>
+                <a:extLst>
+                  <a:ext uri="{0D108BD9-81ED-4DB2-BD59-A6C34878D82A}">
+                    <a16:rowId xmlns:a16="http://schemas.microsoft.com/office/drawing/2014/main" val="3017358110"/>
+                  </a:ext>
+                </a:extLst>
+              </a:tr>
+              <a:tr h="0">
+                <a:tc vMerge="1">
+                  <a:txBody>
+                    <a:bodyPr/>
+                    <a:lstStyle/>
+                    <a:p>
+                      <a:endParaRPr lang="en-US"/>
+                    </a:p>
+                  </a:txBody>
+                  <a:tcPr/>
+                </a:tc>
+                <a:tc>
+                  <a:txBody>
+                    <a:bodyPr/>
+                    <a:lstStyle/>
+                    <a:p>
+                      <a:pPr algn="r" fontAlgn="ctr"/>
+                      <a:r>
+                        <a:rPr lang="en-US" sz="1400" i="1" dirty="0" err="1">
+                          <a:effectLst/>
+                        </a:rPr>
+                        <a:t>Myrcia</a:t>
+                      </a:r>
+                      <a:r>
+                        <a:rPr lang="en-US" sz="1400" i="1" dirty="0">
+                          <a:effectLst/>
+                        </a:rPr>
+                        <a:t> </a:t>
+                      </a:r>
+                      <a:r>
+                        <a:rPr lang="en-US" sz="1400" i="1" dirty="0" err="1">
+                          <a:effectLst/>
+                        </a:rPr>
+                        <a:t>sp</a:t>
+                      </a:r>
+                      <a:r>
+                        <a:rPr lang="en-US" sz="1400" i="1" dirty="0">
+                          <a:effectLst/>
+                        </a:rPr>
+                        <a:t> </a:t>
+                      </a:r>
+                      <a:r>
+                        <a:rPr lang="en-US" sz="1400" i="1" dirty="0" err="1">
+                          <a:effectLst/>
+                        </a:rPr>
+                        <a:t>nov</a:t>
+                      </a:r>
+                      <a:endParaRPr lang="en-US" sz="1400" b="0" i="1" dirty="0">
+                        <a:effectLst/>
+                      </a:endParaRPr>
+                    </a:p>
+                  </a:txBody>
+                  <a:tcPr marL="76200" marR="76200" marT="38100" marB="38100" anchor="ctr">
+                    <a:lnT w="12700" cap="flat" cmpd="sng" algn="ctr">
+                      <a:solidFill>
+                        <a:schemeClr val="tx1"/>
+                      </a:solidFill>
+                      <a:prstDash val="solid"/>
+                      <a:round/>
+                      <a:headEnd type="none" w="med" len="med"/>
+                      <a:tailEnd type="none" w="med" len="med"/>
+                    </a:lnT>
+                    <a:lnB w="12700" cap="flat" cmpd="sng" algn="ctr">
+                      <a:solidFill>
+                        <a:schemeClr val="tx1"/>
+                      </a:solidFill>
+                      <a:prstDash val="solid"/>
+                      <a:round/>
+                      <a:headEnd type="none" w="med" len="med"/>
+                      <a:tailEnd type="none" w="med" len="med"/>
+                    </a:lnB>
+                  </a:tcPr>
+                </a:tc>
+                <a:tc>
+                  <a:txBody>
+                    <a:bodyPr/>
+                    <a:lstStyle/>
+                    <a:p>
+                      <a:r>
+                        <a:rPr lang="en-US" dirty="0">
+                          <a:effectLst/>
+                        </a:rPr>
+                        <a:t>15</a:t>
+                      </a:r>
+                    </a:p>
+                  </a:txBody>
+                  <a:tcPr marL="76200" marR="76200" marT="38100" marB="38100" anchor="ctr">
+                    <a:lnT w="12700" cap="flat" cmpd="sng" algn="ctr">
+                      <a:solidFill>
+                        <a:schemeClr val="tx1"/>
+                      </a:solidFill>
+                      <a:prstDash val="solid"/>
+                      <a:round/>
+                      <a:headEnd type="none" w="med" len="med"/>
+                      <a:tailEnd type="none" w="med" len="med"/>
+                    </a:lnT>
+                    <a:lnB w="12700" cap="flat" cmpd="sng" algn="ctr">
+                      <a:solidFill>
+                        <a:schemeClr val="tx1"/>
+                      </a:solidFill>
+                      <a:prstDash val="solid"/>
+                      <a:round/>
+                      <a:headEnd type="none" w="med" len="med"/>
+                      <a:tailEnd type="none" w="med" len="med"/>
+                    </a:lnB>
+                  </a:tcPr>
+                </a:tc>
+                <a:tc>
+                  <a:txBody>
+                    <a:bodyPr/>
+                    <a:lstStyle/>
+                    <a:p>
+                      <a:r>
+                        <a:rPr lang="en-US" dirty="0">
+                          <a:effectLst/>
+                        </a:rPr>
+                        <a:t>10</a:t>
+                      </a:r>
+                    </a:p>
+                  </a:txBody>
+                  <a:tcPr marL="76200" marR="76200" marT="38100" marB="38100" anchor="ctr">
+                    <a:lnT w="12700" cap="flat" cmpd="sng" algn="ctr">
+                      <a:solidFill>
+                        <a:schemeClr val="tx1"/>
+                      </a:solidFill>
+                      <a:prstDash val="solid"/>
+                      <a:round/>
+                      <a:headEnd type="none" w="med" len="med"/>
+                      <a:tailEnd type="none" w="med" len="med"/>
+                    </a:lnT>
+                    <a:lnB w="12700" cap="flat" cmpd="sng" algn="ctr">
+                      <a:solidFill>
+                        <a:schemeClr val="tx1"/>
+                      </a:solidFill>
+                      <a:prstDash val="solid"/>
+                      <a:round/>
+                      <a:headEnd type="none" w="med" len="med"/>
+                      <a:tailEnd type="none" w="med" len="med"/>
+                    </a:lnB>
+                  </a:tcPr>
+                </a:tc>
+                <a:tc>
+                  <a:txBody>
+                    <a:bodyPr/>
+                    <a:lstStyle/>
+                    <a:p>
+                      <a:r>
+                        <a:rPr lang="en-US" dirty="0">
+                          <a:effectLst/>
+                        </a:rPr>
+                        <a:t>13</a:t>
+                      </a:r>
+                    </a:p>
+                  </a:txBody>
+                  <a:tcPr marL="76200" marR="76200" marT="38100" marB="38100" anchor="ctr">
+                    <a:lnT w="12700" cap="flat" cmpd="sng" algn="ctr">
+                      <a:solidFill>
+                        <a:schemeClr val="tx1"/>
+                      </a:solidFill>
+                      <a:prstDash val="solid"/>
+                      <a:round/>
+                      <a:headEnd type="none" w="med" len="med"/>
+                      <a:tailEnd type="none" w="med" len="med"/>
+                    </a:lnT>
+                    <a:lnB w="12700" cap="flat" cmpd="sng" algn="ctr">
+                      <a:solidFill>
+                        <a:schemeClr val="tx1"/>
+                      </a:solidFill>
+                      <a:prstDash val="solid"/>
+                      <a:round/>
+                      <a:headEnd type="none" w="med" len="med"/>
+                      <a:tailEnd type="none" w="med" len="med"/>
+                    </a:lnB>
+                  </a:tcPr>
+                </a:tc>
+                <a:tc>
+                  <a:txBody>
+                    <a:bodyPr/>
+                    <a:lstStyle/>
+                    <a:p>
+                      <a:r>
+                        <a:rPr lang="en-US">
+                          <a:effectLst/>
+                        </a:rPr>
+                        <a:t>11</a:t>
+                      </a:r>
+                    </a:p>
+                  </a:txBody>
+                  <a:tcPr marL="76200" marR="76200" marT="38100" marB="38100" anchor="ctr">
+                    <a:lnT w="12700" cap="flat" cmpd="sng" algn="ctr">
+                      <a:solidFill>
+                        <a:schemeClr val="tx1"/>
+                      </a:solidFill>
+                      <a:prstDash val="solid"/>
+                      <a:round/>
+                      <a:headEnd type="none" w="med" len="med"/>
+                      <a:tailEnd type="none" w="med" len="med"/>
+                    </a:lnT>
+                    <a:lnB w="12700" cap="flat" cmpd="sng" algn="ctr">
+                      <a:solidFill>
+                        <a:schemeClr val="tx1"/>
+                      </a:solidFill>
+                      <a:prstDash val="solid"/>
+                      <a:round/>
+                      <a:headEnd type="none" w="med" len="med"/>
+                      <a:tailEnd type="none" w="med" len="med"/>
+                    </a:lnB>
+                  </a:tcPr>
+                </a:tc>
+                <a:extLst>
+                  <a:ext uri="{0D108BD9-81ED-4DB2-BD59-A6C34878D82A}">
+                    <a16:rowId xmlns:a16="http://schemas.microsoft.com/office/drawing/2014/main" val="3881439957"/>
+                  </a:ext>
+                </a:extLst>
+              </a:tr>
+              <a:tr h="0">
+                <a:tc rowSpan="2">
+                  <a:txBody>
+                    <a:bodyPr/>
+                    <a:lstStyle/>
+                    <a:p>
+                      <a:pPr algn="r" fontAlgn="t"/>
+                      <a:r>
+                        <a:rPr lang="en-US">
+                          <a:effectLst/>
+                        </a:rPr>
+                        <a:t>3000</a:t>
+                      </a:r>
+                      <a:endParaRPr lang="en-US" b="0">
+                        <a:effectLst/>
+                      </a:endParaRPr>
+                    </a:p>
+                  </a:txBody>
+                  <a:tcPr marL="76200" marR="76200" marT="38100" marB="38100">
+                    <a:lnT w="12700" cap="flat" cmpd="sng" algn="ctr">
+                      <a:solidFill>
+                        <a:schemeClr val="tx1"/>
+                      </a:solidFill>
+                      <a:prstDash val="solid"/>
+                      <a:round/>
+                      <a:headEnd type="none" w="med" len="med"/>
+                      <a:tailEnd type="none" w="med" len="med"/>
+                    </a:lnT>
+                  </a:tcPr>
+                </a:tc>
+                <a:tc>
+                  <a:txBody>
+                    <a:bodyPr/>
+                    <a:lstStyle/>
+                    <a:p>
+                      <a:pPr algn="r" fontAlgn="t"/>
+                      <a:r>
+                        <a:rPr lang="en-US" sz="1400" i="1" dirty="0" err="1">
+                          <a:effectLst/>
+                        </a:rPr>
+                        <a:t>Hedyosmun</a:t>
+                      </a:r>
+                      <a:r>
+                        <a:rPr lang="en-US" sz="1400" i="1" dirty="0">
+                          <a:effectLst/>
+                        </a:rPr>
+                        <a:t> </a:t>
+                      </a:r>
+                      <a:r>
+                        <a:rPr lang="en-US" sz="1400" i="1" dirty="0" err="1">
+                          <a:effectLst/>
+                        </a:rPr>
+                        <a:t>purpurascens</a:t>
+                      </a:r>
+                      <a:endParaRPr lang="en-US" sz="1400" b="0" i="1" dirty="0">
+                        <a:effectLst/>
+                      </a:endParaRPr>
+                    </a:p>
+                  </a:txBody>
+                  <a:tcPr marL="76200" marR="76200" marT="38100" marB="38100">
+                    <a:lnT w="12700" cap="flat" cmpd="sng" algn="ctr">
+                      <a:solidFill>
+                        <a:schemeClr val="tx1"/>
+                      </a:solidFill>
+                      <a:prstDash val="solid"/>
+                      <a:round/>
+                      <a:headEnd type="none" w="med" len="med"/>
+                      <a:tailEnd type="none" w="med" len="med"/>
+                    </a:lnT>
+                    <a:lnB w="12700" cap="flat" cmpd="sng" algn="ctr">
+                      <a:solidFill>
+                        <a:schemeClr val="tx1"/>
+                      </a:solidFill>
+                      <a:prstDash val="solid"/>
+                      <a:round/>
+                      <a:headEnd type="none" w="med" len="med"/>
+                      <a:tailEnd type="none" w="med" len="med"/>
+                    </a:lnB>
+                  </a:tcPr>
+                </a:tc>
+                <a:tc>
+                  <a:txBody>
+                    <a:bodyPr/>
+                    <a:lstStyle/>
+                    <a:p>
+                      <a:r>
+                        <a:rPr lang="en-US" dirty="0">
+                          <a:effectLst/>
+                        </a:rPr>
+                        <a:t>5</a:t>
+                      </a:r>
+                    </a:p>
+                  </a:txBody>
+                  <a:tcPr marL="76200" marR="76200" marT="38100" marB="38100" anchor="ctr">
+                    <a:lnT w="12700" cap="flat" cmpd="sng" algn="ctr">
+                      <a:solidFill>
+                        <a:schemeClr val="tx1"/>
+                      </a:solidFill>
+                      <a:prstDash val="solid"/>
+                      <a:round/>
+                      <a:headEnd type="none" w="med" len="med"/>
+                      <a:tailEnd type="none" w="med" len="med"/>
+                    </a:lnT>
+                    <a:lnB w="12700" cap="flat" cmpd="sng" algn="ctr">
+                      <a:solidFill>
+                        <a:schemeClr val="tx1"/>
+                      </a:solidFill>
+                      <a:prstDash val="solid"/>
+                      <a:round/>
+                      <a:headEnd type="none" w="med" len="med"/>
+                      <a:tailEnd type="none" w="med" len="med"/>
+                    </a:lnB>
+                  </a:tcPr>
+                </a:tc>
+                <a:tc>
+                  <a:txBody>
+                    <a:bodyPr/>
+                    <a:lstStyle/>
+                    <a:p>
+                      <a:r>
+                        <a:rPr lang="en-US" dirty="0">
+                          <a:effectLst/>
+                        </a:rPr>
+                        <a:t>6</a:t>
+                      </a:r>
+                    </a:p>
+                  </a:txBody>
+                  <a:tcPr marL="76200" marR="76200" marT="38100" marB="38100" anchor="ctr">
+                    <a:lnT w="12700" cap="flat" cmpd="sng" algn="ctr">
+                      <a:solidFill>
+                        <a:schemeClr val="tx1"/>
+                      </a:solidFill>
+                      <a:prstDash val="solid"/>
+                      <a:round/>
+                      <a:headEnd type="none" w="med" len="med"/>
+                      <a:tailEnd type="none" w="med" len="med"/>
+                    </a:lnT>
+                    <a:lnB w="12700" cap="flat" cmpd="sng" algn="ctr">
+                      <a:solidFill>
+                        <a:schemeClr val="tx1"/>
+                      </a:solidFill>
+                      <a:prstDash val="solid"/>
+                      <a:round/>
+                      <a:headEnd type="none" w="med" len="med"/>
+                      <a:tailEnd type="none" w="med" len="med"/>
+                    </a:lnB>
+                  </a:tcPr>
+                </a:tc>
+                <a:tc>
+                  <a:txBody>
+                    <a:bodyPr/>
+                    <a:lstStyle/>
+                    <a:p>
+                      <a:r>
+                        <a:rPr lang="en-US" dirty="0">
+                          <a:effectLst/>
+                        </a:rPr>
+                        <a:t>3</a:t>
+                      </a:r>
+                    </a:p>
+                  </a:txBody>
+                  <a:tcPr marL="76200" marR="76200" marT="38100" marB="38100" anchor="ctr">
+                    <a:lnT w="12700" cap="flat" cmpd="sng" algn="ctr">
+                      <a:solidFill>
+                        <a:schemeClr val="tx1"/>
+                      </a:solidFill>
+                      <a:prstDash val="solid"/>
+                      <a:round/>
+                      <a:headEnd type="none" w="med" len="med"/>
+                      <a:tailEnd type="none" w="med" len="med"/>
+                    </a:lnT>
+                    <a:lnB w="12700" cap="flat" cmpd="sng" algn="ctr">
+                      <a:solidFill>
+                        <a:schemeClr val="tx1"/>
+                      </a:solidFill>
+                      <a:prstDash val="solid"/>
+                      <a:round/>
+                      <a:headEnd type="none" w="med" len="med"/>
+                      <a:tailEnd type="none" w="med" len="med"/>
+                    </a:lnB>
+                  </a:tcPr>
+                </a:tc>
+                <a:tc>
+                  <a:txBody>
+                    <a:bodyPr/>
+                    <a:lstStyle/>
+                    <a:p>
+                      <a:r>
+                        <a:rPr lang="en-US" dirty="0">
+                          <a:effectLst/>
+                        </a:rPr>
+                        <a:t>7</a:t>
+                      </a:r>
+                    </a:p>
+                  </a:txBody>
+                  <a:tcPr marL="76200" marR="76200" marT="38100" marB="38100" anchor="ctr">
+                    <a:lnT w="12700" cap="flat" cmpd="sng" algn="ctr">
+                      <a:solidFill>
+                        <a:schemeClr val="tx1"/>
+                      </a:solidFill>
+                      <a:prstDash val="solid"/>
+                      <a:round/>
+                      <a:headEnd type="none" w="med" len="med"/>
+                      <a:tailEnd type="none" w="med" len="med"/>
+                    </a:lnT>
+                    <a:lnB w="12700" cap="flat" cmpd="sng" algn="ctr">
+                      <a:solidFill>
+                        <a:schemeClr val="tx1"/>
+                      </a:solidFill>
+                      <a:prstDash val="solid"/>
+                      <a:round/>
+                      <a:headEnd type="none" w="med" len="med"/>
+                      <a:tailEnd type="none" w="med" len="med"/>
+                    </a:lnB>
+                  </a:tcPr>
+                </a:tc>
+                <a:extLst>
+                  <a:ext uri="{0D108BD9-81ED-4DB2-BD59-A6C34878D82A}">
+                    <a16:rowId xmlns:a16="http://schemas.microsoft.com/office/drawing/2014/main" val="164670539"/>
+                  </a:ext>
+                </a:extLst>
+              </a:tr>
+              <a:tr h="0">
+                <a:tc vMerge="1">
+                  <a:txBody>
+                    <a:bodyPr/>
+                    <a:lstStyle/>
+                    <a:p>
+                      <a:endParaRPr lang="en-US"/>
+                    </a:p>
+                  </a:txBody>
+                  <a:tcPr/>
+                </a:tc>
+                <a:tc>
+                  <a:txBody>
+                    <a:bodyPr/>
+                    <a:lstStyle/>
+                    <a:p>
+                      <a:pPr algn="r" fontAlgn="ctr"/>
+                      <a:r>
+                        <a:rPr lang="en-US" sz="1400" i="1" dirty="0" err="1">
+                          <a:effectLst/>
+                        </a:rPr>
+                        <a:t>Weinmania</a:t>
+                      </a:r>
+                      <a:r>
+                        <a:rPr lang="en-US" sz="1400" i="1" dirty="0">
+                          <a:effectLst/>
+                        </a:rPr>
+                        <a:t> </a:t>
+                      </a:r>
+                      <a:r>
+                        <a:rPr lang="en-US" sz="1400" i="1" dirty="0" err="1">
+                          <a:effectLst/>
+                        </a:rPr>
+                        <a:t>loxensis</a:t>
+                      </a:r>
+                      <a:endParaRPr lang="en-US" sz="1400" b="0" i="1" dirty="0">
+                        <a:effectLst/>
+                      </a:endParaRPr>
+                    </a:p>
+                  </a:txBody>
+                  <a:tcPr marL="76200" marR="76200" marT="38100" marB="38100" anchor="ctr">
+                    <a:lnT w="12700" cap="flat" cmpd="sng" algn="ctr">
+                      <a:solidFill>
+                        <a:schemeClr val="tx1"/>
+                      </a:solidFill>
+                      <a:prstDash val="solid"/>
+                      <a:round/>
+                      <a:headEnd type="none" w="med" len="med"/>
+                      <a:tailEnd type="none" w="med" len="med"/>
+                    </a:lnT>
+                  </a:tcPr>
+                </a:tc>
+                <a:tc>
+                  <a:txBody>
+                    <a:bodyPr/>
+                    <a:lstStyle/>
+                    <a:p>
+                      <a:r>
+                        <a:rPr lang="en-US">
+                          <a:effectLst/>
+                        </a:rPr>
+                        <a:t>5</a:t>
+                      </a:r>
+                    </a:p>
+                  </a:txBody>
+                  <a:tcPr marL="76200" marR="76200" marT="38100" marB="38100" anchor="ctr">
+                    <a:lnT w="12700" cap="flat" cmpd="sng" algn="ctr">
+                      <a:solidFill>
+                        <a:schemeClr val="tx1"/>
+                      </a:solidFill>
+                      <a:prstDash val="solid"/>
+                      <a:round/>
+                      <a:headEnd type="none" w="med" len="med"/>
+                      <a:tailEnd type="none" w="med" len="med"/>
+                    </a:lnT>
+                  </a:tcPr>
+                </a:tc>
+                <a:tc>
+                  <a:txBody>
+                    <a:bodyPr/>
+                    <a:lstStyle/>
+                    <a:p>
+                      <a:r>
+                        <a:rPr lang="en-US">
+                          <a:effectLst/>
+                        </a:rPr>
+                        <a:t>5</a:t>
+                      </a:r>
+                    </a:p>
+                  </a:txBody>
+                  <a:tcPr marL="76200" marR="76200" marT="38100" marB="38100" anchor="ctr">
+                    <a:lnT w="12700" cap="flat" cmpd="sng" algn="ctr">
+                      <a:solidFill>
+                        <a:schemeClr val="tx1"/>
+                      </a:solidFill>
+                      <a:prstDash val="solid"/>
+                      <a:round/>
+                      <a:headEnd type="none" w="med" len="med"/>
+                      <a:tailEnd type="none" w="med" len="med"/>
+                    </a:lnT>
+                  </a:tcPr>
+                </a:tc>
+                <a:tc>
+                  <a:txBody>
+                    <a:bodyPr/>
+                    <a:lstStyle/>
+                    <a:p>
+                      <a:r>
+                        <a:rPr lang="en-US" dirty="0">
+                          <a:effectLst/>
+                        </a:rPr>
+                        <a:t>2</a:t>
+                      </a:r>
+                    </a:p>
+                  </a:txBody>
+                  <a:tcPr marL="76200" marR="76200" marT="38100" marB="38100" anchor="ctr">
+                    <a:lnT w="12700" cap="flat" cmpd="sng" algn="ctr">
+                      <a:solidFill>
+                        <a:schemeClr val="tx1"/>
+                      </a:solidFill>
+                      <a:prstDash val="solid"/>
+                      <a:round/>
+                      <a:headEnd type="none" w="med" len="med"/>
+                      <a:tailEnd type="none" w="med" len="med"/>
+                    </a:lnT>
+                  </a:tcPr>
+                </a:tc>
+                <a:tc>
+                  <a:txBody>
+                    <a:bodyPr/>
+                    <a:lstStyle/>
+                    <a:p>
+                      <a:r>
+                        <a:rPr lang="en-US" dirty="0">
+                          <a:effectLst/>
+                        </a:rPr>
+                        <a:t>6</a:t>
+                      </a:r>
+                    </a:p>
+                  </a:txBody>
+                  <a:tcPr marL="76200" marR="76200" marT="38100" marB="38100" anchor="ctr">
+                    <a:lnT w="12700" cap="flat" cmpd="sng" algn="ctr">
+                      <a:solidFill>
+                        <a:schemeClr val="tx1"/>
+                      </a:solidFill>
+                      <a:prstDash val="solid"/>
+                      <a:round/>
+                      <a:headEnd type="none" w="med" len="med"/>
+                      <a:tailEnd type="none" w="med" len="med"/>
+                    </a:lnT>
+                  </a:tcPr>
+                </a:tc>
+                <a:extLst>
+                  <a:ext uri="{0D108BD9-81ED-4DB2-BD59-A6C34878D82A}">
+                    <a16:rowId xmlns:a16="http://schemas.microsoft.com/office/drawing/2014/main" val="3084022532"/>
+                  </a:ext>
+                </a:extLst>
+              </a:tr>
+            </a:tbl>
+          </a:graphicData>
+        </a:graphic>
+      </p:graphicFrame>
+    </p:spTree>
+    <p:extLst>
+      <p:ext uri="{BB962C8B-B14F-4D97-AF65-F5344CB8AC3E}">
+        <p14:creationId xmlns:p14="http://schemas.microsoft.com/office/powerpoint/2010/main" val="1419620862"/>
+      </p:ext>
+    </p:extLst>
+  </p:cSld>
+  <p:clrMapOvr>
+    <a:masterClrMapping/>
+  </p:clrMapOvr>
+</p:sld>
+</file>
+
+<file path=ppt/slides/slide8.xml><?xml version="1.0" encoding="utf-8"?>
+<p:sld xmlns:a="http://schemas.openxmlformats.org/drawingml/2006/main" xmlns:r="http://schemas.openxmlformats.org/officeDocument/2006/relationships" xmlns:p="http://schemas.openxmlformats.org/presentationml/2006/main" show="0">
   <p:cSld>
     <p:spTree>
       <p:nvGrpSpPr>
@@ -36488,6 +38849,14 @@
   <p:clrMapOvr>
     <a:masterClrMapping/>
   </p:clrMapOvr>
+  <mc:AlternateContent xmlns:mc="http://schemas.openxmlformats.org/markup-compatibility/2006">
+    <mc:Choice xmlns:p14="http://schemas.microsoft.com/office/powerpoint/2010/main" Requires="p14">
+      <p:transition spd="slow" p14:dur="2000"/>
+    </mc:Choice>
+    <mc:Fallback>
+      <p:transition spd="slow"/>
+    </mc:Fallback>
+  </mc:AlternateContent>
   <p:timing>
     <p:tnLst>
       <p:par>
@@ -36498,8 +38867,8 @@
 </p:sld>
 </file>
 
-<file path=ppt/slides/slide7.xml><?xml version="1.0" encoding="utf-8"?>
-<p:sld xmlns:a="http://schemas.openxmlformats.org/drawingml/2006/main" xmlns:r="http://schemas.openxmlformats.org/officeDocument/2006/relationships" xmlns:p="http://schemas.openxmlformats.org/presentationml/2006/main" show="0">
+<file path=ppt/slides/slide9.xml><?xml version="1.0" encoding="utf-8"?>
+<p:sld xmlns:a="http://schemas.openxmlformats.org/drawingml/2006/main" xmlns:r="http://schemas.openxmlformats.org/officeDocument/2006/relationships" xmlns:p="http://schemas.openxmlformats.org/presentationml/2006/main">
   <p:cSld>
     <p:spTree>
       <p:nvGrpSpPr>
@@ -36525,14 +38894,14 @@
             <p:ph idx="1"/>
             <p:extLst>
               <p:ext uri="{D42A27DB-BD31-4B8C-83A1-F6EECF244321}">
-                <p14:modId xmlns:p14="http://schemas.microsoft.com/office/powerpoint/2010/main" val="1404341045"/>
+                <p14:modId xmlns:p14="http://schemas.microsoft.com/office/powerpoint/2010/main" val="3895609165"/>
               </p:ext>
             </p:extLst>
           </p:nvPr>
         </p:nvGraphicFramePr>
         <p:xfrm>
           <a:off x="1229678" y="966209"/>
-          <a:ext cx="9732643" cy="5613519"/>
+          <a:ext cx="9062715" cy="5613519"/>
         </p:xfrm>
         <a:graphic>
           <a:graphicData uri="http://schemas.openxmlformats.org/drawingml/2006/table">
@@ -36552,13 +38921,6 @@
                   <a:extLst>
                     <a:ext uri="{9D8B030D-6E8A-4147-A177-3AD203B41FA5}">
                       <a16:colId xmlns:a16="http://schemas.microsoft.com/office/drawing/2014/main" val="3571363669"/>
-                    </a:ext>
-                  </a:extLst>
-                </a:gridCol>
-                <a:gridCol w="669928">
-                  <a:extLst>
-                    <a:ext uri="{9D8B030D-6E8A-4147-A177-3AD203B41FA5}">
-                      <a16:colId xmlns:a16="http://schemas.microsoft.com/office/drawing/2014/main" val="1604352394"/>
                     </a:ext>
                   </a:extLst>
                 </a:gridCol>
@@ -36674,35 +39036,6 @@
                   </a:txBody>
                   <a:tcPr marL="7823" marR="7823" marT="7823" marB="0"/>
                 </a:tc>
-                <a:tc>
-                  <a:txBody>
-                    <a:bodyPr/>
-                    <a:lstStyle/>
-                    <a:p>
-                      <a:pPr algn="l" fontAlgn="t"/>
-                      <a:r>
-                        <a:rPr lang="en-US" sz="1200" u="none" strike="noStrike" dirty="0">
-                          <a:effectLst/>
-                        </a:rPr>
-                        <a:t> </a:t>
-                      </a:r>
-                      <a:r>
-                        <a:rPr lang="en-US" sz="1200" b="1" u="none" strike="noStrike" dirty="0" smtClean="0">
-                          <a:effectLst/>
-                        </a:rPr>
-                        <a:t>n</a:t>
-                      </a:r>
-                      <a:endParaRPr lang="en-US" sz="1200" b="1" i="0" u="none" strike="noStrike" dirty="0">
-                        <a:solidFill>
-                          <a:srgbClr val="000000"/>
-                        </a:solidFill>
-                        <a:effectLst/>
-                        <a:latin typeface="+mn-lt"/>
-                      </a:endParaRPr>
-                    </a:p>
-                  </a:txBody>
-                  <a:tcPr marL="7823" marR="7823" marT="7823" marB="0"/>
-                </a:tc>
                 <a:tc gridSpan="2">
                   <a:txBody>
                     <a:bodyPr/>
@@ -36975,23 +39308,6 @@
                     <a:lstStyle/>
                     <a:p>
                       <a:pPr algn="ctr" fontAlgn="t"/>
-                      <a:endParaRPr lang="en-US" sz="1200" b="1" i="0" u="none" strike="noStrike" dirty="0">
-                        <a:solidFill>
-                          <a:srgbClr val="000000"/>
-                        </a:solidFill>
-                        <a:effectLst/>
-                        <a:latin typeface="+mn-lt"/>
-                      </a:endParaRPr>
-                    </a:p>
-                  </a:txBody>
-                  <a:tcPr marL="7823" marR="7823" marT="7823" marB="0"/>
-                </a:tc>
-                <a:tc>
-                  <a:txBody>
-                    <a:bodyPr/>
-                    <a:lstStyle/>
-                    <a:p>
-                      <a:pPr algn="ctr" fontAlgn="t"/>
                       <a:r>
                         <a:rPr lang="en-US" sz="1200" u="none" strike="noStrike">
                           <a:effectLst/>
@@ -37256,23 +39572,6 @@
                     </a:p>
                   </a:txBody>
                   <a:tcPr marL="7823" marR="7823" marT="7823" marB="0"/>
-                </a:tc>
-                <a:tc>
-                  <a:txBody>
-                    <a:bodyPr/>
-                    <a:lstStyle/>
-                    <a:p>
-                      <a:pPr algn="l" fontAlgn="b"/>
-                      <a:endParaRPr lang="en-US" sz="1200" b="0" i="0" u="none" strike="noStrike">
-                        <a:solidFill>
-                          <a:srgbClr val="000000"/>
-                        </a:solidFill>
-                        <a:effectLst/>
-                        <a:latin typeface="+mn-lt"/>
-                      </a:endParaRPr>
-                    </a:p>
-                  </a:txBody>
-                  <a:tcPr marL="7823" marR="7823" marT="7823" marB="0" anchor="b"/>
                 </a:tc>
                 <a:tc>
                   <a:txBody>
@@ -37519,29 +39818,6 @@
                         <a:rPr lang="en-US" sz="1200" u="none" strike="noStrike">
                           <a:effectLst/>
                         </a:rPr>
-                        <a:t>12</a:t>
-                      </a:r>
-                      <a:endParaRPr lang="en-US" sz="1200" b="0" i="0" u="none" strike="noStrike">
-                        <a:solidFill>
-                          <a:srgbClr val="000000"/>
-                        </a:solidFill>
-                        <a:effectLst/>
-                        <a:latin typeface="+mn-lt"/>
-                      </a:endParaRPr>
-                    </a:p>
-                  </a:txBody>
-                  <a:tcPr marL="7823" marR="7823" marT="7823" marB="0" anchor="b"/>
-                </a:tc>
-                <a:tc>
-                  <a:txBody>
-                    <a:bodyPr/>
-                    <a:lstStyle/>
-                    <a:p>
-                      <a:pPr algn="r" fontAlgn="b"/>
-                      <a:r>
-                        <a:rPr lang="en-US" sz="1200" u="none" strike="noStrike">
-                          <a:effectLst/>
-                        </a:rPr>
                         <a:t>-5.27</a:t>
                       </a:r>
                       <a:endParaRPr lang="en-US" sz="1200" b="0" i="0" u="none" strike="noStrike">
@@ -37812,29 +40088,6 @@
                         <a:rPr lang="en-US" sz="1200" u="none" strike="noStrike">
                           <a:effectLst/>
                         </a:rPr>
-                        <a:t>10</a:t>
-                      </a:r>
-                      <a:endParaRPr lang="en-US" sz="1200" b="0" i="0" u="none" strike="noStrike">
-                        <a:solidFill>
-                          <a:srgbClr val="000000"/>
-                        </a:solidFill>
-                        <a:effectLst/>
-                        <a:latin typeface="+mn-lt"/>
-                      </a:endParaRPr>
-                    </a:p>
-                  </a:txBody>
-                  <a:tcPr marL="7823" marR="7823" marT="7823" marB="0" anchor="b"/>
-                </a:tc>
-                <a:tc>
-                  <a:txBody>
-                    <a:bodyPr/>
-                    <a:lstStyle/>
-                    <a:p>
-                      <a:pPr algn="r" fontAlgn="b"/>
-                      <a:r>
-                        <a:rPr lang="en-US" sz="1200" u="none" strike="noStrike">
-                          <a:effectLst/>
-                        </a:rPr>
                         <a:t>-2.57</a:t>
                       </a:r>
                       <a:endParaRPr lang="en-US" sz="1200" b="0" i="0" u="none" strike="noStrike">
@@ -38105,29 +40358,6 @@
                         <a:rPr lang="en-US" sz="1200" u="none" strike="noStrike">
                           <a:effectLst/>
                         </a:rPr>
-                        <a:t>8</a:t>
-                      </a:r>
-                      <a:endParaRPr lang="en-US" sz="1200" b="0" i="0" u="none" strike="noStrike">
-                        <a:solidFill>
-                          <a:srgbClr val="000000"/>
-                        </a:solidFill>
-                        <a:effectLst/>
-                        <a:latin typeface="+mn-lt"/>
-                      </a:endParaRPr>
-                    </a:p>
-                  </a:txBody>
-                  <a:tcPr marL="7823" marR="7823" marT="7823" marB="0" anchor="b"/>
-                </a:tc>
-                <a:tc>
-                  <a:txBody>
-                    <a:bodyPr/>
-                    <a:lstStyle/>
-                    <a:p>
-                      <a:pPr algn="r" fontAlgn="b"/>
-                      <a:r>
-                        <a:rPr lang="en-US" sz="1200" u="none" strike="noStrike">
-                          <a:effectLst/>
-                        </a:rPr>
                         <a:t>-2.44</a:t>
                       </a:r>
                       <a:endParaRPr lang="en-US" sz="1200" b="0" i="0" u="none" strike="noStrike">
@@ -38398,29 +40628,6 @@
                         <a:rPr lang="en-US" sz="1200" u="none" strike="noStrike">
                           <a:effectLst/>
                         </a:rPr>
-                        <a:t>15</a:t>
-                      </a:r>
-                      <a:endParaRPr lang="en-US" sz="1200" b="0" i="0" u="none" strike="noStrike">
-                        <a:solidFill>
-                          <a:srgbClr val="000000"/>
-                        </a:solidFill>
-                        <a:effectLst/>
-                        <a:latin typeface="+mn-lt"/>
-                      </a:endParaRPr>
-                    </a:p>
-                  </a:txBody>
-                  <a:tcPr marL="7823" marR="7823" marT="7823" marB="0" anchor="b"/>
-                </a:tc>
-                <a:tc>
-                  <a:txBody>
-                    <a:bodyPr/>
-                    <a:lstStyle/>
-                    <a:p>
-                      <a:pPr algn="r" fontAlgn="b"/>
-                      <a:r>
-                        <a:rPr lang="en-US" sz="1200" u="none" strike="noStrike">
-                          <a:effectLst/>
-                        </a:rPr>
                         <a:t>-5.08</a:t>
                       </a:r>
                       <a:endParaRPr lang="en-US" sz="1200" b="0" i="0" u="none" strike="noStrike">
@@ -38716,29 +40923,6 @@
                         <a:rPr lang="en-US" sz="1200" u="none" strike="noStrike">
                           <a:effectLst/>
                         </a:rPr>
-                        <a:t>3</a:t>
-                      </a:r>
-                      <a:endParaRPr lang="en-US" sz="1200" b="0" i="0" u="none" strike="noStrike">
-                        <a:solidFill>
-                          <a:srgbClr val="000000"/>
-                        </a:solidFill>
-                        <a:effectLst/>
-                        <a:latin typeface="+mn-lt"/>
-                      </a:endParaRPr>
-                    </a:p>
-                  </a:txBody>
-                  <a:tcPr marL="7823" marR="7823" marT="7823" marB="0" anchor="b"/>
-                </a:tc>
-                <a:tc>
-                  <a:txBody>
-                    <a:bodyPr/>
-                    <a:lstStyle/>
-                    <a:p>
-                      <a:pPr algn="r" fontAlgn="b"/>
-                      <a:r>
-                        <a:rPr lang="en-US" sz="1200" u="none" strike="noStrike">
-                          <a:effectLst/>
-                        </a:rPr>
                         <a:t>0.61</a:t>
                       </a:r>
                       <a:endParaRPr lang="en-US" sz="1200" b="0" i="0" u="none" strike="noStrike">
@@ -39009,29 +41193,6 @@
                         <a:rPr lang="en-US" sz="1200" u="none" strike="noStrike">
                           <a:effectLst/>
                         </a:rPr>
-                        <a:t>1</a:t>
-                      </a:r>
-                      <a:endParaRPr lang="en-US" sz="1200" b="0" i="0" u="none" strike="noStrike">
-                        <a:solidFill>
-                          <a:srgbClr val="000000"/>
-                        </a:solidFill>
-                        <a:effectLst/>
-                        <a:latin typeface="+mn-lt"/>
-                      </a:endParaRPr>
-                    </a:p>
-                  </a:txBody>
-                  <a:tcPr marL="7823" marR="7823" marT="7823" marB="0" anchor="b"/>
-                </a:tc>
-                <a:tc>
-                  <a:txBody>
-                    <a:bodyPr/>
-                    <a:lstStyle/>
-                    <a:p>
-                      <a:pPr algn="r" fontAlgn="b"/>
-                      <a:r>
-                        <a:rPr lang="en-US" sz="1200" u="none" strike="noStrike">
-                          <a:effectLst/>
-                        </a:rPr>
                         <a:t>0.47</a:t>
                       </a:r>
                       <a:endParaRPr lang="en-US" sz="1200" b="0" i="0" u="none" strike="noStrike">
@@ -39272,29 +41433,6 @@
                         <a:rPr lang="en-US" sz="1200" u="none" strike="noStrike">
                           <a:effectLst/>
                         </a:rPr>
-                        <a:t>4</a:t>
-                      </a:r>
-                      <a:endParaRPr lang="en-US" sz="1200" b="0" i="0" u="none" strike="noStrike">
-                        <a:solidFill>
-                          <a:srgbClr val="000000"/>
-                        </a:solidFill>
-                        <a:effectLst/>
-                        <a:latin typeface="+mn-lt"/>
-                      </a:endParaRPr>
-                    </a:p>
-                  </a:txBody>
-                  <a:tcPr marL="7823" marR="7823" marT="7823" marB="0" anchor="b"/>
-                </a:tc>
-                <a:tc>
-                  <a:txBody>
-                    <a:bodyPr/>
-                    <a:lstStyle/>
-                    <a:p>
-                      <a:pPr algn="r" fontAlgn="b"/>
-                      <a:r>
-                        <a:rPr lang="en-US" sz="1200" u="none" strike="noStrike">
-                          <a:effectLst/>
-                        </a:rPr>
                         <a:t>2.04</a:t>
                       </a:r>
                       <a:endParaRPr lang="en-US" sz="1200" b="0" i="0" u="none" strike="noStrike">
@@ -39565,29 +41703,6 @@
                         <a:rPr lang="en-US" sz="1200" u="none" strike="noStrike">
                           <a:effectLst/>
                         </a:rPr>
-                        <a:t>4</a:t>
-                      </a:r>
-                      <a:endParaRPr lang="en-US" sz="1200" b="0" i="0" u="none" strike="noStrike">
-                        <a:solidFill>
-                          <a:srgbClr val="000000"/>
-                        </a:solidFill>
-                        <a:effectLst/>
-                        <a:latin typeface="+mn-lt"/>
-                      </a:endParaRPr>
-                    </a:p>
-                  </a:txBody>
-                  <a:tcPr marL="7823" marR="7823" marT="7823" marB="0" anchor="b"/>
-                </a:tc>
-                <a:tc>
-                  <a:txBody>
-                    <a:bodyPr/>
-                    <a:lstStyle/>
-                    <a:p>
-                      <a:pPr algn="r" fontAlgn="b"/>
-                      <a:r>
-                        <a:rPr lang="en-US" sz="1200" u="none" strike="noStrike">
-                          <a:effectLst/>
-                        </a:rPr>
                         <a:t>0.6</a:t>
                       </a:r>
                       <a:endParaRPr lang="en-US" sz="1200" b="0" i="0" u="none" strike="noStrike">
@@ -39883,29 +41998,6 @@
                         <a:rPr lang="en-US" sz="1200" u="none" strike="noStrike">
                           <a:effectLst/>
                         </a:rPr>
-                        <a:t>5</a:t>
-                      </a:r>
-                      <a:endParaRPr lang="en-US" sz="1200" b="0" i="0" u="none" strike="noStrike">
-                        <a:solidFill>
-                          <a:srgbClr val="000000"/>
-                        </a:solidFill>
-                        <a:effectLst/>
-                        <a:latin typeface="+mn-lt"/>
-                      </a:endParaRPr>
-                    </a:p>
-                  </a:txBody>
-                  <a:tcPr marL="7823" marR="7823" marT="7823" marB="0" anchor="b"/>
-                </a:tc>
-                <a:tc>
-                  <a:txBody>
-                    <a:bodyPr/>
-                    <a:lstStyle/>
-                    <a:p>
-                      <a:pPr algn="r" fontAlgn="b"/>
-                      <a:r>
-                        <a:rPr lang="en-US" sz="1200" u="none" strike="noStrike">
-                          <a:effectLst/>
-                        </a:rPr>
                         <a:t>-2.58</a:t>
                       </a:r>
                       <a:endParaRPr lang="en-US" sz="1200" b="0" i="0" u="none" strike="noStrike">
@@ -40176,29 +42268,6 @@
                         <a:rPr lang="en-US" sz="1200" u="none" strike="noStrike">
                           <a:effectLst/>
                         </a:rPr>
-                        <a:t>6</a:t>
-                      </a:r>
-                      <a:endParaRPr lang="en-US" sz="1200" b="0" i="0" u="none" strike="noStrike">
-                        <a:solidFill>
-                          <a:srgbClr val="000000"/>
-                        </a:solidFill>
-                        <a:effectLst/>
-                        <a:latin typeface="+mn-lt"/>
-                      </a:endParaRPr>
-                    </a:p>
-                  </a:txBody>
-                  <a:tcPr marL="7823" marR="7823" marT="7823" marB="0" anchor="b"/>
-                </a:tc>
-                <a:tc>
-                  <a:txBody>
-                    <a:bodyPr/>
-                    <a:lstStyle/>
-                    <a:p>
-                      <a:pPr algn="r" fontAlgn="b"/>
-                      <a:r>
-                        <a:rPr lang="en-US" sz="1200" u="none" strike="noStrike">
-                          <a:effectLst/>
-                        </a:rPr>
                         <a:t>-1.13</a:t>
                       </a:r>
                       <a:endParaRPr lang="en-US" sz="1200" b="0" i="0" u="none" strike="noStrike">
@@ -40469,29 +42538,6 @@
                         <a:rPr lang="en-US" sz="1200" u="none" strike="noStrike">
                           <a:effectLst/>
                         </a:rPr>
-                        <a:t>3</a:t>
-                      </a:r>
-                      <a:endParaRPr lang="en-US" sz="1200" b="0" i="0" u="none" strike="noStrike">
-                        <a:solidFill>
-                          <a:srgbClr val="000000"/>
-                        </a:solidFill>
-                        <a:effectLst/>
-                        <a:latin typeface="+mn-lt"/>
-                      </a:endParaRPr>
-                    </a:p>
-                  </a:txBody>
-                  <a:tcPr marL="7823" marR="7823" marT="7823" marB="0" anchor="b"/>
-                </a:tc>
-                <a:tc>
-                  <a:txBody>
-                    <a:bodyPr/>
-                    <a:lstStyle/>
-                    <a:p>
-                      <a:pPr algn="r" fontAlgn="b"/>
-                      <a:r>
-                        <a:rPr lang="en-US" sz="1200" u="none" strike="noStrike">
-                          <a:effectLst/>
-                        </a:rPr>
                         <a:t>-0.77</a:t>
                       </a:r>
                       <a:endParaRPr lang="en-US" sz="1200" b="0" i="0" u="none" strike="noStrike">
@@ -40762,29 +42808,6 @@
                         <a:rPr lang="en-US" sz="1200" u="none" strike="noStrike">
                           <a:effectLst/>
                         </a:rPr>
-                        <a:t>7</a:t>
-                      </a:r>
-                      <a:endParaRPr lang="en-US" sz="1200" b="0" i="0" u="none" strike="noStrike">
-                        <a:solidFill>
-                          <a:srgbClr val="000000"/>
-                        </a:solidFill>
-                        <a:effectLst/>
-                        <a:latin typeface="+mn-lt"/>
-                      </a:endParaRPr>
-                    </a:p>
-                  </a:txBody>
-                  <a:tcPr marL="7823" marR="7823" marT="7823" marB="0" anchor="b"/>
-                </a:tc>
-                <a:tc>
-                  <a:txBody>
-                    <a:bodyPr/>
-                    <a:lstStyle/>
-                    <a:p>
-                      <a:pPr algn="r" fontAlgn="b"/>
-                      <a:r>
-                        <a:rPr lang="en-US" sz="1200" u="none" strike="noStrike">
-                          <a:effectLst/>
-                        </a:rPr>
                         <a:t>-1.42</a:t>
                       </a:r>
                       <a:endParaRPr lang="en-US" sz="1200" b="0" i="0" u="none" strike="noStrike">
@@ -41092,29 +43115,6 @@
                         <a:rPr lang="en-US" sz="1200" u="none" strike="noStrike">
                           <a:effectLst/>
                         </a:rPr>
-                        <a:t>15</a:t>
-                      </a:r>
-                      <a:endParaRPr lang="en-US" sz="1200" b="0" i="0" u="none" strike="noStrike">
-                        <a:solidFill>
-                          <a:srgbClr val="000000"/>
-                        </a:solidFill>
-                        <a:effectLst/>
-                        <a:latin typeface="+mn-lt"/>
-                      </a:endParaRPr>
-                    </a:p>
-                  </a:txBody>
-                  <a:tcPr marL="7823" marR="7823" marT="7823" marB="0" anchor="b"/>
-                </a:tc>
-                <a:tc>
-                  <a:txBody>
-                    <a:bodyPr/>
-                    <a:lstStyle/>
-                    <a:p>
-                      <a:pPr algn="r" fontAlgn="b"/>
-                      <a:r>
-                        <a:rPr lang="en-US" sz="1200" u="none" strike="noStrike">
-                          <a:effectLst/>
-                        </a:rPr>
                         <a:t>-3.58</a:t>
                       </a:r>
                       <a:endParaRPr lang="en-US" sz="1200" b="0" i="0" u="none" strike="noStrike">
@@ -41385,29 +43385,6 @@
                         <a:rPr lang="en-US" sz="1200" u="none" strike="noStrike">
                           <a:effectLst/>
                         </a:rPr>
-                        <a:t>10</a:t>
-                      </a:r>
-                      <a:endParaRPr lang="en-US" sz="1200" b="0" i="0" u="none" strike="noStrike">
-                        <a:solidFill>
-                          <a:srgbClr val="000000"/>
-                        </a:solidFill>
-                        <a:effectLst/>
-                        <a:latin typeface="+mn-lt"/>
-                      </a:endParaRPr>
-                    </a:p>
-                  </a:txBody>
-                  <a:tcPr marL="7823" marR="7823" marT="7823" marB="0" anchor="b"/>
-                </a:tc>
-                <a:tc>
-                  <a:txBody>
-                    <a:bodyPr/>
-                    <a:lstStyle/>
-                    <a:p>
-                      <a:pPr algn="r" fontAlgn="b"/>
-                      <a:r>
-                        <a:rPr lang="en-US" sz="1200" u="none" strike="noStrike">
-                          <a:effectLst/>
-                        </a:rPr>
                         <a:t>-2.79</a:t>
                       </a:r>
                       <a:endParaRPr lang="en-US" sz="1200" b="0" i="0" u="none" strike="noStrike">
@@ -41678,7 +43655,7 @@
                         <a:rPr lang="en-US" sz="1200" u="none" strike="noStrike">
                           <a:effectLst/>
                         </a:rPr>
-                        <a:t>13</a:t>
+                        <a:t>-1.64</a:t>
                       </a:r>
                       <a:endParaRPr lang="en-US" sz="1200" b="0" i="0" u="none" strike="noStrike">
                         <a:solidFill>
@@ -41701,7 +43678,7 @@
                         <a:rPr lang="en-US" sz="1200" u="none" strike="noStrike">
                           <a:effectLst/>
                         </a:rPr>
-                        <a:t>-1.64</a:t>
+                        <a:t>0.76</a:t>
                       </a:r>
                       <a:endParaRPr lang="en-US" sz="1200" b="0" i="0" u="none" strike="noStrike">
                         <a:solidFill>
@@ -41724,7 +43701,7 @@
                         <a:rPr lang="en-US" sz="1200" u="none" strike="noStrike">
                           <a:effectLst/>
                         </a:rPr>
-                        <a:t>0.76</a:t>
+                        <a:t>30.97</a:t>
                       </a:r>
                       <a:endParaRPr lang="en-US" sz="1200" b="0" i="0" u="none" strike="noStrike">
                         <a:solidFill>
@@ -41747,7 +43724,7 @@
                         <a:rPr lang="en-US" sz="1200" u="none" strike="noStrike">
                           <a:effectLst/>
                         </a:rPr>
-                        <a:t>30.97</a:t>
+                        <a:t>0.94</a:t>
                       </a:r>
                       <a:endParaRPr lang="en-US" sz="1200" b="0" i="0" u="none" strike="noStrike">
                         <a:solidFill>
@@ -41770,7 +43747,7 @@
                         <a:rPr lang="en-US" sz="1200" u="none" strike="noStrike">
                           <a:effectLst/>
                         </a:rPr>
-                        <a:t>0.94</a:t>
+                        <a:t>-27.27</a:t>
                       </a:r>
                       <a:endParaRPr lang="en-US" sz="1200" b="0" i="0" u="none" strike="noStrike">
                         <a:solidFill>
@@ -41793,7 +43770,7 @@
                         <a:rPr lang="en-US" sz="1200" u="none" strike="noStrike">
                           <a:effectLst/>
                         </a:rPr>
-                        <a:t>-27.27</a:t>
+                        <a:t>1</a:t>
                       </a:r>
                       <a:endParaRPr lang="en-US" sz="1200" b="0" i="0" u="none" strike="noStrike">
                         <a:solidFill>
@@ -41816,7 +43793,7 @@
                         <a:rPr lang="en-US" sz="1200" u="none" strike="noStrike">
                           <a:effectLst/>
                         </a:rPr>
-                        <a:t>1</a:t>
+                        <a:t>83.88</a:t>
                       </a:r>
                       <a:endParaRPr lang="en-US" sz="1200" b="0" i="0" u="none" strike="noStrike">
                         <a:solidFill>
@@ -41836,10 +43813,33 @@
                     <a:p>
                       <a:pPr algn="r" fontAlgn="b"/>
                       <a:r>
+                        <a:rPr lang="en-US" sz="1200" u="none" strike="noStrike" dirty="0">
+                          <a:effectLst/>
+                        </a:rPr>
+                        <a:t>12.23</a:t>
+                      </a:r>
+                      <a:endParaRPr lang="en-US" sz="1200" b="0" i="0" u="none" strike="noStrike" dirty="0">
+                        <a:solidFill>
+                          <a:srgbClr val="000000"/>
+                        </a:solidFill>
+                        <a:effectLst/>
+                        <a:latin typeface="+mn-lt"/>
+                      </a:endParaRPr>
+                    </a:p>
+                  </a:txBody>
+                  <a:tcPr marL="7823" marR="7823" marT="7823" marB="0" anchor="b"/>
+                </a:tc>
+                <a:tc>
+                  <a:txBody>
+                    <a:bodyPr/>
+                    <a:lstStyle/>
+                    <a:p>
+                      <a:pPr algn="r" fontAlgn="b"/>
+                      <a:r>
                         <a:rPr lang="en-US" sz="1200" u="none" strike="noStrike">
                           <a:effectLst/>
                         </a:rPr>
-                        <a:t>83.88</a:t>
+                        <a:t>47.79</a:t>
                       </a:r>
                       <a:endParaRPr lang="en-US" sz="1200" b="0" i="0" u="none" strike="noStrike">
                         <a:solidFill>
@@ -41862,55 +43862,9 @@
                         <a:rPr lang="en-US" sz="1200" u="none" strike="noStrike" dirty="0">
                           <a:effectLst/>
                         </a:rPr>
-                        <a:t>12.23</a:t>
+                        <a:t>4.16</a:t>
                       </a:r>
                       <a:endParaRPr lang="en-US" sz="1200" b="0" i="0" u="none" strike="noStrike" dirty="0">
-                        <a:solidFill>
-                          <a:srgbClr val="000000"/>
-                        </a:solidFill>
-                        <a:effectLst/>
-                        <a:latin typeface="+mn-lt"/>
-                      </a:endParaRPr>
-                    </a:p>
-                  </a:txBody>
-                  <a:tcPr marL="7823" marR="7823" marT="7823" marB="0" anchor="b"/>
-                </a:tc>
-                <a:tc>
-                  <a:txBody>
-                    <a:bodyPr/>
-                    <a:lstStyle/>
-                    <a:p>
-                      <a:pPr algn="r" fontAlgn="b"/>
-                      <a:r>
-                        <a:rPr lang="en-US" sz="1200" u="none" strike="noStrike">
-                          <a:effectLst/>
-                        </a:rPr>
-                        <a:t>47.79</a:t>
-                      </a:r>
-                      <a:endParaRPr lang="en-US" sz="1200" b="0" i="0" u="none" strike="noStrike">
-                        <a:solidFill>
-                          <a:srgbClr val="000000"/>
-                        </a:solidFill>
-                        <a:effectLst/>
-                        <a:latin typeface="+mn-lt"/>
-                      </a:endParaRPr>
-                    </a:p>
-                  </a:txBody>
-                  <a:tcPr marL="7823" marR="7823" marT="7823" marB="0" anchor="b"/>
-                </a:tc>
-                <a:tc>
-                  <a:txBody>
-                    <a:bodyPr/>
-                    <a:lstStyle/>
-                    <a:p>
-                      <a:pPr algn="r" fontAlgn="b"/>
-                      <a:r>
-                        <a:rPr lang="en-US" sz="1200" u="none" strike="noStrike">
-                          <a:effectLst/>
-                        </a:rPr>
-                        <a:t>4.16</a:t>
-                      </a:r>
-                      <a:endParaRPr lang="en-US" sz="1200" b="0" i="0" u="none" strike="noStrike">
                         <a:solidFill>
                           <a:srgbClr val="000000"/>
                         </a:solidFill>
@@ -41971,29 +43925,6 @@
                         <a:rPr lang="en-US" sz="1200" u="none" strike="noStrike">
                           <a:effectLst/>
                         </a:rPr>
-                        <a:t>12</a:t>
-                      </a:r>
-                      <a:endParaRPr lang="en-US" sz="1200" b="0" i="0" u="none" strike="noStrike">
-                        <a:solidFill>
-                          <a:srgbClr val="000000"/>
-                        </a:solidFill>
-                        <a:effectLst/>
-                        <a:latin typeface="+mn-lt"/>
-                      </a:endParaRPr>
-                    </a:p>
-                  </a:txBody>
-                  <a:tcPr marL="7823" marR="7823" marT="7823" marB="0" anchor="b"/>
-                </a:tc>
-                <a:tc>
-                  <a:txBody>
-                    <a:bodyPr/>
-                    <a:lstStyle/>
-                    <a:p>
-                      <a:pPr algn="r" fontAlgn="b"/>
-                      <a:r>
-                        <a:rPr lang="en-US" sz="1200" u="none" strike="noStrike">
-                          <a:effectLst/>
-                        </a:rPr>
                         <a:t>-4.48</a:t>
                       </a:r>
                       <a:endParaRPr lang="en-US" sz="1200" b="0" i="0" u="none" strike="noStrike">
@@ -42289,29 +44220,6 @@
                         <a:rPr lang="en-US" sz="1200" u="none" strike="noStrike">
                           <a:effectLst/>
                         </a:rPr>
-                        <a:t>11</a:t>
-                      </a:r>
-                      <a:endParaRPr lang="en-US" sz="1200" b="0" i="0" u="none" strike="noStrike">
-                        <a:solidFill>
-                          <a:srgbClr val="000000"/>
-                        </a:solidFill>
-                        <a:effectLst/>
-                        <a:latin typeface="+mn-lt"/>
-                      </a:endParaRPr>
-                    </a:p>
-                  </a:txBody>
-                  <a:tcPr marL="7823" marR="7823" marT="7823" marB="0" anchor="b"/>
-                </a:tc>
-                <a:tc>
-                  <a:txBody>
-                    <a:bodyPr/>
-                    <a:lstStyle/>
-                    <a:p>
-                      <a:pPr algn="r" fontAlgn="b"/>
-                      <a:r>
-                        <a:rPr lang="en-US" sz="1200" u="none" strike="noStrike">
-                          <a:effectLst/>
-                        </a:rPr>
                         <a:t>1.28</a:t>
                       </a:r>
                       <a:endParaRPr lang="en-US" sz="1200" b="0" i="0" u="none" strike="noStrike">
@@ -42582,29 +44490,6 @@
                         <a:rPr lang="en-US" sz="1200" u="none" strike="noStrike">
                           <a:effectLst/>
                         </a:rPr>
-                        <a:t>10</a:t>
-                      </a:r>
-                      <a:endParaRPr lang="en-US" sz="1200" b="0" i="0" u="none" strike="noStrike">
-                        <a:solidFill>
-                          <a:srgbClr val="000000"/>
-                        </a:solidFill>
-                        <a:effectLst/>
-                        <a:latin typeface="+mn-lt"/>
-                      </a:endParaRPr>
-                    </a:p>
-                  </a:txBody>
-                  <a:tcPr marL="7823" marR="7823" marT="7823" marB="0" anchor="b"/>
-                </a:tc>
-                <a:tc>
-                  <a:txBody>
-                    <a:bodyPr/>
-                    <a:lstStyle/>
-                    <a:p>
-                      <a:pPr algn="r" fontAlgn="b"/>
-                      <a:r>
-                        <a:rPr lang="en-US" sz="1200" u="none" strike="noStrike">
-                          <a:effectLst/>
-                        </a:rPr>
                         <a:t>1.49</a:t>
                       </a:r>
                       <a:endParaRPr lang="en-US" sz="1200" b="0" i="0" u="none" strike="noStrike">
@@ -42875,29 +44760,6 @@
                         <a:rPr lang="en-US" sz="1200" u="none" strike="noStrike">
                           <a:effectLst/>
                         </a:rPr>
-                        <a:t>7</a:t>
-                      </a:r>
-                      <a:endParaRPr lang="en-US" sz="1200" b="0" i="0" u="none" strike="noStrike">
-                        <a:solidFill>
-                          <a:srgbClr val="000000"/>
-                        </a:solidFill>
-                        <a:effectLst/>
-                        <a:latin typeface="+mn-lt"/>
-                      </a:endParaRPr>
-                    </a:p>
-                  </a:txBody>
-                  <a:tcPr marL="7823" marR="7823" marT="7823" marB="0" anchor="b"/>
-                </a:tc>
-                <a:tc>
-                  <a:txBody>
-                    <a:bodyPr/>
-                    <a:lstStyle/>
-                    <a:p>
-                      <a:pPr algn="r" fontAlgn="b"/>
-                      <a:r>
-                        <a:rPr lang="en-US" sz="1200" u="none" strike="noStrike">
-                          <a:effectLst/>
-                        </a:rPr>
                         <a:t>1.79</a:t>
                       </a:r>
                       <a:endParaRPr lang="en-US" sz="1200" b="0" i="0" u="none" strike="noStrike">
@@ -43168,29 +45030,6 @@
                         <a:rPr lang="en-US" sz="1200" u="none" strike="noStrike">
                           <a:effectLst/>
                         </a:rPr>
-                        <a:t>8</a:t>
-                      </a:r>
-                      <a:endParaRPr lang="en-US" sz="1200" b="0" i="0" u="none" strike="noStrike">
-                        <a:solidFill>
-                          <a:srgbClr val="000000"/>
-                        </a:solidFill>
-                        <a:effectLst/>
-                        <a:latin typeface="+mn-lt"/>
-                      </a:endParaRPr>
-                    </a:p>
-                  </a:txBody>
-                  <a:tcPr marL="7823" marR="7823" marT="7823" marB="0" anchor="b"/>
-                </a:tc>
-                <a:tc>
-                  <a:txBody>
-                    <a:bodyPr/>
-                    <a:lstStyle/>
-                    <a:p>
-                      <a:pPr algn="r" fontAlgn="b"/>
-                      <a:r>
-                        <a:rPr lang="en-US" sz="1200" u="none" strike="noStrike">
-                          <a:effectLst/>
-                        </a:rPr>
                         <a:t>1.01</a:t>
                       </a:r>
                       <a:endParaRPr lang="en-US" sz="1200" b="0" i="0" u="none" strike="noStrike">
@@ -43486,29 +45325,6 @@
                         <a:rPr lang="en-US" sz="1200" u="none" strike="noStrike">
                           <a:effectLst/>
                         </a:rPr>
-                        <a:t>5</a:t>
-                      </a:r>
-                      <a:endParaRPr lang="en-US" sz="1200" b="0" i="0" u="none" strike="noStrike">
-                        <a:solidFill>
-                          <a:srgbClr val="000000"/>
-                        </a:solidFill>
-                        <a:effectLst/>
-                        <a:latin typeface="+mn-lt"/>
-                      </a:endParaRPr>
-                    </a:p>
-                  </a:txBody>
-                  <a:tcPr marL="7823" marR="7823" marT="7823" marB="0" anchor="b"/>
-                </a:tc>
-                <a:tc>
-                  <a:txBody>
-                    <a:bodyPr/>
-                    <a:lstStyle/>
-                    <a:p>
-                      <a:pPr algn="r" fontAlgn="b"/>
-                      <a:r>
-                        <a:rPr lang="en-US" sz="1200" u="none" strike="noStrike">
-                          <a:effectLst/>
-                        </a:rPr>
                         <a:t>-4.45</a:t>
                       </a:r>
                       <a:endParaRPr lang="en-US" sz="1200" b="0" i="0" u="none" strike="noStrike">
@@ -43779,29 +45595,6 @@
                         <a:rPr lang="en-US" sz="1200" u="none" strike="noStrike">
                           <a:effectLst/>
                         </a:rPr>
-                        <a:t>5</a:t>
-                      </a:r>
-                      <a:endParaRPr lang="en-US" sz="1200" b="0" i="0" u="none" strike="noStrike">
-                        <a:solidFill>
-                          <a:srgbClr val="000000"/>
-                        </a:solidFill>
-                        <a:effectLst/>
-                        <a:latin typeface="+mn-lt"/>
-                      </a:endParaRPr>
-                    </a:p>
-                  </a:txBody>
-                  <a:tcPr marL="7823" marR="7823" marT="7823" marB="0" anchor="b"/>
-                </a:tc>
-                <a:tc>
-                  <a:txBody>
-                    <a:bodyPr/>
-                    <a:lstStyle/>
-                    <a:p>
-                      <a:pPr algn="r" fontAlgn="b"/>
-                      <a:r>
-                        <a:rPr lang="en-US" sz="1200" u="none" strike="noStrike">
-                          <a:effectLst/>
-                        </a:rPr>
                         <a:t>-3.05</a:t>
                       </a:r>
                       <a:endParaRPr lang="en-US" sz="1200" b="0" i="0" u="none" strike="noStrike">
@@ -44072,29 +45865,6 @@
                         <a:rPr lang="en-US" sz="1200" u="none" strike="noStrike">
                           <a:effectLst/>
                         </a:rPr>
-                        <a:t>2</a:t>
-                      </a:r>
-                      <a:endParaRPr lang="en-US" sz="1200" b="0" i="0" u="none" strike="noStrike">
-                        <a:solidFill>
-                          <a:srgbClr val="000000"/>
-                        </a:solidFill>
-                        <a:effectLst/>
-                        <a:latin typeface="+mn-lt"/>
-                      </a:endParaRPr>
-                    </a:p>
-                  </a:txBody>
-                  <a:tcPr marL="7823" marR="7823" marT="7823" marB="0" anchor="b"/>
-                </a:tc>
-                <a:tc>
-                  <a:txBody>
-                    <a:bodyPr/>
-                    <a:lstStyle/>
-                    <a:p>
-                      <a:pPr algn="r" fontAlgn="b"/>
-                      <a:r>
-                        <a:rPr lang="en-US" sz="1200" u="none" strike="noStrike">
-                          <a:effectLst/>
-                        </a:rPr>
                         <a:t>-4.53</a:t>
                       </a:r>
                       <a:endParaRPr lang="en-US" sz="1200" b="0" i="0" u="none" strike="noStrike">
@@ -44354,29 +46124,6 @@
                     </a:p>
                   </a:txBody>
                   <a:tcPr marL="7823" marR="7823" marT="7823" marB="0"/>
-                </a:tc>
-                <a:tc>
-                  <a:txBody>
-                    <a:bodyPr/>
-                    <a:lstStyle/>
-                    <a:p>
-                      <a:pPr algn="r" fontAlgn="b"/>
-                      <a:r>
-                        <a:rPr lang="en-US" sz="1200" u="none" strike="noStrike">
-                          <a:effectLst/>
-                        </a:rPr>
-                        <a:t>6</a:t>
-                      </a:r>
-                      <a:endParaRPr lang="en-US" sz="1200" b="0" i="0" u="none" strike="noStrike">
-                        <a:solidFill>
-                          <a:srgbClr val="000000"/>
-                        </a:solidFill>
-                        <a:effectLst/>
-                        <a:latin typeface="+mn-lt"/>
-                      </a:endParaRPr>
-                    </a:p>
-                  </a:txBody>
-                  <a:tcPr marL="7823" marR="7823" marT="7823" marB="0" anchor="b"/>
                 </a:tc>
                 <a:tc>
                   <a:txBody>
@@ -44694,601 +46441,6 @@
       <p:transition spd="slow"/>
     </mc:Fallback>
   </mc:AlternateContent>
-  <p:timing>
-    <p:tnLst>
-      <p:par>
-        <p:cTn id="1" dur="indefinite" restart="never" nodeType="tmRoot"/>
-      </p:par>
-    </p:tnLst>
-  </p:timing>
-</p:sld>
-</file>
-
-<file path=ppt/slides/slide8.xml><?xml version="1.0" encoding="utf-8"?>
-<p:sld xmlns:a="http://schemas.openxmlformats.org/drawingml/2006/main" xmlns:r="http://schemas.openxmlformats.org/officeDocument/2006/relationships" xmlns:p="http://schemas.openxmlformats.org/presentationml/2006/main">
-  <p:cSld>
-    <p:spTree>
-      <p:nvGrpSpPr>
-        <p:cNvPr id="1" name=""/>
-        <p:cNvGrpSpPr/>
-        <p:nvPr/>
-      </p:nvGrpSpPr>
-      <p:grpSpPr>
-        <a:xfrm>
-          <a:off x="0" y="0"/>
-          <a:ext cx="0" cy="0"/>
-          <a:chOff x="0" y="0"/>
-          <a:chExt cx="0" cy="0"/>
-        </a:xfrm>
-      </p:grpSpPr>
-      <p:sp>
-        <p:nvSpPr>
-          <p:cNvPr id="2" name="Título 1"/>
-          <p:cNvSpPr>
-            <a:spLocks noGrp="1"/>
-          </p:cNvSpPr>
-          <p:nvPr>
-            <p:ph type="title"/>
-          </p:nvPr>
-        </p:nvSpPr>
-        <p:spPr/>
-        <p:txBody>
-          <a:bodyPr/>
-          <a:lstStyle/>
-          <a:p>
-            <a:r>
-              <a:rPr lang="es-MX" dirty="0" smtClean="0"/>
-              <a:t>ANALYSIS PER SPECIE</a:t>
-            </a:r>
-            <a:endParaRPr lang="en-US" dirty="0"/>
-          </a:p>
-        </p:txBody>
-      </p:sp>
-      <p:sp>
-        <p:nvSpPr>
-          <p:cNvPr id="3" name="Marcador de contenido 2"/>
-          <p:cNvSpPr>
-            <a:spLocks noGrp="1"/>
-          </p:cNvSpPr>
-          <p:nvPr>
-            <p:ph idx="1"/>
-          </p:nvPr>
-        </p:nvSpPr>
-        <p:spPr/>
-        <p:txBody>
-          <a:bodyPr>
-            <a:normAutofit/>
-          </a:bodyPr>
-          <a:lstStyle/>
-          <a:p>
-            <a:r>
-              <a:rPr lang="es-MX" dirty="0" smtClean="0"/>
-              <a:t>I </a:t>
-            </a:r>
-            <a:r>
-              <a:rPr lang="es-MX" dirty="0" err="1" smtClean="0"/>
-              <a:t>ran</a:t>
-            </a:r>
-            <a:r>
-              <a:rPr lang="es-MX" dirty="0" smtClean="0"/>
-              <a:t> ANOVA </a:t>
-            </a:r>
-            <a:r>
-              <a:rPr lang="es-MX" dirty="0" err="1" smtClean="0"/>
-              <a:t>interaction</a:t>
-            </a:r>
-            <a:r>
-              <a:rPr lang="es-MX" dirty="0" smtClean="0"/>
-              <a:t> </a:t>
-            </a:r>
-            <a:r>
-              <a:rPr lang="es-MX" dirty="0" err="1" smtClean="0"/>
-              <a:t>tests</a:t>
-            </a:r>
-            <a:r>
-              <a:rPr lang="es-MX" dirty="0" smtClean="0"/>
-              <a:t> per </a:t>
-            </a:r>
-            <a:r>
-              <a:rPr lang="es-MX" dirty="0" err="1" smtClean="0"/>
-              <a:t>species</a:t>
-            </a:r>
-            <a:r>
-              <a:rPr lang="es-MX" dirty="0" smtClean="0"/>
-              <a:t> – </a:t>
-            </a:r>
-            <a:r>
-              <a:rPr lang="es-MX" dirty="0" err="1" smtClean="0"/>
-              <a:t>not</a:t>
-            </a:r>
-            <a:r>
-              <a:rPr lang="es-MX" dirty="0" smtClean="0"/>
-              <a:t> </a:t>
-            </a:r>
-            <a:r>
-              <a:rPr lang="es-MX" dirty="0" err="1" smtClean="0"/>
-              <a:t>showed</a:t>
-            </a:r>
-            <a:r>
-              <a:rPr lang="es-MX" dirty="0" smtClean="0"/>
-              <a:t>- </a:t>
-            </a:r>
-            <a:r>
-              <a:rPr lang="es-MX" dirty="0" err="1" smtClean="0"/>
-              <a:t>but</a:t>
-            </a:r>
-            <a:r>
-              <a:rPr lang="es-MX" dirty="0" smtClean="0"/>
-              <a:t> </a:t>
-            </a:r>
-            <a:r>
-              <a:rPr lang="es-MX" dirty="0" err="1" smtClean="0"/>
-              <a:t>decided</a:t>
-            </a:r>
-            <a:r>
-              <a:rPr lang="es-MX" dirty="0" smtClean="0"/>
-              <a:t> to </a:t>
-            </a:r>
-            <a:r>
-              <a:rPr lang="es-MX" dirty="0" err="1" smtClean="0"/>
-              <a:t>go</a:t>
-            </a:r>
-            <a:r>
-              <a:rPr lang="es-MX" dirty="0" smtClean="0"/>
-              <a:t> </a:t>
-            </a:r>
-            <a:r>
-              <a:rPr lang="es-MX" dirty="0" err="1" smtClean="0"/>
-              <a:t>with</a:t>
-            </a:r>
-            <a:r>
-              <a:rPr lang="es-MX" dirty="0" smtClean="0"/>
-              <a:t> </a:t>
-            </a:r>
-            <a:r>
-              <a:rPr lang="es-MX" dirty="0" err="1" smtClean="0"/>
-              <a:t>glmm</a:t>
-            </a:r>
-            <a:r>
-              <a:rPr lang="es-MX" dirty="0" smtClean="0"/>
-              <a:t> </a:t>
-            </a:r>
-            <a:r>
-              <a:rPr lang="es-MX" dirty="0" err="1" smtClean="0"/>
-              <a:t>for</a:t>
-            </a:r>
-            <a:r>
-              <a:rPr lang="es-MX" dirty="0" smtClean="0"/>
-              <a:t> </a:t>
-            </a:r>
-            <a:r>
-              <a:rPr lang="es-MX" dirty="0" err="1" smtClean="0"/>
-              <a:t>their</a:t>
-            </a:r>
-            <a:r>
-              <a:rPr lang="es-MX" dirty="0" smtClean="0"/>
-              <a:t> </a:t>
-            </a:r>
-            <a:r>
-              <a:rPr lang="es-MX" dirty="0" err="1" smtClean="0"/>
-              <a:t>statistic</a:t>
-            </a:r>
-            <a:r>
-              <a:rPr lang="es-MX" dirty="0" smtClean="0"/>
-              <a:t> </a:t>
-            </a:r>
-            <a:r>
-              <a:rPr lang="es-MX" dirty="0" err="1" smtClean="0"/>
-              <a:t>power</a:t>
-            </a:r>
-            <a:r>
-              <a:rPr lang="es-MX" dirty="0" smtClean="0"/>
-              <a:t>. </a:t>
-            </a:r>
-            <a:endParaRPr lang="es-MX" dirty="0" smtClean="0"/>
-          </a:p>
-          <a:p>
-            <a:endParaRPr lang="es-MX" dirty="0" smtClean="0"/>
-          </a:p>
-          <a:p>
-            <a:pPr marL="0" indent="0">
-              <a:buNone/>
-            </a:pPr>
-            <a:r>
-              <a:rPr lang="es-MX" sz="4000" dirty="0" err="1" smtClean="0">
-                <a:solidFill>
-                  <a:schemeClr val="accent1"/>
-                </a:solidFill>
-              </a:rPr>
-              <a:t>lmer</a:t>
-            </a:r>
-            <a:r>
-              <a:rPr lang="es-MX" sz="4000" dirty="0" smtClean="0">
-                <a:solidFill>
-                  <a:schemeClr val="accent1"/>
-                </a:solidFill>
-              </a:rPr>
-              <a:t>(Response </a:t>
-            </a:r>
-            <a:r>
-              <a:rPr lang="es-MX" sz="4000" dirty="0">
-                <a:solidFill>
-                  <a:schemeClr val="accent1"/>
-                </a:solidFill>
-              </a:rPr>
-              <a:t>variable~ N * P + (1 | Block/</a:t>
-            </a:r>
-            <a:r>
-              <a:rPr lang="es-MX" sz="4000" dirty="0" err="1">
-                <a:solidFill>
-                  <a:schemeClr val="accent1"/>
-                </a:solidFill>
-              </a:rPr>
-              <a:t>Plot</a:t>
-            </a:r>
-            <a:r>
-              <a:rPr lang="es-MX" sz="4000" dirty="0" smtClean="0">
-                <a:solidFill>
-                  <a:schemeClr val="accent1"/>
-                </a:solidFill>
-              </a:rPr>
-              <a:t>))</a:t>
-            </a:r>
-          </a:p>
-          <a:p>
-            <a:pPr marL="0" indent="0">
-              <a:buNone/>
-            </a:pPr>
-            <a:endParaRPr lang="es-MX" sz="4000" b="1" dirty="0">
-              <a:solidFill>
-                <a:schemeClr val="accent1"/>
-              </a:solidFill>
-            </a:endParaRPr>
-          </a:p>
-          <a:p>
-            <a:r>
-              <a:rPr lang="es-MX" b="1" dirty="0" smtClean="0"/>
-              <a:t>Q-Q </a:t>
-            </a:r>
-            <a:r>
-              <a:rPr lang="es-MX" b="1" dirty="0" err="1" smtClean="0"/>
-              <a:t>plots</a:t>
-            </a:r>
-            <a:r>
-              <a:rPr lang="es-MX" b="1" dirty="0" smtClean="0"/>
-              <a:t> </a:t>
-            </a:r>
-            <a:r>
-              <a:rPr lang="es-MX" b="1" dirty="0" err="1" smtClean="0"/>
-              <a:t>evaluation</a:t>
-            </a:r>
-            <a:r>
-              <a:rPr lang="es-MX" b="1" dirty="0" smtClean="0"/>
-              <a:t> </a:t>
-            </a:r>
-            <a:r>
-              <a:rPr lang="es-MX" b="1" dirty="0" err="1" smtClean="0"/>
-              <a:t>but</a:t>
-            </a:r>
-            <a:r>
-              <a:rPr lang="es-MX" b="1" dirty="0" smtClean="0"/>
-              <a:t> </a:t>
-            </a:r>
-            <a:r>
-              <a:rPr lang="es-MX" b="1" dirty="0" err="1" smtClean="0"/>
-              <a:t>also</a:t>
-            </a:r>
-            <a:r>
-              <a:rPr lang="es-MX" b="1" dirty="0" smtClean="0"/>
-              <a:t> </a:t>
-            </a:r>
-            <a:r>
-              <a:rPr lang="es-MX" b="1" dirty="0" err="1" smtClean="0"/>
-              <a:t>integrating</a:t>
-            </a:r>
-            <a:r>
-              <a:rPr lang="es-MX" b="1" dirty="0" smtClean="0"/>
-              <a:t> </a:t>
-            </a:r>
-            <a:r>
-              <a:rPr lang="es-MX" b="1" dirty="0" err="1" smtClean="0"/>
-              <a:t>DHARMa</a:t>
-            </a:r>
-            <a:r>
-              <a:rPr lang="es-MX" b="1" dirty="0" smtClean="0"/>
-              <a:t> </a:t>
-            </a:r>
-            <a:r>
-              <a:rPr lang="es-MX" b="1" dirty="0" err="1" smtClean="0"/>
-              <a:t>analysis</a:t>
-            </a:r>
-            <a:r>
-              <a:rPr lang="es-MX" b="1" dirty="0" smtClean="0"/>
-              <a:t>- more </a:t>
-            </a:r>
-            <a:r>
-              <a:rPr lang="es-MX" b="1" dirty="0" err="1" smtClean="0"/>
-              <a:t>strict</a:t>
-            </a:r>
-            <a:r>
-              <a:rPr lang="es-MX" b="1" dirty="0" smtClean="0"/>
-              <a:t>. </a:t>
-            </a:r>
-            <a:endParaRPr lang="es-MX" dirty="0" smtClean="0"/>
-          </a:p>
-        </p:txBody>
-      </p:sp>
-    </p:spTree>
-    <p:extLst>
-      <p:ext uri="{BB962C8B-B14F-4D97-AF65-F5344CB8AC3E}">
-        <p14:creationId xmlns:p14="http://schemas.microsoft.com/office/powerpoint/2010/main" val="4267299257"/>
-      </p:ext>
-    </p:extLst>
-  </p:cSld>
-  <p:clrMapOvr>
-    <a:masterClrMapping/>
-  </p:clrMapOvr>
-  <p:timing>
-    <p:tnLst>
-      <p:par>
-        <p:cTn id="1" dur="indefinite" restart="never" nodeType="tmRoot"/>
-      </p:par>
-    </p:tnLst>
-  </p:timing>
-</p:sld>
-</file>
-
-<file path=ppt/slides/slide9.xml><?xml version="1.0" encoding="utf-8"?>
-<p:sld xmlns:a="http://schemas.openxmlformats.org/drawingml/2006/main" xmlns:r="http://schemas.openxmlformats.org/officeDocument/2006/relationships" xmlns:p="http://schemas.openxmlformats.org/presentationml/2006/main">
-  <p:cSld>
-    <p:spTree>
-      <p:nvGrpSpPr>
-        <p:cNvPr id="1" name=""/>
-        <p:cNvGrpSpPr/>
-        <p:nvPr/>
-      </p:nvGrpSpPr>
-      <p:grpSpPr>
-        <a:xfrm>
-          <a:off x="0" y="0"/>
-          <a:ext cx="0" cy="0"/>
-          <a:chOff x="0" y="0"/>
-          <a:chExt cx="0" cy="0"/>
-        </a:xfrm>
-      </p:grpSpPr>
-      <p:sp>
-        <p:nvSpPr>
-          <p:cNvPr id="5" name="Rectángulo 4"/>
-          <p:cNvSpPr/>
-          <p:nvPr/>
-        </p:nvSpPr>
-        <p:spPr>
-          <a:xfrm>
-            <a:off x="667512" y="164030"/>
-            <a:ext cx="1691640" cy="402898"/>
-          </a:xfrm>
-          <a:prstGeom prst="rect">
-            <a:avLst/>
-          </a:prstGeom>
-        </p:spPr>
-        <p:style>
-          <a:lnRef idx="2">
-            <a:schemeClr val="accent1">
-              <a:shade val="50000"/>
-            </a:schemeClr>
-          </a:lnRef>
-          <a:fillRef idx="1">
-            <a:schemeClr val="accent1"/>
-          </a:fillRef>
-          <a:effectRef idx="0">
-            <a:schemeClr val="accent1"/>
-          </a:effectRef>
-          <a:fontRef idx="minor">
-            <a:schemeClr val="lt1"/>
-          </a:fontRef>
-        </p:style>
-        <p:txBody>
-          <a:bodyPr rtlCol="0" anchor="ctr"/>
-          <a:lstStyle/>
-          <a:p>
-            <a:pPr algn="ctr"/>
-            <a:r>
-              <a:rPr lang="es-MX" dirty="0" smtClean="0"/>
-              <a:t>*</a:t>
-            </a:r>
-            <a:r>
-              <a:rPr lang="es-MX" dirty="0" err="1" smtClean="0"/>
-              <a:t>Missing</a:t>
-            </a:r>
-            <a:r>
-              <a:rPr lang="es-MX" dirty="0" smtClean="0"/>
-              <a:t> </a:t>
-            </a:r>
-            <a:r>
-              <a:rPr lang="es-MX" dirty="0" err="1" smtClean="0"/>
-              <a:t>values</a:t>
-            </a:r>
-            <a:endParaRPr lang="en-US" dirty="0"/>
-          </a:p>
-        </p:txBody>
-      </p:sp>
-      <p:pic>
-        <p:nvPicPr>
-          <p:cNvPr id="17" name="Imagen 16"/>
-          <p:cNvPicPr>
-            <a:picLocks noChangeAspect="1"/>
-          </p:cNvPicPr>
-          <p:nvPr/>
-        </p:nvPicPr>
-        <p:blipFill>
-          <a:blip r:embed="rId3"/>
-          <a:stretch>
-            <a:fillRect/>
-          </a:stretch>
-        </p:blipFill>
-        <p:spPr>
-          <a:xfrm>
-            <a:off x="327089" y="1108708"/>
-            <a:ext cx="5662232" cy="4640584"/>
-          </a:xfrm>
-          <a:prstGeom prst="rect">
-            <a:avLst/>
-          </a:prstGeom>
-        </p:spPr>
-      </p:pic>
-      <p:pic>
-        <p:nvPicPr>
-          <p:cNvPr id="21" name="Imagen 20"/>
-          <p:cNvPicPr>
-            <a:picLocks noChangeAspect="1"/>
-          </p:cNvPicPr>
-          <p:nvPr/>
-        </p:nvPicPr>
-        <p:blipFill>
-          <a:blip r:embed="rId4"/>
-          <a:stretch>
-            <a:fillRect/>
-          </a:stretch>
-        </p:blipFill>
-        <p:spPr>
-          <a:xfrm>
-            <a:off x="6096000" y="1200148"/>
-            <a:ext cx="5680746" cy="4661681"/>
-          </a:xfrm>
-          <a:prstGeom prst="rect">
-            <a:avLst/>
-          </a:prstGeom>
-        </p:spPr>
-      </p:pic>
-      <p:sp>
-        <p:nvSpPr>
-          <p:cNvPr id="22" name="CuadroTexto 21"/>
-          <p:cNvSpPr txBox="1"/>
-          <p:nvPr/>
-        </p:nvSpPr>
-        <p:spPr>
-          <a:xfrm>
-            <a:off x="1068801" y="3793116"/>
-            <a:ext cx="274320" cy="369332"/>
-          </a:xfrm>
-          <a:prstGeom prst="rect">
-            <a:avLst/>
-          </a:prstGeom>
-          <a:noFill/>
-        </p:spPr>
-        <p:txBody>
-          <a:bodyPr wrap="square" rtlCol="0">
-            <a:spAutoFit/>
-          </a:bodyPr>
-          <a:lstStyle/>
-          <a:p>
-            <a:r>
-              <a:rPr lang="es-MX" dirty="0" smtClean="0"/>
-              <a:t>*</a:t>
-            </a:r>
-            <a:endParaRPr lang="en-US" dirty="0"/>
-          </a:p>
-        </p:txBody>
-      </p:sp>
-      <p:sp>
-        <p:nvSpPr>
-          <p:cNvPr id="23" name="CuadroTexto 22"/>
-          <p:cNvSpPr txBox="1"/>
-          <p:nvPr/>
-        </p:nvSpPr>
-        <p:spPr>
-          <a:xfrm>
-            <a:off x="2359152" y="3793116"/>
-            <a:ext cx="274320" cy="369332"/>
-          </a:xfrm>
-          <a:prstGeom prst="rect">
-            <a:avLst/>
-          </a:prstGeom>
-          <a:noFill/>
-        </p:spPr>
-        <p:txBody>
-          <a:bodyPr wrap="square" rtlCol="0">
-            <a:spAutoFit/>
-          </a:bodyPr>
-          <a:lstStyle/>
-          <a:p>
-            <a:r>
-              <a:rPr lang="es-MX" dirty="0" smtClean="0"/>
-              <a:t>*</a:t>
-            </a:r>
-            <a:endParaRPr lang="en-US" dirty="0"/>
-          </a:p>
-        </p:txBody>
-      </p:sp>
-      <p:sp>
-        <p:nvSpPr>
-          <p:cNvPr id="24" name="CuadroTexto 23"/>
-          <p:cNvSpPr txBox="1"/>
-          <p:nvPr/>
-        </p:nvSpPr>
-        <p:spPr>
-          <a:xfrm>
-            <a:off x="7641336" y="3977782"/>
-            <a:ext cx="274320" cy="369332"/>
-          </a:xfrm>
-          <a:prstGeom prst="rect">
-            <a:avLst/>
-          </a:prstGeom>
-          <a:noFill/>
-        </p:spPr>
-        <p:txBody>
-          <a:bodyPr wrap="square" rtlCol="0">
-            <a:spAutoFit/>
-          </a:bodyPr>
-          <a:lstStyle/>
-          <a:p>
-            <a:r>
-              <a:rPr lang="es-MX" dirty="0" smtClean="0"/>
-              <a:t>*</a:t>
-            </a:r>
-            <a:endParaRPr lang="en-US" dirty="0"/>
-          </a:p>
-        </p:txBody>
-      </p:sp>
-      <p:sp>
-        <p:nvSpPr>
-          <p:cNvPr id="25" name="CuadroTexto 24"/>
-          <p:cNvSpPr txBox="1"/>
-          <p:nvPr/>
-        </p:nvSpPr>
-        <p:spPr>
-          <a:xfrm>
-            <a:off x="8936373" y="1688734"/>
-            <a:ext cx="274320" cy="369332"/>
-          </a:xfrm>
-          <a:prstGeom prst="rect">
-            <a:avLst/>
-          </a:prstGeom>
-          <a:noFill/>
-        </p:spPr>
-        <p:txBody>
-          <a:bodyPr wrap="square" rtlCol="0">
-            <a:spAutoFit/>
-          </a:bodyPr>
-          <a:lstStyle/>
-          <a:p>
-            <a:r>
-              <a:rPr lang="es-MX" dirty="0" smtClean="0"/>
-              <a:t>*</a:t>
-            </a:r>
-            <a:endParaRPr lang="en-US" dirty="0"/>
-          </a:p>
-        </p:txBody>
-      </p:sp>
-    </p:spTree>
-    <p:extLst>
-      <p:ext uri="{BB962C8B-B14F-4D97-AF65-F5344CB8AC3E}">
-        <p14:creationId xmlns:p14="http://schemas.microsoft.com/office/powerpoint/2010/main" val="2380233219"/>
-      </p:ext>
-    </p:extLst>
-  </p:cSld>
-  <p:clrMapOvr>
-    <a:masterClrMapping/>
-  </p:clrMapOvr>
   <p:timing>
     <p:tnLst>
       <p:par>

--- a/NUMEX_pre_RStudio/NUMEX results.pptx
+++ b/NUMEX_pre_RStudio/NUMEX results.pptx
@@ -5,7 +5,7 @@
     <p:sldMasterId id="2147483648" r:id="rId1"/>
   </p:sldMasterIdLst>
   <p:notesMasterIdLst>
-    <p:notesMasterId r:id="rId32"/>
+    <p:notesMasterId r:id="rId31"/>
   </p:notesMasterIdLst>
   <p:sldIdLst>
     <p:sldId id="266" r:id="rId2"/>
@@ -19,25 +19,24 @@
     <p:sldId id="269" r:id="rId10"/>
     <p:sldId id="272" r:id="rId11"/>
     <p:sldId id="259" r:id="rId12"/>
-    <p:sldId id="286" r:id="rId13"/>
-    <p:sldId id="287" r:id="rId14"/>
-    <p:sldId id="284" r:id="rId15"/>
-    <p:sldId id="261" r:id="rId16"/>
-    <p:sldId id="260" r:id="rId17"/>
-    <p:sldId id="273" r:id="rId18"/>
-    <p:sldId id="274" r:id="rId19"/>
-    <p:sldId id="275" r:id="rId20"/>
-    <p:sldId id="288" r:id="rId21"/>
-    <p:sldId id="276" r:id="rId22"/>
-    <p:sldId id="277" r:id="rId23"/>
-    <p:sldId id="281" r:id="rId24"/>
-    <p:sldId id="278" r:id="rId25"/>
-    <p:sldId id="289" r:id="rId26"/>
-    <p:sldId id="290" r:id="rId27"/>
-    <p:sldId id="270" r:id="rId28"/>
-    <p:sldId id="257" r:id="rId29"/>
-    <p:sldId id="256" r:id="rId30"/>
-    <p:sldId id="280" r:id="rId31"/>
+    <p:sldId id="287" r:id="rId13"/>
+    <p:sldId id="284" r:id="rId14"/>
+    <p:sldId id="261" r:id="rId15"/>
+    <p:sldId id="260" r:id="rId16"/>
+    <p:sldId id="273" r:id="rId17"/>
+    <p:sldId id="274" r:id="rId18"/>
+    <p:sldId id="275" r:id="rId19"/>
+    <p:sldId id="288" r:id="rId20"/>
+    <p:sldId id="276" r:id="rId21"/>
+    <p:sldId id="277" r:id="rId22"/>
+    <p:sldId id="281" r:id="rId23"/>
+    <p:sldId id="278" r:id="rId24"/>
+    <p:sldId id="289" r:id="rId25"/>
+    <p:sldId id="290" r:id="rId26"/>
+    <p:sldId id="270" r:id="rId27"/>
+    <p:sldId id="257" r:id="rId28"/>
+    <p:sldId id="256" r:id="rId29"/>
+    <p:sldId id="280" r:id="rId30"/>
   </p:sldIdLst>
   <p:sldSz cx="12192000" cy="6858000"/>
   <p:notesSz cx="6858000" cy="9144000"/>
@@ -634,17 +633,47 @@
           <a:lstStyle/>
           <a:p>
             <a:r>
-              <a:rPr lang="es-MX" dirty="0" smtClean="0"/>
-              <a:t>U </a:t>
-            </a:r>
-            <a:r>
               <a:rPr lang="es-MX" dirty="0" err="1" smtClean="0"/>
-              <a:t>shaped</a:t>
-            </a:r>
-            <a:r>
-              <a:rPr lang="es-MX" dirty="0" smtClean="0"/>
+              <a:t>Not</a:t>
+            </a:r>
+            <a:r>
+              <a:rPr lang="es-MX" baseline="0" dirty="0" smtClean="0"/>
+              <a:t> </a:t>
+            </a:r>
+            <a:r>
+              <a:rPr lang="es-MX" baseline="0" dirty="0" err="1" smtClean="0"/>
+              <a:t>sure</a:t>
+            </a:r>
+            <a:r>
+              <a:rPr lang="es-MX" baseline="0" dirty="0" smtClean="0"/>
+              <a:t> </a:t>
+            </a:r>
+            <a:r>
+              <a:rPr lang="es-MX" baseline="0" dirty="0" err="1" smtClean="0"/>
+              <a:t>how</a:t>
+            </a:r>
+            <a:r>
+              <a:rPr lang="es-MX" baseline="0" dirty="0" smtClean="0"/>
+              <a:t> to </a:t>
+            </a:r>
+            <a:r>
+              <a:rPr lang="es-MX" baseline="0" dirty="0" err="1" smtClean="0"/>
+              <a:t>model</a:t>
+            </a:r>
+            <a:r>
+              <a:rPr lang="es-MX" baseline="0" dirty="0" smtClean="0"/>
+              <a:t> </a:t>
+            </a:r>
+            <a:r>
+              <a:rPr lang="es-MX" baseline="0" dirty="0" err="1" smtClean="0"/>
+              <a:t>them</a:t>
+            </a:r>
+            <a:r>
+              <a:rPr lang="es-MX" baseline="0" dirty="0" smtClean="0"/>
               <a:t>.</a:t>
             </a:r>
+          </a:p>
+          <a:p>
             <a:endParaRPr lang="en-US" dirty="0"/>
           </a:p>
         </p:txBody>
@@ -666,7 +695,7 @@
           <a:p>
             <a:fld id="{FB953BC2-43C1-4767-ADF3-5E906A4AA839}" type="slidenum">
               <a:rPr lang="en-US" smtClean="0"/>
-              <a:t>19</a:t>
+              <a:t>20</a:t>
             </a:fld>
             <a:endParaRPr lang="en-US"/>
           </a:p>
@@ -675,7 +704,7 @@
     </p:spTree>
     <p:extLst>
       <p:ext uri="{BB962C8B-B14F-4D97-AF65-F5344CB8AC3E}">
-        <p14:creationId xmlns:p14="http://schemas.microsoft.com/office/powerpoint/2010/main" val="2152417619"/>
+        <p14:creationId xmlns:p14="http://schemas.microsoft.com/office/powerpoint/2010/main" val="3661237908"/>
       </p:ext>
     </p:extLst>
   </p:cSld>
@@ -730,47 +759,9 @@
           <a:lstStyle/>
           <a:p>
             <a:r>
-              <a:rPr lang="es-MX" dirty="0" err="1" smtClean="0"/>
-              <a:t>Not</a:t>
-            </a:r>
-            <a:r>
-              <a:rPr lang="es-MX" baseline="0" dirty="0" smtClean="0"/>
-              <a:t> </a:t>
-            </a:r>
-            <a:r>
-              <a:rPr lang="es-MX" baseline="0" dirty="0" err="1" smtClean="0"/>
-              <a:t>sure</a:t>
-            </a:r>
-            <a:r>
-              <a:rPr lang="es-MX" baseline="0" dirty="0" smtClean="0"/>
-              <a:t> </a:t>
-            </a:r>
-            <a:r>
-              <a:rPr lang="es-MX" baseline="0" dirty="0" err="1" smtClean="0"/>
-              <a:t>how</a:t>
-            </a:r>
-            <a:r>
-              <a:rPr lang="es-MX" baseline="0" dirty="0" smtClean="0"/>
-              <a:t> to </a:t>
-            </a:r>
-            <a:r>
-              <a:rPr lang="es-MX" baseline="0" dirty="0" err="1" smtClean="0"/>
-              <a:t>model</a:t>
-            </a:r>
-            <a:r>
-              <a:rPr lang="es-MX" baseline="0" dirty="0" smtClean="0"/>
-              <a:t> </a:t>
-            </a:r>
-            <a:r>
-              <a:rPr lang="es-MX" baseline="0" dirty="0" err="1" smtClean="0"/>
-              <a:t>them</a:t>
-            </a:r>
-            <a:r>
-              <a:rPr lang="es-MX" baseline="0" dirty="0" smtClean="0"/>
-              <a:t>.</a:t>
-            </a:r>
-          </a:p>
-          <a:p>
+              <a:rPr lang="es-MX" dirty="0" smtClean="0"/>
+              <a:t>Con flecha errores</a:t>
+            </a:r>
             <a:endParaRPr lang="en-US" dirty="0"/>
           </a:p>
         </p:txBody>
@@ -801,7 +792,7 @@
     </p:spTree>
     <p:extLst>
       <p:ext uri="{BB962C8B-B14F-4D97-AF65-F5344CB8AC3E}">
-        <p14:creationId xmlns:p14="http://schemas.microsoft.com/office/powerpoint/2010/main" val="3661237908"/>
+        <p14:creationId xmlns:p14="http://schemas.microsoft.com/office/powerpoint/2010/main" val="3928284802"/>
       </p:ext>
     </p:extLst>
   </p:cSld>
@@ -857,7 +848,95 @@
           <a:p>
             <a:r>
               <a:rPr lang="es-MX" dirty="0" smtClean="0"/>
-              <a:t>Con flecha errores</a:t>
+              <a:t>Clear </a:t>
+            </a:r>
+            <a:r>
+              <a:rPr lang="es-MX" dirty="0" err="1" smtClean="0"/>
+              <a:t>differences</a:t>
+            </a:r>
+            <a:r>
+              <a:rPr lang="es-MX" dirty="0" smtClean="0"/>
+              <a:t> </a:t>
+            </a:r>
+            <a:r>
+              <a:rPr lang="es-MX" dirty="0" err="1" smtClean="0"/>
+              <a:t>between</a:t>
+            </a:r>
+            <a:r>
+              <a:rPr lang="es-MX" dirty="0" smtClean="0"/>
+              <a:t> </a:t>
+            </a:r>
+            <a:r>
+              <a:rPr lang="es-MX" dirty="0" err="1" smtClean="0"/>
+              <a:t>elevations</a:t>
+            </a:r>
+            <a:r>
+              <a:rPr lang="es-MX" dirty="0" smtClean="0"/>
+              <a:t>. </a:t>
+            </a:r>
+            <a:r>
+              <a:rPr lang="es-MX" dirty="0" err="1" smtClean="0"/>
+              <a:t>Higher</a:t>
+            </a:r>
+            <a:r>
+              <a:rPr lang="es-MX" dirty="0" smtClean="0"/>
+              <a:t> O18 </a:t>
+            </a:r>
+            <a:r>
+              <a:rPr lang="es-MX" dirty="0" err="1" smtClean="0"/>
+              <a:t>enrichment</a:t>
+            </a:r>
+            <a:r>
+              <a:rPr lang="es-MX" dirty="0" smtClean="0"/>
+              <a:t> in </a:t>
+            </a:r>
+            <a:r>
+              <a:rPr lang="es-MX" dirty="0" err="1" smtClean="0"/>
+              <a:t>the</a:t>
+            </a:r>
+            <a:r>
+              <a:rPr lang="es-MX" dirty="0" smtClean="0"/>
+              <a:t> </a:t>
+            </a:r>
+            <a:r>
+              <a:rPr lang="es-MX" dirty="0" err="1" smtClean="0"/>
+              <a:t>lowlands</a:t>
+            </a:r>
+            <a:r>
+              <a:rPr lang="es-MX" dirty="0" smtClean="0"/>
+              <a:t> and at 2000 m – </a:t>
+            </a:r>
+            <a:r>
+              <a:rPr lang="es-MX" dirty="0" err="1" smtClean="0"/>
+              <a:t>associated</a:t>
+            </a:r>
+            <a:r>
+              <a:rPr lang="es-MX" dirty="0" smtClean="0"/>
+              <a:t> </a:t>
+            </a:r>
+            <a:r>
+              <a:rPr lang="es-MX" dirty="0" err="1" smtClean="0"/>
+              <a:t>with</a:t>
+            </a:r>
+            <a:r>
+              <a:rPr lang="es-MX" dirty="0" smtClean="0"/>
+              <a:t> </a:t>
+            </a:r>
+            <a:r>
+              <a:rPr lang="es-MX" dirty="0" err="1" smtClean="0"/>
+              <a:t>higher</a:t>
+            </a:r>
+            <a:r>
+              <a:rPr lang="es-MX" dirty="0" smtClean="0"/>
+              <a:t> </a:t>
+            </a:r>
+            <a:r>
+              <a:rPr lang="es-MX" dirty="0" err="1" smtClean="0"/>
+              <a:t>transpiration</a:t>
+            </a:r>
+            <a:r>
+              <a:rPr lang="es-MX" dirty="0" smtClean="0"/>
+              <a:t>. </a:t>
             </a:r>
             <a:endParaRPr lang="en-US" dirty="0"/>
           </a:p>
@@ -880,7 +959,7 @@
           <a:p>
             <a:fld id="{FB953BC2-43C1-4767-ADF3-5E906A4AA839}" type="slidenum">
               <a:rPr lang="en-US" smtClean="0"/>
-              <a:t>22</a:t>
+              <a:t>27</a:t>
             </a:fld>
             <a:endParaRPr lang="en-US"/>
           </a:p>
@@ -889,7 +968,7 @@
     </p:spTree>
     <p:extLst>
       <p:ext uri="{BB962C8B-B14F-4D97-AF65-F5344CB8AC3E}">
-        <p14:creationId xmlns:p14="http://schemas.microsoft.com/office/powerpoint/2010/main" val="3928284802"/>
+        <p14:creationId xmlns:p14="http://schemas.microsoft.com/office/powerpoint/2010/main" val="1680979971"/>
       </p:ext>
     </p:extLst>
   </p:cSld>
@@ -944,96 +1023,180 @@
           <a:lstStyle/>
           <a:p>
             <a:r>
-              <a:rPr lang="es-MX" dirty="0" smtClean="0"/>
-              <a:t>Clear </a:t>
-            </a:r>
-            <a:r>
               <a:rPr lang="es-MX" dirty="0" err="1" smtClean="0"/>
-              <a:t>differences</a:t>
-            </a:r>
-            <a:r>
-              <a:rPr lang="es-MX" dirty="0" smtClean="0"/>
+              <a:t>Effects</a:t>
+            </a:r>
+            <a:r>
+              <a:rPr lang="es-MX" baseline="0" dirty="0" smtClean="0"/>
+              <a:t> of </a:t>
+            </a:r>
+            <a:r>
+              <a:rPr lang="es-MX" baseline="0" dirty="0" err="1" smtClean="0"/>
+              <a:t>treatment</a:t>
+            </a:r>
+            <a:r>
+              <a:rPr lang="es-MX" baseline="0" dirty="0" smtClean="0"/>
+              <a:t> in </a:t>
+            </a:r>
+            <a:r>
+              <a:rPr lang="es-MX" baseline="0" dirty="0" err="1" smtClean="0"/>
+              <a:t>Pouteria</a:t>
+            </a:r>
+            <a:r>
+              <a:rPr lang="es-MX" baseline="0" dirty="0" smtClean="0"/>
+              <a:t>, </a:t>
+            </a:r>
+            <a:r>
+              <a:rPr lang="es-MX" baseline="0" dirty="0" err="1" smtClean="0"/>
+              <a:t>Alchornea</a:t>
+            </a:r>
+            <a:r>
+              <a:rPr lang="es-MX" baseline="0" dirty="0" smtClean="0"/>
+              <a:t>, </a:t>
+            </a:r>
+            <a:r>
+              <a:rPr lang="es-MX" baseline="0" dirty="0" err="1" smtClean="0"/>
+              <a:t>Hedyosmum</a:t>
+            </a:r>
+            <a:r>
+              <a:rPr lang="es-MX" baseline="0" dirty="0" smtClean="0"/>
+              <a:t>. </a:t>
+            </a:r>
+            <a:r>
+              <a:rPr lang="es-MX" baseline="0" dirty="0" err="1" smtClean="0"/>
+              <a:t>Not</a:t>
+            </a:r>
+            <a:r>
+              <a:rPr lang="es-MX" baseline="0" dirty="0" smtClean="0"/>
               <a:t> </a:t>
             </a:r>
             <a:r>
-              <a:rPr lang="es-MX" dirty="0" err="1" smtClean="0"/>
-              <a:t>between</a:t>
-            </a:r>
-            <a:r>
-              <a:rPr lang="es-MX" dirty="0" smtClean="0"/>
+              <a:rPr lang="es-MX" baseline="0" dirty="0" err="1" smtClean="0"/>
+              <a:t>sure</a:t>
+            </a:r>
+            <a:r>
+              <a:rPr lang="es-MX" baseline="0" dirty="0" smtClean="0"/>
               <a:t> </a:t>
             </a:r>
             <a:r>
-              <a:rPr lang="es-MX" dirty="0" err="1" smtClean="0"/>
-              <a:t>elevations</a:t>
-            </a:r>
-            <a:r>
-              <a:rPr lang="es-MX" dirty="0" smtClean="0"/>
+              <a:rPr lang="es-MX" baseline="0" dirty="0" err="1" smtClean="0"/>
+              <a:t>if</a:t>
+            </a:r>
+            <a:r>
+              <a:rPr lang="es-MX" baseline="0" dirty="0" smtClean="0"/>
+              <a:t> </a:t>
+            </a:r>
+            <a:r>
+              <a:rPr lang="es-MX" baseline="0" dirty="0" err="1" smtClean="0"/>
+              <a:t>these</a:t>
+            </a:r>
+            <a:r>
+              <a:rPr lang="es-MX" baseline="0" dirty="0" smtClean="0"/>
+              <a:t> </a:t>
+            </a:r>
+            <a:r>
+              <a:rPr lang="es-MX" baseline="0" dirty="0" err="1" smtClean="0"/>
+              <a:t>graphics</a:t>
+            </a:r>
+            <a:r>
+              <a:rPr lang="es-MX" baseline="0" dirty="0" smtClean="0"/>
+              <a:t> are </a:t>
+            </a:r>
+            <a:r>
+              <a:rPr lang="es-MX" baseline="0" dirty="0" err="1" smtClean="0"/>
+              <a:t>actually</a:t>
+            </a:r>
+            <a:r>
+              <a:rPr lang="es-MX" baseline="0" dirty="0" smtClean="0"/>
+              <a:t> </a:t>
+            </a:r>
+            <a:r>
+              <a:rPr lang="es-MX" baseline="0" dirty="0" err="1" smtClean="0"/>
+              <a:t>useful</a:t>
+            </a:r>
+            <a:r>
+              <a:rPr lang="es-MX" baseline="0" dirty="0" smtClean="0"/>
               <a:t>. </a:t>
             </a:r>
             <a:r>
-              <a:rPr lang="es-MX" dirty="0" err="1" smtClean="0"/>
-              <a:t>Higher</a:t>
-            </a:r>
-            <a:r>
-              <a:rPr lang="es-MX" dirty="0" smtClean="0"/>
-              <a:t> O18 </a:t>
-            </a:r>
-            <a:r>
-              <a:rPr lang="es-MX" dirty="0" err="1" smtClean="0"/>
-              <a:t>enrichment</a:t>
-            </a:r>
-            <a:r>
-              <a:rPr lang="es-MX" dirty="0" smtClean="0"/>
-              <a:t> in </a:t>
-            </a:r>
-            <a:r>
-              <a:rPr lang="es-MX" dirty="0" err="1" smtClean="0"/>
+              <a:rPr lang="es-MX" baseline="0" dirty="0" err="1" smtClean="0"/>
+              <a:t>Dotted</a:t>
+            </a:r>
+            <a:r>
+              <a:rPr lang="es-MX" baseline="0" dirty="0" smtClean="0"/>
+              <a:t> </a:t>
+            </a:r>
+            <a:r>
+              <a:rPr lang="es-MX" baseline="0" dirty="0" err="1" smtClean="0"/>
+              <a:t>lines</a:t>
+            </a:r>
+            <a:r>
+              <a:rPr lang="es-MX" baseline="0" dirty="0" smtClean="0"/>
+              <a:t> are </a:t>
+            </a:r>
+            <a:r>
+              <a:rPr lang="es-MX" baseline="0" dirty="0" err="1" smtClean="0"/>
               <a:t>the</a:t>
             </a:r>
             <a:r>
-              <a:rPr lang="es-MX" dirty="0" smtClean="0"/>
+              <a:rPr lang="es-MX" baseline="0" dirty="0" smtClean="0"/>
               <a:t> </a:t>
             </a:r>
             <a:r>
-              <a:rPr lang="es-MX" dirty="0" err="1" smtClean="0"/>
-              <a:t>lowlands</a:t>
-            </a:r>
-            <a:r>
-              <a:rPr lang="es-MX" dirty="0" smtClean="0"/>
-              <a:t> and at 2000 m – </a:t>
-            </a:r>
-            <a:r>
-              <a:rPr lang="es-MX" dirty="0" err="1" smtClean="0"/>
-              <a:t>associated</a:t>
-            </a:r>
-            <a:r>
-              <a:rPr lang="es-MX" dirty="0" smtClean="0"/>
+              <a:rPr lang="es-MX" baseline="0" dirty="0" err="1" smtClean="0"/>
+              <a:t>means</a:t>
+            </a:r>
+            <a:r>
+              <a:rPr lang="es-MX" baseline="0" dirty="0" smtClean="0"/>
+              <a:t> of </a:t>
+            </a:r>
+            <a:r>
+              <a:rPr lang="es-MX" baseline="0" dirty="0" err="1" smtClean="0"/>
+              <a:t>the</a:t>
+            </a:r>
+            <a:r>
+              <a:rPr lang="es-MX" baseline="0" dirty="0" smtClean="0"/>
+              <a:t> control. </a:t>
+            </a:r>
+            <a:r>
+              <a:rPr lang="es-MX" baseline="0" dirty="0" err="1" smtClean="0"/>
+              <a:t>Maybe</a:t>
+            </a:r>
+            <a:r>
+              <a:rPr lang="es-MX" baseline="0" dirty="0" smtClean="0"/>
+              <a:t> I </a:t>
+            </a:r>
+            <a:r>
+              <a:rPr lang="es-MX" baseline="0" dirty="0" err="1" smtClean="0"/>
+              <a:t>should</a:t>
+            </a:r>
+            <a:r>
+              <a:rPr lang="es-MX" baseline="0" dirty="0" smtClean="0"/>
               <a:t> </a:t>
             </a:r>
             <a:r>
-              <a:rPr lang="es-MX" dirty="0" err="1" smtClean="0"/>
-              <a:t>with</a:t>
-            </a:r>
-            <a:r>
-              <a:rPr lang="es-MX" dirty="0" smtClean="0"/>
+              <a:rPr lang="es-MX" baseline="0" dirty="0" err="1" smtClean="0"/>
+              <a:t>plot</a:t>
+            </a:r>
+            <a:r>
+              <a:rPr lang="es-MX" baseline="0" dirty="0" smtClean="0"/>
               <a:t> </a:t>
             </a:r>
             <a:r>
-              <a:rPr lang="es-MX" dirty="0" err="1" smtClean="0"/>
-              <a:t>higher</a:t>
-            </a:r>
-            <a:r>
-              <a:rPr lang="es-MX" dirty="0" smtClean="0"/>
-              <a:t> </a:t>
-            </a:r>
-            <a:r>
-              <a:rPr lang="es-MX" dirty="0" err="1" smtClean="0"/>
-              <a:t>transpiration</a:t>
-            </a:r>
-            <a:r>
-              <a:rPr lang="es-MX" dirty="0" smtClean="0"/>
-              <a:t>. </a:t>
+              <a:rPr lang="es-MX" baseline="0" dirty="0" err="1" smtClean="0"/>
+              <a:t>the</a:t>
+            </a:r>
+            <a:r>
+              <a:rPr lang="es-MX" baseline="0" dirty="0" smtClean="0"/>
+              <a:t> center </a:t>
+            </a:r>
+            <a:r>
+              <a:rPr lang="es-MX" baseline="0" dirty="0" err="1" smtClean="0"/>
+              <a:t>instead</a:t>
+            </a:r>
+            <a:r>
+              <a:rPr lang="es-MX" baseline="0" dirty="0" smtClean="0"/>
+              <a:t>?</a:t>
             </a:r>
             <a:endParaRPr lang="en-US" dirty="0"/>
           </a:p>
@@ -1057,266 +1220,6 @@
             <a:fld id="{FB953BC2-43C1-4767-ADF3-5E906A4AA839}" type="slidenum">
               <a:rPr lang="en-US" smtClean="0"/>
               <a:t>28</a:t>
-            </a:fld>
-            <a:endParaRPr lang="en-US"/>
-          </a:p>
-        </p:txBody>
-      </p:sp>
-    </p:spTree>
-    <p:extLst>
-      <p:ext uri="{BB962C8B-B14F-4D97-AF65-F5344CB8AC3E}">
-        <p14:creationId xmlns:p14="http://schemas.microsoft.com/office/powerpoint/2010/main" val="1680979971"/>
-      </p:ext>
-    </p:extLst>
-  </p:cSld>
-  <p:clrMapOvr>
-    <a:masterClrMapping/>
-  </p:clrMapOvr>
-</p:notes>
-</file>
-
-<file path=ppt/notesSlides/notesSlide14.xml><?xml version="1.0" encoding="utf-8"?>
-<p:notes xmlns:a="http://schemas.openxmlformats.org/drawingml/2006/main" xmlns:r="http://schemas.openxmlformats.org/officeDocument/2006/relationships" xmlns:p="http://schemas.openxmlformats.org/presentationml/2006/main">
-  <p:cSld>
-    <p:spTree>
-      <p:nvGrpSpPr>
-        <p:cNvPr id="1" name=""/>
-        <p:cNvGrpSpPr/>
-        <p:nvPr/>
-      </p:nvGrpSpPr>
-      <p:grpSpPr>
-        <a:xfrm>
-          <a:off x="0" y="0"/>
-          <a:ext cx="0" cy="0"/>
-          <a:chOff x="0" y="0"/>
-          <a:chExt cx="0" cy="0"/>
-        </a:xfrm>
-      </p:grpSpPr>
-      <p:sp>
-        <p:nvSpPr>
-          <p:cNvPr id="2" name="Marcador de imagen de diapositiva 1"/>
-          <p:cNvSpPr>
-            <a:spLocks noGrp="1" noRot="1" noChangeAspect="1"/>
-          </p:cNvSpPr>
-          <p:nvPr>
-            <p:ph type="sldImg"/>
-          </p:nvPr>
-        </p:nvSpPr>
-        <p:spPr/>
-      </p:sp>
-      <p:sp>
-        <p:nvSpPr>
-          <p:cNvPr id="3" name="Marcador de notas 2"/>
-          <p:cNvSpPr>
-            <a:spLocks noGrp="1"/>
-          </p:cNvSpPr>
-          <p:nvPr>
-            <p:ph type="body" idx="1"/>
-          </p:nvPr>
-        </p:nvSpPr>
-        <p:spPr/>
-        <p:txBody>
-          <a:bodyPr/>
-          <a:lstStyle/>
-          <a:p>
-            <a:r>
-              <a:rPr lang="es-MX" dirty="0" err="1" smtClean="0"/>
-              <a:t>Effects</a:t>
-            </a:r>
-            <a:r>
-              <a:rPr lang="es-MX" baseline="0" dirty="0" smtClean="0"/>
-              <a:t> of </a:t>
-            </a:r>
-            <a:r>
-              <a:rPr lang="es-MX" baseline="0" dirty="0" err="1" smtClean="0"/>
-              <a:t>treatment</a:t>
-            </a:r>
-            <a:r>
-              <a:rPr lang="es-MX" baseline="0" dirty="0" smtClean="0"/>
-              <a:t> in </a:t>
-            </a:r>
-            <a:r>
-              <a:rPr lang="es-MX" baseline="0" dirty="0" err="1" smtClean="0"/>
-              <a:t>Pouteria</a:t>
-            </a:r>
-            <a:r>
-              <a:rPr lang="es-MX" baseline="0" dirty="0" smtClean="0"/>
-              <a:t>, </a:t>
-            </a:r>
-            <a:r>
-              <a:rPr lang="es-MX" baseline="0" dirty="0" err="1" smtClean="0"/>
-              <a:t>Alchornea</a:t>
-            </a:r>
-            <a:r>
-              <a:rPr lang="es-MX" baseline="0" dirty="0" smtClean="0"/>
-              <a:t>, </a:t>
-            </a:r>
-            <a:r>
-              <a:rPr lang="es-MX" baseline="0" dirty="0" err="1" smtClean="0"/>
-              <a:t>Hedyosmum</a:t>
-            </a:r>
-            <a:r>
-              <a:rPr lang="es-MX" baseline="0" dirty="0" smtClean="0"/>
-              <a:t>. </a:t>
-            </a:r>
-            <a:r>
-              <a:rPr lang="es-MX" baseline="0" dirty="0" err="1" smtClean="0"/>
-              <a:t>Not</a:t>
-            </a:r>
-            <a:r>
-              <a:rPr lang="es-MX" baseline="0" dirty="0" smtClean="0"/>
-              <a:t> </a:t>
-            </a:r>
-            <a:r>
-              <a:rPr lang="es-MX" baseline="0" dirty="0" err="1" smtClean="0"/>
-              <a:t>sure</a:t>
-            </a:r>
-            <a:r>
-              <a:rPr lang="es-MX" baseline="0" dirty="0" smtClean="0"/>
-              <a:t> </a:t>
-            </a:r>
-            <a:r>
-              <a:rPr lang="es-MX" baseline="0" dirty="0" err="1" smtClean="0"/>
-              <a:t>if</a:t>
-            </a:r>
-            <a:r>
-              <a:rPr lang="es-MX" baseline="0" dirty="0" smtClean="0"/>
-              <a:t> </a:t>
-            </a:r>
-            <a:r>
-              <a:rPr lang="es-MX" baseline="0" dirty="0" err="1" smtClean="0"/>
-              <a:t>these</a:t>
-            </a:r>
-            <a:r>
-              <a:rPr lang="es-MX" baseline="0" dirty="0" smtClean="0"/>
-              <a:t> </a:t>
-            </a:r>
-            <a:r>
-              <a:rPr lang="es-MX" baseline="0" dirty="0" err="1" smtClean="0"/>
-              <a:t>graphics</a:t>
-            </a:r>
-            <a:r>
-              <a:rPr lang="es-MX" baseline="0" dirty="0" smtClean="0"/>
-              <a:t> are </a:t>
-            </a:r>
-            <a:r>
-              <a:rPr lang="es-MX" baseline="0" dirty="0" err="1" smtClean="0"/>
-              <a:t>actually</a:t>
-            </a:r>
-            <a:r>
-              <a:rPr lang="es-MX" baseline="0" dirty="0" smtClean="0"/>
-              <a:t> </a:t>
-            </a:r>
-            <a:r>
-              <a:rPr lang="es-MX" baseline="0" dirty="0" err="1" smtClean="0"/>
-              <a:t>useful</a:t>
-            </a:r>
-            <a:r>
-              <a:rPr lang="es-MX" baseline="0" dirty="0" smtClean="0"/>
-              <a:t>. </a:t>
-            </a:r>
-            <a:r>
-              <a:rPr lang="es-MX" baseline="0" dirty="0" err="1" smtClean="0"/>
-              <a:t>Dotted</a:t>
-            </a:r>
-            <a:r>
-              <a:rPr lang="es-MX" baseline="0" dirty="0" smtClean="0"/>
-              <a:t> </a:t>
-            </a:r>
-            <a:r>
-              <a:rPr lang="es-MX" baseline="0" dirty="0" err="1" smtClean="0"/>
-              <a:t>lines</a:t>
-            </a:r>
-            <a:r>
-              <a:rPr lang="es-MX" baseline="0" dirty="0" smtClean="0"/>
-              <a:t> are </a:t>
-            </a:r>
-            <a:r>
-              <a:rPr lang="es-MX" baseline="0" dirty="0" err="1" smtClean="0"/>
-              <a:t>the</a:t>
-            </a:r>
-            <a:r>
-              <a:rPr lang="es-MX" baseline="0" dirty="0" smtClean="0"/>
-              <a:t> </a:t>
-            </a:r>
-            <a:r>
-              <a:rPr lang="es-MX" baseline="0" dirty="0" err="1" smtClean="0"/>
-              <a:t>means</a:t>
-            </a:r>
-            <a:r>
-              <a:rPr lang="es-MX" baseline="0" dirty="0" smtClean="0"/>
-              <a:t> of </a:t>
-            </a:r>
-            <a:r>
-              <a:rPr lang="es-MX" baseline="0" dirty="0" err="1" smtClean="0"/>
-              <a:t>the</a:t>
-            </a:r>
-            <a:r>
-              <a:rPr lang="es-MX" baseline="0" dirty="0" smtClean="0"/>
-              <a:t> control. </a:t>
-            </a:r>
-            <a:r>
-              <a:rPr lang="es-MX" baseline="0" dirty="0" err="1" smtClean="0"/>
-              <a:t>Maybe</a:t>
-            </a:r>
-            <a:r>
-              <a:rPr lang="es-MX" baseline="0" dirty="0" smtClean="0"/>
-              <a:t> I </a:t>
-            </a:r>
-            <a:r>
-              <a:rPr lang="es-MX" baseline="0" dirty="0" err="1" smtClean="0"/>
-              <a:t>should</a:t>
-            </a:r>
-            <a:r>
-              <a:rPr lang="es-MX" baseline="0" dirty="0" smtClean="0"/>
-              <a:t> </a:t>
-            </a:r>
-            <a:r>
-              <a:rPr lang="es-MX" baseline="0" dirty="0" err="1" smtClean="0"/>
-              <a:t>plot</a:t>
-            </a:r>
-            <a:r>
-              <a:rPr lang="es-MX" baseline="0" dirty="0" smtClean="0"/>
-              <a:t> </a:t>
-            </a:r>
-            <a:r>
-              <a:rPr lang="es-MX" baseline="0" dirty="0" err="1" smtClean="0"/>
-              <a:t>the</a:t>
-            </a:r>
-            <a:r>
-              <a:rPr lang="es-MX" baseline="0" dirty="0" smtClean="0"/>
-              <a:t> center </a:t>
-            </a:r>
-            <a:r>
-              <a:rPr lang="es-MX" baseline="0" dirty="0" err="1" smtClean="0"/>
-              <a:t>instead</a:t>
-            </a:r>
-            <a:r>
-              <a:rPr lang="es-MX" baseline="0" dirty="0" smtClean="0"/>
-              <a:t>?</a:t>
-            </a:r>
-            <a:endParaRPr lang="en-US" dirty="0"/>
-          </a:p>
-        </p:txBody>
-      </p:sp>
-      <p:sp>
-        <p:nvSpPr>
-          <p:cNvPr id="4" name="Marcador de número de diapositiva 3"/>
-          <p:cNvSpPr>
-            <a:spLocks noGrp="1"/>
-          </p:cNvSpPr>
-          <p:nvPr>
-            <p:ph type="sldNum" sz="quarter" idx="10"/>
-          </p:nvPr>
-        </p:nvSpPr>
-        <p:spPr/>
-        <p:txBody>
-          <a:bodyPr/>
-          <a:lstStyle/>
-          <a:p>
-            <a:fld id="{FB953BC2-43C1-4767-ADF3-5E906A4AA839}" type="slidenum">
-              <a:rPr lang="en-US" smtClean="0"/>
-              <a:t>29</a:t>
             </a:fld>
             <a:endParaRPr lang="en-US"/>
           </a:p>
@@ -2147,7 +2050,23 @@
           <a:p>
             <a:r>
               <a:rPr lang="es-MX" dirty="0" err="1" smtClean="0"/>
-              <a:t>The</a:t>
+              <a:t>None</a:t>
+            </a:r>
+            <a:r>
+              <a:rPr lang="es-MX" dirty="0" smtClean="0"/>
+              <a:t> of </a:t>
+            </a:r>
+            <a:r>
+              <a:rPr lang="es-MX" dirty="0" err="1" smtClean="0"/>
+              <a:t>them</a:t>
+            </a:r>
+            <a:r>
+              <a:rPr lang="es-MX" dirty="0" smtClean="0"/>
+              <a:t> are </a:t>
+            </a:r>
+            <a:r>
+              <a:rPr lang="es-MX" dirty="0" err="1" smtClean="0"/>
+              <a:t>nitrogen</a:t>
             </a:r>
             <a:r>
               <a:rPr lang="es-MX" dirty="0" smtClean="0"/>
@@ -2155,15 +2074,7 @@
             </a:r>
             <a:r>
               <a:rPr lang="es-MX" dirty="0" err="1" smtClean="0"/>
-              <a:t>dotted</a:t>
-            </a:r>
-            <a:r>
-              <a:rPr lang="es-MX" dirty="0" smtClean="0"/>
-              <a:t> line </a:t>
-            </a:r>
-            <a:r>
-              <a:rPr lang="es-MX" dirty="0" err="1" smtClean="0"/>
-              <a:t>is</a:t>
+              <a:t>fixing</a:t>
             </a:r>
             <a:r>
               <a:rPr lang="es-MX" dirty="0" smtClean="0"/>
@@ -2171,362 +2082,54 @@
             </a:r>
             <a:r>
               <a:rPr lang="es-MX" dirty="0" err="1" smtClean="0"/>
-              <a:t>the</a:t>
+              <a:t>species</a:t>
             </a:r>
             <a:r>
               <a:rPr lang="es-MX" dirty="0" smtClean="0"/>
-              <a:t> mean</a:t>
-            </a:r>
-            <a:r>
-              <a:rPr lang="es-MX" baseline="0" dirty="0" smtClean="0"/>
-              <a:t> of </a:t>
-            </a:r>
-            <a:r>
-              <a:rPr lang="es-MX" baseline="0" dirty="0" err="1" smtClean="0"/>
-              <a:t>the</a:t>
-            </a:r>
-            <a:r>
-              <a:rPr lang="es-MX" baseline="0" dirty="0" smtClean="0"/>
-              <a:t> control.  </a:t>
+              <a:t>.</a:t>
             </a:r>
           </a:p>
           <a:p>
             <a:r>
               <a:rPr lang="es-MX" dirty="0" err="1" smtClean="0"/>
-              <a:t>Weinmania</a:t>
+              <a:t>How</a:t>
             </a:r>
             <a:r>
               <a:rPr lang="es-MX" dirty="0" smtClean="0"/>
-              <a:t> looks</a:t>
-            </a:r>
-            <a:r>
-              <a:rPr lang="es-MX" baseline="0" dirty="0" smtClean="0"/>
+              <a:t> to </a:t>
+            </a:r>
+            <a:r>
+              <a:rPr lang="es-MX" dirty="0" err="1" smtClean="0"/>
+              <a:t>interpret</a:t>
+            </a:r>
+            <a:r>
+              <a:rPr lang="es-MX" dirty="0" smtClean="0"/>
               <a:t> </a:t>
             </a:r>
             <a:r>
-              <a:rPr lang="es-MX" baseline="0" dirty="0" err="1" smtClean="0"/>
-              <a:t>that</a:t>
-            </a:r>
-            <a:r>
-              <a:rPr lang="es-MX" baseline="0" dirty="0" smtClean="0"/>
-              <a:t> NP has </a:t>
-            </a:r>
-            <a:r>
-              <a:rPr lang="es-MX" baseline="0" dirty="0" err="1" smtClean="0"/>
-              <a:t>an</a:t>
-            </a:r>
-            <a:r>
-              <a:rPr lang="es-MX" baseline="0" dirty="0" smtClean="0"/>
+              <a:rPr lang="es-MX" dirty="0" err="1" smtClean="0"/>
+              <a:t>this</a:t>
+            </a:r>
+            <a:r>
+              <a:rPr lang="es-MX" dirty="0" smtClean="0"/>
               <a:t> </a:t>
             </a:r>
             <a:r>
-              <a:rPr lang="es-MX" baseline="0" dirty="0" err="1" smtClean="0"/>
-              <a:t>strong</a:t>
-            </a:r>
-            <a:r>
-              <a:rPr lang="es-MX" baseline="0" dirty="0" smtClean="0"/>
+              <a:rPr lang="es-MX" dirty="0" err="1" smtClean="0"/>
+              <a:t>one</a:t>
+            </a:r>
+            <a:r>
+              <a:rPr lang="es-MX" dirty="0" smtClean="0"/>
               <a:t> </a:t>
             </a:r>
             <a:r>
-              <a:rPr lang="es-MX" baseline="0" dirty="0" err="1" smtClean="0"/>
-              <a:t>effect</a:t>
-            </a:r>
-            <a:r>
-              <a:rPr lang="es-MX" baseline="0" dirty="0" smtClean="0"/>
-              <a:t> </a:t>
-            </a:r>
-            <a:r>
-              <a:rPr lang="es-MX" baseline="0" dirty="0" err="1" smtClean="0"/>
-              <a:t>on</a:t>
-            </a:r>
-            <a:r>
-              <a:rPr lang="es-MX" baseline="0" dirty="0" smtClean="0"/>
-              <a:t> </a:t>
-            </a:r>
-            <a:r>
-              <a:rPr lang="es-MX" baseline="0" dirty="0" err="1" smtClean="0"/>
-              <a:t>iWUE</a:t>
-            </a:r>
-            <a:r>
-              <a:rPr lang="es-MX" baseline="0" dirty="0" smtClean="0"/>
-              <a:t>, </a:t>
-            </a:r>
-            <a:r>
-              <a:rPr lang="es-MX" baseline="0" dirty="0" err="1" smtClean="0"/>
-              <a:t>but</a:t>
-            </a:r>
-            <a:r>
-              <a:rPr lang="es-MX" baseline="0" dirty="0" smtClean="0"/>
-              <a:t> </a:t>
-            </a:r>
-            <a:r>
-              <a:rPr lang="es-MX" baseline="0" dirty="0" err="1" smtClean="0"/>
-              <a:t>it</a:t>
-            </a:r>
-            <a:r>
-              <a:rPr lang="es-MX" baseline="0" dirty="0" smtClean="0"/>
-              <a:t> </a:t>
-            </a:r>
-            <a:r>
-              <a:rPr lang="es-MX" baseline="0" dirty="0" err="1" smtClean="0"/>
-              <a:t>is</a:t>
-            </a:r>
-            <a:r>
-              <a:rPr lang="es-MX" baseline="0" dirty="0" smtClean="0"/>
-              <a:t> </a:t>
-            </a:r>
-            <a:r>
-              <a:rPr lang="es-MX" baseline="0" dirty="0" err="1" smtClean="0"/>
-              <a:t>not</a:t>
-            </a:r>
-            <a:r>
-              <a:rPr lang="es-MX" baseline="0" dirty="0" smtClean="0"/>
-              <a:t> </a:t>
-            </a:r>
-            <a:r>
-              <a:rPr lang="es-MX" baseline="0" dirty="0" err="1" smtClean="0"/>
-              <a:t>statistical</a:t>
-            </a:r>
-            <a:r>
-              <a:rPr lang="es-MX" baseline="0" dirty="0" smtClean="0"/>
-              <a:t> </a:t>
-            </a:r>
-            <a:r>
-              <a:rPr lang="es-MX" baseline="0" dirty="0" err="1" smtClean="0"/>
-              <a:t>significant</a:t>
-            </a:r>
-            <a:r>
-              <a:rPr lang="es-MX" baseline="0" dirty="0" smtClean="0"/>
+              <a:rPr lang="es-MX" dirty="0" err="1" smtClean="0"/>
+              <a:t>better</a:t>
+            </a:r>
+            <a:r>
+              <a:rPr lang="es-MX" dirty="0" smtClean="0"/>
               <a:t>.</a:t>
             </a:r>
-          </a:p>
-          <a:p>
-            <a:r>
-              <a:rPr lang="es-MX" baseline="0" dirty="0" err="1" smtClean="0"/>
-              <a:t>What</a:t>
-            </a:r>
-            <a:r>
-              <a:rPr lang="es-MX" baseline="0" dirty="0" smtClean="0"/>
-              <a:t> I </a:t>
-            </a:r>
-            <a:r>
-              <a:rPr lang="es-MX" baseline="0" dirty="0" err="1" smtClean="0"/>
-              <a:t>see</a:t>
-            </a:r>
-            <a:r>
-              <a:rPr lang="es-MX" baseline="0" dirty="0" smtClean="0"/>
-              <a:t>: </a:t>
-            </a:r>
-            <a:r>
-              <a:rPr lang="es-MX" baseline="0" dirty="0" err="1" smtClean="0"/>
-              <a:t>With</a:t>
-            </a:r>
-            <a:r>
-              <a:rPr lang="es-MX" baseline="0" dirty="0" smtClean="0"/>
-              <a:t> N </a:t>
-            </a:r>
-            <a:r>
-              <a:rPr lang="es-MX" baseline="0" dirty="0" err="1" smtClean="0"/>
-              <a:t>the</a:t>
-            </a:r>
-            <a:r>
-              <a:rPr lang="es-MX" baseline="0" dirty="0" smtClean="0"/>
-              <a:t> </a:t>
-            </a:r>
-            <a:r>
-              <a:rPr lang="es-MX" baseline="0" dirty="0" err="1" smtClean="0"/>
-              <a:t>iWUE</a:t>
-            </a:r>
-            <a:r>
-              <a:rPr lang="es-MX" baseline="0" dirty="0" smtClean="0"/>
-              <a:t> </a:t>
-            </a:r>
-            <a:r>
-              <a:rPr lang="es-MX" baseline="0" dirty="0" err="1" smtClean="0"/>
-              <a:t>increases</a:t>
-            </a:r>
-            <a:r>
-              <a:rPr lang="es-MX" baseline="0" dirty="0" smtClean="0"/>
-              <a:t>, </a:t>
-            </a:r>
-            <a:r>
-              <a:rPr lang="es-MX" baseline="0" dirty="0" err="1" smtClean="0"/>
-              <a:t>with</a:t>
-            </a:r>
-            <a:r>
-              <a:rPr lang="es-MX" baseline="0" dirty="0" smtClean="0"/>
-              <a:t> P </a:t>
-            </a:r>
-            <a:r>
-              <a:rPr lang="es-MX" baseline="0" dirty="0" err="1" smtClean="0"/>
-              <a:t>iWUE</a:t>
-            </a:r>
-            <a:r>
-              <a:rPr lang="es-MX" baseline="0" dirty="0" smtClean="0"/>
-              <a:t> </a:t>
-            </a:r>
-            <a:r>
-              <a:rPr lang="es-MX" baseline="0" dirty="0" err="1" smtClean="0"/>
-              <a:t>increases</a:t>
-            </a:r>
-            <a:r>
-              <a:rPr lang="es-MX" baseline="0" dirty="0" smtClean="0"/>
-              <a:t> as </a:t>
-            </a:r>
-            <a:r>
-              <a:rPr lang="es-MX" baseline="0" dirty="0" err="1" smtClean="0"/>
-              <a:t>well</a:t>
-            </a:r>
-            <a:r>
-              <a:rPr lang="es-MX" baseline="0" dirty="0" smtClean="0"/>
-              <a:t> </a:t>
-            </a:r>
-            <a:r>
-              <a:rPr lang="es-MX" baseline="0" dirty="0" err="1" smtClean="0"/>
-              <a:t>but</a:t>
-            </a:r>
-            <a:r>
-              <a:rPr lang="es-MX" baseline="0" dirty="0" smtClean="0"/>
-              <a:t> </a:t>
-            </a:r>
-            <a:r>
-              <a:rPr lang="es-MX" baseline="0" dirty="0" err="1" smtClean="0"/>
-              <a:t>less</a:t>
-            </a:r>
-            <a:r>
-              <a:rPr lang="es-MX" baseline="0" dirty="0" smtClean="0"/>
-              <a:t> </a:t>
-            </a:r>
-            <a:r>
-              <a:rPr lang="es-MX" baseline="0" dirty="0" err="1" smtClean="0"/>
-              <a:t>strongly</a:t>
-            </a:r>
-            <a:r>
-              <a:rPr lang="es-MX" baseline="0" dirty="0" smtClean="0"/>
-              <a:t>. </a:t>
-            </a:r>
-            <a:r>
-              <a:rPr lang="es-MX" baseline="0" dirty="0" err="1" smtClean="0"/>
-              <a:t>The</a:t>
-            </a:r>
-            <a:r>
-              <a:rPr lang="es-MX" baseline="0" dirty="0" smtClean="0"/>
-              <a:t> </a:t>
-            </a:r>
-            <a:r>
-              <a:rPr lang="es-MX" baseline="0" dirty="0" err="1" smtClean="0"/>
-              <a:t>interaction</a:t>
-            </a:r>
-            <a:r>
-              <a:rPr lang="es-MX" baseline="0" dirty="0" smtClean="0"/>
-              <a:t> has a positive </a:t>
-            </a:r>
-            <a:r>
-              <a:rPr lang="es-MX" baseline="0" dirty="0" err="1" smtClean="0"/>
-              <a:t>effect</a:t>
-            </a:r>
-            <a:r>
-              <a:rPr lang="es-MX" baseline="0" dirty="0" smtClean="0"/>
-              <a:t> </a:t>
-            </a:r>
-            <a:r>
-              <a:rPr lang="es-MX" baseline="0" dirty="0" err="1" smtClean="0"/>
-              <a:t>on</a:t>
-            </a:r>
-            <a:r>
-              <a:rPr lang="es-MX" baseline="0" dirty="0" smtClean="0"/>
-              <a:t> </a:t>
-            </a:r>
-            <a:r>
-              <a:rPr lang="es-MX" baseline="0" dirty="0" err="1" smtClean="0"/>
-              <a:t>some</a:t>
-            </a:r>
-            <a:r>
-              <a:rPr lang="es-MX" baseline="0" dirty="0" smtClean="0"/>
-              <a:t> </a:t>
-            </a:r>
-            <a:r>
-              <a:rPr lang="es-MX" baseline="0" dirty="0" err="1" smtClean="0"/>
-              <a:t>species</a:t>
-            </a:r>
-            <a:r>
-              <a:rPr lang="es-MX" baseline="0" dirty="0" smtClean="0"/>
-              <a:t> (</a:t>
-            </a:r>
-            <a:r>
-              <a:rPr lang="es-MX" baseline="0" dirty="0" err="1" smtClean="0"/>
-              <a:t>Puteria</a:t>
-            </a:r>
-            <a:r>
-              <a:rPr lang="es-MX" baseline="0" dirty="0" smtClean="0"/>
-              <a:t>, </a:t>
-            </a:r>
-            <a:r>
-              <a:rPr lang="es-MX" baseline="0" dirty="0" err="1" smtClean="0"/>
-              <a:t>Myrcia</a:t>
-            </a:r>
-            <a:r>
-              <a:rPr lang="es-MX" baseline="0" dirty="0" smtClean="0"/>
-              <a:t>, </a:t>
-            </a:r>
-            <a:r>
-              <a:rPr lang="es-MX" baseline="0" dirty="0" err="1" smtClean="0"/>
-              <a:t>Hedyosmum</a:t>
-            </a:r>
-            <a:r>
-              <a:rPr lang="es-MX" baseline="0" dirty="0" smtClean="0"/>
-              <a:t>) and </a:t>
-            </a:r>
-            <a:r>
-              <a:rPr lang="es-MX" baseline="0" dirty="0" err="1" smtClean="0"/>
-              <a:t>negative</a:t>
-            </a:r>
-            <a:r>
-              <a:rPr lang="es-MX" baseline="0" dirty="0" smtClean="0"/>
-              <a:t> (</a:t>
-            </a:r>
-            <a:r>
-              <a:rPr lang="es-MX" baseline="0" dirty="0" err="1" smtClean="0"/>
-              <a:t>less</a:t>
-            </a:r>
-            <a:r>
-              <a:rPr lang="es-MX" baseline="0" dirty="0" smtClean="0"/>
-              <a:t> tan control </a:t>
-            </a:r>
-            <a:r>
-              <a:rPr lang="es-MX" baseline="0" dirty="0" err="1" smtClean="0"/>
-              <a:t>on</a:t>
-            </a:r>
-            <a:r>
-              <a:rPr lang="es-MX" baseline="0" dirty="0" smtClean="0"/>
-              <a:t> </a:t>
-            </a:r>
-            <a:r>
-              <a:rPr lang="es-MX" baseline="0" dirty="0" err="1" smtClean="0"/>
-              <a:t>others</a:t>
-            </a:r>
-            <a:r>
-              <a:rPr lang="es-MX" baseline="0" dirty="0" smtClean="0"/>
-              <a:t> (</a:t>
-            </a:r>
-            <a:r>
-              <a:rPr lang="es-MX" baseline="0" dirty="0" err="1" smtClean="0"/>
-              <a:t>Alchornea</a:t>
-            </a:r>
-            <a:r>
-              <a:rPr lang="es-MX" baseline="0" dirty="0" smtClean="0"/>
-              <a:t>, </a:t>
-            </a:r>
-            <a:r>
-              <a:rPr lang="es-MX" baseline="0" dirty="0" err="1" smtClean="0"/>
-              <a:t>Weinmania</a:t>
-            </a:r>
-            <a:r>
-              <a:rPr lang="es-MX" baseline="0" dirty="0" smtClean="0"/>
-              <a:t>).</a:t>
-            </a:r>
-          </a:p>
-          <a:p>
             <a:endParaRPr lang="en-US" dirty="0"/>
           </a:p>
         </p:txBody>
@@ -2548,173 +2151,7 @@
           <a:p>
             <a:fld id="{FB953BC2-43C1-4767-ADF3-5E906A4AA839}" type="slidenum">
               <a:rPr lang="en-US" smtClean="0"/>
-              <a:t>12</a:t>
-            </a:fld>
-            <a:endParaRPr lang="en-US"/>
-          </a:p>
-        </p:txBody>
-      </p:sp>
-    </p:spTree>
-    <p:extLst>
-      <p:ext uri="{BB962C8B-B14F-4D97-AF65-F5344CB8AC3E}">
-        <p14:creationId xmlns:p14="http://schemas.microsoft.com/office/powerpoint/2010/main" val="1108890781"/>
-      </p:ext>
-    </p:extLst>
-  </p:cSld>
-  <p:clrMapOvr>
-    <a:masterClrMapping/>
-  </p:clrMapOvr>
-</p:notes>
-</file>
-
-<file path=ppt/notesSlides/notesSlide7.xml><?xml version="1.0" encoding="utf-8"?>
-<p:notes xmlns:a="http://schemas.openxmlformats.org/drawingml/2006/main" xmlns:r="http://schemas.openxmlformats.org/officeDocument/2006/relationships" xmlns:p="http://schemas.openxmlformats.org/presentationml/2006/main">
-  <p:cSld>
-    <p:spTree>
-      <p:nvGrpSpPr>
-        <p:cNvPr id="1" name=""/>
-        <p:cNvGrpSpPr/>
-        <p:nvPr/>
-      </p:nvGrpSpPr>
-      <p:grpSpPr>
-        <a:xfrm>
-          <a:off x="0" y="0"/>
-          <a:ext cx="0" cy="0"/>
-          <a:chOff x="0" y="0"/>
-          <a:chExt cx="0" cy="0"/>
-        </a:xfrm>
-      </p:grpSpPr>
-      <p:sp>
-        <p:nvSpPr>
-          <p:cNvPr id="2" name="Marcador de imagen de diapositiva 1"/>
-          <p:cNvSpPr>
-            <a:spLocks noGrp="1" noRot="1" noChangeAspect="1"/>
-          </p:cNvSpPr>
-          <p:nvPr>
-            <p:ph type="sldImg"/>
-          </p:nvPr>
-        </p:nvSpPr>
-        <p:spPr/>
-      </p:sp>
-      <p:sp>
-        <p:nvSpPr>
-          <p:cNvPr id="3" name="Marcador de notas 2"/>
-          <p:cNvSpPr>
-            <a:spLocks noGrp="1"/>
-          </p:cNvSpPr>
-          <p:nvPr>
-            <p:ph type="body" idx="1"/>
-          </p:nvPr>
-        </p:nvSpPr>
-        <p:spPr/>
-        <p:txBody>
-          <a:bodyPr/>
-          <a:lstStyle/>
-          <a:p>
-            <a:r>
-              <a:rPr lang="es-MX" dirty="0" err="1" smtClean="0"/>
-              <a:t>None</a:t>
-            </a:r>
-            <a:r>
-              <a:rPr lang="es-MX" dirty="0" smtClean="0"/>
-              <a:t> of </a:t>
-            </a:r>
-            <a:r>
-              <a:rPr lang="es-MX" dirty="0" err="1" smtClean="0"/>
-              <a:t>them</a:t>
-            </a:r>
-            <a:r>
-              <a:rPr lang="es-MX" dirty="0" smtClean="0"/>
-              <a:t> are </a:t>
-            </a:r>
-            <a:r>
-              <a:rPr lang="es-MX" dirty="0" err="1" smtClean="0"/>
-              <a:t>nitrogen</a:t>
-            </a:r>
-            <a:r>
-              <a:rPr lang="es-MX" dirty="0" smtClean="0"/>
-              <a:t> </a:t>
-            </a:r>
-            <a:r>
-              <a:rPr lang="es-MX" dirty="0" err="1" smtClean="0"/>
-              <a:t>fixing</a:t>
-            </a:r>
-            <a:r>
-              <a:rPr lang="es-MX" dirty="0" smtClean="0"/>
-              <a:t> </a:t>
-            </a:r>
-            <a:r>
-              <a:rPr lang="es-MX" dirty="0" err="1" smtClean="0"/>
-              <a:t>species</a:t>
-            </a:r>
-            <a:r>
-              <a:rPr lang="es-MX" dirty="0" smtClean="0"/>
-              <a:t>.</a:t>
-            </a:r>
-          </a:p>
-          <a:p>
-            <a:r>
-              <a:rPr lang="es-MX" dirty="0" err="1" smtClean="0"/>
-              <a:t>How</a:t>
-            </a:r>
-            <a:r>
-              <a:rPr lang="es-MX" dirty="0" smtClean="0"/>
-              <a:t> to </a:t>
-            </a:r>
-            <a:r>
-              <a:rPr lang="es-MX" dirty="0" err="1" smtClean="0"/>
-              <a:t>interpret</a:t>
-            </a:r>
-            <a:r>
-              <a:rPr lang="es-MX" dirty="0" smtClean="0"/>
-              <a:t> </a:t>
-            </a:r>
-            <a:r>
-              <a:rPr lang="es-MX" dirty="0" err="1" smtClean="0"/>
-              <a:t>this</a:t>
-            </a:r>
-            <a:r>
-              <a:rPr lang="es-MX" dirty="0" smtClean="0"/>
-              <a:t> </a:t>
-            </a:r>
-            <a:r>
-              <a:rPr lang="es-MX" dirty="0" err="1" smtClean="0"/>
-              <a:t>one</a:t>
-            </a:r>
-            <a:r>
-              <a:rPr lang="es-MX" dirty="0" smtClean="0"/>
-              <a:t> </a:t>
-            </a:r>
-            <a:r>
-              <a:rPr lang="es-MX" dirty="0" err="1" smtClean="0"/>
-              <a:t>better</a:t>
-            </a:r>
-            <a:r>
-              <a:rPr lang="es-MX" dirty="0" smtClean="0"/>
-              <a:t>.</a:t>
-            </a:r>
-            <a:endParaRPr lang="en-US" dirty="0"/>
-          </a:p>
-        </p:txBody>
-      </p:sp>
-      <p:sp>
-        <p:nvSpPr>
-          <p:cNvPr id="4" name="Marcador de número de diapositiva 3"/>
-          <p:cNvSpPr>
-            <a:spLocks noGrp="1"/>
-          </p:cNvSpPr>
-          <p:nvPr>
-            <p:ph type="sldNum" sz="quarter" idx="10"/>
-          </p:nvPr>
-        </p:nvSpPr>
-        <p:spPr/>
-        <p:txBody>
-          <a:bodyPr/>
-          <a:lstStyle/>
-          <a:p>
-            <a:fld id="{FB953BC2-43C1-4767-ADF3-5E906A4AA839}" type="slidenum">
-              <a:rPr lang="en-US" smtClean="0"/>
-              <a:t>15</a:t>
+              <a:t>14</a:t>
             </a:fld>
             <a:endParaRPr lang="en-US"/>
           </a:p>
@@ -2733,7 +2170,7 @@
 </p:notes>
 </file>
 
-<file path=ppt/notesSlides/notesSlide8.xml><?xml version="1.0" encoding="utf-8"?>
+<file path=ppt/notesSlides/notesSlide7.xml><?xml version="1.0" encoding="utf-8"?>
 <p:notes xmlns:a="http://schemas.openxmlformats.org/drawingml/2006/main" xmlns:r="http://schemas.openxmlformats.org/officeDocument/2006/relationships" xmlns:p="http://schemas.openxmlformats.org/presentationml/2006/main">
   <p:cSld>
     <p:spTree>
@@ -2798,6 +2235,316 @@
           <a:p>
             <a:fld id="{FB953BC2-43C1-4767-ADF3-5E906A4AA839}" type="slidenum">
               <a:rPr lang="en-US" smtClean="0"/>
+              <a:t>15</a:t>
+            </a:fld>
+            <a:endParaRPr lang="en-US"/>
+          </a:p>
+        </p:txBody>
+      </p:sp>
+    </p:spTree>
+    <p:extLst>
+      <p:ext uri="{BB962C8B-B14F-4D97-AF65-F5344CB8AC3E}">
+        <p14:creationId xmlns:p14="http://schemas.microsoft.com/office/powerpoint/2010/main" val="1672766010"/>
+      </p:ext>
+    </p:extLst>
+  </p:cSld>
+  <p:clrMapOvr>
+    <a:masterClrMapping/>
+  </p:clrMapOvr>
+</p:notes>
+</file>
+
+<file path=ppt/notesSlides/notesSlide8.xml><?xml version="1.0" encoding="utf-8"?>
+<p:notes xmlns:a="http://schemas.openxmlformats.org/drawingml/2006/main" xmlns:r="http://schemas.openxmlformats.org/officeDocument/2006/relationships" xmlns:p="http://schemas.openxmlformats.org/presentationml/2006/main">
+  <p:cSld>
+    <p:spTree>
+      <p:nvGrpSpPr>
+        <p:cNvPr id="1" name=""/>
+        <p:cNvGrpSpPr/>
+        <p:nvPr/>
+      </p:nvGrpSpPr>
+      <p:grpSpPr>
+        <a:xfrm>
+          <a:off x="0" y="0"/>
+          <a:ext cx="0" cy="0"/>
+          <a:chOff x="0" y="0"/>
+          <a:chExt cx="0" cy="0"/>
+        </a:xfrm>
+      </p:grpSpPr>
+      <p:sp>
+        <p:nvSpPr>
+          <p:cNvPr id="2" name="Marcador de imagen de diapositiva 1"/>
+          <p:cNvSpPr>
+            <a:spLocks noGrp="1" noRot="1" noChangeAspect="1"/>
+          </p:cNvSpPr>
+          <p:nvPr>
+            <p:ph type="sldImg"/>
+          </p:nvPr>
+        </p:nvSpPr>
+        <p:spPr/>
+      </p:sp>
+      <p:sp>
+        <p:nvSpPr>
+          <p:cNvPr id="3" name="Marcador de notas 2"/>
+          <p:cNvSpPr>
+            <a:spLocks noGrp="1"/>
+          </p:cNvSpPr>
+          <p:nvPr>
+            <p:ph type="body" idx="1"/>
+          </p:nvPr>
+        </p:nvSpPr>
+        <p:spPr/>
+        <p:txBody>
+          <a:bodyPr/>
+          <a:lstStyle/>
+          <a:p>
+            <a:r>
+              <a:rPr lang="es-MX" dirty="0" err="1" smtClean="0"/>
+              <a:t>Pouteria</a:t>
+            </a:r>
+            <a:r>
+              <a:rPr lang="es-MX" dirty="0" smtClean="0"/>
+              <a:t> torta, </a:t>
+            </a:r>
+            <a:r>
+              <a:rPr lang="es-MX" dirty="0" err="1" smtClean="0"/>
+              <a:t>effect</a:t>
+            </a:r>
+            <a:r>
+              <a:rPr lang="es-MX" dirty="0" smtClean="0"/>
+              <a:t> of </a:t>
+            </a:r>
+            <a:r>
+              <a:rPr lang="es-MX" dirty="0" err="1" smtClean="0"/>
+              <a:t>the</a:t>
+            </a:r>
+            <a:r>
+              <a:rPr lang="es-MX" dirty="0" smtClean="0"/>
+              <a:t> N</a:t>
+            </a:r>
+            <a:r>
+              <a:rPr lang="es-MX" baseline="0" dirty="0" smtClean="0"/>
+              <a:t> and N*P </a:t>
+            </a:r>
+            <a:r>
+              <a:rPr lang="es-MX" baseline="0" dirty="0" err="1" smtClean="0"/>
+              <a:t>on</a:t>
+            </a:r>
+            <a:r>
+              <a:rPr lang="es-MX" baseline="0" dirty="0" smtClean="0"/>
+              <a:t> </a:t>
+            </a:r>
+            <a:r>
+              <a:rPr lang="es-MX" baseline="0" dirty="0" err="1" smtClean="0"/>
+              <a:t>iWUE</a:t>
+            </a:r>
+            <a:r>
+              <a:rPr lang="es-MX" baseline="0" dirty="0" smtClean="0"/>
+              <a:t>, and </a:t>
+            </a:r>
+            <a:r>
+              <a:rPr lang="es-MX" baseline="0" dirty="0" err="1" smtClean="0"/>
+              <a:t>effect</a:t>
+            </a:r>
+            <a:r>
+              <a:rPr lang="es-MX" baseline="0" dirty="0" smtClean="0"/>
+              <a:t> of P o d18O. </a:t>
+            </a:r>
+            <a:r>
+              <a:rPr lang="es-MX" baseline="0" dirty="0" err="1" smtClean="0"/>
+              <a:t>This</a:t>
+            </a:r>
+            <a:r>
+              <a:rPr lang="es-MX" baseline="0" dirty="0" smtClean="0"/>
+              <a:t> </a:t>
+            </a:r>
+            <a:r>
+              <a:rPr lang="es-MX" baseline="0" dirty="0" err="1" smtClean="0"/>
+              <a:t>is</a:t>
+            </a:r>
+            <a:r>
+              <a:rPr lang="es-MX" baseline="0" dirty="0" smtClean="0"/>
+              <a:t> </a:t>
+            </a:r>
+            <a:r>
+              <a:rPr lang="es-MX" baseline="0" dirty="0" err="1" smtClean="0"/>
+              <a:t>the</a:t>
+            </a:r>
+            <a:r>
+              <a:rPr lang="es-MX" baseline="0" dirty="0" smtClean="0"/>
+              <a:t> </a:t>
+            </a:r>
+            <a:r>
+              <a:rPr lang="es-MX" baseline="0" dirty="0" err="1" smtClean="0"/>
+              <a:t>only</a:t>
+            </a:r>
+            <a:r>
+              <a:rPr lang="es-MX" baseline="0" dirty="0" smtClean="0"/>
+              <a:t> </a:t>
+            </a:r>
+            <a:r>
+              <a:rPr lang="es-MX" baseline="0" dirty="0" err="1" smtClean="0"/>
+              <a:t>specie</a:t>
+            </a:r>
+            <a:r>
+              <a:rPr lang="es-MX" baseline="0" dirty="0" smtClean="0"/>
+              <a:t> </a:t>
+            </a:r>
+            <a:r>
+              <a:rPr lang="es-MX" baseline="0" dirty="0" err="1" smtClean="0"/>
+              <a:t>giving</a:t>
+            </a:r>
+            <a:r>
+              <a:rPr lang="es-MX" baseline="0" dirty="0" smtClean="0"/>
+              <a:t> a </a:t>
+            </a:r>
+            <a:r>
+              <a:rPr lang="es-MX" baseline="0" dirty="0" err="1" smtClean="0"/>
+              <a:t>statistical</a:t>
+            </a:r>
+            <a:r>
+              <a:rPr lang="es-MX" baseline="0" dirty="0" smtClean="0"/>
+              <a:t> </a:t>
+            </a:r>
+            <a:r>
+              <a:rPr lang="es-MX" baseline="0" dirty="0" err="1" smtClean="0"/>
+              <a:t>signal</a:t>
+            </a:r>
+            <a:r>
+              <a:rPr lang="es-MX" baseline="0" dirty="0" smtClean="0"/>
+              <a:t> response to </a:t>
+            </a:r>
+            <a:r>
+              <a:rPr lang="es-MX" baseline="0" dirty="0" err="1" smtClean="0"/>
+              <a:t>nutrient</a:t>
+            </a:r>
+            <a:r>
+              <a:rPr lang="es-MX" baseline="0" dirty="0" smtClean="0"/>
+              <a:t> </a:t>
+            </a:r>
+            <a:r>
+              <a:rPr lang="es-MX" baseline="0" dirty="0" err="1" smtClean="0"/>
+              <a:t>addition</a:t>
+            </a:r>
+            <a:r>
+              <a:rPr lang="es-MX" baseline="0" dirty="0" smtClean="0"/>
+              <a:t> </a:t>
+            </a:r>
+            <a:r>
+              <a:rPr lang="es-MX" baseline="0" dirty="0" err="1" smtClean="0"/>
+              <a:t>on</a:t>
+            </a:r>
+            <a:r>
+              <a:rPr lang="es-MX" baseline="0" dirty="0" smtClean="0"/>
+              <a:t> </a:t>
+            </a:r>
+            <a:r>
+              <a:rPr lang="es-MX" baseline="0" dirty="0" err="1" smtClean="0"/>
+              <a:t>iQUE</a:t>
+            </a:r>
+            <a:r>
+              <a:rPr lang="es-MX" baseline="0" dirty="0" smtClean="0"/>
+              <a:t>.</a:t>
+            </a:r>
+          </a:p>
+          <a:p>
+            <a:r>
+              <a:rPr lang="es-MX" baseline="0" dirty="0" err="1" smtClean="0"/>
+              <a:t>Alchornea</a:t>
+            </a:r>
+            <a:r>
+              <a:rPr lang="es-MX" baseline="0" dirty="0" smtClean="0"/>
+              <a:t>, </a:t>
+            </a:r>
+            <a:r>
+              <a:rPr lang="es-MX" baseline="0" dirty="0" err="1" smtClean="0"/>
+              <a:t>effect</a:t>
+            </a:r>
+            <a:r>
+              <a:rPr lang="es-MX" baseline="0" dirty="0" smtClean="0"/>
+              <a:t> of </a:t>
+            </a:r>
+            <a:r>
+              <a:rPr lang="es-MX" baseline="0" dirty="0" err="1" smtClean="0"/>
+              <a:t>the</a:t>
+            </a:r>
+            <a:r>
+              <a:rPr lang="es-MX" baseline="0" dirty="0" smtClean="0"/>
+              <a:t> N </a:t>
+            </a:r>
+            <a:r>
+              <a:rPr lang="es-MX" baseline="0" dirty="0" err="1" smtClean="0"/>
+              <a:t>on</a:t>
+            </a:r>
+            <a:r>
+              <a:rPr lang="es-MX" baseline="0" dirty="0" smtClean="0"/>
+              <a:t> d15N and C:N. </a:t>
+            </a:r>
+          </a:p>
+          <a:p>
+            <a:r>
+              <a:rPr lang="es-MX" baseline="0" dirty="0" err="1" smtClean="0"/>
+              <a:t>Myrcia</a:t>
+            </a:r>
+            <a:r>
+              <a:rPr lang="es-MX" baseline="0" dirty="0" smtClean="0"/>
+              <a:t>, </a:t>
+            </a:r>
+            <a:r>
+              <a:rPr lang="es-MX" baseline="0" dirty="0" err="1" smtClean="0"/>
+              <a:t>effect</a:t>
+            </a:r>
+            <a:r>
+              <a:rPr lang="es-MX" baseline="0" dirty="0" smtClean="0"/>
+              <a:t> of N </a:t>
+            </a:r>
+            <a:r>
+              <a:rPr lang="es-MX" baseline="0" dirty="0" err="1" smtClean="0"/>
+              <a:t>on</a:t>
+            </a:r>
+            <a:r>
+              <a:rPr lang="es-MX" baseline="0" dirty="0" smtClean="0"/>
+              <a:t> d18O, d15N, C:N</a:t>
+            </a:r>
+          </a:p>
+          <a:p>
+            <a:r>
+              <a:rPr lang="es-MX" baseline="0" dirty="0" err="1" smtClean="0"/>
+              <a:t>Hedyosmum</a:t>
+            </a:r>
+            <a:r>
+              <a:rPr lang="es-MX" baseline="0" dirty="0" smtClean="0"/>
+              <a:t>, </a:t>
+            </a:r>
+            <a:r>
+              <a:rPr lang="es-MX" baseline="0" dirty="0" err="1" smtClean="0"/>
+              <a:t>effect</a:t>
+            </a:r>
+            <a:r>
+              <a:rPr lang="es-MX" baseline="0" dirty="0" smtClean="0"/>
+              <a:t> of d15N and C:N. (+ p &lt;0.1)</a:t>
+            </a:r>
+            <a:endParaRPr lang="en-US" dirty="0"/>
+          </a:p>
+        </p:txBody>
+      </p:sp>
+      <p:sp>
+        <p:nvSpPr>
+          <p:cNvPr id="4" name="Marcador de número de diapositiva 3"/>
+          <p:cNvSpPr>
+            <a:spLocks noGrp="1"/>
+          </p:cNvSpPr>
+          <p:nvPr>
+            <p:ph type="sldNum" sz="quarter" idx="10"/>
+          </p:nvPr>
+        </p:nvSpPr>
+        <p:spPr/>
+        <p:txBody>
+          <a:bodyPr/>
+          <a:lstStyle/>
+          <a:p>
+            <a:fld id="{FB953BC2-43C1-4767-ADF3-5E906A4AA839}" type="slidenum">
+              <a:rPr lang="en-US" smtClean="0"/>
               <a:t>16</a:t>
             </a:fld>
             <a:endParaRPr lang="en-US"/>
@@ -2807,7 +2554,7 @@
     </p:spTree>
     <p:extLst>
       <p:ext uri="{BB962C8B-B14F-4D97-AF65-F5344CB8AC3E}">
-        <p14:creationId xmlns:p14="http://schemas.microsoft.com/office/powerpoint/2010/main" val="1672766010"/>
+        <p14:creationId xmlns:p14="http://schemas.microsoft.com/office/powerpoint/2010/main" val="3466854139"/>
       </p:ext>
     </p:extLst>
   </p:cSld>
@@ -2862,230 +2609,16 @@
           <a:lstStyle/>
           <a:p>
             <a:r>
+              <a:rPr lang="es-MX" dirty="0" smtClean="0"/>
+              <a:t>U </a:t>
+            </a:r>
+            <a:r>
               <a:rPr lang="es-MX" dirty="0" err="1" smtClean="0"/>
-              <a:t>Pouteria</a:t>
+              <a:t>shaped</a:t>
             </a:r>
             <a:r>
               <a:rPr lang="es-MX" dirty="0" smtClean="0"/>
-              <a:t> torta, </a:t>
-            </a:r>
-            <a:r>
-              <a:rPr lang="es-MX" dirty="0" err="1" smtClean="0"/>
-              <a:t>effect</a:t>
-            </a:r>
-            <a:r>
-              <a:rPr lang="es-MX" dirty="0" smtClean="0"/>
-              <a:t> of </a:t>
-            </a:r>
-            <a:r>
-              <a:rPr lang="es-MX" dirty="0" err="1" smtClean="0"/>
-              <a:t>the</a:t>
-            </a:r>
-            <a:r>
-              <a:rPr lang="es-MX" dirty="0" smtClean="0"/>
-              <a:t> N</a:t>
-            </a:r>
-            <a:r>
-              <a:rPr lang="es-MX" baseline="0" dirty="0" smtClean="0"/>
-              <a:t> and N*P </a:t>
-            </a:r>
-            <a:r>
-              <a:rPr lang="es-MX" baseline="0" dirty="0" err="1" smtClean="0"/>
-              <a:t>on</a:t>
-            </a:r>
-            <a:r>
-              <a:rPr lang="es-MX" baseline="0" dirty="0" smtClean="0"/>
-              <a:t> </a:t>
-            </a:r>
-            <a:r>
-              <a:rPr lang="es-MX" baseline="0" dirty="0" err="1" smtClean="0"/>
-              <a:t>iWUE</a:t>
-            </a:r>
-            <a:r>
-              <a:rPr lang="es-MX" baseline="0" dirty="0" smtClean="0"/>
-              <a:t>, and </a:t>
-            </a:r>
-            <a:r>
-              <a:rPr lang="es-MX" baseline="0" dirty="0" err="1" smtClean="0"/>
-              <a:t>effect</a:t>
-            </a:r>
-            <a:r>
-              <a:rPr lang="es-MX" baseline="0" dirty="0" smtClean="0"/>
-              <a:t> of P o d18O. </a:t>
-            </a:r>
-            <a:r>
-              <a:rPr lang="es-MX" baseline="0" dirty="0" err="1" smtClean="0"/>
-              <a:t>This</a:t>
-            </a:r>
-            <a:r>
-              <a:rPr lang="es-MX" baseline="0" dirty="0" smtClean="0"/>
-              <a:t> </a:t>
-            </a:r>
-            <a:r>
-              <a:rPr lang="es-MX" baseline="0" dirty="0" err="1" smtClean="0"/>
-              <a:t>is</a:t>
-            </a:r>
-            <a:r>
-              <a:rPr lang="es-MX" baseline="0" dirty="0" smtClean="0"/>
-              <a:t> </a:t>
-            </a:r>
-            <a:r>
-              <a:rPr lang="es-MX" baseline="0" dirty="0" err="1" smtClean="0"/>
-              <a:t>the</a:t>
-            </a:r>
-            <a:r>
-              <a:rPr lang="es-MX" baseline="0" dirty="0" smtClean="0"/>
-              <a:t> </a:t>
-            </a:r>
-            <a:r>
-              <a:rPr lang="es-MX" baseline="0" dirty="0" err="1" smtClean="0"/>
-              <a:t>only</a:t>
-            </a:r>
-            <a:r>
-              <a:rPr lang="es-MX" baseline="0" dirty="0" smtClean="0"/>
-              <a:t> </a:t>
-            </a:r>
-            <a:r>
-              <a:rPr lang="es-MX" baseline="0" dirty="0" err="1" smtClean="0"/>
-              <a:t>specie</a:t>
-            </a:r>
-            <a:r>
-              <a:rPr lang="es-MX" baseline="0" dirty="0" smtClean="0"/>
-              <a:t> </a:t>
-            </a:r>
-            <a:r>
-              <a:rPr lang="es-MX" baseline="0" dirty="0" err="1" smtClean="0"/>
-              <a:t>giving</a:t>
-            </a:r>
-            <a:r>
-              <a:rPr lang="es-MX" baseline="0" dirty="0" smtClean="0"/>
-              <a:t> a </a:t>
-            </a:r>
-            <a:r>
-              <a:rPr lang="es-MX" baseline="0" dirty="0" err="1" smtClean="0"/>
-              <a:t>statistical</a:t>
-            </a:r>
-            <a:r>
-              <a:rPr lang="es-MX" baseline="0" dirty="0" smtClean="0"/>
-              <a:t> </a:t>
-            </a:r>
-            <a:r>
-              <a:rPr lang="es-MX" baseline="0" dirty="0" err="1" smtClean="0"/>
-              <a:t>signal</a:t>
-            </a:r>
-            <a:r>
-              <a:rPr lang="es-MX" baseline="0" dirty="0" smtClean="0"/>
-              <a:t> response to </a:t>
-            </a:r>
-            <a:r>
-              <a:rPr lang="es-MX" baseline="0" dirty="0" err="1" smtClean="0"/>
-              <a:t>nutrient</a:t>
-            </a:r>
-            <a:r>
-              <a:rPr lang="es-MX" baseline="0" dirty="0" smtClean="0"/>
-              <a:t> </a:t>
-            </a:r>
-            <a:r>
-              <a:rPr lang="es-MX" baseline="0" dirty="0" err="1" smtClean="0"/>
-              <a:t>addition</a:t>
-            </a:r>
-            <a:r>
-              <a:rPr lang="es-MX" baseline="0" dirty="0" smtClean="0"/>
-              <a:t> </a:t>
-            </a:r>
-            <a:r>
-              <a:rPr lang="es-MX" baseline="0" dirty="0" err="1" smtClean="0"/>
-              <a:t>on</a:t>
-            </a:r>
-            <a:r>
-              <a:rPr lang="es-MX" baseline="0" dirty="0" smtClean="0"/>
-              <a:t> </a:t>
-            </a:r>
-            <a:r>
-              <a:rPr lang="es-MX" baseline="0" dirty="0" err="1" smtClean="0"/>
-              <a:t>iQUE</a:t>
-            </a:r>
-            <a:r>
-              <a:rPr lang="es-MX" baseline="0" dirty="0" smtClean="0"/>
               <a:t>.</a:t>
-            </a:r>
-          </a:p>
-          <a:p>
-            <a:r>
-              <a:rPr lang="es-MX" baseline="0" dirty="0" err="1" smtClean="0"/>
-              <a:t>Alchornea</a:t>
-            </a:r>
-            <a:r>
-              <a:rPr lang="es-MX" baseline="0" dirty="0" smtClean="0"/>
-              <a:t>, </a:t>
-            </a:r>
-            <a:r>
-              <a:rPr lang="es-MX" baseline="0" dirty="0" err="1" smtClean="0"/>
-              <a:t>effect</a:t>
-            </a:r>
-            <a:r>
-              <a:rPr lang="es-MX" baseline="0" dirty="0" smtClean="0"/>
-              <a:t> of </a:t>
-            </a:r>
-            <a:r>
-              <a:rPr lang="es-MX" baseline="0" dirty="0" err="1" smtClean="0"/>
-              <a:t>the</a:t>
-            </a:r>
-            <a:r>
-              <a:rPr lang="es-MX" baseline="0" dirty="0" smtClean="0"/>
-              <a:t> N </a:t>
-            </a:r>
-            <a:r>
-              <a:rPr lang="es-MX" baseline="0" dirty="0" err="1" smtClean="0"/>
-              <a:t>on</a:t>
-            </a:r>
-            <a:r>
-              <a:rPr lang="es-MX" baseline="0" dirty="0" smtClean="0"/>
-              <a:t> d15N and C:N. </a:t>
-            </a:r>
-          </a:p>
-          <a:p>
-            <a:r>
-              <a:rPr lang="es-MX" baseline="0" dirty="0" err="1" smtClean="0"/>
-              <a:t>Myrcia</a:t>
-            </a:r>
-            <a:r>
-              <a:rPr lang="es-MX" baseline="0" dirty="0" smtClean="0"/>
-              <a:t>, </a:t>
-            </a:r>
-            <a:r>
-              <a:rPr lang="es-MX" baseline="0" dirty="0" err="1" smtClean="0"/>
-              <a:t>effect</a:t>
-            </a:r>
-            <a:r>
-              <a:rPr lang="es-MX" baseline="0" dirty="0" smtClean="0"/>
-              <a:t> of N </a:t>
-            </a:r>
-            <a:r>
-              <a:rPr lang="es-MX" baseline="0" dirty="0" err="1" smtClean="0"/>
-              <a:t>on</a:t>
-            </a:r>
-            <a:r>
-              <a:rPr lang="es-MX" baseline="0" dirty="0" smtClean="0"/>
-              <a:t> d18O, d15N, C:N</a:t>
-            </a:r>
-          </a:p>
-          <a:p>
-            <a:r>
-              <a:rPr lang="es-MX" baseline="0" dirty="0" err="1" smtClean="0"/>
-              <a:t>Hedyosmum</a:t>
-            </a:r>
-            <a:r>
-              <a:rPr lang="es-MX" baseline="0" dirty="0" smtClean="0"/>
-              <a:t>, </a:t>
-            </a:r>
-            <a:r>
-              <a:rPr lang="es-MX" baseline="0" dirty="0" err="1" smtClean="0"/>
-              <a:t>effect</a:t>
-            </a:r>
-            <a:r>
-              <a:rPr lang="es-MX" baseline="0" dirty="0" smtClean="0"/>
-              <a:t> of d15N and C:N. (+ p &lt;0.1)</a:t>
             </a:r>
             <a:endParaRPr lang="en-US" dirty="0"/>
           </a:p>
@@ -3108,7 +2641,7 @@
           <a:p>
             <a:fld id="{FB953BC2-43C1-4767-ADF3-5E906A4AA839}" type="slidenum">
               <a:rPr lang="en-US" smtClean="0"/>
-              <a:t>17</a:t>
+              <a:t>18</a:t>
             </a:fld>
             <a:endParaRPr lang="en-US"/>
           </a:p>
@@ -3117,7 +2650,7 @@
     </p:spTree>
     <p:extLst>
       <p:ext uri="{BB962C8B-B14F-4D97-AF65-F5344CB8AC3E}">
-        <p14:creationId xmlns:p14="http://schemas.microsoft.com/office/powerpoint/2010/main" val="3466854139"/>
+        <p14:creationId xmlns:p14="http://schemas.microsoft.com/office/powerpoint/2010/main" val="2152417619"/>
       </p:ext>
     </p:extLst>
   </p:cSld>
@@ -6445,55 +5978,29 @@
       </p:grpSpPr>
       <p:sp>
         <p:nvSpPr>
-          <p:cNvPr id="5" name="Rectángulo 4"/>
-          <p:cNvSpPr/>
+          <p:cNvPr id="24" name="CuadroTexto 23"/>
+          <p:cNvSpPr txBox="1"/>
           <p:nvPr/>
         </p:nvSpPr>
         <p:spPr>
           <a:xfrm>
-            <a:off x="667512" y="164030"/>
-            <a:ext cx="1691640" cy="402898"/>
+            <a:off x="534039" y="997973"/>
+            <a:ext cx="274320" cy="369332"/>
           </a:xfrm>
           <a:prstGeom prst="rect">
             <a:avLst/>
           </a:prstGeom>
+          <a:noFill/>
         </p:spPr>
-        <p:style>
-          <a:lnRef idx="2">
-            <a:schemeClr val="accent1">
-              <a:shade val="50000"/>
-            </a:schemeClr>
-          </a:lnRef>
-          <a:fillRef idx="1">
-            <a:schemeClr val="accent1"/>
-          </a:fillRef>
-          <a:effectRef idx="0">
-            <a:schemeClr val="accent1"/>
-          </a:effectRef>
-          <a:fontRef idx="minor">
-            <a:schemeClr val="lt1"/>
-          </a:fontRef>
-        </p:style>
         <p:txBody>
-          <a:bodyPr rtlCol="0" anchor="ctr"/>
+          <a:bodyPr wrap="square" rtlCol="0">
+            <a:spAutoFit/>
+          </a:bodyPr>
           <a:lstStyle/>
           <a:p>
-            <a:pPr algn="ctr"/>
             <a:r>
               <a:rPr lang="es-MX" dirty="0" smtClean="0"/>
               <a:t>*</a:t>
-            </a:r>
-            <a:r>
-              <a:rPr lang="es-MX" dirty="0" err="1" smtClean="0"/>
-              <a:t>Missing</a:t>
-            </a:r>
-            <a:r>
-              <a:rPr lang="es-MX" dirty="0" smtClean="0"/>
-              <a:t> </a:t>
-            </a:r>
-            <a:r>
-              <a:rPr lang="es-MX" dirty="0" err="1" smtClean="0"/>
-              <a:t>values</a:t>
             </a:r>
             <a:endParaRPr lang="en-US" dirty="0"/>
           </a:p>
@@ -6501,7 +6008,7 @@
       </p:sp>
       <p:pic>
         <p:nvPicPr>
-          <p:cNvPr id="17" name="Imagen 16"/>
+          <p:cNvPr id="2" name="Imagen 1"/>
           <p:cNvPicPr>
             <a:picLocks noChangeAspect="1"/>
           </p:cNvPicPr>
@@ -6515,32 +6022,8 @@
         </p:blipFill>
         <p:spPr>
           <a:xfrm>
-            <a:off x="327089" y="1108708"/>
-            <a:ext cx="5662232" cy="4640584"/>
-          </a:xfrm>
-          <a:prstGeom prst="rect">
-            <a:avLst/>
-          </a:prstGeom>
-        </p:spPr>
-      </p:pic>
-      <p:pic>
-        <p:nvPicPr>
-          <p:cNvPr id="21" name="Imagen 20"/>
-          <p:cNvPicPr>
-            <a:picLocks noChangeAspect="1"/>
-          </p:cNvPicPr>
-          <p:nvPr/>
-        </p:nvPicPr>
-        <p:blipFill>
-          <a:blip r:embed="rId4"/>
-          <a:stretch>
-            <a:fillRect/>
-          </a:stretch>
-        </p:blipFill>
-        <p:spPr>
-          <a:xfrm>
-            <a:off x="6096000" y="1200148"/>
-            <a:ext cx="5680746" cy="4661681"/>
+            <a:off x="945519" y="179201"/>
+            <a:ext cx="7918262" cy="6497810"/>
           </a:xfrm>
           <a:prstGeom prst="rect">
             <a:avLst/>
@@ -6549,103 +6032,13 @@
       </p:pic>
       <p:sp>
         <p:nvSpPr>
-          <p:cNvPr id="22" name="CuadroTexto 21"/>
-          <p:cNvSpPr txBox="1"/>
-          <p:nvPr/>
-        </p:nvSpPr>
-        <p:spPr>
-          <a:xfrm>
-            <a:off x="1068801" y="3793116"/>
-            <a:ext cx="274320" cy="369332"/>
-          </a:xfrm>
-          <a:prstGeom prst="rect">
-            <a:avLst/>
-          </a:prstGeom>
-          <a:noFill/>
-        </p:spPr>
-        <p:txBody>
-          <a:bodyPr wrap="square" rtlCol="0">
-            <a:spAutoFit/>
-          </a:bodyPr>
-          <a:lstStyle/>
-          <a:p>
-            <a:r>
-              <a:rPr lang="es-MX" dirty="0" smtClean="0"/>
-              <a:t>*</a:t>
-            </a:r>
-            <a:endParaRPr lang="en-US" dirty="0"/>
-          </a:p>
-        </p:txBody>
-      </p:sp>
-      <p:sp>
-        <p:nvSpPr>
-          <p:cNvPr id="23" name="CuadroTexto 22"/>
-          <p:cNvSpPr txBox="1"/>
-          <p:nvPr/>
-        </p:nvSpPr>
-        <p:spPr>
-          <a:xfrm>
-            <a:off x="2359152" y="3793116"/>
-            <a:ext cx="274320" cy="369332"/>
-          </a:xfrm>
-          <a:prstGeom prst="rect">
-            <a:avLst/>
-          </a:prstGeom>
-          <a:noFill/>
-        </p:spPr>
-        <p:txBody>
-          <a:bodyPr wrap="square" rtlCol="0">
-            <a:spAutoFit/>
-          </a:bodyPr>
-          <a:lstStyle/>
-          <a:p>
-            <a:r>
-              <a:rPr lang="es-MX" dirty="0" smtClean="0"/>
-              <a:t>*</a:t>
-            </a:r>
-            <a:endParaRPr lang="en-US" dirty="0"/>
-          </a:p>
-        </p:txBody>
-      </p:sp>
-      <p:sp>
-        <p:nvSpPr>
-          <p:cNvPr id="24" name="CuadroTexto 23"/>
-          <p:cNvSpPr txBox="1"/>
-          <p:nvPr/>
-        </p:nvSpPr>
-        <p:spPr>
-          <a:xfrm>
-            <a:off x="7641336" y="3977782"/>
-            <a:ext cx="274320" cy="369332"/>
-          </a:xfrm>
-          <a:prstGeom prst="rect">
-            <a:avLst/>
-          </a:prstGeom>
-          <a:noFill/>
-        </p:spPr>
-        <p:txBody>
-          <a:bodyPr wrap="square" rtlCol="0">
-            <a:spAutoFit/>
-          </a:bodyPr>
-          <a:lstStyle/>
-          <a:p>
-            <a:r>
-              <a:rPr lang="es-MX" dirty="0" smtClean="0"/>
-              <a:t>*</a:t>
-            </a:r>
-            <a:endParaRPr lang="en-US" dirty="0"/>
-          </a:p>
-        </p:txBody>
-      </p:sp>
-      <p:sp>
-        <p:nvSpPr>
           <p:cNvPr id="25" name="CuadroTexto 24"/>
           <p:cNvSpPr txBox="1"/>
           <p:nvPr/>
         </p:nvSpPr>
         <p:spPr>
           <a:xfrm>
-            <a:off x="8936373" y="1688734"/>
+            <a:off x="396879" y="628641"/>
             <a:ext cx="274320" cy="369332"/>
           </a:xfrm>
           <a:prstGeom prst="rect">
@@ -6689,150 +6082,6 @@
 
 <file path=ppt/slides/slide12.xml><?xml version="1.0" encoding="utf-8"?>
 <p:sld xmlns:a="http://schemas.openxmlformats.org/drawingml/2006/main" xmlns:r="http://schemas.openxmlformats.org/officeDocument/2006/relationships" xmlns:p="http://schemas.openxmlformats.org/presentationml/2006/main" show="0">
-  <p:cSld>
-    <p:spTree>
-      <p:nvGrpSpPr>
-        <p:cNvPr id="1" name=""/>
-        <p:cNvGrpSpPr/>
-        <p:nvPr/>
-      </p:nvGrpSpPr>
-      <p:grpSpPr>
-        <a:xfrm>
-          <a:off x="0" y="0"/>
-          <a:ext cx="0" cy="0"/>
-          <a:chOff x="0" y="0"/>
-          <a:chExt cx="0" cy="0"/>
-        </a:xfrm>
-      </p:grpSpPr>
-      <p:sp>
-        <p:nvSpPr>
-          <p:cNvPr id="5" name="Rectángulo 4"/>
-          <p:cNvSpPr/>
-          <p:nvPr/>
-        </p:nvSpPr>
-        <p:spPr>
-          <a:xfrm>
-            <a:off x="667512" y="164030"/>
-            <a:ext cx="1691640" cy="402898"/>
-          </a:xfrm>
-          <a:prstGeom prst="rect">
-            <a:avLst/>
-          </a:prstGeom>
-        </p:spPr>
-        <p:style>
-          <a:lnRef idx="2">
-            <a:schemeClr val="accent1">
-              <a:shade val="50000"/>
-            </a:schemeClr>
-          </a:lnRef>
-          <a:fillRef idx="1">
-            <a:schemeClr val="accent1"/>
-          </a:fillRef>
-          <a:effectRef idx="0">
-            <a:schemeClr val="accent1"/>
-          </a:effectRef>
-          <a:fontRef idx="minor">
-            <a:schemeClr val="lt1"/>
-          </a:fontRef>
-        </p:style>
-        <p:txBody>
-          <a:bodyPr rtlCol="0" anchor="ctr"/>
-          <a:lstStyle/>
-          <a:p>
-            <a:pPr algn="ctr"/>
-            <a:endParaRPr lang="en-US"/>
-          </a:p>
-        </p:txBody>
-      </p:sp>
-      <p:pic>
-        <p:nvPicPr>
-          <p:cNvPr id="18" name="Imagen 17"/>
-          <p:cNvPicPr>
-            <a:picLocks noChangeAspect="1"/>
-          </p:cNvPicPr>
-          <p:nvPr/>
-        </p:nvPicPr>
-        <p:blipFill>
-          <a:blip r:embed="rId3"/>
-          <a:stretch>
-            <a:fillRect/>
-          </a:stretch>
-        </p:blipFill>
-        <p:spPr>
-          <a:xfrm>
-            <a:off x="6096000" y="967552"/>
-            <a:ext cx="5834464" cy="4781740"/>
-          </a:xfrm>
-          <a:prstGeom prst="rect">
-            <a:avLst/>
-          </a:prstGeom>
-        </p:spPr>
-      </p:pic>
-      <p:cxnSp>
-        <p:nvCxnSpPr>
-          <p:cNvPr id="20" name="Conector recto 19"/>
-          <p:cNvCxnSpPr/>
-          <p:nvPr/>
-        </p:nvCxnSpPr>
-        <p:spPr>
-          <a:xfrm flipV="1">
-            <a:off x="7104888" y="566928"/>
-            <a:ext cx="4507992" cy="5779008"/>
-          </a:xfrm>
-          <a:prstGeom prst="line">
-            <a:avLst/>
-          </a:prstGeom>
-          <a:ln>
-            <a:solidFill>
-              <a:srgbClr val="FF0000"/>
-            </a:solidFill>
-          </a:ln>
-        </p:spPr>
-        <p:style>
-          <a:lnRef idx="3">
-            <a:schemeClr val="accent2"/>
-          </a:lnRef>
-          <a:fillRef idx="0">
-            <a:schemeClr val="accent2"/>
-          </a:fillRef>
-          <a:effectRef idx="2">
-            <a:schemeClr val="accent2"/>
-          </a:effectRef>
-          <a:fontRef idx="minor">
-            <a:schemeClr val="tx1"/>
-          </a:fontRef>
-        </p:style>
-      </p:cxnSp>
-    </p:spTree>
-    <p:extLst>
-      <p:ext uri="{BB962C8B-B14F-4D97-AF65-F5344CB8AC3E}">
-        <p14:creationId xmlns:p14="http://schemas.microsoft.com/office/powerpoint/2010/main" val="3118574709"/>
-      </p:ext>
-    </p:extLst>
-  </p:cSld>
-  <p:clrMapOvr>
-    <a:masterClrMapping/>
-  </p:clrMapOvr>
-  <mc:AlternateContent xmlns:mc="http://schemas.openxmlformats.org/markup-compatibility/2006" xmlns:p14="http://schemas.microsoft.com/office/powerpoint/2010/main">
-    <mc:Choice Requires="p14">
-      <p:transition spd="slow" p14:dur="2000"/>
-    </mc:Choice>
-    <mc:Fallback xmlns="">
-      <p:transition spd="slow"/>
-    </mc:Fallback>
-  </mc:AlternateContent>
-  <p:timing>
-    <p:tnLst>
-      <p:par>
-        <p:cTn id="1" dur="indefinite" restart="never" nodeType="tmRoot"/>
-      </p:par>
-    </p:tnLst>
-  </p:timing>
-</p:sld>
-</file>
-
-<file path=ppt/slides/slide13.xml><?xml version="1.0" encoding="utf-8"?>
-<p:sld xmlns:a="http://schemas.openxmlformats.org/drawingml/2006/main" xmlns:r="http://schemas.openxmlformats.org/officeDocument/2006/relationships" xmlns:p="http://schemas.openxmlformats.org/presentationml/2006/main">
   <p:cSld>
     <p:spTree>
       <p:nvGrpSpPr>
@@ -12031,6 +11280,14 @@
   <p:clrMapOvr>
     <a:masterClrMapping/>
   </p:clrMapOvr>
+  <mc:AlternateContent xmlns:mc="http://schemas.openxmlformats.org/markup-compatibility/2006">
+    <mc:Choice xmlns:p14="http://schemas.microsoft.com/office/powerpoint/2010/main" Requires="p14">
+      <p:transition spd="slow" p14:dur="2000"/>
+    </mc:Choice>
+    <mc:Fallback>
+      <p:transition spd="slow"/>
+    </mc:Fallback>
+  </mc:AlternateContent>
   <p:timing>
     <p:tnLst>
       <p:par>
@@ -12041,7 +11298,7 @@
 </p:sld>
 </file>
 
-<file path=ppt/slides/slide14.xml><?xml version="1.0" encoding="utf-8"?>
+<file path=ppt/slides/slide13.xml><?xml version="1.0" encoding="utf-8"?>
 <p:sld xmlns:a="http://schemas.openxmlformats.org/drawingml/2006/main" xmlns:r="http://schemas.openxmlformats.org/officeDocument/2006/relationships" xmlns:p="http://schemas.openxmlformats.org/presentationml/2006/main">
   <p:cSld>
     <p:spTree>
@@ -12319,7 +11576,7 @@
 </p:sld>
 </file>
 
-<file path=ppt/slides/slide15.xml><?xml version="1.0" encoding="utf-8"?>
+<file path=ppt/slides/slide14.xml><?xml version="1.0" encoding="utf-8"?>
 <p:sld xmlns:a="http://schemas.openxmlformats.org/drawingml/2006/main" xmlns:r="http://schemas.openxmlformats.org/officeDocument/2006/relationships" xmlns:p="http://schemas.openxmlformats.org/presentationml/2006/main" show="0">
   <p:cSld>
     <p:spTree>
@@ -12412,7 +11669,7 @@
 </p:sld>
 </file>
 
-<file path=ppt/slides/slide16.xml><?xml version="1.0" encoding="utf-8"?>
+<file path=ppt/slides/slide15.xml><?xml version="1.0" encoding="utf-8"?>
 <p:sld xmlns:a="http://schemas.openxmlformats.org/drawingml/2006/main" xmlns:r="http://schemas.openxmlformats.org/officeDocument/2006/relationships" xmlns:p="http://schemas.openxmlformats.org/presentationml/2006/main" show="0">
   <p:cSld>
     <p:spTree>
@@ -12505,7 +11762,7 @@
 </p:sld>
 </file>
 
-<file path=ppt/slides/slide17.xml><?xml version="1.0" encoding="utf-8"?>
+<file path=ppt/slides/slide16.xml><?xml version="1.0" encoding="utf-8"?>
 <p:sld xmlns:a="http://schemas.openxmlformats.org/drawingml/2006/main" xmlns:r="http://schemas.openxmlformats.org/officeDocument/2006/relationships" xmlns:p="http://schemas.openxmlformats.org/presentationml/2006/main" show="0">
   <p:cSld>
     <p:spTree>
@@ -12676,7 +11933,7 @@
 </p:sld>
 </file>
 
-<file path=ppt/slides/slide18.xml><?xml version="1.0" encoding="utf-8"?>
+<file path=ppt/slides/slide17.xml><?xml version="1.0" encoding="utf-8"?>
 <p:sld xmlns:a="http://schemas.openxmlformats.org/drawingml/2006/main" xmlns:r="http://schemas.openxmlformats.org/officeDocument/2006/relationships" xmlns:p="http://schemas.openxmlformats.org/presentationml/2006/main">
   <p:cSld>
     <p:spTree>
@@ -12907,7 +12164,7 @@
 </p:sld>
 </file>
 
-<file path=ppt/slides/slide19.xml><?xml version="1.0" encoding="utf-8"?>
+<file path=ppt/slides/slide18.xml><?xml version="1.0" encoding="utf-8"?>
 <p:sld xmlns:a="http://schemas.openxmlformats.org/drawingml/2006/main" xmlns:r="http://schemas.openxmlformats.org/officeDocument/2006/relationships" xmlns:p="http://schemas.openxmlformats.org/presentationml/2006/main">
   <p:cSld>
     <p:spTree>
@@ -13135,590 +12392,7 @@
 </p:sld>
 </file>
 
-<file path=ppt/slides/slide2.xml><?xml version="1.0" encoding="utf-8"?>
-<p:sld xmlns:a="http://schemas.openxmlformats.org/drawingml/2006/main" xmlns:r="http://schemas.openxmlformats.org/officeDocument/2006/relationships" xmlns:p="http://schemas.openxmlformats.org/presentationml/2006/main">
-  <p:cSld>
-    <p:spTree>
-      <p:nvGrpSpPr>
-        <p:cNvPr id="1" name=""/>
-        <p:cNvGrpSpPr/>
-        <p:nvPr/>
-      </p:nvGrpSpPr>
-      <p:grpSpPr>
-        <a:xfrm>
-          <a:off x="0" y="0"/>
-          <a:ext cx="0" cy="0"/>
-          <a:chOff x="0" y="0"/>
-          <a:chExt cx="0" cy="0"/>
-        </a:xfrm>
-      </p:grpSpPr>
-      <p:sp>
-        <p:nvSpPr>
-          <p:cNvPr id="10" name="Rectángulo 9"/>
-          <p:cNvSpPr/>
-          <p:nvPr/>
-        </p:nvSpPr>
-        <p:spPr>
-          <a:xfrm>
-            <a:off x="731520" y="3291840"/>
-            <a:ext cx="11082528" cy="3374136"/>
-          </a:xfrm>
-          <a:prstGeom prst="rect">
-            <a:avLst/>
-          </a:prstGeom>
-        </p:spPr>
-        <p:style>
-          <a:lnRef idx="2">
-            <a:schemeClr val="accent1">
-              <a:shade val="50000"/>
-            </a:schemeClr>
-          </a:lnRef>
-          <a:fillRef idx="1">
-            <a:schemeClr val="accent1"/>
-          </a:fillRef>
-          <a:effectRef idx="0">
-            <a:schemeClr val="accent1"/>
-          </a:effectRef>
-          <a:fontRef idx="minor">
-            <a:schemeClr val="lt1"/>
-          </a:fontRef>
-        </p:style>
-        <p:txBody>
-          <a:bodyPr rtlCol="0" anchor="ctr"/>
-          <a:lstStyle/>
-          <a:p>
-            <a:pPr algn="ctr"/>
-            <a:endParaRPr lang="en-US"/>
-          </a:p>
-        </p:txBody>
-      </p:sp>
-      <p:sp>
-        <p:nvSpPr>
-          <p:cNvPr id="2" name="Título 1"/>
-          <p:cNvSpPr>
-            <a:spLocks noGrp="1"/>
-          </p:cNvSpPr>
-          <p:nvPr>
-            <p:ph type="title"/>
-          </p:nvPr>
-        </p:nvSpPr>
-        <p:spPr/>
-        <p:txBody>
-          <a:bodyPr/>
-          <a:lstStyle/>
-          <a:p>
-            <a:endParaRPr lang="en-US" dirty="0"/>
-          </a:p>
-        </p:txBody>
-      </p:sp>
-      <p:pic>
-        <p:nvPicPr>
-          <p:cNvPr id="7" name="Marcador de contenido 6"/>
-          <p:cNvPicPr>
-            <a:picLocks noGrp="1" noChangeAspect="1"/>
-          </p:cNvPicPr>
-          <p:nvPr>
-            <p:ph idx="1"/>
-          </p:nvPr>
-        </p:nvPicPr>
-        <p:blipFill>
-          <a:blip r:embed="rId2">
-            <a:extLst>
-              <a:ext uri="{28A0092B-C50C-407E-A947-70E740481C1C}">
-                <a14:useLocalDpi xmlns:a14="http://schemas.microsoft.com/office/drawing/2010/main" val="0"/>
-              </a:ext>
-            </a:extLst>
-          </a:blip>
-          <a:stretch>
-            <a:fillRect/>
-          </a:stretch>
-        </p:blipFill>
-        <p:spPr>
-          <a:xfrm>
-            <a:off x="2157997" y="4143772"/>
-            <a:ext cx="2076056" cy="1905633"/>
-          </a:xfrm>
-        </p:spPr>
-      </p:pic>
-      <p:sp>
-        <p:nvSpPr>
-          <p:cNvPr id="4" name="Elipse 3"/>
-          <p:cNvSpPr/>
-          <p:nvPr/>
-        </p:nvSpPr>
-        <p:spPr>
-          <a:xfrm>
-            <a:off x="594360" y="337376"/>
-            <a:ext cx="2926080" cy="2579560"/>
-          </a:xfrm>
-          <a:prstGeom prst="ellipse">
-            <a:avLst/>
-          </a:prstGeom>
-        </p:spPr>
-        <p:style>
-          <a:lnRef idx="2">
-            <a:schemeClr val="accent2">
-              <a:shade val="50000"/>
-            </a:schemeClr>
-          </a:lnRef>
-          <a:fillRef idx="1">
-            <a:schemeClr val="accent2"/>
-          </a:fillRef>
-          <a:effectRef idx="0">
-            <a:schemeClr val="accent2"/>
-          </a:effectRef>
-          <a:fontRef idx="minor">
-            <a:schemeClr val="lt1"/>
-          </a:fontRef>
-        </p:style>
-        <p:txBody>
-          <a:bodyPr rtlCol="0" anchor="ctr"/>
-          <a:lstStyle/>
-          <a:p>
-            <a:pPr algn="ctr"/>
-            <a:r>
-              <a:rPr lang="es-MX" dirty="0" err="1" smtClean="0"/>
-              <a:t>Nutrient</a:t>
-            </a:r>
-            <a:r>
-              <a:rPr lang="es-MX" dirty="0" smtClean="0"/>
-              <a:t> </a:t>
-            </a:r>
-            <a:r>
-              <a:rPr lang="es-MX" dirty="0" err="1" smtClean="0"/>
-              <a:t>addition</a:t>
-            </a:r>
-            <a:r>
-              <a:rPr lang="es-MX" dirty="0" smtClean="0"/>
-              <a:t> </a:t>
-            </a:r>
-            <a:r>
-              <a:rPr lang="es-MX" dirty="0" err="1" smtClean="0"/>
-              <a:t>experiment</a:t>
-            </a:r>
-            <a:endParaRPr lang="es-MX" dirty="0" smtClean="0"/>
-          </a:p>
-          <a:p>
-            <a:pPr algn="ctr"/>
-            <a:endParaRPr lang="es-MX" dirty="0"/>
-          </a:p>
-          <a:p>
-            <a:pPr algn="ctr"/>
-            <a:r>
-              <a:rPr lang="es-MX" dirty="0" smtClean="0"/>
-              <a:t>N, P, N*P</a:t>
-            </a:r>
-            <a:endParaRPr lang="en-US" dirty="0"/>
-          </a:p>
-        </p:txBody>
-      </p:sp>
-      <p:sp>
-        <p:nvSpPr>
-          <p:cNvPr id="5" name="Elipse 4"/>
-          <p:cNvSpPr/>
-          <p:nvPr/>
-        </p:nvSpPr>
-        <p:spPr>
-          <a:xfrm>
-            <a:off x="4581144" y="337375"/>
-            <a:ext cx="2795016" cy="2491993"/>
-          </a:xfrm>
-          <a:prstGeom prst="ellipse">
-            <a:avLst/>
-          </a:prstGeom>
-        </p:spPr>
-        <p:style>
-          <a:lnRef idx="2">
-            <a:schemeClr val="accent6">
-              <a:shade val="50000"/>
-            </a:schemeClr>
-          </a:lnRef>
-          <a:fillRef idx="1">
-            <a:schemeClr val="accent6"/>
-          </a:fillRef>
-          <a:effectRef idx="0">
-            <a:schemeClr val="accent6"/>
-          </a:effectRef>
-          <a:fontRef idx="minor">
-            <a:schemeClr val="lt1"/>
-          </a:fontRef>
-        </p:style>
-        <p:txBody>
-          <a:bodyPr rtlCol="0" anchor="ctr"/>
-          <a:lstStyle/>
-          <a:p>
-            <a:pPr algn="ctr"/>
-            <a:r>
-              <a:rPr lang="es-MX" dirty="0" err="1" smtClean="0"/>
-              <a:t>Leaf</a:t>
-            </a:r>
-            <a:r>
-              <a:rPr lang="es-MX" dirty="0" smtClean="0"/>
-              <a:t> </a:t>
-            </a:r>
-            <a:r>
-              <a:rPr lang="es-MX" dirty="0" err="1" smtClean="0"/>
-              <a:t>functional</a:t>
-            </a:r>
-            <a:r>
-              <a:rPr lang="es-MX" dirty="0" smtClean="0"/>
-              <a:t> </a:t>
-            </a:r>
-            <a:r>
-              <a:rPr lang="es-MX" dirty="0" err="1" smtClean="0"/>
-              <a:t>traits</a:t>
-            </a:r>
-            <a:endParaRPr lang="es-MX" dirty="0" smtClean="0"/>
-          </a:p>
-          <a:p>
-            <a:pPr marL="285750" indent="-285750" algn="ctr">
-              <a:buFontTx/>
-              <a:buChar char="-"/>
-            </a:pPr>
-            <a:r>
-              <a:rPr lang="es-MX" sz="1200" dirty="0" err="1" smtClean="0"/>
-              <a:t>Thoughness</a:t>
-            </a:r>
-            <a:endParaRPr lang="es-MX" sz="1200" dirty="0" smtClean="0"/>
-          </a:p>
-          <a:p>
-            <a:pPr marL="285750" indent="-285750" algn="ctr">
-              <a:buFontTx/>
-              <a:buChar char="-"/>
-            </a:pPr>
-            <a:r>
-              <a:rPr lang="es-MX" sz="1200" dirty="0" err="1" smtClean="0"/>
-              <a:t>Thickness</a:t>
-            </a:r>
-            <a:endParaRPr lang="es-MX" sz="1200" dirty="0" smtClean="0"/>
-          </a:p>
-          <a:p>
-            <a:pPr marL="285750" indent="-285750" algn="ctr">
-              <a:buFontTx/>
-              <a:buChar char="-"/>
-            </a:pPr>
-            <a:r>
-              <a:rPr lang="es-MX" sz="1200" dirty="0" smtClean="0"/>
-              <a:t>SLA / LA</a:t>
-            </a:r>
-          </a:p>
-          <a:p>
-            <a:pPr marL="285750" indent="-285750" algn="ctr">
-              <a:buFontTx/>
-              <a:buChar char="-"/>
-            </a:pPr>
-            <a:r>
-              <a:rPr lang="es-MX" sz="1200" dirty="0" smtClean="0"/>
-              <a:t>Carea / </a:t>
-            </a:r>
-            <a:r>
-              <a:rPr lang="es-MX" sz="1200" dirty="0" err="1" smtClean="0"/>
-              <a:t>Narea</a:t>
-            </a:r>
-            <a:endParaRPr lang="es-MX" sz="1200" dirty="0" smtClean="0"/>
-          </a:p>
-          <a:p>
-            <a:pPr marL="285750" indent="-285750" algn="ctr">
-              <a:buFontTx/>
-              <a:buChar char="-"/>
-            </a:pPr>
-            <a:r>
-              <a:rPr lang="es-MX" sz="1200" dirty="0" err="1" smtClean="0"/>
-              <a:t>Leat</a:t>
-            </a:r>
-            <a:r>
-              <a:rPr lang="es-MX" sz="1200" dirty="0" smtClean="0"/>
-              <a:t> </a:t>
-            </a:r>
-            <a:r>
-              <a:rPr lang="es-MX" sz="1200" dirty="0" err="1" smtClean="0"/>
-              <a:t>water</a:t>
-            </a:r>
-            <a:r>
-              <a:rPr lang="es-MX" sz="1200" dirty="0" smtClean="0"/>
-              <a:t> </a:t>
-            </a:r>
-            <a:r>
-              <a:rPr lang="es-MX" sz="1200" dirty="0" err="1" smtClean="0"/>
-              <a:t>content</a:t>
-            </a:r>
-            <a:endParaRPr lang="en-US" sz="1200" dirty="0"/>
-          </a:p>
-        </p:txBody>
-      </p:sp>
-      <p:sp>
-        <p:nvSpPr>
-          <p:cNvPr id="6" name="Elipse 5"/>
-          <p:cNvSpPr/>
-          <p:nvPr/>
-        </p:nvSpPr>
-        <p:spPr>
-          <a:xfrm>
-            <a:off x="8357616" y="337375"/>
-            <a:ext cx="2896248" cy="2491993"/>
-          </a:xfrm>
-          <a:prstGeom prst="ellipse">
-            <a:avLst/>
-          </a:prstGeom>
-        </p:spPr>
-        <p:style>
-          <a:lnRef idx="2">
-            <a:schemeClr val="accent2">
-              <a:shade val="50000"/>
-            </a:schemeClr>
-          </a:lnRef>
-          <a:fillRef idx="1">
-            <a:schemeClr val="accent2"/>
-          </a:fillRef>
-          <a:effectRef idx="0">
-            <a:schemeClr val="accent2"/>
-          </a:effectRef>
-          <a:fontRef idx="minor">
-            <a:schemeClr val="lt1"/>
-          </a:fontRef>
-        </p:style>
-        <p:txBody>
-          <a:bodyPr rtlCol="0" anchor="ctr"/>
-          <a:lstStyle/>
-          <a:p>
-            <a:pPr algn="ctr"/>
-            <a:r>
-              <a:rPr lang="es-MX" dirty="0" err="1" smtClean="0"/>
-              <a:t>Climatic</a:t>
-            </a:r>
-            <a:r>
-              <a:rPr lang="es-MX" dirty="0" smtClean="0"/>
-              <a:t> – </a:t>
-            </a:r>
-            <a:r>
-              <a:rPr lang="es-MX" dirty="0" err="1" smtClean="0"/>
-              <a:t>Using</a:t>
-            </a:r>
-            <a:r>
-              <a:rPr lang="es-MX" dirty="0" smtClean="0"/>
-              <a:t> </a:t>
-            </a:r>
-            <a:r>
-              <a:rPr lang="es-MX" dirty="0" err="1" smtClean="0"/>
-              <a:t>Elevation</a:t>
-            </a:r>
-            <a:r>
-              <a:rPr lang="es-MX" dirty="0" smtClean="0"/>
-              <a:t> as proxy</a:t>
-            </a:r>
-          </a:p>
-          <a:p>
-            <a:pPr algn="ctr"/>
-            <a:r>
-              <a:rPr lang="es-MX" dirty="0" smtClean="0"/>
-              <a:t>1000, 2000, 3000</a:t>
-            </a:r>
-          </a:p>
-          <a:p>
-            <a:pPr algn="ctr"/>
-            <a:endParaRPr lang="en-US" dirty="0"/>
-          </a:p>
-        </p:txBody>
-      </p:sp>
-      <p:pic>
-        <p:nvPicPr>
-          <p:cNvPr id="8" name="Imagen 7"/>
-          <p:cNvPicPr>
-            <a:picLocks noChangeAspect="1"/>
-          </p:cNvPicPr>
-          <p:nvPr/>
-        </p:nvPicPr>
-        <p:blipFill>
-          <a:blip r:embed="rId3" cstate="print">
-            <a:extLst>
-              <a:ext uri="{28A0092B-C50C-407E-A947-70E740481C1C}">
-                <a14:useLocalDpi xmlns:a14="http://schemas.microsoft.com/office/drawing/2010/main" val="0"/>
-              </a:ext>
-            </a:extLst>
-          </a:blip>
-          <a:stretch>
-            <a:fillRect/>
-          </a:stretch>
-        </p:blipFill>
-        <p:spPr>
-          <a:xfrm>
-            <a:off x="6606264" y="3721896"/>
-            <a:ext cx="4887792" cy="2749383"/>
-          </a:xfrm>
-          <a:prstGeom prst="rect">
-            <a:avLst/>
-          </a:prstGeom>
-        </p:spPr>
-      </p:pic>
-      <p:sp>
-        <p:nvSpPr>
-          <p:cNvPr id="9" name="CuadroTexto 8"/>
-          <p:cNvSpPr txBox="1"/>
-          <p:nvPr/>
-        </p:nvSpPr>
-        <p:spPr>
-          <a:xfrm>
-            <a:off x="4953000" y="4727256"/>
-            <a:ext cx="1389888" cy="369332"/>
-          </a:xfrm>
-          <a:prstGeom prst="rect">
-            <a:avLst/>
-          </a:prstGeom>
-          <a:noFill/>
-        </p:spPr>
-        <p:txBody>
-          <a:bodyPr wrap="square" rtlCol="0">
-            <a:spAutoFit/>
-          </a:bodyPr>
-          <a:lstStyle/>
-          <a:p>
-            <a:r>
-              <a:rPr lang="es-MX" dirty="0" err="1" smtClean="0"/>
-              <a:t>iWUE</a:t>
-            </a:r>
-            <a:r>
-              <a:rPr lang="es-MX" dirty="0" smtClean="0"/>
-              <a:t> = A/g</a:t>
-            </a:r>
-            <a:endParaRPr lang="en-US" dirty="0"/>
-          </a:p>
-        </p:txBody>
-      </p:sp>
-      <p:sp>
-        <p:nvSpPr>
-          <p:cNvPr id="13" name="Flecha abajo 12"/>
-          <p:cNvSpPr/>
-          <p:nvPr/>
-        </p:nvSpPr>
-        <p:spPr>
-          <a:xfrm>
-            <a:off x="1476756" y="2462924"/>
-            <a:ext cx="1161288" cy="1305944"/>
-          </a:xfrm>
-          <a:prstGeom prst="downArrow">
-            <a:avLst/>
-          </a:prstGeom>
-        </p:spPr>
-        <p:style>
-          <a:lnRef idx="2">
-            <a:schemeClr val="dk1"/>
-          </a:lnRef>
-          <a:fillRef idx="1">
-            <a:schemeClr val="lt1"/>
-          </a:fillRef>
-          <a:effectRef idx="0">
-            <a:schemeClr val="dk1"/>
-          </a:effectRef>
-          <a:fontRef idx="minor">
-            <a:schemeClr val="dk1"/>
-          </a:fontRef>
-        </p:style>
-        <p:txBody>
-          <a:bodyPr rtlCol="0" anchor="ctr"/>
-          <a:lstStyle/>
-          <a:p>
-            <a:pPr algn="ctr"/>
-            <a:endParaRPr lang="en-US"/>
-          </a:p>
-        </p:txBody>
-      </p:sp>
-      <p:sp>
-        <p:nvSpPr>
-          <p:cNvPr id="14" name="Flecha abajo 13"/>
-          <p:cNvSpPr/>
-          <p:nvPr/>
-        </p:nvSpPr>
-        <p:spPr>
-          <a:xfrm>
-            <a:off x="5515356" y="2537104"/>
-            <a:ext cx="1161288" cy="1305944"/>
-          </a:xfrm>
-          <a:prstGeom prst="downArrow">
-            <a:avLst/>
-          </a:prstGeom>
-        </p:spPr>
-        <p:style>
-          <a:lnRef idx="2">
-            <a:schemeClr val="dk1"/>
-          </a:lnRef>
-          <a:fillRef idx="1">
-            <a:schemeClr val="lt1"/>
-          </a:fillRef>
-          <a:effectRef idx="0">
-            <a:schemeClr val="dk1"/>
-          </a:effectRef>
-          <a:fontRef idx="minor">
-            <a:schemeClr val="dk1"/>
-          </a:fontRef>
-        </p:style>
-        <p:txBody>
-          <a:bodyPr rtlCol="0" anchor="ctr"/>
-          <a:lstStyle/>
-          <a:p>
-            <a:pPr algn="ctr"/>
-            <a:endParaRPr lang="en-US"/>
-          </a:p>
-        </p:txBody>
-      </p:sp>
-      <p:sp>
-        <p:nvSpPr>
-          <p:cNvPr id="15" name="Flecha abajo 14"/>
-          <p:cNvSpPr/>
-          <p:nvPr/>
-        </p:nvSpPr>
-        <p:spPr>
-          <a:xfrm>
-            <a:off x="9261372" y="2324000"/>
-            <a:ext cx="1161288" cy="1305944"/>
-          </a:xfrm>
-          <a:prstGeom prst="downArrow">
-            <a:avLst/>
-          </a:prstGeom>
-        </p:spPr>
-        <p:style>
-          <a:lnRef idx="2">
-            <a:schemeClr val="dk1"/>
-          </a:lnRef>
-          <a:fillRef idx="1">
-            <a:schemeClr val="lt1"/>
-          </a:fillRef>
-          <a:effectRef idx="0">
-            <a:schemeClr val="dk1"/>
-          </a:effectRef>
-          <a:fontRef idx="minor">
-            <a:schemeClr val="dk1"/>
-          </a:fontRef>
-        </p:style>
-        <p:txBody>
-          <a:bodyPr rtlCol="0" anchor="ctr"/>
-          <a:lstStyle/>
-          <a:p>
-            <a:pPr algn="ctr"/>
-            <a:endParaRPr lang="en-US"/>
-          </a:p>
-        </p:txBody>
-      </p:sp>
-    </p:spTree>
-    <p:extLst>
-      <p:ext uri="{BB962C8B-B14F-4D97-AF65-F5344CB8AC3E}">
-        <p14:creationId xmlns:p14="http://schemas.microsoft.com/office/powerpoint/2010/main" val="1733027128"/>
-      </p:ext>
-    </p:extLst>
-  </p:cSld>
-  <p:clrMapOvr>
-    <a:masterClrMapping/>
-  </p:clrMapOvr>
-  <p:timing>
-    <p:tnLst>
-      <p:par>
-        <p:cTn id="1" dur="indefinite" restart="never" nodeType="tmRoot"/>
-      </p:par>
-    </p:tnLst>
-  </p:timing>
-</p:sld>
-</file>
-
-<file path=ppt/slides/slide20.xml><?xml version="1.0" encoding="utf-8"?>
+<file path=ppt/slides/slide19.xml><?xml version="1.0" encoding="utf-8"?>
 <p:sld xmlns:a="http://schemas.openxmlformats.org/drawingml/2006/main" xmlns:r="http://schemas.openxmlformats.org/officeDocument/2006/relationships" xmlns:p="http://schemas.openxmlformats.org/presentationml/2006/main">
   <p:cSld>
     <p:spTree>
@@ -16923,7 +15597,590 @@
 </p:sld>
 </file>
 
-<file path=ppt/slides/slide21.xml><?xml version="1.0" encoding="utf-8"?>
+<file path=ppt/slides/slide2.xml><?xml version="1.0" encoding="utf-8"?>
+<p:sld xmlns:a="http://schemas.openxmlformats.org/drawingml/2006/main" xmlns:r="http://schemas.openxmlformats.org/officeDocument/2006/relationships" xmlns:p="http://schemas.openxmlformats.org/presentationml/2006/main">
+  <p:cSld>
+    <p:spTree>
+      <p:nvGrpSpPr>
+        <p:cNvPr id="1" name=""/>
+        <p:cNvGrpSpPr/>
+        <p:nvPr/>
+      </p:nvGrpSpPr>
+      <p:grpSpPr>
+        <a:xfrm>
+          <a:off x="0" y="0"/>
+          <a:ext cx="0" cy="0"/>
+          <a:chOff x="0" y="0"/>
+          <a:chExt cx="0" cy="0"/>
+        </a:xfrm>
+      </p:grpSpPr>
+      <p:sp>
+        <p:nvSpPr>
+          <p:cNvPr id="10" name="Rectángulo 9"/>
+          <p:cNvSpPr/>
+          <p:nvPr/>
+        </p:nvSpPr>
+        <p:spPr>
+          <a:xfrm>
+            <a:off x="731520" y="3291840"/>
+            <a:ext cx="11082528" cy="3374136"/>
+          </a:xfrm>
+          <a:prstGeom prst="rect">
+            <a:avLst/>
+          </a:prstGeom>
+        </p:spPr>
+        <p:style>
+          <a:lnRef idx="2">
+            <a:schemeClr val="accent1">
+              <a:shade val="50000"/>
+            </a:schemeClr>
+          </a:lnRef>
+          <a:fillRef idx="1">
+            <a:schemeClr val="accent1"/>
+          </a:fillRef>
+          <a:effectRef idx="0">
+            <a:schemeClr val="accent1"/>
+          </a:effectRef>
+          <a:fontRef idx="minor">
+            <a:schemeClr val="lt1"/>
+          </a:fontRef>
+        </p:style>
+        <p:txBody>
+          <a:bodyPr rtlCol="0" anchor="ctr"/>
+          <a:lstStyle/>
+          <a:p>
+            <a:pPr algn="ctr"/>
+            <a:endParaRPr lang="en-US"/>
+          </a:p>
+        </p:txBody>
+      </p:sp>
+      <p:sp>
+        <p:nvSpPr>
+          <p:cNvPr id="2" name="Título 1"/>
+          <p:cNvSpPr>
+            <a:spLocks noGrp="1"/>
+          </p:cNvSpPr>
+          <p:nvPr>
+            <p:ph type="title"/>
+          </p:nvPr>
+        </p:nvSpPr>
+        <p:spPr/>
+        <p:txBody>
+          <a:bodyPr/>
+          <a:lstStyle/>
+          <a:p>
+            <a:endParaRPr lang="en-US" dirty="0"/>
+          </a:p>
+        </p:txBody>
+      </p:sp>
+      <p:pic>
+        <p:nvPicPr>
+          <p:cNvPr id="7" name="Marcador de contenido 6"/>
+          <p:cNvPicPr>
+            <a:picLocks noGrp="1" noChangeAspect="1"/>
+          </p:cNvPicPr>
+          <p:nvPr>
+            <p:ph idx="1"/>
+          </p:nvPr>
+        </p:nvPicPr>
+        <p:blipFill>
+          <a:blip r:embed="rId2">
+            <a:extLst>
+              <a:ext uri="{28A0092B-C50C-407E-A947-70E740481C1C}">
+                <a14:useLocalDpi xmlns:a14="http://schemas.microsoft.com/office/drawing/2010/main" val="0"/>
+              </a:ext>
+            </a:extLst>
+          </a:blip>
+          <a:stretch>
+            <a:fillRect/>
+          </a:stretch>
+        </p:blipFill>
+        <p:spPr>
+          <a:xfrm>
+            <a:off x="2157997" y="4143772"/>
+            <a:ext cx="2076056" cy="1905633"/>
+          </a:xfrm>
+        </p:spPr>
+      </p:pic>
+      <p:sp>
+        <p:nvSpPr>
+          <p:cNvPr id="4" name="Elipse 3"/>
+          <p:cNvSpPr/>
+          <p:nvPr/>
+        </p:nvSpPr>
+        <p:spPr>
+          <a:xfrm>
+            <a:off x="594360" y="337376"/>
+            <a:ext cx="2926080" cy="2579560"/>
+          </a:xfrm>
+          <a:prstGeom prst="ellipse">
+            <a:avLst/>
+          </a:prstGeom>
+        </p:spPr>
+        <p:style>
+          <a:lnRef idx="2">
+            <a:schemeClr val="accent2">
+              <a:shade val="50000"/>
+            </a:schemeClr>
+          </a:lnRef>
+          <a:fillRef idx="1">
+            <a:schemeClr val="accent2"/>
+          </a:fillRef>
+          <a:effectRef idx="0">
+            <a:schemeClr val="accent2"/>
+          </a:effectRef>
+          <a:fontRef idx="minor">
+            <a:schemeClr val="lt1"/>
+          </a:fontRef>
+        </p:style>
+        <p:txBody>
+          <a:bodyPr rtlCol="0" anchor="ctr"/>
+          <a:lstStyle/>
+          <a:p>
+            <a:pPr algn="ctr"/>
+            <a:r>
+              <a:rPr lang="es-MX" dirty="0" err="1" smtClean="0"/>
+              <a:t>Nutrient</a:t>
+            </a:r>
+            <a:r>
+              <a:rPr lang="es-MX" dirty="0" smtClean="0"/>
+              <a:t> </a:t>
+            </a:r>
+            <a:r>
+              <a:rPr lang="es-MX" dirty="0" err="1" smtClean="0"/>
+              <a:t>addition</a:t>
+            </a:r>
+            <a:r>
+              <a:rPr lang="es-MX" dirty="0" smtClean="0"/>
+              <a:t> </a:t>
+            </a:r>
+            <a:r>
+              <a:rPr lang="es-MX" dirty="0" err="1" smtClean="0"/>
+              <a:t>experiment</a:t>
+            </a:r>
+            <a:endParaRPr lang="es-MX" dirty="0" smtClean="0"/>
+          </a:p>
+          <a:p>
+            <a:pPr algn="ctr"/>
+            <a:endParaRPr lang="es-MX" dirty="0"/>
+          </a:p>
+          <a:p>
+            <a:pPr algn="ctr"/>
+            <a:r>
+              <a:rPr lang="es-MX" dirty="0" smtClean="0"/>
+              <a:t>N, P, N*P</a:t>
+            </a:r>
+            <a:endParaRPr lang="en-US" dirty="0"/>
+          </a:p>
+        </p:txBody>
+      </p:sp>
+      <p:sp>
+        <p:nvSpPr>
+          <p:cNvPr id="5" name="Elipse 4"/>
+          <p:cNvSpPr/>
+          <p:nvPr/>
+        </p:nvSpPr>
+        <p:spPr>
+          <a:xfrm>
+            <a:off x="4581144" y="337375"/>
+            <a:ext cx="2795016" cy="2491993"/>
+          </a:xfrm>
+          <a:prstGeom prst="ellipse">
+            <a:avLst/>
+          </a:prstGeom>
+        </p:spPr>
+        <p:style>
+          <a:lnRef idx="2">
+            <a:schemeClr val="accent6">
+              <a:shade val="50000"/>
+            </a:schemeClr>
+          </a:lnRef>
+          <a:fillRef idx="1">
+            <a:schemeClr val="accent6"/>
+          </a:fillRef>
+          <a:effectRef idx="0">
+            <a:schemeClr val="accent6"/>
+          </a:effectRef>
+          <a:fontRef idx="minor">
+            <a:schemeClr val="lt1"/>
+          </a:fontRef>
+        </p:style>
+        <p:txBody>
+          <a:bodyPr rtlCol="0" anchor="ctr"/>
+          <a:lstStyle/>
+          <a:p>
+            <a:pPr algn="ctr"/>
+            <a:r>
+              <a:rPr lang="es-MX" dirty="0" err="1" smtClean="0"/>
+              <a:t>Leaf</a:t>
+            </a:r>
+            <a:r>
+              <a:rPr lang="es-MX" dirty="0" smtClean="0"/>
+              <a:t> </a:t>
+            </a:r>
+            <a:r>
+              <a:rPr lang="es-MX" dirty="0" err="1" smtClean="0"/>
+              <a:t>functional</a:t>
+            </a:r>
+            <a:r>
+              <a:rPr lang="es-MX" dirty="0" smtClean="0"/>
+              <a:t> </a:t>
+            </a:r>
+            <a:r>
+              <a:rPr lang="es-MX" dirty="0" err="1" smtClean="0"/>
+              <a:t>traits</a:t>
+            </a:r>
+            <a:endParaRPr lang="es-MX" dirty="0" smtClean="0"/>
+          </a:p>
+          <a:p>
+            <a:pPr marL="285750" indent="-285750" algn="ctr">
+              <a:buFontTx/>
+              <a:buChar char="-"/>
+            </a:pPr>
+            <a:r>
+              <a:rPr lang="es-MX" sz="1200" dirty="0" err="1" smtClean="0"/>
+              <a:t>Thoughness</a:t>
+            </a:r>
+            <a:endParaRPr lang="es-MX" sz="1200" dirty="0" smtClean="0"/>
+          </a:p>
+          <a:p>
+            <a:pPr marL="285750" indent="-285750" algn="ctr">
+              <a:buFontTx/>
+              <a:buChar char="-"/>
+            </a:pPr>
+            <a:r>
+              <a:rPr lang="es-MX" sz="1200" dirty="0" err="1" smtClean="0"/>
+              <a:t>Thickness</a:t>
+            </a:r>
+            <a:endParaRPr lang="es-MX" sz="1200" dirty="0" smtClean="0"/>
+          </a:p>
+          <a:p>
+            <a:pPr marL="285750" indent="-285750" algn="ctr">
+              <a:buFontTx/>
+              <a:buChar char="-"/>
+            </a:pPr>
+            <a:r>
+              <a:rPr lang="es-MX" sz="1200" dirty="0" smtClean="0"/>
+              <a:t>SLA / LA</a:t>
+            </a:r>
+          </a:p>
+          <a:p>
+            <a:pPr marL="285750" indent="-285750" algn="ctr">
+              <a:buFontTx/>
+              <a:buChar char="-"/>
+            </a:pPr>
+            <a:r>
+              <a:rPr lang="es-MX" sz="1200" dirty="0" smtClean="0"/>
+              <a:t>Carea / </a:t>
+            </a:r>
+            <a:r>
+              <a:rPr lang="es-MX" sz="1200" dirty="0" err="1" smtClean="0"/>
+              <a:t>Narea</a:t>
+            </a:r>
+            <a:endParaRPr lang="es-MX" sz="1200" dirty="0" smtClean="0"/>
+          </a:p>
+          <a:p>
+            <a:pPr marL="285750" indent="-285750" algn="ctr">
+              <a:buFontTx/>
+              <a:buChar char="-"/>
+            </a:pPr>
+            <a:r>
+              <a:rPr lang="es-MX" sz="1200" dirty="0" err="1" smtClean="0"/>
+              <a:t>Leat</a:t>
+            </a:r>
+            <a:r>
+              <a:rPr lang="es-MX" sz="1200" dirty="0" smtClean="0"/>
+              <a:t> </a:t>
+            </a:r>
+            <a:r>
+              <a:rPr lang="es-MX" sz="1200" dirty="0" err="1" smtClean="0"/>
+              <a:t>water</a:t>
+            </a:r>
+            <a:r>
+              <a:rPr lang="es-MX" sz="1200" dirty="0" smtClean="0"/>
+              <a:t> </a:t>
+            </a:r>
+            <a:r>
+              <a:rPr lang="es-MX" sz="1200" dirty="0" err="1" smtClean="0"/>
+              <a:t>content</a:t>
+            </a:r>
+            <a:endParaRPr lang="en-US" sz="1200" dirty="0"/>
+          </a:p>
+        </p:txBody>
+      </p:sp>
+      <p:sp>
+        <p:nvSpPr>
+          <p:cNvPr id="6" name="Elipse 5"/>
+          <p:cNvSpPr/>
+          <p:nvPr/>
+        </p:nvSpPr>
+        <p:spPr>
+          <a:xfrm>
+            <a:off x="8357616" y="337375"/>
+            <a:ext cx="2896248" cy="2491993"/>
+          </a:xfrm>
+          <a:prstGeom prst="ellipse">
+            <a:avLst/>
+          </a:prstGeom>
+        </p:spPr>
+        <p:style>
+          <a:lnRef idx="2">
+            <a:schemeClr val="accent2">
+              <a:shade val="50000"/>
+            </a:schemeClr>
+          </a:lnRef>
+          <a:fillRef idx="1">
+            <a:schemeClr val="accent2"/>
+          </a:fillRef>
+          <a:effectRef idx="0">
+            <a:schemeClr val="accent2"/>
+          </a:effectRef>
+          <a:fontRef idx="minor">
+            <a:schemeClr val="lt1"/>
+          </a:fontRef>
+        </p:style>
+        <p:txBody>
+          <a:bodyPr rtlCol="0" anchor="ctr"/>
+          <a:lstStyle/>
+          <a:p>
+            <a:pPr algn="ctr"/>
+            <a:r>
+              <a:rPr lang="es-MX" dirty="0" err="1" smtClean="0"/>
+              <a:t>Climatic</a:t>
+            </a:r>
+            <a:r>
+              <a:rPr lang="es-MX" dirty="0" smtClean="0"/>
+              <a:t> – </a:t>
+            </a:r>
+            <a:r>
+              <a:rPr lang="es-MX" dirty="0" err="1" smtClean="0"/>
+              <a:t>Using</a:t>
+            </a:r>
+            <a:r>
+              <a:rPr lang="es-MX" dirty="0" smtClean="0"/>
+              <a:t> </a:t>
+            </a:r>
+            <a:r>
+              <a:rPr lang="es-MX" dirty="0" err="1" smtClean="0"/>
+              <a:t>Elevation</a:t>
+            </a:r>
+            <a:r>
+              <a:rPr lang="es-MX" dirty="0" smtClean="0"/>
+              <a:t> as proxy</a:t>
+            </a:r>
+          </a:p>
+          <a:p>
+            <a:pPr algn="ctr"/>
+            <a:r>
+              <a:rPr lang="es-MX" dirty="0" smtClean="0"/>
+              <a:t>1000, 2000, 3000</a:t>
+            </a:r>
+          </a:p>
+          <a:p>
+            <a:pPr algn="ctr"/>
+            <a:endParaRPr lang="en-US" dirty="0"/>
+          </a:p>
+        </p:txBody>
+      </p:sp>
+      <p:pic>
+        <p:nvPicPr>
+          <p:cNvPr id="8" name="Imagen 7"/>
+          <p:cNvPicPr>
+            <a:picLocks noChangeAspect="1"/>
+          </p:cNvPicPr>
+          <p:nvPr/>
+        </p:nvPicPr>
+        <p:blipFill>
+          <a:blip r:embed="rId3" cstate="print">
+            <a:extLst>
+              <a:ext uri="{28A0092B-C50C-407E-A947-70E740481C1C}">
+                <a14:useLocalDpi xmlns:a14="http://schemas.microsoft.com/office/drawing/2010/main" val="0"/>
+              </a:ext>
+            </a:extLst>
+          </a:blip>
+          <a:stretch>
+            <a:fillRect/>
+          </a:stretch>
+        </p:blipFill>
+        <p:spPr>
+          <a:xfrm>
+            <a:off x="6606264" y="3721896"/>
+            <a:ext cx="4887792" cy="2749383"/>
+          </a:xfrm>
+          <a:prstGeom prst="rect">
+            <a:avLst/>
+          </a:prstGeom>
+        </p:spPr>
+      </p:pic>
+      <p:sp>
+        <p:nvSpPr>
+          <p:cNvPr id="9" name="CuadroTexto 8"/>
+          <p:cNvSpPr txBox="1"/>
+          <p:nvPr/>
+        </p:nvSpPr>
+        <p:spPr>
+          <a:xfrm>
+            <a:off x="4953000" y="4727256"/>
+            <a:ext cx="1389888" cy="369332"/>
+          </a:xfrm>
+          <a:prstGeom prst="rect">
+            <a:avLst/>
+          </a:prstGeom>
+          <a:noFill/>
+        </p:spPr>
+        <p:txBody>
+          <a:bodyPr wrap="square" rtlCol="0">
+            <a:spAutoFit/>
+          </a:bodyPr>
+          <a:lstStyle/>
+          <a:p>
+            <a:r>
+              <a:rPr lang="es-MX" dirty="0" err="1" smtClean="0"/>
+              <a:t>iWUE</a:t>
+            </a:r>
+            <a:r>
+              <a:rPr lang="es-MX" dirty="0" smtClean="0"/>
+              <a:t> = A/g</a:t>
+            </a:r>
+            <a:endParaRPr lang="en-US" dirty="0"/>
+          </a:p>
+        </p:txBody>
+      </p:sp>
+      <p:sp>
+        <p:nvSpPr>
+          <p:cNvPr id="13" name="Flecha abajo 12"/>
+          <p:cNvSpPr/>
+          <p:nvPr/>
+        </p:nvSpPr>
+        <p:spPr>
+          <a:xfrm>
+            <a:off x="1476756" y="2462924"/>
+            <a:ext cx="1161288" cy="1305944"/>
+          </a:xfrm>
+          <a:prstGeom prst="downArrow">
+            <a:avLst/>
+          </a:prstGeom>
+        </p:spPr>
+        <p:style>
+          <a:lnRef idx="2">
+            <a:schemeClr val="dk1"/>
+          </a:lnRef>
+          <a:fillRef idx="1">
+            <a:schemeClr val="lt1"/>
+          </a:fillRef>
+          <a:effectRef idx="0">
+            <a:schemeClr val="dk1"/>
+          </a:effectRef>
+          <a:fontRef idx="minor">
+            <a:schemeClr val="dk1"/>
+          </a:fontRef>
+        </p:style>
+        <p:txBody>
+          <a:bodyPr rtlCol="0" anchor="ctr"/>
+          <a:lstStyle/>
+          <a:p>
+            <a:pPr algn="ctr"/>
+            <a:endParaRPr lang="en-US"/>
+          </a:p>
+        </p:txBody>
+      </p:sp>
+      <p:sp>
+        <p:nvSpPr>
+          <p:cNvPr id="14" name="Flecha abajo 13"/>
+          <p:cNvSpPr/>
+          <p:nvPr/>
+        </p:nvSpPr>
+        <p:spPr>
+          <a:xfrm>
+            <a:off x="5515356" y="2537104"/>
+            <a:ext cx="1161288" cy="1305944"/>
+          </a:xfrm>
+          <a:prstGeom prst="downArrow">
+            <a:avLst/>
+          </a:prstGeom>
+        </p:spPr>
+        <p:style>
+          <a:lnRef idx="2">
+            <a:schemeClr val="dk1"/>
+          </a:lnRef>
+          <a:fillRef idx="1">
+            <a:schemeClr val="lt1"/>
+          </a:fillRef>
+          <a:effectRef idx="0">
+            <a:schemeClr val="dk1"/>
+          </a:effectRef>
+          <a:fontRef idx="minor">
+            <a:schemeClr val="dk1"/>
+          </a:fontRef>
+        </p:style>
+        <p:txBody>
+          <a:bodyPr rtlCol="0" anchor="ctr"/>
+          <a:lstStyle/>
+          <a:p>
+            <a:pPr algn="ctr"/>
+            <a:endParaRPr lang="en-US"/>
+          </a:p>
+        </p:txBody>
+      </p:sp>
+      <p:sp>
+        <p:nvSpPr>
+          <p:cNvPr id="15" name="Flecha abajo 14"/>
+          <p:cNvSpPr/>
+          <p:nvPr/>
+        </p:nvSpPr>
+        <p:spPr>
+          <a:xfrm>
+            <a:off x="9261372" y="2324000"/>
+            <a:ext cx="1161288" cy="1305944"/>
+          </a:xfrm>
+          <a:prstGeom prst="downArrow">
+            <a:avLst/>
+          </a:prstGeom>
+        </p:spPr>
+        <p:style>
+          <a:lnRef idx="2">
+            <a:schemeClr val="dk1"/>
+          </a:lnRef>
+          <a:fillRef idx="1">
+            <a:schemeClr val="lt1"/>
+          </a:fillRef>
+          <a:effectRef idx="0">
+            <a:schemeClr val="dk1"/>
+          </a:effectRef>
+          <a:fontRef idx="minor">
+            <a:schemeClr val="dk1"/>
+          </a:fontRef>
+        </p:style>
+        <p:txBody>
+          <a:bodyPr rtlCol="0" anchor="ctr"/>
+          <a:lstStyle/>
+          <a:p>
+            <a:pPr algn="ctr"/>
+            <a:endParaRPr lang="en-US"/>
+          </a:p>
+        </p:txBody>
+      </p:sp>
+    </p:spTree>
+    <p:extLst>
+      <p:ext uri="{BB962C8B-B14F-4D97-AF65-F5344CB8AC3E}">
+        <p14:creationId xmlns:p14="http://schemas.microsoft.com/office/powerpoint/2010/main" val="1733027128"/>
+      </p:ext>
+    </p:extLst>
+  </p:cSld>
+  <p:clrMapOvr>
+    <a:masterClrMapping/>
+  </p:clrMapOvr>
+  <p:timing>
+    <p:tnLst>
+      <p:par>
+        <p:cTn id="1" dur="indefinite" restart="never" nodeType="tmRoot"/>
+      </p:par>
+    </p:tnLst>
+  </p:timing>
+</p:sld>
+</file>
+
+<file path=ppt/slides/slide20.xml><?xml version="1.0" encoding="utf-8"?>
 <p:sld xmlns:a="http://schemas.openxmlformats.org/drawingml/2006/main" xmlns:r="http://schemas.openxmlformats.org/officeDocument/2006/relationships" xmlns:p="http://schemas.openxmlformats.org/presentationml/2006/main" show="0">
   <p:cSld>
     <p:spTree>
@@ -17036,7 +16293,7 @@
 </p:sld>
 </file>
 
-<file path=ppt/slides/slide22.xml><?xml version="1.0" encoding="utf-8"?>
+<file path=ppt/slides/slide21.xml><?xml version="1.0" encoding="utf-8"?>
 <p:sld xmlns:a="http://schemas.openxmlformats.org/drawingml/2006/main" xmlns:r="http://schemas.openxmlformats.org/officeDocument/2006/relationships" xmlns:p="http://schemas.openxmlformats.org/presentationml/2006/main" show="0">
   <p:cSld>
     <p:spTree>
@@ -17145,7 +16402,7 @@
 </p:sld>
 </file>
 
-<file path=ppt/slides/slide23.xml><?xml version="1.0" encoding="utf-8"?>
+<file path=ppt/slides/slide22.xml><?xml version="1.0" encoding="utf-8"?>
 <p:sld xmlns:a="http://schemas.openxmlformats.org/drawingml/2006/main" xmlns:r="http://schemas.openxmlformats.org/officeDocument/2006/relationships" xmlns:p="http://schemas.openxmlformats.org/presentationml/2006/main">
   <p:cSld>
     <p:spTree>
@@ -17736,7 +16993,7 @@
 </p:sld>
 </file>
 
-<file path=ppt/slides/slide24.xml><?xml version="1.0" encoding="utf-8"?>
+<file path=ppt/slides/slide23.xml><?xml version="1.0" encoding="utf-8"?>
 <p:sld xmlns:a="http://schemas.openxmlformats.org/drawingml/2006/main" xmlns:r="http://schemas.openxmlformats.org/officeDocument/2006/relationships" xmlns:p="http://schemas.openxmlformats.org/presentationml/2006/main">
   <p:cSld>
     <p:spTree>
@@ -18102,7 +17359,7 @@
 </p:sld>
 </file>
 
-<file path=ppt/slides/slide25.xml><?xml version="1.0" encoding="utf-8"?>
+<file path=ppt/slides/slide24.xml><?xml version="1.0" encoding="utf-8"?>
 <p:sld xmlns:a="http://schemas.openxmlformats.org/drawingml/2006/main" xmlns:r="http://schemas.openxmlformats.org/officeDocument/2006/relationships" xmlns:p="http://schemas.openxmlformats.org/presentationml/2006/main">
   <p:cSld>
     <p:spTree>
@@ -18205,7 +17462,7 @@
 </p:sld>
 </file>
 
-<file path=ppt/slides/slide26.xml><?xml version="1.0" encoding="utf-8"?>
+<file path=ppt/slides/slide25.xml><?xml version="1.0" encoding="utf-8"?>
 <p:sld xmlns:a="http://schemas.openxmlformats.org/drawingml/2006/main" xmlns:r="http://schemas.openxmlformats.org/officeDocument/2006/relationships" xmlns:p="http://schemas.openxmlformats.org/presentationml/2006/main">
   <p:cSld>
     <p:spTree>
@@ -18352,7 +17609,7 @@
 </p:sld>
 </file>
 
-<file path=ppt/slides/slide27.xml><?xml version="1.0" encoding="utf-8"?>
+<file path=ppt/slides/slide26.xml><?xml version="1.0" encoding="utf-8"?>
 <p:sld xmlns:a="http://schemas.openxmlformats.org/drawingml/2006/main" xmlns:r="http://schemas.openxmlformats.org/officeDocument/2006/relationships" xmlns:p="http://schemas.openxmlformats.org/presentationml/2006/main">
   <p:cSld>
     <p:spTree>
@@ -18706,7 +17963,7 @@
 </p:sld>
 </file>
 
-<file path=ppt/slides/slide28.xml><?xml version="1.0" encoding="utf-8"?>
+<file path=ppt/slides/slide27.xml><?xml version="1.0" encoding="utf-8"?>
 <p:sld xmlns:a="http://schemas.openxmlformats.org/drawingml/2006/main" xmlns:r="http://schemas.openxmlformats.org/officeDocument/2006/relationships" xmlns:p="http://schemas.openxmlformats.org/presentationml/2006/main">
   <p:cSld>
     <p:spTree>
@@ -18812,7 +18069,7 @@
 </p:sld>
 </file>
 
-<file path=ppt/slides/slide29.xml><?xml version="1.0" encoding="utf-8"?>
+<file path=ppt/slides/slide28.xml><?xml version="1.0" encoding="utf-8"?>
 <p:sld xmlns:a="http://schemas.openxmlformats.org/drawingml/2006/main" xmlns:r="http://schemas.openxmlformats.org/officeDocument/2006/relationships" xmlns:p="http://schemas.openxmlformats.org/presentationml/2006/main" show="0">
   <p:cSld>
     <p:spTree>
@@ -19185,6 +18442,113 @@
 </p:sld>
 </file>
 
+<file path=ppt/slides/slide29.xml><?xml version="1.0" encoding="utf-8"?>
+<p:sld xmlns:a="http://schemas.openxmlformats.org/drawingml/2006/main" xmlns:r="http://schemas.openxmlformats.org/officeDocument/2006/relationships" xmlns:p="http://schemas.openxmlformats.org/presentationml/2006/main">
+  <p:cSld>
+    <p:spTree>
+      <p:nvGrpSpPr>
+        <p:cNvPr id="1" name=""/>
+        <p:cNvGrpSpPr/>
+        <p:nvPr/>
+      </p:nvGrpSpPr>
+      <p:grpSpPr>
+        <a:xfrm>
+          <a:off x="0" y="0"/>
+          <a:ext cx="0" cy="0"/>
+          <a:chOff x="0" y="0"/>
+          <a:chExt cx="0" cy="0"/>
+        </a:xfrm>
+      </p:grpSpPr>
+      <p:sp>
+        <p:nvSpPr>
+          <p:cNvPr id="2" name="Título 1"/>
+          <p:cNvSpPr>
+            <a:spLocks noGrp="1"/>
+          </p:cNvSpPr>
+          <p:nvPr>
+            <p:ph type="title"/>
+          </p:nvPr>
+        </p:nvSpPr>
+        <p:spPr/>
+        <p:txBody>
+          <a:bodyPr/>
+          <a:lstStyle/>
+          <a:p>
+            <a:r>
+              <a:rPr lang="es-MX" dirty="0" smtClean="0"/>
+              <a:t>NEXT STEPS AND QUESTIONS</a:t>
+            </a:r>
+            <a:endParaRPr lang="en-US" dirty="0"/>
+          </a:p>
+        </p:txBody>
+      </p:sp>
+      <p:sp>
+        <p:nvSpPr>
+          <p:cNvPr id="3" name="Marcador de contenido 2"/>
+          <p:cNvSpPr>
+            <a:spLocks noGrp="1"/>
+          </p:cNvSpPr>
+          <p:nvPr>
+            <p:ph idx="1"/>
+          </p:nvPr>
+        </p:nvSpPr>
+        <p:spPr/>
+        <p:txBody>
+          <a:bodyPr>
+            <a:normAutofit/>
+          </a:bodyPr>
+          <a:lstStyle/>
+          <a:p>
+            <a:r>
+              <a:rPr lang="en-US" sz="2200" dirty="0" smtClean="0"/>
+              <a:t>Refining – how better integrate traits. PCA?</a:t>
+            </a:r>
+          </a:p>
+          <a:p>
+            <a:r>
+              <a:rPr lang="en-US" sz="2200" dirty="0" smtClean="0"/>
+              <a:t>The </a:t>
+            </a:r>
+            <a:r>
+              <a:rPr lang="en-US" sz="2200" dirty="0"/>
+              <a:t>experimental controls from 2009 (n = 9) would be used mainly as a baseline reference due to their limited sample size.</a:t>
+            </a:r>
+          </a:p>
+          <a:p>
+            <a:r>
+              <a:rPr lang="en-US" sz="2200" dirty="0"/>
+              <a:t>Regarding environmental drivers, elevation has been useful as an integrative gradient, but I would like to discuss the incorporation of explicit climatic variables to improve </a:t>
+            </a:r>
+            <a:r>
+              <a:rPr lang="en-US" sz="2200" dirty="0" smtClean="0"/>
+              <a:t>interpretability or TPI?. I thought on working with PCA dimensions. </a:t>
+            </a:r>
+          </a:p>
+          <a:p>
+            <a:endParaRPr lang="en-US" dirty="0"/>
+          </a:p>
+        </p:txBody>
+      </p:sp>
+    </p:spTree>
+    <p:extLst>
+      <p:ext uri="{BB962C8B-B14F-4D97-AF65-F5344CB8AC3E}">
+        <p14:creationId xmlns:p14="http://schemas.microsoft.com/office/powerpoint/2010/main" val="2759048454"/>
+      </p:ext>
+    </p:extLst>
+  </p:cSld>
+  <p:clrMapOvr>
+    <a:masterClrMapping/>
+  </p:clrMapOvr>
+  <p:timing>
+    <p:tnLst>
+      <p:par>
+        <p:cTn id="1" dur="indefinite" restart="never" nodeType="tmRoot"/>
+      </p:par>
+    </p:tnLst>
+  </p:timing>
+</p:sld>
+</file>
+
 <file path=ppt/slides/slide3.xml><?xml version="1.0" encoding="utf-8"?>
 <p:sld xmlns:a="http://schemas.openxmlformats.org/drawingml/2006/main" xmlns:r="http://schemas.openxmlformats.org/officeDocument/2006/relationships" xmlns:p="http://schemas.openxmlformats.org/presentationml/2006/main" show="0">
   <p:cSld>
@@ -20595,121 +19959,14 @@
   <p:clrMapOvr>
     <a:masterClrMapping/>
   </p:clrMapOvr>
-  <mc:AlternateContent xmlns:mc="http://schemas.openxmlformats.org/markup-compatibility/2006">
-    <mc:Choice xmlns:p14="http://schemas.microsoft.com/office/powerpoint/2010/main" Requires="p14">
+  <mc:AlternateContent xmlns:mc="http://schemas.openxmlformats.org/markup-compatibility/2006" xmlns:p14="http://schemas.microsoft.com/office/powerpoint/2010/main">
+    <mc:Choice Requires="p14">
       <p:transition spd="slow" p14:dur="2000"/>
     </mc:Choice>
-    <mc:Fallback>
+    <mc:Fallback xmlns="">
       <p:transition spd="slow"/>
     </mc:Fallback>
   </mc:AlternateContent>
-  <p:timing>
-    <p:tnLst>
-      <p:par>
-        <p:cTn id="1" dur="indefinite" restart="never" nodeType="tmRoot"/>
-      </p:par>
-    </p:tnLst>
-  </p:timing>
-</p:sld>
-</file>
-
-<file path=ppt/slides/slide30.xml><?xml version="1.0" encoding="utf-8"?>
-<p:sld xmlns:a="http://schemas.openxmlformats.org/drawingml/2006/main" xmlns:r="http://schemas.openxmlformats.org/officeDocument/2006/relationships" xmlns:p="http://schemas.openxmlformats.org/presentationml/2006/main">
-  <p:cSld>
-    <p:spTree>
-      <p:nvGrpSpPr>
-        <p:cNvPr id="1" name=""/>
-        <p:cNvGrpSpPr/>
-        <p:nvPr/>
-      </p:nvGrpSpPr>
-      <p:grpSpPr>
-        <a:xfrm>
-          <a:off x="0" y="0"/>
-          <a:ext cx="0" cy="0"/>
-          <a:chOff x="0" y="0"/>
-          <a:chExt cx="0" cy="0"/>
-        </a:xfrm>
-      </p:grpSpPr>
-      <p:sp>
-        <p:nvSpPr>
-          <p:cNvPr id="2" name="Título 1"/>
-          <p:cNvSpPr>
-            <a:spLocks noGrp="1"/>
-          </p:cNvSpPr>
-          <p:nvPr>
-            <p:ph type="title"/>
-          </p:nvPr>
-        </p:nvSpPr>
-        <p:spPr/>
-        <p:txBody>
-          <a:bodyPr/>
-          <a:lstStyle/>
-          <a:p>
-            <a:r>
-              <a:rPr lang="es-MX" dirty="0" smtClean="0"/>
-              <a:t>NEXT STEPS AND QUESTIONS</a:t>
-            </a:r>
-            <a:endParaRPr lang="en-US" dirty="0"/>
-          </a:p>
-        </p:txBody>
-      </p:sp>
-      <p:sp>
-        <p:nvSpPr>
-          <p:cNvPr id="3" name="Marcador de contenido 2"/>
-          <p:cNvSpPr>
-            <a:spLocks noGrp="1"/>
-          </p:cNvSpPr>
-          <p:nvPr>
-            <p:ph idx="1"/>
-          </p:nvPr>
-        </p:nvSpPr>
-        <p:spPr/>
-        <p:txBody>
-          <a:bodyPr>
-            <a:normAutofit/>
-          </a:bodyPr>
-          <a:lstStyle/>
-          <a:p>
-            <a:r>
-              <a:rPr lang="en-US" sz="2200" dirty="0" smtClean="0"/>
-              <a:t>Refining – how better integrate traits. PCA?</a:t>
-            </a:r>
-          </a:p>
-          <a:p>
-            <a:r>
-              <a:rPr lang="en-US" sz="2200" dirty="0" smtClean="0"/>
-              <a:t>The </a:t>
-            </a:r>
-            <a:r>
-              <a:rPr lang="en-US" sz="2200" dirty="0"/>
-              <a:t>experimental controls from 2009 (n = 9) would be used mainly as a baseline reference due to their limited sample size.</a:t>
-            </a:r>
-          </a:p>
-          <a:p>
-            <a:r>
-              <a:rPr lang="en-US" sz="2200" dirty="0"/>
-              <a:t>Regarding environmental drivers, elevation has been useful as an integrative gradient, but I would like to discuss the incorporation of explicit climatic variables to improve </a:t>
-            </a:r>
-            <a:r>
-              <a:rPr lang="en-US" sz="2200" dirty="0" smtClean="0"/>
-              <a:t>interpretability or TPI?. I thought on working with PCA dimensions. </a:t>
-            </a:r>
-          </a:p>
-          <a:p>
-            <a:endParaRPr lang="en-US" dirty="0"/>
-          </a:p>
-        </p:txBody>
-      </p:sp>
-    </p:spTree>
-    <p:extLst>
-      <p:ext uri="{BB962C8B-B14F-4D97-AF65-F5344CB8AC3E}">
-        <p14:creationId xmlns:p14="http://schemas.microsoft.com/office/powerpoint/2010/main" val="2759048454"/>
-      </p:ext>
-    </p:extLst>
-  </p:cSld>
-  <p:clrMapOvr>
-    <a:masterClrMapping/>
-  </p:clrMapOvr>
   <p:timing>
     <p:tnLst>
       <p:par>
@@ -20919,11 +20176,7 @@
             </a:r>
             <a:r>
               <a:rPr lang="es-MX" dirty="0" smtClean="0"/>
-              <a:t> </a:t>
-            </a:r>
-            <a:r>
-              <a:rPr lang="es-MX" dirty="0" smtClean="0"/>
-              <a:t>are </a:t>
+              <a:t> are </a:t>
             </a:r>
             <a:r>
               <a:rPr lang="es-MX" dirty="0" err="1" smtClean="0"/>
@@ -21013,7 +20266,6 @@
               <a:rPr lang="es-MX" dirty="0" smtClean="0"/>
               <a:t>)?</a:t>
             </a:r>
-            <a:endParaRPr lang="es-MX" dirty="0" smtClean="0"/>
           </a:p>
           <a:p>
             <a:pPr marL="0" indent="0">
@@ -21154,11 +20406,7 @@
             </a:r>
             <a:r>
               <a:rPr lang="es-MX" dirty="0" smtClean="0"/>
-              <a:t>)</a:t>
-            </a:r>
-            <a:r>
-              <a:rPr lang="es-MX" dirty="0" smtClean="0"/>
-              <a:t>.</a:t>
+              <a:t>).</a:t>
             </a:r>
           </a:p>
           <a:p>
@@ -21233,7 +20481,6 @@
               <a:rPr lang="es-MX" sz="2400" dirty="0" smtClean="0"/>
               <a:t> et al, 2016).</a:t>
             </a:r>
-            <a:endParaRPr lang="es-MX" sz="2400" dirty="0" smtClean="0"/>
           </a:p>
           <a:p>
             <a:pPr marL="0" indent="0" algn="just">
@@ -21293,13 +20540,8 @@
             </a:r>
             <a:r>
               <a:rPr lang="es-MX" dirty="0" smtClean="0"/>
-              <a:t>of dO18</a:t>
-            </a:r>
-            <a:r>
-              <a:rPr lang="es-MX" dirty="0" smtClean="0"/>
-              <a:t>.</a:t>
-            </a:r>
-            <a:endParaRPr lang="es-MX" dirty="0" smtClean="0"/>
+              <a:t>of dO18.</a:t>
+            </a:r>
           </a:p>
         </p:txBody>
       </p:sp>
@@ -22014,7 +21256,7 @@
                     <a:lstStyle/>
                     <a:p>
                       <a:r>
-                        <a:rPr lang="en-US">
+                        <a:rPr lang="en-US" dirty="0">
                           <a:effectLst/>
                         </a:rPr>
                         <a:t>3</a:t>
@@ -38849,11 +38091,11 @@
   <p:clrMapOvr>
     <a:masterClrMapping/>
   </p:clrMapOvr>
-  <mc:AlternateContent xmlns:mc="http://schemas.openxmlformats.org/markup-compatibility/2006">
-    <mc:Choice xmlns:p14="http://schemas.microsoft.com/office/powerpoint/2010/main" Requires="p14">
+  <mc:AlternateContent xmlns:mc="http://schemas.openxmlformats.org/markup-compatibility/2006" xmlns:p14="http://schemas.microsoft.com/office/powerpoint/2010/main">
+    <mc:Choice Requires="p14">
       <p:transition spd="slow" p14:dur="2000"/>
     </mc:Choice>
-    <mc:Fallback>
+    <mc:Fallback xmlns="">
       <p:transition spd="slow"/>
     </mc:Fallback>
   </mc:AlternateContent>
@@ -46433,11 +45675,11 @@
   <p:clrMapOvr>
     <a:masterClrMapping/>
   </p:clrMapOvr>
-  <mc:AlternateContent xmlns:mc="http://schemas.openxmlformats.org/markup-compatibility/2006">
-    <mc:Choice xmlns:p14="http://schemas.microsoft.com/office/powerpoint/2010/main" Requires="p14">
+  <mc:AlternateContent xmlns:mc="http://schemas.openxmlformats.org/markup-compatibility/2006" xmlns:p14="http://schemas.microsoft.com/office/powerpoint/2010/main">
+    <mc:Choice Requires="p14">
       <p:transition spd="slow" p14:dur="2000"/>
     </mc:Choice>
-    <mc:Fallback>
+    <mc:Fallback xmlns="">
       <p:transition spd="slow"/>
     </mc:Fallback>
   </mc:AlternateContent>

--- a/NUMEX_pre_RStudio/NUMEX results.pptx
+++ b/NUMEX_pre_RStudio/NUMEX results.pptx
@@ -236,7 +236,7 @@
           <a:p>
             <a:fld id="{99ADAB2D-2438-4DAF-8EF0-78196AA5F544}" type="datetimeFigureOut">
               <a:rPr lang="en-US" smtClean="0"/>
-              <a:t>2/18/2026</a:t>
+              <a:t>2/24/2026</a:t>
             </a:fld>
             <a:endParaRPr lang="en-US"/>
           </a:p>
@@ -2791,7 +2791,7 @@
           <a:p>
             <a:fld id="{742CBFA1-BD22-4292-9851-D341668FFB9E}" type="datetimeFigureOut">
               <a:rPr lang="en-US" smtClean="0"/>
-              <a:t>2/18/2026</a:t>
+              <a:t>2/24/2026</a:t>
             </a:fld>
             <a:endParaRPr lang="en-US"/>
           </a:p>
@@ -2961,7 +2961,7 @@
           <a:p>
             <a:fld id="{742CBFA1-BD22-4292-9851-D341668FFB9E}" type="datetimeFigureOut">
               <a:rPr lang="en-US" smtClean="0"/>
-              <a:t>2/18/2026</a:t>
+              <a:t>2/24/2026</a:t>
             </a:fld>
             <a:endParaRPr lang="en-US"/>
           </a:p>
@@ -3141,7 +3141,7 @@
           <a:p>
             <a:fld id="{742CBFA1-BD22-4292-9851-D341668FFB9E}" type="datetimeFigureOut">
               <a:rPr lang="en-US" smtClean="0"/>
-              <a:t>2/18/2026</a:t>
+              <a:t>2/24/2026</a:t>
             </a:fld>
             <a:endParaRPr lang="en-US"/>
           </a:p>
@@ -3311,7 +3311,7 @@
           <a:p>
             <a:fld id="{742CBFA1-BD22-4292-9851-D341668FFB9E}" type="datetimeFigureOut">
               <a:rPr lang="en-US" smtClean="0"/>
-              <a:t>2/18/2026</a:t>
+              <a:t>2/24/2026</a:t>
             </a:fld>
             <a:endParaRPr lang="en-US"/>
           </a:p>
@@ -3557,7 +3557,7 @@
           <a:p>
             <a:fld id="{742CBFA1-BD22-4292-9851-D341668FFB9E}" type="datetimeFigureOut">
               <a:rPr lang="en-US" smtClean="0"/>
-              <a:t>2/18/2026</a:t>
+              <a:t>2/24/2026</a:t>
             </a:fld>
             <a:endParaRPr lang="en-US"/>
           </a:p>
@@ -3789,7 +3789,7 @@
           <a:p>
             <a:fld id="{742CBFA1-BD22-4292-9851-D341668FFB9E}" type="datetimeFigureOut">
               <a:rPr lang="en-US" smtClean="0"/>
-              <a:t>2/18/2026</a:t>
+              <a:t>2/24/2026</a:t>
             </a:fld>
             <a:endParaRPr lang="en-US"/>
           </a:p>
@@ -4156,7 +4156,7 @@
           <a:p>
             <a:fld id="{742CBFA1-BD22-4292-9851-D341668FFB9E}" type="datetimeFigureOut">
               <a:rPr lang="en-US" smtClean="0"/>
-              <a:t>2/18/2026</a:t>
+              <a:t>2/24/2026</a:t>
             </a:fld>
             <a:endParaRPr lang="en-US"/>
           </a:p>
@@ -4274,7 +4274,7 @@
           <a:p>
             <a:fld id="{742CBFA1-BD22-4292-9851-D341668FFB9E}" type="datetimeFigureOut">
               <a:rPr lang="en-US" smtClean="0"/>
-              <a:t>2/18/2026</a:t>
+              <a:t>2/24/2026</a:t>
             </a:fld>
             <a:endParaRPr lang="en-US"/>
           </a:p>
@@ -4369,7 +4369,7 @@
           <a:p>
             <a:fld id="{742CBFA1-BD22-4292-9851-D341668FFB9E}" type="datetimeFigureOut">
               <a:rPr lang="en-US" smtClean="0"/>
-              <a:t>2/18/2026</a:t>
+              <a:t>2/24/2026</a:t>
             </a:fld>
             <a:endParaRPr lang="en-US"/>
           </a:p>
@@ -4646,7 +4646,7 @@
           <a:p>
             <a:fld id="{742CBFA1-BD22-4292-9851-D341668FFB9E}" type="datetimeFigureOut">
               <a:rPr lang="en-US" smtClean="0"/>
-              <a:t>2/18/2026</a:t>
+              <a:t>2/24/2026</a:t>
             </a:fld>
             <a:endParaRPr lang="en-US"/>
           </a:p>
@@ -4899,7 +4899,7 @@
           <a:p>
             <a:fld id="{742CBFA1-BD22-4292-9851-D341668FFB9E}" type="datetimeFigureOut">
               <a:rPr lang="en-US" smtClean="0"/>
-              <a:t>2/18/2026</a:t>
+              <a:t>2/24/2026</a:t>
             </a:fld>
             <a:endParaRPr lang="en-US"/>
           </a:p>
@@ -5112,7 +5112,7 @@
           <a:p>
             <a:fld id="{742CBFA1-BD22-4292-9851-D341668FFB9E}" type="datetimeFigureOut">
               <a:rPr lang="en-US" smtClean="0"/>
-              <a:t>2/18/2026</a:t>
+              <a:t>2/24/2026</a:t>
             </a:fld>
             <a:endParaRPr lang="en-US"/>
           </a:p>
@@ -5837,15 +5837,7 @@
                   <a:schemeClr val="accent1"/>
                 </a:solidFill>
               </a:rPr>
-              <a:t>variable~ N * P + (1 | Block/</a:t>
-            </a:r>
-            <a:r>
-              <a:rPr lang="es-MX" sz="4000" dirty="0" err="1">
-                <a:solidFill>
-                  <a:schemeClr val="accent1"/>
-                </a:solidFill>
-              </a:rPr>
-              <a:t>Plot</a:t>
+              <a:t>variable~ N * P + (1 | </a:t>
             </a:r>
             <a:r>
               <a:rPr lang="es-MX" sz="4000" dirty="0" smtClean="0">
@@ -5853,7 +5845,7 @@
                   <a:schemeClr val="accent1"/>
                 </a:solidFill>
               </a:rPr>
-              <a:t>))</a:t>
+              <a:t>Block))</a:t>
             </a:r>
           </a:p>
           <a:p>
@@ -5976,6 +5968,30 @@
           <a:chExt cx="0" cy="0"/>
         </a:xfrm>
       </p:grpSpPr>
+      <p:pic>
+        <p:nvPicPr>
+          <p:cNvPr id="4" name="Imagen 3"/>
+          <p:cNvPicPr>
+            <a:picLocks noChangeAspect="1"/>
+          </p:cNvPicPr>
+          <p:nvPr/>
+        </p:nvPicPr>
+        <p:blipFill>
+          <a:blip r:embed="rId3"/>
+          <a:stretch>
+            <a:fillRect/>
+          </a:stretch>
+        </p:blipFill>
+        <p:spPr>
+          <a:xfrm>
+            <a:off x="6095999" y="978308"/>
+            <a:ext cx="5758747" cy="4725690"/>
+          </a:xfrm>
+          <a:prstGeom prst="rect">
+            <a:avLst/>
+          </a:prstGeom>
+        </p:spPr>
+      </p:pic>
       <p:sp>
         <p:nvSpPr>
           <p:cNvPr id="24" name="CuadroTexto 23"/>
@@ -5984,7 +6000,51 @@
         </p:nvSpPr>
         <p:spPr>
           <a:xfrm>
-            <a:off x="534039" y="997973"/>
+            <a:off x="8230580" y="1570698"/>
+            <a:ext cx="1846108" cy="923330"/>
+          </a:xfrm>
+          <a:prstGeom prst="rect">
+            <a:avLst/>
+          </a:prstGeom>
+          <a:noFill/>
+        </p:spPr>
+        <p:txBody>
+          <a:bodyPr wrap="square" rtlCol="0">
+            <a:spAutoFit/>
+          </a:bodyPr>
+          <a:lstStyle/>
+          <a:p>
+            <a:r>
+              <a:rPr lang="es-MX" dirty="0"/>
+              <a:t>* </a:t>
+            </a:r>
+            <a:r>
+              <a:rPr lang="es-MX" dirty="0" smtClean="0"/>
+              <a:t>            *     *     *</a:t>
+            </a:r>
+            <a:endParaRPr lang="en-US" dirty="0"/>
+          </a:p>
+          <a:p>
+            <a:endParaRPr lang="en-US" dirty="0"/>
+          </a:p>
+          <a:p>
+            <a:r>
+              <a:rPr lang="es-MX" dirty="0" smtClean="0"/>
+              <a:t>                 </a:t>
+            </a:r>
+            <a:endParaRPr lang="en-US" dirty="0"/>
+          </a:p>
+        </p:txBody>
+      </p:sp>
+      <p:sp>
+        <p:nvSpPr>
+          <p:cNvPr id="25" name="CuadroTexto 24"/>
+          <p:cNvSpPr txBox="1"/>
+          <p:nvPr/>
+        </p:nvSpPr>
+        <p:spPr>
+          <a:xfrm>
+            <a:off x="7784296" y="3545015"/>
             <a:ext cx="274320" cy="369332"/>
           </a:xfrm>
           <a:prstGeom prst="rect">
@@ -6008,22 +6068,22 @@
       </p:sp>
       <p:pic>
         <p:nvPicPr>
-          <p:cNvPr id="2" name="Imagen 1"/>
+          <p:cNvPr id="3" name="Imagen 2"/>
           <p:cNvPicPr>
             <a:picLocks noChangeAspect="1"/>
           </p:cNvPicPr>
           <p:nvPr/>
         </p:nvPicPr>
         <p:blipFill>
-          <a:blip r:embed="rId3"/>
+          <a:blip r:embed="rId4"/>
           <a:stretch>
             <a:fillRect/>
           </a:stretch>
         </p:blipFill>
         <p:spPr>
           <a:xfrm>
-            <a:off x="945519" y="179201"/>
-            <a:ext cx="7918262" cy="6497810"/>
+            <a:off x="163302" y="978307"/>
+            <a:ext cx="5745197" cy="4714570"/>
           </a:xfrm>
           <a:prstGeom prst="rect">
             <a:avLst/>
@@ -6032,13 +6092,13 @@
       </p:pic>
       <p:sp>
         <p:nvSpPr>
-          <p:cNvPr id="25" name="CuadroTexto 24"/>
+          <p:cNvPr id="8" name="CuadroTexto 7"/>
           <p:cNvSpPr txBox="1"/>
           <p:nvPr/>
         </p:nvSpPr>
         <p:spPr>
           <a:xfrm>
-            <a:off x="396879" y="628641"/>
+            <a:off x="9054574" y="3545015"/>
             <a:ext cx="274320" cy="369332"/>
           </a:xfrm>
           <a:prstGeom prst="rect">
@@ -6055,6 +6115,50 @@
             <a:r>
               <a:rPr lang="es-MX" dirty="0" smtClean="0"/>
               <a:t>*</a:t>
+            </a:r>
+            <a:endParaRPr lang="en-US" dirty="0"/>
+          </a:p>
+        </p:txBody>
+      </p:sp>
+      <p:sp>
+        <p:nvSpPr>
+          <p:cNvPr id="9" name="CuadroTexto 8"/>
+          <p:cNvSpPr txBox="1"/>
+          <p:nvPr/>
+        </p:nvSpPr>
+        <p:spPr>
+          <a:xfrm>
+            <a:off x="10687268" y="1375626"/>
+            <a:ext cx="1846108" cy="923330"/>
+          </a:xfrm>
+          <a:prstGeom prst="rect">
+            <a:avLst/>
+          </a:prstGeom>
+          <a:noFill/>
+        </p:spPr>
+        <p:txBody>
+          <a:bodyPr wrap="square" rtlCol="0">
+            <a:spAutoFit/>
+          </a:bodyPr>
+          <a:lstStyle/>
+          <a:p>
+            <a:r>
+              <a:rPr lang="es-MX" dirty="0"/>
+              <a:t>* </a:t>
+            </a:r>
+            <a:r>
+              <a:rPr lang="es-MX" dirty="0" smtClean="0"/>
+              <a:t>            *</a:t>
+            </a:r>
+            <a:endParaRPr lang="en-US" dirty="0"/>
+          </a:p>
+          <a:p>
+            <a:endParaRPr lang="en-US" dirty="0"/>
+          </a:p>
+          <a:p>
+            <a:r>
+              <a:rPr lang="es-MX" dirty="0" smtClean="0"/>
+              <a:t>                 </a:t>
             </a:r>
             <a:endParaRPr lang="en-US" dirty="0"/>
           </a:p>
@@ -6116,5160 +6220,25 @@
           </a:p>
         </p:txBody>
       </p:sp>
-      <p:graphicFrame>
-        <p:nvGraphicFramePr>
-          <p:cNvPr id="6" name="Marcador de contenido 5"/>
-          <p:cNvGraphicFramePr>
-            <a:graphicFrameLocks noGrp="1"/>
-          </p:cNvGraphicFramePr>
+      <p:sp>
+        <p:nvSpPr>
+          <p:cNvPr id="3" name="Marcador de contenido 2"/>
+          <p:cNvSpPr>
+            <a:spLocks noGrp="1"/>
+          </p:cNvSpPr>
           <p:nvPr>
             <p:ph idx="1"/>
-            <p:extLst>
-              <p:ext uri="{D42A27DB-BD31-4B8C-83A1-F6EECF244321}">
-                <p14:modId xmlns:p14="http://schemas.microsoft.com/office/powerpoint/2010/main" val="1198652276"/>
-              </p:ext>
-            </p:extLst>
           </p:nvPr>
-        </p:nvGraphicFramePr>
-        <p:xfrm>
-          <a:off x="722376" y="768093"/>
-          <a:ext cx="10631423" cy="5559551"/>
-        </p:xfrm>
-        <a:graphic>
-          <a:graphicData uri="http://schemas.openxmlformats.org/drawingml/2006/table">
-            <a:tbl>
-              <a:tblPr>
-                <a:tableStyleId>{85BE263C-DBD7-4A20-BB59-AAB30ACAA65A}</a:tableStyleId>
-              </a:tblPr>
-              <a:tblGrid>
-                <a:gridCol w="1271930">
-                  <a:extLst>
-                    <a:ext uri="{9D8B030D-6E8A-4147-A177-3AD203B41FA5}">
-                      <a16:colId xmlns:a16="http://schemas.microsoft.com/office/drawing/2014/main" val="957602047"/>
-                    </a:ext>
-                  </a:extLst>
-                </a:gridCol>
-                <a:gridCol w="719961">
-                  <a:extLst>
-                    <a:ext uri="{9D8B030D-6E8A-4147-A177-3AD203B41FA5}">
-                      <a16:colId xmlns:a16="http://schemas.microsoft.com/office/drawing/2014/main" val="1749157259"/>
-                    </a:ext>
-                  </a:extLst>
-                </a:gridCol>
-                <a:gridCol w="719961">
-                  <a:extLst>
-                    <a:ext uri="{9D8B030D-6E8A-4147-A177-3AD203B41FA5}">
-                      <a16:colId xmlns:a16="http://schemas.microsoft.com/office/drawing/2014/main" val="2574355415"/>
-                    </a:ext>
-                  </a:extLst>
-                </a:gridCol>
-                <a:gridCol w="719961">
-                  <a:extLst>
-                    <a:ext uri="{9D8B030D-6E8A-4147-A177-3AD203B41FA5}">
-                      <a16:colId xmlns:a16="http://schemas.microsoft.com/office/drawing/2014/main" val="3798723496"/>
-                    </a:ext>
-                  </a:extLst>
-                </a:gridCol>
-                <a:gridCol w="719961">
-                  <a:extLst>
-                    <a:ext uri="{9D8B030D-6E8A-4147-A177-3AD203B41FA5}">
-                      <a16:colId xmlns:a16="http://schemas.microsoft.com/office/drawing/2014/main" val="542881834"/>
-                    </a:ext>
-                  </a:extLst>
-                </a:gridCol>
-                <a:gridCol w="719961">
-                  <a:extLst>
-                    <a:ext uri="{9D8B030D-6E8A-4147-A177-3AD203B41FA5}">
-                      <a16:colId xmlns:a16="http://schemas.microsoft.com/office/drawing/2014/main" val="4104319525"/>
-                    </a:ext>
-                  </a:extLst>
-                </a:gridCol>
-                <a:gridCol w="719961">
-                  <a:extLst>
-                    <a:ext uri="{9D8B030D-6E8A-4147-A177-3AD203B41FA5}">
-                      <a16:colId xmlns:a16="http://schemas.microsoft.com/office/drawing/2014/main" val="1200589546"/>
-                    </a:ext>
-                  </a:extLst>
-                </a:gridCol>
-                <a:gridCol w="719961">
-                  <a:extLst>
-                    <a:ext uri="{9D8B030D-6E8A-4147-A177-3AD203B41FA5}">
-                      <a16:colId xmlns:a16="http://schemas.microsoft.com/office/drawing/2014/main" val="612151190"/>
-                    </a:ext>
-                  </a:extLst>
-                </a:gridCol>
-                <a:gridCol w="719961">
-                  <a:extLst>
-                    <a:ext uri="{9D8B030D-6E8A-4147-A177-3AD203B41FA5}">
-                      <a16:colId xmlns:a16="http://schemas.microsoft.com/office/drawing/2014/main" val="260538774"/>
-                    </a:ext>
-                  </a:extLst>
-                </a:gridCol>
-                <a:gridCol w="719961">
-                  <a:extLst>
-                    <a:ext uri="{9D8B030D-6E8A-4147-A177-3AD203B41FA5}">
-                      <a16:colId xmlns:a16="http://schemas.microsoft.com/office/drawing/2014/main" val="1517434615"/>
-                    </a:ext>
-                  </a:extLst>
-                </a:gridCol>
-                <a:gridCol w="719961">
-                  <a:extLst>
-                    <a:ext uri="{9D8B030D-6E8A-4147-A177-3AD203B41FA5}">
-                      <a16:colId xmlns:a16="http://schemas.microsoft.com/office/drawing/2014/main" val="970010685"/>
-                    </a:ext>
-                  </a:extLst>
-                </a:gridCol>
-                <a:gridCol w="719961">
-                  <a:extLst>
-                    <a:ext uri="{9D8B030D-6E8A-4147-A177-3AD203B41FA5}">
-                      <a16:colId xmlns:a16="http://schemas.microsoft.com/office/drawing/2014/main" val="4101434592"/>
-                    </a:ext>
-                  </a:extLst>
-                </a:gridCol>
-                <a:gridCol w="719961">
-                  <a:extLst>
-                    <a:ext uri="{9D8B030D-6E8A-4147-A177-3AD203B41FA5}">
-                      <a16:colId xmlns:a16="http://schemas.microsoft.com/office/drawing/2014/main" val="2722010356"/>
-                    </a:ext>
-                  </a:extLst>
-                </a:gridCol>
-                <a:gridCol w="719961">
-                  <a:extLst>
-                    <a:ext uri="{9D8B030D-6E8A-4147-A177-3AD203B41FA5}">
-                      <a16:colId xmlns:a16="http://schemas.microsoft.com/office/drawing/2014/main" val="2764505017"/>
-                    </a:ext>
-                  </a:extLst>
-                </a:gridCol>
-              </a:tblGrid>
-              <a:tr h="198555">
-                <a:tc>
-                  <a:txBody>
-                    <a:bodyPr/>
-                    <a:lstStyle/>
-                    <a:p>
-                      <a:pPr algn="l" fontAlgn="ctr"/>
-                      <a:endParaRPr lang="en-US" sz="900" b="1" i="0" u="none" strike="noStrike">
-                        <a:solidFill>
-                          <a:srgbClr val="000000"/>
-                        </a:solidFill>
-                        <a:effectLst/>
-                        <a:latin typeface="Calibri" panose="020F0502020204030204" pitchFamily="34" charset="0"/>
-                      </a:endParaRPr>
-                    </a:p>
-                  </a:txBody>
-                  <a:tcPr marL="7770" marR="7770" marT="7770" marB="0" anchor="ctr"/>
-                </a:tc>
-                <a:tc>
-                  <a:txBody>
-                    <a:bodyPr/>
-                    <a:lstStyle/>
-                    <a:p>
-                      <a:pPr algn="l" fontAlgn="ctr"/>
-                      <a:r>
-                        <a:rPr lang="en-US" sz="900" u="none" strike="noStrike">
-                          <a:effectLst/>
-                        </a:rPr>
-                        <a:t>estimates</a:t>
-                      </a:r>
-                      <a:endParaRPr lang="en-US" sz="900" b="1" i="0" u="none" strike="noStrike">
-                        <a:solidFill>
-                          <a:srgbClr val="000000"/>
-                        </a:solidFill>
-                        <a:effectLst/>
-                        <a:latin typeface="Calibri" panose="020F0502020204030204" pitchFamily="34" charset="0"/>
-                      </a:endParaRPr>
-                    </a:p>
-                  </a:txBody>
-                  <a:tcPr marL="7770" marR="7770" marT="7770" marB="0" anchor="ctr"/>
-                </a:tc>
-                <a:tc>
-                  <a:txBody>
-                    <a:bodyPr/>
-                    <a:lstStyle/>
-                    <a:p>
-                      <a:pPr algn="l" fontAlgn="ctr"/>
-                      <a:r>
-                        <a:rPr lang="en-US" sz="900" u="none" strike="noStrike">
-                          <a:effectLst/>
-                        </a:rPr>
-                        <a:t>estimates</a:t>
-                      </a:r>
-                      <a:endParaRPr lang="en-US" sz="900" b="1" i="0" u="none" strike="noStrike">
-                        <a:solidFill>
-                          <a:srgbClr val="000000"/>
-                        </a:solidFill>
-                        <a:effectLst/>
-                        <a:latin typeface="Calibri" panose="020F0502020204030204" pitchFamily="34" charset="0"/>
-                      </a:endParaRPr>
-                    </a:p>
-                  </a:txBody>
-                  <a:tcPr marL="7770" marR="7770" marT="7770" marB="0" anchor="ctr"/>
-                </a:tc>
-                <a:tc>
-                  <a:txBody>
-                    <a:bodyPr/>
-                    <a:lstStyle/>
-                    <a:p>
-                      <a:pPr algn="l" fontAlgn="ctr"/>
-                      <a:r>
-                        <a:rPr lang="en-US" sz="900" u="none" strike="noStrike">
-                          <a:effectLst/>
-                        </a:rPr>
-                        <a:t>estimates</a:t>
-                      </a:r>
-                      <a:endParaRPr lang="en-US" sz="900" b="1" i="0" u="none" strike="noStrike">
-                        <a:solidFill>
-                          <a:srgbClr val="000000"/>
-                        </a:solidFill>
-                        <a:effectLst/>
-                        <a:latin typeface="Calibri" panose="020F0502020204030204" pitchFamily="34" charset="0"/>
-                      </a:endParaRPr>
-                    </a:p>
-                  </a:txBody>
-                  <a:tcPr marL="7770" marR="7770" marT="7770" marB="0" anchor="ctr"/>
-                </a:tc>
-                <a:tc>
-                  <a:txBody>
-                    <a:bodyPr/>
-                    <a:lstStyle/>
-                    <a:p>
-                      <a:pPr algn="l" fontAlgn="ctr"/>
-                      <a:r>
-                        <a:rPr lang="en-US" sz="900" u="none" strike="noStrike">
-                          <a:effectLst/>
-                        </a:rPr>
-                        <a:t>estimates</a:t>
-                      </a:r>
-                      <a:endParaRPr lang="en-US" sz="900" b="1" i="0" u="none" strike="noStrike">
-                        <a:solidFill>
-                          <a:srgbClr val="000000"/>
-                        </a:solidFill>
-                        <a:effectLst/>
-                        <a:latin typeface="Calibri" panose="020F0502020204030204" pitchFamily="34" charset="0"/>
-                      </a:endParaRPr>
-                    </a:p>
-                  </a:txBody>
-                  <a:tcPr marL="7770" marR="7770" marT="7770" marB="0" anchor="ctr"/>
-                </a:tc>
-                <a:tc>
-                  <a:txBody>
-                    <a:bodyPr/>
-                    <a:lstStyle/>
-                    <a:p>
-                      <a:pPr algn="l" fontAlgn="ctr"/>
-                      <a:r>
-                        <a:rPr lang="en-US" sz="900" u="none" strike="noStrike">
-                          <a:effectLst/>
-                        </a:rPr>
-                        <a:t>estimates</a:t>
-                      </a:r>
-                      <a:endParaRPr lang="en-US" sz="900" b="1" i="0" u="none" strike="noStrike">
-                        <a:solidFill>
-                          <a:srgbClr val="000000"/>
-                        </a:solidFill>
-                        <a:effectLst/>
-                        <a:latin typeface="Calibri" panose="020F0502020204030204" pitchFamily="34" charset="0"/>
-                      </a:endParaRPr>
-                    </a:p>
-                  </a:txBody>
-                  <a:tcPr marL="7770" marR="7770" marT="7770" marB="0" anchor="ctr"/>
-                </a:tc>
-                <a:tc>
-                  <a:txBody>
-                    <a:bodyPr/>
-                    <a:lstStyle/>
-                    <a:p>
-                      <a:pPr algn="l" fontAlgn="ctr"/>
-                      <a:r>
-                        <a:rPr lang="en-US" sz="900" u="none" strike="noStrike">
-                          <a:effectLst/>
-                        </a:rPr>
-                        <a:t>estimates</a:t>
-                      </a:r>
-                      <a:endParaRPr lang="en-US" sz="900" b="1" i="0" u="none" strike="noStrike">
-                        <a:solidFill>
-                          <a:srgbClr val="000000"/>
-                        </a:solidFill>
-                        <a:effectLst/>
-                        <a:latin typeface="Calibri" panose="020F0502020204030204" pitchFamily="34" charset="0"/>
-                      </a:endParaRPr>
-                    </a:p>
-                  </a:txBody>
-                  <a:tcPr marL="7770" marR="7770" marT="7770" marB="0" anchor="ctr"/>
-                </a:tc>
-                <a:tc>
-                  <a:txBody>
-                    <a:bodyPr/>
-                    <a:lstStyle/>
-                    <a:p>
-                      <a:pPr algn="l" fontAlgn="ctr"/>
-                      <a:r>
-                        <a:rPr lang="en-US" sz="900" u="none" strike="noStrike">
-                          <a:effectLst/>
-                        </a:rPr>
-                        <a:t>estimates</a:t>
-                      </a:r>
-                      <a:endParaRPr lang="en-US" sz="900" b="1" i="0" u="none" strike="noStrike">
-                        <a:solidFill>
-                          <a:srgbClr val="000000"/>
-                        </a:solidFill>
-                        <a:effectLst/>
-                        <a:latin typeface="Calibri" panose="020F0502020204030204" pitchFamily="34" charset="0"/>
-                      </a:endParaRPr>
-                    </a:p>
-                  </a:txBody>
-                  <a:tcPr marL="7770" marR="7770" marT="7770" marB="0" anchor="ctr"/>
-                </a:tc>
-                <a:tc>
-                  <a:txBody>
-                    <a:bodyPr/>
-                    <a:lstStyle/>
-                    <a:p>
-                      <a:pPr algn="l" fontAlgn="ctr"/>
-                      <a:r>
-                        <a:rPr lang="en-US" sz="900" u="none" strike="noStrike">
-                          <a:effectLst/>
-                        </a:rPr>
-                        <a:t>estimates</a:t>
-                      </a:r>
-                      <a:endParaRPr lang="en-US" sz="900" b="1" i="0" u="none" strike="noStrike">
-                        <a:solidFill>
-                          <a:srgbClr val="000000"/>
-                        </a:solidFill>
-                        <a:effectLst/>
-                        <a:latin typeface="Calibri" panose="020F0502020204030204" pitchFamily="34" charset="0"/>
-                      </a:endParaRPr>
-                    </a:p>
-                  </a:txBody>
-                  <a:tcPr marL="7770" marR="7770" marT="7770" marB="0" anchor="ctr"/>
-                </a:tc>
-                <a:tc>
-                  <a:txBody>
-                    <a:bodyPr/>
-                    <a:lstStyle/>
-                    <a:p>
-                      <a:pPr algn="l" fontAlgn="ctr"/>
-                      <a:r>
-                        <a:rPr lang="en-US" sz="900" u="none" strike="noStrike">
-                          <a:effectLst/>
-                        </a:rPr>
-                        <a:t>estimates</a:t>
-                      </a:r>
-                      <a:endParaRPr lang="en-US" sz="900" b="1" i="0" u="none" strike="noStrike">
-                        <a:solidFill>
-                          <a:srgbClr val="000000"/>
-                        </a:solidFill>
-                        <a:effectLst/>
-                        <a:latin typeface="Calibri" panose="020F0502020204030204" pitchFamily="34" charset="0"/>
-                      </a:endParaRPr>
-                    </a:p>
-                  </a:txBody>
-                  <a:tcPr marL="7770" marR="7770" marT="7770" marB="0" anchor="ctr"/>
-                </a:tc>
-                <a:tc>
-                  <a:txBody>
-                    <a:bodyPr/>
-                    <a:lstStyle/>
-                    <a:p>
-                      <a:pPr algn="l" fontAlgn="ctr"/>
-                      <a:r>
-                        <a:rPr lang="en-US" sz="900" u="none" strike="noStrike">
-                          <a:effectLst/>
-                        </a:rPr>
-                        <a:t>estimates</a:t>
-                      </a:r>
-                      <a:endParaRPr lang="en-US" sz="900" b="1" i="0" u="none" strike="noStrike">
-                        <a:solidFill>
-                          <a:srgbClr val="000000"/>
-                        </a:solidFill>
-                        <a:effectLst/>
-                        <a:latin typeface="Calibri" panose="020F0502020204030204" pitchFamily="34" charset="0"/>
-                      </a:endParaRPr>
-                    </a:p>
-                  </a:txBody>
-                  <a:tcPr marL="7770" marR="7770" marT="7770" marB="0" anchor="ctr"/>
-                </a:tc>
-                <a:tc>
-                  <a:txBody>
-                    <a:bodyPr/>
-                    <a:lstStyle/>
-                    <a:p>
-                      <a:pPr algn="l" fontAlgn="ctr"/>
-                      <a:r>
-                        <a:rPr lang="en-US" sz="900" u="none" strike="noStrike">
-                          <a:effectLst/>
-                        </a:rPr>
-                        <a:t>estimates</a:t>
-                      </a:r>
-                      <a:endParaRPr lang="en-US" sz="900" b="1" i="0" u="none" strike="noStrike">
-                        <a:solidFill>
-                          <a:srgbClr val="000000"/>
-                        </a:solidFill>
-                        <a:effectLst/>
-                        <a:latin typeface="Calibri" panose="020F0502020204030204" pitchFamily="34" charset="0"/>
-                      </a:endParaRPr>
-                    </a:p>
-                  </a:txBody>
-                  <a:tcPr marL="7770" marR="7770" marT="7770" marB="0" anchor="ctr"/>
-                </a:tc>
-                <a:tc>
-                  <a:txBody>
-                    <a:bodyPr/>
-                    <a:lstStyle/>
-                    <a:p>
-                      <a:pPr algn="l" fontAlgn="ctr"/>
-                      <a:r>
-                        <a:rPr lang="en-US" sz="900" u="none" strike="noStrike">
-                          <a:effectLst/>
-                        </a:rPr>
-                        <a:t>gof</a:t>
-                      </a:r>
-                      <a:endParaRPr lang="en-US" sz="900" b="1" i="0" u="none" strike="noStrike">
-                        <a:solidFill>
-                          <a:srgbClr val="000000"/>
-                        </a:solidFill>
-                        <a:effectLst/>
-                        <a:latin typeface="Calibri" panose="020F0502020204030204" pitchFamily="34" charset="0"/>
-                      </a:endParaRPr>
-                    </a:p>
-                  </a:txBody>
-                  <a:tcPr marL="7770" marR="7770" marT="7770" marB="0" anchor="ctr"/>
-                </a:tc>
-                <a:tc>
-                  <a:txBody>
-                    <a:bodyPr/>
-                    <a:lstStyle/>
-                    <a:p>
-                      <a:pPr algn="l" fontAlgn="ctr"/>
-                      <a:r>
-                        <a:rPr lang="en-US" sz="900" u="none" strike="noStrike">
-                          <a:effectLst/>
-                        </a:rPr>
-                        <a:t>gof</a:t>
-                      </a:r>
-                      <a:endParaRPr lang="en-US" sz="900" b="1" i="0" u="none" strike="noStrike">
-                        <a:solidFill>
-                          <a:srgbClr val="000000"/>
-                        </a:solidFill>
-                        <a:effectLst/>
-                        <a:latin typeface="Calibri" panose="020F0502020204030204" pitchFamily="34" charset="0"/>
-                      </a:endParaRPr>
-                    </a:p>
-                  </a:txBody>
-                  <a:tcPr marL="7770" marR="7770" marT="7770" marB="0" anchor="ctr"/>
-                </a:tc>
-                <a:extLst>
-                  <a:ext uri="{0D108BD9-81ED-4DB2-BD59-A6C34878D82A}">
-                    <a16:rowId xmlns:a16="http://schemas.microsoft.com/office/drawing/2014/main" val="1597466623"/>
-                  </a:ext>
-                </a:extLst>
-              </a:tr>
-              <a:tr h="794221">
-                <a:tc>
-                  <a:txBody>
-                    <a:bodyPr/>
-                    <a:lstStyle/>
-                    <a:p>
-                      <a:pPr algn="l" fontAlgn="ctr"/>
-                      <a:r>
-                        <a:rPr lang="en-US" sz="900" u="none" strike="noStrike" dirty="0">
-                          <a:effectLst/>
-                        </a:rPr>
-                        <a:t>term</a:t>
-                      </a:r>
-                      <a:endParaRPr lang="en-US" sz="900" b="0" i="0" u="none" strike="noStrike" dirty="0">
-                        <a:solidFill>
-                          <a:srgbClr val="000000"/>
-                        </a:solidFill>
-                        <a:effectLst/>
-                        <a:latin typeface="Calibri" panose="020F0502020204030204" pitchFamily="34" charset="0"/>
-                      </a:endParaRPr>
-                    </a:p>
-                  </a:txBody>
-                  <a:tcPr marL="7770" marR="7770" marT="7770" marB="0" anchor="ctr"/>
-                </a:tc>
-                <a:tc>
-                  <a:txBody>
-                    <a:bodyPr/>
-                    <a:lstStyle/>
-                    <a:p>
-                      <a:pPr algn="l" fontAlgn="ctr"/>
-                      <a:r>
-                        <a:rPr lang="en-US" sz="900" u="none" strike="noStrike">
-                          <a:effectLst/>
-                        </a:rPr>
-                        <a:t>(Intercept)</a:t>
-                      </a:r>
-                      <a:endParaRPr lang="en-US" sz="900" b="0" i="0" u="none" strike="noStrike">
-                        <a:solidFill>
-                          <a:srgbClr val="000000"/>
-                        </a:solidFill>
-                        <a:effectLst/>
-                        <a:latin typeface="Calibri" panose="020F0502020204030204" pitchFamily="34" charset="0"/>
-                      </a:endParaRPr>
-                    </a:p>
-                  </a:txBody>
-                  <a:tcPr marL="7770" marR="7770" marT="7770" marB="0" anchor="ctr"/>
-                </a:tc>
-                <a:tc>
-                  <a:txBody>
-                    <a:bodyPr/>
-                    <a:lstStyle/>
-                    <a:p>
-                      <a:pPr algn="l" fontAlgn="ctr"/>
-                      <a:r>
-                        <a:rPr lang="en-US" sz="900" u="none" strike="noStrike">
-                          <a:effectLst/>
-                        </a:rPr>
-                        <a:t>(Intercept)</a:t>
-                      </a:r>
-                      <a:endParaRPr lang="en-US" sz="900" b="0" i="0" u="none" strike="noStrike">
-                        <a:solidFill>
-                          <a:srgbClr val="000000"/>
-                        </a:solidFill>
-                        <a:effectLst/>
-                        <a:latin typeface="Calibri" panose="020F0502020204030204" pitchFamily="34" charset="0"/>
-                      </a:endParaRPr>
-                    </a:p>
-                  </a:txBody>
-                  <a:tcPr marL="7770" marR="7770" marT="7770" marB="0" anchor="ctr"/>
-                </a:tc>
-                <a:tc>
-                  <a:txBody>
-                    <a:bodyPr/>
-                    <a:lstStyle/>
-                    <a:p>
-                      <a:pPr algn="l" fontAlgn="ctr"/>
-                      <a:r>
-                        <a:rPr lang="en-US" sz="900" u="none" strike="noStrike">
-                          <a:effectLst/>
-                        </a:rPr>
-                        <a:t>N</a:t>
-                      </a:r>
-                      <a:endParaRPr lang="en-US" sz="900" b="0" i="0" u="none" strike="noStrike">
-                        <a:solidFill>
-                          <a:srgbClr val="000000"/>
-                        </a:solidFill>
-                        <a:effectLst/>
-                        <a:latin typeface="Calibri" panose="020F0502020204030204" pitchFamily="34" charset="0"/>
-                      </a:endParaRPr>
-                    </a:p>
-                  </a:txBody>
-                  <a:tcPr marL="7770" marR="7770" marT="7770" marB="0" anchor="ctr"/>
-                </a:tc>
-                <a:tc>
-                  <a:txBody>
-                    <a:bodyPr/>
-                    <a:lstStyle/>
-                    <a:p>
-                      <a:pPr algn="l" fontAlgn="ctr"/>
-                      <a:r>
-                        <a:rPr lang="en-US" sz="900" u="none" strike="noStrike">
-                          <a:effectLst/>
-                        </a:rPr>
-                        <a:t>N</a:t>
-                      </a:r>
-                      <a:endParaRPr lang="en-US" sz="900" b="0" i="0" u="none" strike="noStrike">
-                        <a:solidFill>
-                          <a:srgbClr val="000000"/>
-                        </a:solidFill>
-                        <a:effectLst/>
-                        <a:latin typeface="Calibri" panose="020F0502020204030204" pitchFamily="34" charset="0"/>
-                      </a:endParaRPr>
-                    </a:p>
-                  </a:txBody>
-                  <a:tcPr marL="7770" marR="7770" marT="7770" marB="0" anchor="ctr"/>
-                </a:tc>
-                <a:tc>
-                  <a:txBody>
-                    <a:bodyPr/>
-                    <a:lstStyle/>
-                    <a:p>
-                      <a:pPr algn="l" fontAlgn="ctr"/>
-                      <a:r>
-                        <a:rPr lang="en-US" sz="900" u="none" strike="noStrike">
-                          <a:effectLst/>
-                        </a:rPr>
-                        <a:t>P</a:t>
-                      </a:r>
-                      <a:endParaRPr lang="en-US" sz="900" b="0" i="0" u="none" strike="noStrike">
-                        <a:solidFill>
-                          <a:srgbClr val="000000"/>
-                        </a:solidFill>
-                        <a:effectLst/>
-                        <a:latin typeface="Calibri" panose="020F0502020204030204" pitchFamily="34" charset="0"/>
-                      </a:endParaRPr>
-                    </a:p>
-                  </a:txBody>
-                  <a:tcPr marL="7770" marR="7770" marT="7770" marB="0" anchor="ctr"/>
-                </a:tc>
-                <a:tc>
-                  <a:txBody>
-                    <a:bodyPr/>
-                    <a:lstStyle/>
-                    <a:p>
-                      <a:pPr algn="l" fontAlgn="ctr"/>
-                      <a:r>
-                        <a:rPr lang="en-US" sz="900" u="none" strike="noStrike">
-                          <a:effectLst/>
-                        </a:rPr>
-                        <a:t>P</a:t>
-                      </a:r>
-                      <a:endParaRPr lang="en-US" sz="900" b="0" i="0" u="none" strike="noStrike">
-                        <a:solidFill>
-                          <a:srgbClr val="000000"/>
-                        </a:solidFill>
-                        <a:effectLst/>
-                        <a:latin typeface="Calibri" panose="020F0502020204030204" pitchFamily="34" charset="0"/>
-                      </a:endParaRPr>
-                    </a:p>
-                  </a:txBody>
-                  <a:tcPr marL="7770" marR="7770" marT="7770" marB="0" anchor="ctr"/>
-                </a:tc>
-                <a:tc>
-                  <a:txBody>
-                    <a:bodyPr/>
-                    <a:lstStyle/>
-                    <a:p>
-                      <a:pPr algn="l" fontAlgn="ctr"/>
-                      <a:r>
-                        <a:rPr lang="en-US" sz="900" u="none" strike="noStrike">
-                          <a:effectLst/>
-                        </a:rPr>
-                        <a:t>N × P</a:t>
-                      </a:r>
-                      <a:endParaRPr lang="en-US" sz="900" b="0" i="0" u="none" strike="noStrike">
-                        <a:solidFill>
-                          <a:srgbClr val="000000"/>
-                        </a:solidFill>
-                        <a:effectLst/>
-                        <a:latin typeface="Calibri" panose="020F0502020204030204" pitchFamily="34" charset="0"/>
-                      </a:endParaRPr>
-                    </a:p>
-                  </a:txBody>
-                  <a:tcPr marL="7770" marR="7770" marT="7770" marB="0" anchor="ctr"/>
-                </a:tc>
-                <a:tc>
-                  <a:txBody>
-                    <a:bodyPr/>
-                    <a:lstStyle/>
-                    <a:p>
-                      <a:pPr algn="l" fontAlgn="ctr"/>
-                      <a:r>
-                        <a:rPr lang="en-US" sz="900" u="none" strike="noStrike">
-                          <a:effectLst/>
-                        </a:rPr>
-                        <a:t>N × P</a:t>
-                      </a:r>
-                      <a:endParaRPr lang="en-US" sz="900" b="0" i="0" u="none" strike="noStrike">
-                        <a:solidFill>
-                          <a:srgbClr val="000000"/>
-                        </a:solidFill>
-                        <a:effectLst/>
-                        <a:latin typeface="Calibri" panose="020F0502020204030204" pitchFamily="34" charset="0"/>
-                      </a:endParaRPr>
-                    </a:p>
-                  </a:txBody>
-                  <a:tcPr marL="7770" marR="7770" marT="7770" marB="0" anchor="ctr"/>
-                </a:tc>
-                <a:tc>
-                  <a:txBody>
-                    <a:bodyPr/>
-                    <a:lstStyle/>
-                    <a:p>
-                      <a:pPr algn="l" fontAlgn="ctr"/>
-                      <a:r>
-                        <a:rPr lang="en-US" sz="900" u="none" strike="noStrike">
-                          <a:effectLst/>
-                        </a:rPr>
-                        <a:t>SD (Intercept PlotBloque)</a:t>
-                      </a:r>
-                      <a:endParaRPr lang="en-US" sz="900" b="0" i="0" u="none" strike="noStrike">
-                        <a:solidFill>
-                          <a:srgbClr val="000000"/>
-                        </a:solidFill>
-                        <a:effectLst/>
-                        <a:latin typeface="Calibri" panose="020F0502020204030204" pitchFamily="34" charset="0"/>
-                      </a:endParaRPr>
-                    </a:p>
-                  </a:txBody>
-                  <a:tcPr marL="7770" marR="7770" marT="7770" marB="0" anchor="ctr"/>
-                </a:tc>
-                <a:tc>
-                  <a:txBody>
-                    <a:bodyPr/>
-                    <a:lstStyle/>
-                    <a:p>
-                      <a:pPr algn="l" fontAlgn="ctr"/>
-                      <a:r>
-                        <a:rPr lang="en-US" sz="900" u="none" strike="noStrike">
-                          <a:effectLst/>
-                        </a:rPr>
-                        <a:t>SD (Intercept Bloque)</a:t>
-                      </a:r>
-                      <a:endParaRPr lang="en-US" sz="900" b="0" i="0" u="none" strike="noStrike">
-                        <a:solidFill>
-                          <a:srgbClr val="000000"/>
-                        </a:solidFill>
-                        <a:effectLst/>
-                        <a:latin typeface="Calibri" panose="020F0502020204030204" pitchFamily="34" charset="0"/>
-                      </a:endParaRPr>
-                    </a:p>
-                  </a:txBody>
-                  <a:tcPr marL="7770" marR="7770" marT="7770" marB="0" anchor="ctr"/>
-                </a:tc>
-                <a:tc>
-                  <a:txBody>
-                    <a:bodyPr/>
-                    <a:lstStyle/>
-                    <a:p>
-                      <a:pPr algn="l" fontAlgn="ctr"/>
-                      <a:r>
-                        <a:rPr lang="en-US" sz="900" u="none" strike="noStrike">
-                          <a:effectLst/>
-                        </a:rPr>
-                        <a:t>SD (Observations)</a:t>
-                      </a:r>
-                      <a:endParaRPr lang="en-US" sz="900" b="0" i="0" u="none" strike="noStrike">
-                        <a:solidFill>
-                          <a:srgbClr val="000000"/>
-                        </a:solidFill>
-                        <a:effectLst/>
-                        <a:latin typeface="Calibri" panose="020F0502020204030204" pitchFamily="34" charset="0"/>
-                      </a:endParaRPr>
-                    </a:p>
-                  </a:txBody>
-                  <a:tcPr marL="7770" marR="7770" marT="7770" marB="0" anchor="ctr"/>
-                </a:tc>
-                <a:tc>
-                  <a:txBody>
-                    <a:bodyPr/>
-                    <a:lstStyle/>
-                    <a:p>
-                      <a:pPr algn="l" fontAlgn="ctr"/>
-                      <a:r>
-                        <a:rPr lang="en-US" sz="900" u="none" strike="noStrike">
-                          <a:effectLst/>
-                        </a:rPr>
-                        <a:t>Num.Obs.</a:t>
-                      </a:r>
-                      <a:endParaRPr lang="en-US" sz="900" b="0" i="0" u="none" strike="noStrike">
-                        <a:solidFill>
-                          <a:srgbClr val="000000"/>
-                        </a:solidFill>
-                        <a:effectLst/>
-                        <a:latin typeface="Calibri" panose="020F0502020204030204" pitchFamily="34" charset="0"/>
-                      </a:endParaRPr>
-                    </a:p>
-                  </a:txBody>
-                  <a:tcPr marL="7770" marR="7770" marT="7770" marB="0" anchor="ctr"/>
-                </a:tc>
-                <a:tc>
-                  <a:txBody>
-                    <a:bodyPr/>
-                    <a:lstStyle/>
-                    <a:p>
-                      <a:pPr algn="l" fontAlgn="ctr"/>
-                      <a:r>
-                        <a:rPr lang="en-US" sz="900" u="none" strike="noStrike">
-                          <a:effectLst/>
-                        </a:rPr>
-                        <a:t>AIC</a:t>
-                      </a:r>
-                      <a:endParaRPr lang="en-US" sz="900" b="0" i="0" u="none" strike="noStrike">
-                        <a:solidFill>
-                          <a:srgbClr val="000000"/>
-                        </a:solidFill>
-                        <a:effectLst/>
-                        <a:latin typeface="Calibri" panose="020F0502020204030204" pitchFamily="34" charset="0"/>
-                      </a:endParaRPr>
-                    </a:p>
-                  </a:txBody>
-                  <a:tcPr marL="7770" marR="7770" marT="7770" marB="0" anchor="ctr"/>
-                </a:tc>
-                <a:extLst>
-                  <a:ext uri="{0D108BD9-81ED-4DB2-BD59-A6C34878D82A}">
-                    <a16:rowId xmlns:a16="http://schemas.microsoft.com/office/drawing/2014/main" val="752457056"/>
-                  </a:ext>
-                </a:extLst>
-              </a:tr>
-              <a:tr h="198555">
-                <a:tc>
-                  <a:txBody>
-                    <a:bodyPr/>
-                    <a:lstStyle/>
-                    <a:p>
-                      <a:pPr algn="l" fontAlgn="ctr"/>
-                      <a:r>
-                        <a:rPr lang="en-US" sz="900" u="none" strike="noStrike">
-                          <a:effectLst/>
-                        </a:rPr>
-                        <a:t>statistic</a:t>
-                      </a:r>
-                      <a:endParaRPr lang="en-US" sz="900" b="0" i="0" u="none" strike="noStrike">
-                        <a:solidFill>
-                          <a:srgbClr val="000000"/>
-                        </a:solidFill>
-                        <a:effectLst/>
-                        <a:latin typeface="Calibri" panose="020F0502020204030204" pitchFamily="34" charset="0"/>
-                      </a:endParaRPr>
-                    </a:p>
-                  </a:txBody>
-                  <a:tcPr marL="7770" marR="7770" marT="7770" marB="0" anchor="ctr"/>
-                </a:tc>
-                <a:tc>
-                  <a:txBody>
-                    <a:bodyPr/>
-                    <a:lstStyle/>
-                    <a:p>
-                      <a:pPr algn="l" fontAlgn="ctr"/>
-                      <a:r>
-                        <a:rPr lang="en-US" sz="900" u="none" strike="noStrike">
-                          <a:effectLst/>
-                        </a:rPr>
-                        <a:t>estimate</a:t>
-                      </a:r>
-                      <a:endParaRPr lang="en-US" sz="900" b="0" i="0" u="none" strike="noStrike">
-                        <a:solidFill>
-                          <a:srgbClr val="000000"/>
-                        </a:solidFill>
-                        <a:effectLst/>
-                        <a:latin typeface="Calibri" panose="020F0502020204030204" pitchFamily="34" charset="0"/>
-                      </a:endParaRPr>
-                    </a:p>
-                  </a:txBody>
-                  <a:tcPr marL="7770" marR="7770" marT="7770" marB="0" anchor="ctr"/>
-                </a:tc>
-                <a:tc>
-                  <a:txBody>
-                    <a:bodyPr/>
-                    <a:lstStyle/>
-                    <a:p>
-                      <a:pPr algn="l" fontAlgn="ctr"/>
-                      <a:r>
-                        <a:rPr lang="en-US" sz="900" u="none" strike="noStrike">
-                          <a:effectLst/>
-                        </a:rPr>
-                        <a:t>std.error</a:t>
-                      </a:r>
-                      <a:endParaRPr lang="en-US" sz="900" b="0" i="0" u="none" strike="noStrike">
-                        <a:solidFill>
-                          <a:srgbClr val="000000"/>
-                        </a:solidFill>
-                        <a:effectLst/>
-                        <a:latin typeface="Calibri" panose="020F0502020204030204" pitchFamily="34" charset="0"/>
-                      </a:endParaRPr>
-                    </a:p>
-                  </a:txBody>
-                  <a:tcPr marL="7770" marR="7770" marT="7770" marB="0" anchor="ctr"/>
-                </a:tc>
-                <a:tc>
-                  <a:txBody>
-                    <a:bodyPr/>
-                    <a:lstStyle/>
-                    <a:p>
-                      <a:pPr algn="l" fontAlgn="ctr"/>
-                      <a:r>
-                        <a:rPr lang="en-US" sz="900" u="none" strike="noStrike">
-                          <a:effectLst/>
-                        </a:rPr>
-                        <a:t>estimate</a:t>
-                      </a:r>
-                      <a:endParaRPr lang="en-US" sz="900" b="0" i="0" u="none" strike="noStrike">
-                        <a:solidFill>
-                          <a:srgbClr val="000000"/>
-                        </a:solidFill>
-                        <a:effectLst/>
-                        <a:latin typeface="Calibri" panose="020F0502020204030204" pitchFamily="34" charset="0"/>
-                      </a:endParaRPr>
-                    </a:p>
-                  </a:txBody>
-                  <a:tcPr marL="7770" marR="7770" marT="7770" marB="0" anchor="ctr"/>
-                </a:tc>
-                <a:tc>
-                  <a:txBody>
-                    <a:bodyPr/>
-                    <a:lstStyle/>
-                    <a:p>
-                      <a:pPr algn="l" fontAlgn="ctr"/>
-                      <a:r>
-                        <a:rPr lang="en-US" sz="900" u="none" strike="noStrike">
-                          <a:effectLst/>
-                        </a:rPr>
-                        <a:t>std.error</a:t>
-                      </a:r>
-                      <a:endParaRPr lang="en-US" sz="900" b="0" i="0" u="none" strike="noStrike">
-                        <a:solidFill>
-                          <a:srgbClr val="000000"/>
-                        </a:solidFill>
-                        <a:effectLst/>
-                        <a:latin typeface="Calibri" panose="020F0502020204030204" pitchFamily="34" charset="0"/>
-                      </a:endParaRPr>
-                    </a:p>
-                  </a:txBody>
-                  <a:tcPr marL="7770" marR="7770" marT="7770" marB="0" anchor="ctr"/>
-                </a:tc>
-                <a:tc>
-                  <a:txBody>
-                    <a:bodyPr/>
-                    <a:lstStyle/>
-                    <a:p>
-                      <a:pPr algn="l" fontAlgn="ctr"/>
-                      <a:r>
-                        <a:rPr lang="en-US" sz="900" u="none" strike="noStrike">
-                          <a:effectLst/>
-                        </a:rPr>
-                        <a:t>estimate</a:t>
-                      </a:r>
-                      <a:endParaRPr lang="en-US" sz="900" b="0" i="0" u="none" strike="noStrike">
-                        <a:solidFill>
-                          <a:srgbClr val="000000"/>
-                        </a:solidFill>
-                        <a:effectLst/>
-                        <a:latin typeface="Calibri" panose="020F0502020204030204" pitchFamily="34" charset="0"/>
-                      </a:endParaRPr>
-                    </a:p>
-                  </a:txBody>
-                  <a:tcPr marL="7770" marR="7770" marT="7770" marB="0" anchor="ctr"/>
-                </a:tc>
-                <a:tc>
-                  <a:txBody>
-                    <a:bodyPr/>
-                    <a:lstStyle/>
-                    <a:p>
-                      <a:pPr algn="l" fontAlgn="ctr"/>
-                      <a:r>
-                        <a:rPr lang="en-US" sz="900" u="none" strike="noStrike">
-                          <a:effectLst/>
-                        </a:rPr>
-                        <a:t>std.error</a:t>
-                      </a:r>
-                      <a:endParaRPr lang="en-US" sz="900" b="0" i="0" u="none" strike="noStrike">
-                        <a:solidFill>
-                          <a:srgbClr val="000000"/>
-                        </a:solidFill>
-                        <a:effectLst/>
-                        <a:latin typeface="Calibri" panose="020F0502020204030204" pitchFamily="34" charset="0"/>
-                      </a:endParaRPr>
-                    </a:p>
-                  </a:txBody>
-                  <a:tcPr marL="7770" marR="7770" marT="7770" marB="0" anchor="ctr"/>
-                </a:tc>
-                <a:tc>
-                  <a:txBody>
-                    <a:bodyPr/>
-                    <a:lstStyle/>
-                    <a:p>
-                      <a:pPr algn="l" fontAlgn="ctr"/>
-                      <a:r>
-                        <a:rPr lang="en-US" sz="900" u="none" strike="noStrike">
-                          <a:effectLst/>
-                        </a:rPr>
-                        <a:t>estimate</a:t>
-                      </a:r>
-                      <a:endParaRPr lang="en-US" sz="900" b="0" i="0" u="none" strike="noStrike">
-                        <a:solidFill>
-                          <a:srgbClr val="000000"/>
-                        </a:solidFill>
-                        <a:effectLst/>
-                        <a:latin typeface="Calibri" panose="020F0502020204030204" pitchFamily="34" charset="0"/>
-                      </a:endParaRPr>
-                    </a:p>
-                  </a:txBody>
-                  <a:tcPr marL="7770" marR="7770" marT="7770" marB="0" anchor="ctr"/>
-                </a:tc>
-                <a:tc>
-                  <a:txBody>
-                    <a:bodyPr/>
-                    <a:lstStyle/>
-                    <a:p>
-                      <a:pPr algn="l" fontAlgn="ctr"/>
-                      <a:r>
-                        <a:rPr lang="en-US" sz="900" u="none" strike="noStrike">
-                          <a:effectLst/>
-                        </a:rPr>
-                        <a:t>std.error</a:t>
-                      </a:r>
-                      <a:endParaRPr lang="en-US" sz="900" b="0" i="0" u="none" strike="noStrike">
-                        <a:solidFill>
-                          <a:srgbClr val="000000"/>
-                        </a:solidFill>
-                        <a:effectLst/>
-                        <a:latin typeface="Calibri" panose="020F0502020204030204" pitchFamily="34" charset="0"/>
-                      </a:endParaRPr>
-                    </a:p>
-                  </a:txBody>
-                  <a:tcPr marL="7770" marR="7770" marT="7770" marB="0" anchor="ctr"/>
-                </a:tc>
-                <a:tc>
-                  <a:txBody>
-                    <a:bodyPr/>
-                    <a:lstStyle/>
-                    <a:p>
-                      <a:pPr algn="l" fontAlgn="ctr"/>
-                      <a:r>
-                        <a:rPr lang="en-US" sz="900" u="none" strike="noStrike">
-                          <a:effectLst/>
-                        </a:rPr>
-                        <a:t>estimate</a:t>
-                      </a:r>
-                      <a:endParaRPr lang="en-US" sz="900" b="0" i="0" u="none" strike="noStrike">
-                        <a:solidFill>
-                          <a:srgbClr val="000000"/>
-                        </a:solidFill>
-                        <a:effectLst/>
-                        <a:latin typeface="Calibri" panose="020F0502020204030204" pitchFamily="34" charset="0"/>
-                      </a:endParaRPr>
-                    </a:p>
-                  </a:txBody>
-                  <a:tcPr marL="7770" marR="7770" marT="7770" marB="0" anchor="ctr"/>
-                </a:tc>
-                <a:tc>
-                  <a:txBody>
-                    <a:bodyPr/>
-                    <a:lstStyle/>
-                    <a:p>
-                      <a:pPr algn="l" fontAlgn="ctr"/>
-                      <a:r>
-                        <a:rPr lang="en-US" sz="900" u="none" strike="noStrike">
-                          <a:effectLst/>
-                        </a:rPr>
-                        <a:t>estimate</a:t>
-                      </a:r>
-                      <a:endParaRPr lang="en-US" sz="900" b="0" i="0" u="none" strike="noStrike">
-                        <a:solidFill>
-                          <a:srgbClr val="000000"/>
-                        </a:solidFill>
-                        <a:effectLst/>
-                        <a:latin typeface="Calibri" panose="020F0502020204030204" pitchFamily="34" charset="0"/>
-                      </a:endParaRPr>
-                    </a:p>
-                  </a:txBody>
-                  <a:tcPr marL="7770" marR="7770" marT="7770" marB="0" anchor="ctr"/>
-                </a:tc>
-                <a:tc>
-                  <a:txBody>
-                    <a:bodyPr/>
-                    <a:lstStyle/>
-                    <a:p>
-                      <a:pPr algn="l" fontAlgn="ctr"/>
-                      <a:r>
-                        <a:rPr lang="en-US" sz="900" u="none" strike="noStrike">
-                          <a:effectLst/>
-                        </a:rPr>
-                        <a:t>estimate</a:t>
-                      </a:r>
-                      <a:endParaRPr lang="en-US" sz="900" b="0" i="0" u="none" strike="noStrike">
-                        <a:solidFill>
-                          <a:srgbClr val="000000"/>
-                        </a:solidFill>
-                        <a:effectLst/>
-                        <a:latin typeface="Calibri" panose="020F0502020204030204" pitchFamily="34" charset="0"/>
-                      </a:endParaRPr>
-                    </a:p>
-                  </a:txBody>
-                  <a:tcPr marL="7770" marR="7770" marT="7770" marB="0" anchor="ctr"/>
-                </a:tc>
-                <a:tc>
-                  <a:txBody>
-                    <a:bodyPr/>
-                    <a:lstStyle/>
-                    <a:p>
-                      <a:pPr algn="l" fontAlgn="ctr"/>
-                      <a:endParaRPr lang="en-US" sz="900" b="0" i="0" u="none" strike="noStrike">
-                        <a:solidFill>
-                          <a:srgbClr val="000000"/>
-                        </a:solidFill>
-                        <a:effectLst/>
-                        <a:latin typeface="Calibri" panose="020F0502020204030204" pitchFamily="34" charset="0"/>
-                      </a:endParaRPr>
-                    </a:p>
-                  </a:txBody>
-                  <a:tcPr marL="7770" marR="7770" marT="7770" marB="0" anchor="ctr"/>
-                </a:tc>
-                <a:tc>
-                  <a:txBody>
-                    <a:bodyPr/>
-                    <a:lstStyle/>
-                    <a:p>
-                      <a:pPr algn="l" fontAlgn="ctr"/>
-                      <a:endParaRPr lang="en-US" sz="900" b="0" i="0" u="none" strike="noStrike">
-                        <a:solidFill>
-                          <a:srgbClr val="000000"/>
-                        </a:solidFill>
-                        <a:effectLst/>
-                        <a:latin typeface="Calibri" panose="020F0502020204030204" pitchFamily="34" charset="0"/>
-                      </a:endParaRPr>
-                    </a:p>
-                  </a:txBody>
-                  <a:tcPr marL="7770" marR="7770" marT="7770" marB="0" anchor="ctr"/>
-                </a:tc>
-                <a:extLst>
-                  <a:ext uri="{0D108BD9-81ED-4DB2-BD59-A6C34878D82A}">
-                    <a16:rowId xmlns:a16="http://schemas.microsoft.com/office/drawing/2014/main" val="3272663899"/>
-                  </a:ext>
-                </a:extLst>
-              </a:tr>
-              <a:tr h="397111">
-                <a:tc>
-                  <a:txBody>
-                    <a:bodyPr/>
-                    <a:lstStyle/>
-                    <a:p>
-                      <a:pPr algn="l" fontAlgn="ctr"/>
-                      <a:r>
-                        <a:rPr lang="en-US" sz="900" u="none" strike="noStrike" dirty="0" err="1">
-                          <a:effectLst/>
-                        </a:rPr>
-                        <a:t>Pouteria</a:t>
-                      </a:r>
-                      <a:r>
-                        <a:rPr lang="en-US" sz="900" u="none" strike="noStrike" dirty="0">
-                          <a:effectLst/>
-                        </a:rPr>
-                        <a:t> </a:t>
-                      </a:r>
-                      <a:r>
-                        <a:rPr lang="en-US" sz="900" u="none" strike="noStrike" dirty="0" err="1">
-                          <a:effectLst/>
-                        </a:rPr>
-                        <a:t>iWUE</a:t>
-                      </a:r>
-                      <a:endParaRPr lang="en-US" sz="900" b="1" i="1" u="none" strike="noStrike" dirty="0">
-                        <a:solidFill>
-                          <a:srgbClr val="000000"/>
-                        </a:solidFill>
-                        <a:effectLst/>
-                        <a:latin typeface="Calibri" panose="020F0502020204030204" pitchFamily="34" charset="0"/>
-                      </a:endParaRPr>
-                    </a:p>
-                  </a:txBody>
-                  <a:tcPr marL="7770" marR="7770" marT="7770" marB="0" anchor="ctr"/>
-                </a:tc>
-                <a:tc>
-                  <a:txBody>
-                    <a:bodyPr/>
-                    <a:lstStyle/>
-                    <a:p>
-                      <a:pPr algn="l" fontAlgn="ctr"/>
-                      <a:r>
-                        <a:rPr lang="en-US" sz="900" u="none" strike="noStrike">
-                          <a:effectLst/>
-                        </a:rPr>
-                        <a:t>34.694***</a:t>
-                      </a:r>
-                      <a:endParaRPr lang="en-US" sz="900" b="0" i="0" u="none" strike="noStrike">
-                        <a:solidFill>
-                          <a:srgbClr val="000000"/>
-                        </a:solidFill>
-                        <a:effectLst/>
-                        <a:latin typeface="Calibri" panose="020F0502020204030204" pitchFamily="34" charset="0"/>
-                      </a:endParaRPr>
-                    </a:p>
-                  </a:txBody>
-                  <a:tcPr marL="7770" marR="7770" marT="7770" marB="0" anchor="ctr"/>
-                </a:tc>
-                <a:tc>
-                  <a:txBody>
-                    <a:bodyPr/>
-                    <a:lstStyle/>
-                    <a:p>
-                      <a:pPr algn="l" fontAlgn="ctr"/>
-                      <a:r>
-                        <a:rPr lang="en-US" sz="900" u="none" strike="noStrike" dirty="0">
-                          <a:effectLst/>
-                        </a:rPr>
-                        <a:t>-7.277</a:t>
-                      </a:r>
-                      <a:endParaRPr lang="en-US" sz="900" b="0" i="0" u="none" strike="noStrike" dirty="0">
-                        <a:solidFill>
-                          <a:srgbClr val="000000"/>
-                        </a:solidFill>
-                        <a:effectLst/>
-                        <a:latin typeface="Calibri" panose="020F0502020204030204" pitchFamily="34" charset="0"/>
-                      </a:endParaRPr>
-                    </a:p>
-                  </a:txBody>
-                  <a:tcPr marL="7770" marR="7770" marT="7770" marB="0" anchor="ctr"/>
-                </a:tc>
-                <a:tc>
-                  <a:txBody>
-                    <a:bodyPr/>
-                    <a:lstStyle/>
-                    <a:p>
-                      <a:pPr algn="l" fontAlgn="ctr"/>
-                      <a:r>
-                        <a:rPr lang="en-US" sz="900" u="none" strike="noStrike" dirty="0">
-                          <a:effectLst/>
-                        </a:rPr>
-                        <a:t>23.640*</a:t>
-                      </a:r>
-                      <a:endParaRPr lang="en-US" sz="900" b="0" i="0" u="none" strike="noStrike" dirty="0">
-                        <a:solidFill>
-                          <a:srgbClr val="FF0000"/>
-                        </a:solidFill>
-                        <a:effectLst/>
-                        <a:latin typeface="Calibri" panose="020F0502020204030204" pitchFamily="34" charset="0"/>
-                      </a:endParaRPr>
-                    </a:p>
-                  </a:txBody>
-                  <a:tcPr marL="7770" marR="7770" marT="7770" marB="0" anchor="ctr"/>
-                </a:tc>
-                <a:tc>
-                  <a:txBody>
-                    <a:bodyPr/>
-                    <a:lstStyle/>
-                    <a:p>
-                      <a:pPr algn="l" fontAlgn="ctr"/>
-                      <a:r>
-                        <a:rPr lang="en-US" sz="900" u="none" strike="noStrike" dirty="0">
-                          <a:effectLst/>
-                        </a:rPr>
-                        <a:t>-9.566</a:t>
-                      </a:r>
-                      <a:endParaRPr lang="en-US" sz="900" b="0" i="0" u="none" strike="noStrike" dirty="0">
-                        <a:solidFill>
-                          <a:srgbClr val="000000"/>
-                        </a:solidFill>
-                        <a:effectLst/>
-                        <a:latin typeface="Calibri" panose="020F0502020204030204" pitchFamily="34" charset="0"/>
-                      </a:endParaRPr>
-                    </a:p>
-                  </a:txBody>
-                  <a:tcPr marL="7770" marR="7770" marT="7770" marB="0" anchor="ctr"/>
-                </a:tc>
-                <a:tc>
-                  <a:txBody>
-                    <a:bodyPr/>
-                    <a:lstStyle/>
-                    <a:p>
-                      <a:pPr algn="l" fontAlgn="ctr"/>
-                      <a:r>
-                        <a:rPr lang="en-US" sz="900" u="none" strike="noStrike">
-                          <a:effectLst/>
-                        </a:rPr>
-                        <a:t>9.166</a:t>
-                      </a:r>
-                      <a:endParaRPr lang="en-US" sz="900" b="0" i="0" u="none" strike="noStrike">
-                        <a:solidFill>
-                          <a:srgbClr val="000000"/>
-                        </a:solidFill>
-                        <a:effectLst/>
-                        <a:latin typeface="Calibri" panose="020F0502020204030204" pitchFamily="34" charset="0"/>
-                      </a:endParaRPr>
-                    </a:p>
-                  </a:txBody>
-                  <a:tcPr marL="7770" marR="7770" marT="7770" marB="0" anchor="ctr"/>
-                </a:tc>
-                <a:tc>
-                  <a:txBody>
-                    <a:bodyPr/>
-                    <a:lstStyle/>
-                    <a:p>
-                      <a:pPr algn="l" fontAlgn="ctr"/>
-                      <a:r>
-                        <a:rPr lang="en-US" sz="900" u="none" strike="noStrike" dirty="0">
-                          <a:effectLst/>
-                        </a:rPr>
-                        <a:t>-10.255</a:t>
-                      </a:r>
-                      <a:endParaRPr lang="en-US" sz="900" b="0" i="0" u="none" strike="noStrike" dirty="0">
-                        <a:solidFill>
-                          <a:srgbClr val="000000"/>
-                        </a:solidFill>
-                        <a:effectLst/>
-                        <a:latin typeface="Calibri" panose="020F0502020204030204" pitchFamily="34" charset="0"/>
-                      </a:endParaRPr>
-                    </a:p>
-                  </a:txBody>
-                  <a:tcPr marL="7770" marR="7770" marT="7770" marB="0" anchor="ctr"/>
-                </a:tc>
-                <a:tc>
-                  <a:txBody>
-                    <a:bodyPr/>
-                    <a:lstStyle/>
-                    <a:p>
-                      <a:pPr algn="l" fontAlgn="ctr"/>
-                      <a:r>
-                        <a:rPr lang="en-US" sz="900" u="none" strike="noStrike" dirty="0">
-                          <a:effectLst/>
-                        </a:rPr>
-                        <a:t>-28.268+</a:t>
-                      </a:r>
-                      <a:endParaRPr lang="en-US" sz="900" b="0" i="0" u="none" strike="noStrike" dirty="0">
-                        <a:solidFill>
-                          <a:srgbClr val="FF0000"/>
-                        </a:solidFill>
-                        <a:effectLst/>
-                        <a:latin typeface="Calibri" panose="020F0502020204030204" pitchFamily="34" charset="0"/>
-                      </a:endParaRPr>
-                    </a:p>
-                  </a:txBody>
-                  <a:tcPr marL="7770" marR="7770" marT="7770" marB="0" anchor="ctr"/>
-                </a:tc>
-                <a:tc>
-                  <a:txBody>
-                    <a:bodyPr/>
-                    <a:lstStyle/>
-                    <a:p>
-                      <a:pPr algn="l" fontAlgn="ctr"/>
-                      <a:r>
-                        <a:rPr lang="en-US" sz="900" u="none" strike="noStrike">
-                          <a:effectLst/>
-                        </a:rPr>
-                        <a:t>-13.913</a:t>
-                      </a:r>
-                      <a:endParaRPr lang="en-US" sz="900" b="0" i="0" u="none" strike="noStrike">
-                        <a:solidFill>
-                          <a:srgbClr val="000000"/>
-                        </a:solidFill>
-                        <a:effectLst/>
-                        <a:latin typeface="Calibri" panose="020F0502020204030204" pitchFamily="34" charset="0"/>
-                      </a:endParaRPr>
-                    </a:p>
-                  </a:txBody>
-                  <a:tcPr marL="7770" marR="7770" marT="7770" marB="0" anchor="ctr"/>
-                </a:tc>
-                <a:tc>
-                  <a:txBody>
-                    <a:bodyPr/>
-                    <a:lstStyle/>
-                    <a:p>
-                      <a:pPr algn="l" fontAlgn="ctr"/>
-                      <a:r>
-                        <a:rPr lang="en-US" sz="900" u="none" strike="noStrike">
-                          <a:effectLst/>
-                        </a:rPr>
-                        <a:t>9.174</a:t>
-                      </a:r>
-                      <a:endParaRPr lang="en-US" sz="900" b="0" i="0" u="none" strike="noStrike">
-                        <a:solidFill>
-                          <a:srgbClr val="000000"/>
-                        </a:solidFill>
-                        <a:effectLst/>
-                        <a:latin typeface="Calibri" panose="020F0502020204030204" pitchFamily="34" charset="0"/>
-                      </a:endParaRPr>
-                    </a:p>
-                  </a:txBody>
-                  <a:tcPr marL="7770" marR="7770" marT="7770" marB="0" anchor="ctr"/>
-                </a:tc>
-                <a:tc>
-                  <a:txBody>
-                    <a:bodyPr/>
-                    <a:lstStyle/>
-                    <a:p>
-                      <a:pPr algn="l" fontAlgn="ctr"/>
-                      <a:r>
-                        <a:rPr lang="en-US" sz="900" u="none" strike="noStrike">
-                          <a:effectLst/>
-                        </a:rPr>
-                        <a:t>0</a:t>
-                      </a:r>
-                      <a:endParaRPr lang="en-US" sz="900" b="0" i="0" u="none" strike="noStrike">
-                        <a:solidFill>
-                          <a:srgbClr val="000000"/>
-                        </a:solidFill>
-                        <a:effectLst/>
-                        <a:latin typeface="Calibri" panose="020F0502020204030204" pitchFamily="34" charset="0"/>
-                      </a:endParaRPr>
-                    </a:p>
-                  </a:txBody>
-                  <a:tcPr marL="7770" marR="7770" marT="7770" marB="0" anchor="ctr"/>
-                </a:tc>
-                <a:tc>
-                  <a:txBody>
-                    <a:bodyPr/>
-                    <a:lstStyle/>
-                    <a:p>
-                      <a:pPr algn="l" fontAlgn="ctr"/>
-                      <a:r>
-                        <a:rPr lang="en-US" sz="900" u="none" strike="noStrike">
-                          <a:effectLst/>
-                        </a:rPr>
-                        <a:t>15.367</a:t>
-                      </a:r>
-                      <a:endParaRPr lang="en-US" sz="900" b="0" i="0" u="none" strike="noStrike">
-                        <a:solidFill>
-                          <a:srgbClr val="000000"/>
-                        </a:solidFill>
-                        <a:effectLst/>
-                        <a:latin typeface="Calibri" panose="020F0502020204030204" pitchFamily="34" charset="0"/>
-                      </a:endParaRPr>
-                    </a:p>
-                  </a:txBody>
-                  <a:tcPr marL="7770" marR="7770" marT="7770" marB="0" anchor="ctr"/>
-                </a:tc>
-                <a:tc>
-                  <a:txBody>
-                    <a:bodyPr/>
-                    <a:lstStyle/>
-                    <a:p>
-                      <a:pPr algn="l" fontAlgn="ctr"/>
-                      <a:r>
-                        <a:rPr lang="en-US" sz="900" u="none" strike="noStrike">
-                          <a:effectLst/>
-                        </a:rPr>
-                        <a:t>36</a:t>
-                      </a:r>
-                      <a:endParaRPr lang="en-US" sz="900" b="0" i="0" u="none" strike="noStrike">
-                        <a:solidFill>
-                          <a:srgbClr val="000000"/>
-                        </a:solidFill>
-                        <a:effectLst/>
-                        <a:latin typeface="Calibri" panose="020F0502020204030204" pitchFamily="34" charset="0"/>
-                      </a:endParaRPr>
-                    </a:p>
-                  </a:txBody>
-                  <a:tcPr marL="7770" marR="7770" marT="7770" marB="0" anchor="ctr"/>
-                </a:tc>
-                <a:tc>
-                  <a:txBody>
-                    <a:bodyPr/>
-                    <a:lstStyle/>
-                    <a:p>
-                      <a:pPr algn="l" fontAlgn="ctr"/>
-                      <a:r>
-                        <a:rPr lang="en-US" sz="900" u="none" strike="noStrike">
-                          <a:effectLst/>
-                        </a:rPr>
-                        <a:t>294.3</a:t>
-                      </a:r>
-                      <a:endParaRPr lang="en-US" sz="900" b="0" i="0" u="none" strike="noStrike">
-                        <a:solidFill>
-                          <a:srgbClr val="000000"/>
-                        </a:solidFill>
-                        <a:effectLst/>
-                        <a:latin typeface="Calibri" panose="020F0502020204030204" pitchFamily="34" charset="0"/>
-                      </a:endParaRPr>
-                    </a:p>
-                  </a:txBody>
-                  <a:tcPr marL="7770" marR="7770" marT="7770" marB="0" anchor="ctr"/>
-                </a:tc>
-                <a:extLst>
-                  <a:ext uri="{0D108BD9-81ED-4DB2-BD59-A6C34878D82A}">
-                    <a16:rowId xmlns:a16="http://schemas.microsoft.com/office/drawing/2014/main" val="3572795938"/>
-                  </a:ext>
-                </a:extLst>
-              </a:tr>
-              <a:tr h="397111">
-                <a:tc>
-                  <a:txBody>
-                    <a:bodyPr/>
-                    <a:lstStyle/>
-                    <a:p>
-                      <a:pPr algn="l" fontAlgn="ctr"/>
-                      <a:r>
-                        <a:rPr lang="en-US" sz="900" u="none" strike="noStrike" dirty="0" err="1">
-                          <a:effectLst/>
-                        </a:rPr>
-                        <a:t>Pouteria</a:t>
-                      </a:r>
-                      <a:r>
-                        <a:rPr lang="en-US" sz="900" u="none" strike="noStrike" dirty="0">
-                          <a:effectLst/>
-                        </a:rPr>
-                        <a:t> O18</a:t>
-                      </a:r>
-                      <a:endParaRPr lang="en-US" sz="900" b="1" i="1" u="none" strike="noStrike" dirty="0">
-                        <a:solidFill>
-                          <a:srgbClr val="000000"/>
-                        </a:solidFill>
-                        <a:effectLst/>
-                        <a:latin typeface="Calibri" panose="020F0502020204030204" pitchFamily="34" charset="0"/>
-                      </a:endParaRPr>
-                    </a:p>
-                  </a:txBody>
-                  <a:tcPr marL="7770" marR="7770" marT="7770" marB="0" anchor="ctr"/>
-                </a:tc>
-                <a:tc>
-                  <a:txBody>
-                    <a:bodyPr/>
-                    <a:lstStyle/>
-                    <a:p>
-                      <a:pPr algn="l" fontAlgn="ctr"/>
-                      <a:r>
-                        <a:rPr lang="en-US" sz="900" u="none" strike="noStrike">
-                          <a:effectLst/>
-                        </a:rPr>
-                        <a:t>30.290***</a:t>
-                      </a:r>
-                      <a:endParaRPr lang="en-US" sz="900" b="0" i="0" u="none" strike="noStrike">
-                        <a:solidFill>
-                          <a:srgbClr val="000000"/>
-                        </a:solidFill>
-                        <a:effectLst/>
-                        <a:latin typeface="Calibri" panose="020F0502020204030204" pitchFamily="34" charset="0"/>
-                      </a:endParaRPr>
-                    </a:p>
-                  </a:txBody>
-                  <a:tcPr marL="7770" marR="7770" marT="7770" marB="0" anchor="ctr"/>
-                </a:tc>
-                <a:tc>
-                  <a:txBody>
-                    <a:bodyPr/>
-                    <a:lstStyle/>
-                    <a:p>
-                      <a:pPr algn="l" fontAlgn="ctr"/>
-                      <a:r>
-                        <a:rPr lang="en-US" sz="900" u="none" strike="noStrike">
-                          <a:effectLst/>
-                        </a:rPr>
-                        <a:t>-0.435</a:t>
-                      </a:r>
-                      <a:endParaRPr lang="en-US" sz="900" b="0" i="0" u="none" strike="noStrike">
-                        <a:solidFill>
-                          <a:srgbClr val="000000"/>
-                        </a:solidFill>
-                        <a:effectLst/>
-                        <a:latin typeface="Calibri" panose="020F0502020204030204" pitchFamily="34" charset="0"/>
-                      </a:endParaRPr>
-                    </a:p>
-                  </a:txBody>
-                  <a:tcPr marL="7770" marR="7770" marT="7770" marB="0" anchor="ctr"/>
-                </a:tc>
-                <a:tc>
-                  <a:txBody>
-                    <a:bodyPr/>
-                    <a:lstStyle/>
-                    <a:p>
-                      <a:pPr algn="l" fontAlgn="ctr"/>
-                      <a:r>
-                        <a:rPr lang="en-US" sz="900" u="none" strike="noStrike">
-                          <a:effectLst/>
-                        </a:rPr>
-                        <a:t>-1.002</a:t>
-                      </a:r>
-                      <a:endParaRPr lang="en-US" sz="900" b="0" i="0" u="none" strike="noStrike">
-                        <a:solidFill>
-                          <a:srgbClr val="000000"/>
-                        </a:solidFill>
-                        <a:effectLst/>
-                        <a:latin typeface="Calibri" panose="020F0502020204030204" pitchFamily="34" charset="0"/>
-                      </a:endParaRPr>
-                    </a:p>
-                  </a:txBody>
-                  <a:tcPr marL="7770" marR="7770" marT="7770" marB="0" anchor="ctr"/>
-                </a:tc>
-                <a:tc>
-                  <a:txBody>
-                    <a:bodyPr/>
-                    <a:lstStyle/>
-                    <a:p>
-                      <a:pPr algn="l" fontAlgn="ctr"/>
-                      <a:r>
-                        <a:rPr lang="en-US" sz="900" u="none" strike="noStrike">
-                          <a:effectLst/>
-                        </a:rPr>
-                        <a:t>-0.617</a:t>
-                      </a:r>
-                      <a:endParaRPr lang="en-US" sz="900" b="0" i="0" u="none" strike="noStrike">
-                        <a:solidFill>
-                          <a:srgbClr val="000000"/>
-                        </a:solidFill>
-                        <a:effectLst/>
-                        <a:latin typeface="Calibri" panose="020F0502020204030204" pitchFamily="34" charset="0"/>
-                      </a:endParaRPr>
-                    </a:p>
-                  </a:txBody>
-                  <a:tcPr marL="7770" marR="7770" marT="7770" marB="0" anchor="ctr"/>
-                </a:tc>
-                <a:tc>
-                  <a:txBody>
-                    <a:bodyPr/>
-                    <a:lstStyle/>
-                    <a:p>
-                      <a:pPr algn="l" fontAlgn="ctr"/>
-                      <a:r>
-                        <a:rPr lang="en-US" sz="900" u="none" strike="noStrike" dirty="0">
-                          <a:effectLst/>
-                        </a:rPr>
-                        <a:t>-1.352*</a:t>
-                      </a:r>
-                      <a:endParaRPr lang="en-US" sz="900" b="0" i="0" u="none" strike="noStrike" dirty="0">
-                        <a:solidFill>
-                          <a:srgbClr val="FF0000"/>
-                        </a:solidFill>
-                        <a:effectLst/>
-                        <a:latin typeface="Calibri" panose="020F0502020204030204" pitchFamily="34" charset="0"/>
-                      </a:endParaRPr>
-                    </a:p>
-                  </a:txBody>
-                  <a:tcPr marL="7770" marR="7770" marT="7770" marB="0" anchor="ctr"/>
-                </a:tc>
-                <a:tc>
-                  <a:txBody>
-                    <a:bodyPr/>
-                    <a:lstStyle/>
-                    <a:p>
-                      <a:pPr algn="l" fontAlgn="ctr"/>
-                      <a:r>
-                        <a:rPr lang="en-US" sz="900" u="none" strike="noStrike" dirty="0">
-                          <a:effectLst/>
-                        </a:rPr>
-                        <a:t>-0.653</a:t>
-                      </a:r>
-                      <a:endParaRPr lang="en-US" sz="900" b="0" i="0" u="none" strike="noStrike" dirty="0">
-                        <a:solidFill>
-                          <a:srgbClr val="000000"/>
-                        </a:solidFill>
-                        <a:effectLst/>
-                        <a:latin typeface="Calibri" panose="020F0502020204030204" pitchFamily="34" charset="0"/>
-                      </a:endParaRPr>
-                    </a:p>
-                  </a:txBody>
-                  <a:tcPr marL="7770" marR="7770" marT="7770" marB="0" anchor="ctr"/>
-                </a:tc>
-                <a:tc>
-                  <a:txBody>
-                    <a:bodyPr/>
-                    <a:lstStyle/>
-                    <a:p>
-                      <a:pPr algn="l" fontAlgn="ctr"/>
-                      <a:r>
-                        <a:rPr lang="en-US" sz="900" u="none" strike="noStrike">
-                          <a:effectLst/>
-                        </a:rPr>
-                        <a:t>0.533</a:t>
-                      </a:r>
-                      <a:endParaRPr lang="en-US" sz="900" b="0" i="0" u="none" strike="noStrike">
-                        <a:solidFill>
-                          <a:srgbClr val="000000"/>
-                        </a:solidFill>
-                        <a:effectLst/>
-                        <a:latin typeface="Calibri" panose="020F0502020204030204" pitchFamily="34" charset="0"/>
-                      </a:endParaRPr>
-                    </a:p>
-                  </a:txBody>
-                  <a:tcPr marL="7770" marR="7770" marT="7770" marB="0" anchor="ctr"/>
-                </a:tc>
-                <a:tc>
-                  <a:txBody>
-                    <a:bodyPr/>
-                    <a:lstStyle/>
-                    <a:p>
-                      <a:pPr algn="l" fontAlgn="ctr"/>
-                      <a:r>
-                        <a:rPr lang="en-US" sz="900" u="none" strike="noStrike">
-                          <a:effectLst/>
-                        </a:rPr>
-                        <a:t>-0.941</a:t>
-                      </a:r>
-                      <a:endParaRPr lang="en-US" sz="900" b="0" i="0" u="none" strike="noStrike">
-                        <a:solidFill>
-                          <a:srgbClr val="000000"/>
-                        </a:solidFill>
-                        <a:effectLst/>
-                        <a:latin typeface="Calibri" panose="020F0502020204030204" pitchFamily="34" charset="0"/>
-                      </a:endParaRPr>
-                    </a:p>
-                  </a:txBody>
-                  <a:tcPr marL="7770" marR="7770" marT="7770" marB="0" anchor="ctr"/>
-                </a:tc>
-                <a:tc>
-                  <a:txBody>
-                    <a:bodyPr/>
-                    <a:lstStyle/>
-                    <a:p>
-                      <a:pPr algn="l" fontAlgn="ctr"/>
-                      <a:r>
-                        <a:rPr lang="en-US" sz="900" u="none" strike="noStrike">
-                          <a:effectLst/>
-                        </a:rPr>
-                        <a:t>0.255</a:t>
-                      </a:r>
-                      <a:endParaRPr lang="en-US" sz="900" b="0" i="0" u="none" strike="noStrike">
-                        <a:solidFill>
-                          <a:srgbClr val="000000"/>
-                        </a:solidFill>
-                        <a:effectLst/>
-                        <a:latin typeface="Calibri" panose="020F0502020204030204" pitchFamily="34" charset="0"/>
-                      </a:endParaRPr>
-                    </a:p>
-                  </a:txBody>
-                  <a:tcPr marL="7770" marR="7770" marT="7770" marB="0" anchor="ctr"/>
-                </a:tc>
-                <a:tc>
-                  <a:txBody>
-                    <a:bodyPr/>
-                    <a:lstStyle/>
-                    <a:p>
-                      <a:pPr algn="l" fontAlgn="ctr"/>
-                      <a:r>
-                        <a:rPr lang="en-US" sz="900" u="none" strike="noStrike">
-                          <a:effectLst/>
-                        </a:rPr>
-                        <a:t>0</a:t>
-                      </a:r>
-                      <a:endParaRPr lang="en-US" sz="900" b="0" i="0" u="none" strike="noStrike">
-                        <a:solidFill>
-                          <a:srgbClr val="000000"/>
-                        </a:solidFill>
-                        <a:effectLst/>
-                        <a:latin typeface="Calibri" panose="020F0502020204030204" pitchFamily="34" charset="0"/>
-                      </a:endParaRPr>
-                    </a:p>
-                  </a:txBody>
-                  <a:tcPr marL="7770" marR="7770" marT="7770" marB="0" anchor="ctr"/>
-                </a:tc>
-                <a:tc>
-                  <a:txBody>
-                    <a:bodyPr/>
-                    <a:lstStyle/>
-                    <a:p>
-                      <a:pPr algn="l" fontAlgn="ctr"/>
-                      <a:r>
-                        <a:rPr lang="en-US" sz="900" u="none" strike="noStrike">
-                          <a:effectLst/>
-                        </a:rPr>
-                        <a:t>1.325</a:t>
-                      </a:r>
-                      <a:endParaRPr lang="en-US" sz="900" b="0" i="0" u="none" strike="noStrike">
-                        <a:solidFill>
-                          <a:srgbClr val="000000"/>
-                        </a:solidFill>
-                        <a:effectLst/>
-                        <a:latin typeface="Calibri" panose="020F0502020204030204" pitchFamily="34" charset="0"/>
-                      </a:endParaRPr>
-                    </a:p>
-                  </a:txBody>
-                  <a:tcPr marL="7770" marR="7770" marT="7770" marB="0" anchor="ctr"/>
-                </a:tc>
-                <a:tc>
-                  <a:txBody>
-                    <a:bodyPr/>
-                    <a:lstStyle/>
-                    <a:p>
-                      <a:pPr algn="l" fontAlgn="ctr"/>
-                      <a:r>
-                        <a:rPr lang="en-US" sz="900" u="none" strike="noStrike">
-                          <a:effectLst/>
-                        </a:rPr>
-                        <a:t>36</a:t>
-                      </a:r>
-                      <a:endParaRPr lang="en-US" sz="900" b="0" i="0" u="none" strike="noStrike">
-                        <a:solidFill>
-                          <a:srgbClr val="000000"/>
-                        </a:solidFill>
-                        <a:effectLst/>
-                        <a:latin typeface="Calibri" panose="020F0502020204030204" pitchFamily="34" charset="0"/>
-                      </a:endParaRPr>
-                    </a:p>
-                  </a:txBody>
-                  <a:tcPr marL="7770" marR="7770" marT="7770" marB="0" anchor="ctr"/>
-                </a:tc>
-                <a:tc>
-                  <a:txBody>
-                    <a:bodyPr/>
-                    <a:lstStyle/>
-                    <a:p>
-                      <a:pPr algn="l" fontAlgn="ctr"/>
-                      <a:r>
-                        <a:rPr lang="en-US" sz="900" u="none" strike="noStrike">
-                          <a:effectLst/>
-                        </a:rPr>
-                        <a:t>132.4</a:t>
-                      </a:r>
-                      <a:endParaRPr lang="en-US" sz="900" b="0" i="0" u="none" strike="noStrike">
-                        <a:solidFill>
-                          <a:srgbClr val="000000"/>
-                        </a:solidFill>
-                        <a:effectLst/>
-                        <a:latin typeface="Calibri" panose="020F0502020204030204" pitchFamily="34" charset="0"/>
-                      </a:endParaRPr>
-                    </a:p>
-                  </a:txBody>
-                  <a:tcPr marL="7770" marR="7770" marT="7770" marB="0" anchor="ctr"/>
-                </a:tc>
-                <a:extLst>
-                  <a:ext uri="{0D108BD9-81ED-4DB2-BD59-A6C34878D82A}">
-                    <a16:rowId xmlns:a16="http://schemas.microsoft.com/office/drawing/2014/main" val="334965098"/>
-                  </a:ext>
-                </a:extLst>
-              </a:tr>
-              <a:tr h="397111">
-                <a:tc>
-                  <a:txBody>
-                    <a:bodyPr/>
-                    <a:lstStyle/>
-                    <a:p>
-                      <a:pPr algn="l" fontAlgn="ctr"/>
-                      <a:r>
-                        <a:rPr lang="en-US" sz="900" u="none" strike="noStrike" dirty="0" err="1">
-                          <a:effectLst/>
-                        </a:rPr>
-                        <a:t>Clarisia</a:t>
-                      </a:r>
-                      <a:r>
-                        <a:rPr lang="en-US" sz="900" u="none" strike="noStrike" dirty="0">
-                          <a:effectLst/>
-                        </a:rPr>
-                        <a:t> </a:t>
-                      </a:r>
-                      <a:r>
-                        <a:rPr lang="en-US" sz="900" u="none" strike="noStrike" dirty="0" err="1">
-                          <a:effectLst/>
-                        </a:rPr>
-                        <a:t>iWUE</a:t>
-                      </a:r>
-                      <a:endParaRPr lang="en-US" sz="900" b="1" i="1" u="none" strike="noStrike" dirty="0">
-                        <a:solidFill>
-                          <a:srgbClr val="000000"/>
-                        </a:solidFill>
-                        <a:effectLst/>
-                        <a:latin typeface="Calibri" panose="020F0502020204030204" pitchFamily="34" charset="0"/>
-                      </a:endParaRPr>
-                    </a:p>
-                  </a:txBody>
-                  <a:tcPr marL="7770" marR="7770" marT="7770" marB="0" anchor="ctr"/>
-                </a:tc>
-                <a:tc>
-                  <a:txBody>
-                    <a:bodyPr/>
-                    <a:lstStyle/>
-                    <a:p>
-                      <a:pPr algn="l" fontAlgn="ctr"/>
-                      <a:r>
-                        <a:rPr lang="en-US" sz="900" u="none" strike="noStrike">
-                          <a:effectLst/>
-                        </a:rPr>
-                        <a:t>51.714***</a:t>
-                      </a:r>
-                      <a:endParaRPr lang="en-US" sz="900" b="0" i="0" u="none" strike="noStrike">
-                        <a:solidFill>
-                          <a:srgbClr val="000000"/>
-                        </a:solidFill>
-                        <a:effectLst/>
-                        <a:latin typeface="Calibri" panose="020F0502020204030204" pitchFamily="34" charset="0"/>
-                      </a:endParaRPr>
-                    </a:p>
-                  </a:txBody>
-                  <a:tcPr marL="7770" marR="7770" marT="7770" marB="0" anchor="ctr"/>
-                </a:tc>
-                <a:tc>
-                  <a:txBody>
-                    <a:bodyPr/>
-                    <a:lstStyle/>
-                    <a:p>
-                      <a:pPr algn="l" fontAlgn="ctr"/>
-                      <a:r>
-                        <a:rPr lang="en-US" sz="900" u="none" strike="noStrike" dirty="0">
-                          <a:effectLst/>
-                        </a:rPr>
-                        <a:t>-6.31</a:t>
-                      </a:r>
-                      <a:endParaRPr lang="en-US" sz="900" b="0" i="0" u="none" strike="noStrike" dirty="0">
-                        <a:solidFill>
-                          <a:srgbClr val="000000"/>
-                        </a:solidFill>
-                        <a:effectLst/>
-                        <a:latin typeface="Calibri" panose="020F0502020204030204" pitchFamily="34" charset="0"/>
-                      </a:endParaRPr>
-                    </a:p>
-                  </a:txBody>
-                  <a:tcPr marL="7770" marR="7770" marT="7770" marB="0" anchor="ctr"/>
-                </a:tc>
-                <a:tc>
-                  <a:txBody>
-                    <a:bodyPr/>
-                    <a:lstStyle/>
-                    <a:p>
-                      <a:pPr algn="l" fontAlgn="ctr"/>
-                      <a:r>
-                        <a:rPr lang="en-US" sz="900" u="none" strike="noStrike" dirty="0">
-                          <a:effectLst/>
-                        </a:rPr>
-                        <a:t>-15.672</a:t>
-                      </a:r>
-                      <a:endParaRPr lang="en-US" sz="900" b="0" i="0" u="none" strike="noStrike" dirty="0">
-                        <a:solidFill>
-                          <a:srgbClr val="000000"/>
-                        </a:solidFill>
-                        <a:effectLst/>
-                        <a:latin typeface="Calibri" panose="020F0502020204030204" pitchFamily="34" charset="0"/>
-                      </a:endParaRPr>
-                    </a:p>
-                  </a:txBody>
-                  <a:tcPr marL="7770" marR="7770" marT="7770" marB="0" anchor="ctr"/>
-                </a:tc>
-                <a:tc>
-                  <a:txBody>
-                    <a:bodyPr/>
-                    <a:lstStyle/>
-                    <a:p>
-                      <a:pPr algn="l" fontAlgn="ctr"/>
-                      <a:r>
-                        <a:rPr lang="en-US" sz="900" u="none" strike="noStrike" dirty="0">
-                          <a:effectLst/>
-                        </a:rPr>
-                        <a:t>-12.62</a:t>
-                      </a:r>
-                      <a:endParaRPr lang="en-US" sz="900" b="0" i="0" u="none" strike="noStrike" dirty="0">
-                        <a:solidFill>
-                          <a:srgbClr val="000000"/>
-                        </a:solidFill>
-                        <a:effectLst/>
-                        <a:latin typeface="Calibri" panose="020F0502020204030204" pitchFamily="34" charset="0"/>
-                      </a:endParaRPr>
-                    </a:p>
-                  </a:txBody>
-                  <a:tcPr marL="7770" marR="7770" marT="7770" marB="0" anchor="ctr"/>
-                </a:tc>
-                <a:tc>
-                  <a:txBody>
-                    <a:bodyPr/>
-                    <a:lstStyle/>
-                    <a:p>
-                      <a:pPr algn="l" fontAlgn="ctr"/>
-                      <a:r>
-                        <a:rPr lang="en-US" sz="900" u="none" strike="noStrike">
-                          <a:effectLst/>
-                        </a:rPr>
-                        <a:t>10.514</a:t>
-                      </a:r>
-                      <a:endParaRPr lang="en-US" sz="900" b="0" i="0" u="none" strike="noStrike">
-                        <a:solidFill>
-                          <a:srgbClr val="000000"/>
-                        </a:solidFill>
-                        <a:effectLst/>
-                        <a:latin typeface="Calibri" panose="020F0502020204030204" pitchFamily="34" charset="0"/>
-                      </a:endParaRPr>
-                    </a:p>
-                  </a:txBody>
-                  <a:tcPr marL="7770" marR="7770" marT="7770" marB="0" anchor="ctr"/>
-                </a:tc>
-                <a:tc>
-                  <a:txBody>
-                    <a:bodyPr/>
-                    <a:lstStyle/>
-                    <a:p>
-                      <a:pPr algn="l" fontAlgn="ctr"/>
-                      <a:r>
-                        <a:rPr lang="en-US" sz="900" u="none" strike="noStrike">
-                          <a:effectLst/>
-                        </a:rPr>
-                        <a:t>-8.347</a:t>
-                      </a:r>
-                      <a:endParaRPr lang="en-US" sz="900" b="0" i="0" u="none" strike="noStrike">
-                        <a:solidFill>
-                          <a:srgbClr val="000000"/>
-                        </a:solidFill>
-                        <a:effectLst/>
-                        <a:latin typeface="Calibri" panose="020F0502020204030204" pitchFamily="34" charset="0"/>
-                      </a:endParaRPr>
-                    </a:p>
-                  </a:txBody>
-                  <a:tcPr marL="7770" marR="7770" marT="7770" marB="0" anchor="ctr"/>
-                </a:tc>
-                <a:tc>
-                  <a:txBody>
-                    <a:bodyPr/>
-                    <a:lstStyle/>
-                    <a:p>
-                      <a:pPr algn="l" fontAlgn="ctr"/>
-                      <a:r>
-                        <a:rPr lang="en-US" sz="900" u="none" strike="noStrike">
-                          <a:effectLst/>
-                        </a:rPr>
-                        <a:t>1.879</a:t>
-                      </a:r>
-                      <a:endParaRPr lang="en-US" sz="900" b="0" i="0" u="none" strike="noStrike">
-                        <a:solidFill>
-                          <a:srgbClr val="000000"/>
-                        </a:solidFill>
-                        <a:effectLst/>
-                        <a:latin typeface="Calibri" panose="020F0502020204030204" pitchFamily="34" charset="0"/>
-                      </a:endParaRPr>
-                    </a:p>
-                  </a:txBody>
-                  <a:tcPr marL="7770" marR="7770" marT="7770" marB="0" anchor="ctr"/>
-                </a:tc>
-                <a:tc>
-                  <a:txBody>
-                    <a:bodyPr/>
-                    <a:lstStyle/>
-                    <a:p>
-                      <a:pPr algn="l" fontAlgn="ctr"/>
-                      <a:r>
-                        <a:rPr lang="en-US" sz="900" u="none" strike="noStrike">
-                          <a:effectLst/>
-                        </a:rPr>
-                        <a:t>-14.798</a:t>
-                      </a:r>
-                      <a:endParaRPr lang="en-US" sz="900" b="0" i="0" u="none" strike="noStrike">
-                        <a:solidFill>
-                          <a:srgbClr val="000000"/>
-                        </a:solidFill>
-                        <a:effectLst/>
-                        <a:latin typeface="Calibri" panose="020F0502020204030204" pitchFamily="34" charset="0"/>
-                      </a:endParaRPr>
-                    </a:p>
-                  </a:txBody>
-                  <a:tcPr marL="7770" marR="7770" marT="7770" marB="0" anchor="ctr"/>
-                </a:tc>
-                <a:tc>
-                  <a:txBody>
-                    <a:bodyPr/>
-                    <a:lstStyle/>
-                    <a:p>
-                      <a:pPr algn="l" fontAlgn="ctr"/>
-                      <a:r>
-                        <a:rPr lang="en-US" sz="900" u="none" strike="noStrike">
-                          <a:effectLst/>
-                        </a:rPr>
-                        <a:t>0</a:t>
-                      </a:r>
-                      <a:endParaRPr lang="en-US" sz="900" b="0" i="0" u="none" strike="noStrike">
-                        <a:solidFill>
-                          <a:srgbClr val="000000"/>
-                        </a:solidFill>
-                        <a:effectLst/>
-                        <a:latin typeface="Calibri" panose="020F0502020204030204" pitchFamily="34" charset="0"/>
-                      </a:endParaRPr>
-                    </a:p>
-                  </a:txBody>
-                  <a:tcPr marL="7770" marR="7770" marT="7770" marB="0" anchor="ctr"/>
-                </a:tc>
-                <a:tc>
-                  <a:txBody>
-                    <a:bodyPr/>
-                    <a:lstStyle/>
-                    <a:p>
-                      <a:pPr algn="l" fontAlgn="ctr"/>
-                      <a:r>
-                        <a:rPr lang="en-US" sz="900" u="none" strike="noStrike">
-                          <a:effectLst/>
-                        </a:rPr>
-                        <a:t>0</a:t>
-                      </a:r>
-                      <a:endParaRPr lang="en-US" sz="900" b="0" i="0" u="none" strike="noStrike">
-                        <a:solidFill>
-                          <a:srgbClr val="000000"/>
-                        </a:solidFill>
-                        <a:effectLst/>
-                        <a:latin typeface="Calibri" panose="020F0502020204030204" pitchFamily="34" charset="0"/>
-                      </a:endParaRPr>
-                    </a:p>
-                  </a:txBody>
-                  <a:tcPr marL="7770" marR="7770" marT="7770" marB="0" anchor="ctr"/>
-                </a:tc>
-                <a:tc>
-                  <a:txBody>
-                    <a:bodyPr/>
-                    <a:lstStyle/>
-                    <a:p>
-                      <a:pPr algn="l" fontAlgn="ctr"/>
-                      <a:r>
-                        <a:rPr lang="en-US" sz="900" u="none" strike="noStrike">
-                          <a:effectLst/>
-                        </a:rPr>
-                        <a:t>10.929</a:t>
-                      </a:r>
-                      <a:endParaRPr lang="en-US" sz="900" b="0" i="0" u="none" strike="noStrike">
-                        <a:solidFill>
-                          <a:srgbClr val="000000"/>
-                        </a:solidFill>
-                        <a:effectLst/>
-                        <a:latin typeface="Calibri" panose="020F0502020204030204" pitchFamily="34" charset="0"/>
-                      </a:endParaRPr>
-                    </a:p>
-                  </a:txBody>
-                  <a:tcPr marL="7770" marR="7770" marT="7770" marB="0" anchor="ctr"/>
-                </a:tc>
-                <a:tc>
-                  <a:txBody>
-                    <a:bodyPr/>
-                    <a:lstStyle/>
-                    <a:p>
-                      <a:pPr algn="l" fontAlgn="ctr"/>
-                      <a:r>
-                        <a:rPr lang="en-US" sz="900" u="none" strike="noStrike">
-                          <a:effectLst/>
-                        </a:rPr>
-                        <a:t>12</a:t>
-                      </a:r>
-                      <a:endParaRPr lang="en-US" sz="900" b="0" i="0" u="none" strike="noStrike">
-                        <a:solidFill>
-                          <a:srgbClr val="000000"/>
-                        </a:solidFill>
-                        <a:effectLst/>
-                        <a:latin typeface="Calibri" panose="020F0502020204030204" pitchFamily="34" charset="0"/>
-                      </a:endParaRPr>
-                    </a:p>
-                  </a:txBody>
-                  <a:tcPr marL="7770" marR="7770" marT="7770" marB="0" anchor="ctr"/>
-                </a:tc>
-                <a:tc>
-                  <a:txBody>
-                    <a:bodyPr/>
-                    <a:lstStyle/>
-                    <a:p>
-                      <a:pPr algn="l" fontAlgn="ctr"/>
-                      <a:r>
-                        <a:rPr lang="en-US" sz="900" u="none" strike="noStrike">
-                          <a:effectLst/>
-                        </a:rPr>
-                        <a:t>78.8</a:t>
-                      </a:r>
-                      <a:endParaRPr lang="en-US" sz="900" b="0" i="0" u="none" strike="noStrike">
-                        <a:solidFill>
-                          <a:srgbClr val="000000"/>
-                        </a:solidFill>
-                        <a:effectLst/>
-                        <a:latin typeface="Calibri" panose="020F0502020204030204" pitchFamily="34" charset="0"/>
-                      </a:endParaRPr>
-                    </a:p>
-                  </a:txBody>
-                  <a:tcPr marL="7770" marR="7770" marT="7770" marB="0" anchor="ctr"/>
-                </a:tc>
-                <a:extLst>
-                  <a:ext uri="{0D108BD9-81ED-4DB2-BD59-A6C34878D82A}">
-                    <a16:rowId xmlns:a16="http://schemas.microsoft.com/office/drawing/2014/main" val="1652984424"/>
-                  </a:ext>
-                </a:extLst>
-              </a:tr>
-              <a:tr h="198555">
-                <a:tc>
-                  <a:txBody>
-                    <a:bodyPr/>
-                    <a:lstStyle/>
-                    <a:p>
-                      <a:pPr algn="l" fontAlgn="ctr"/>
-                      <a:r>
-                        <a:rPr lang="en-US" sz="900" u="none" strike="noStrike" dirty="0" err="1">
-                          <a:effectLst/>
-                        </a:rPr>
-                        <a:t>Clarisia</a:t>
-                      </a:r>
-                      <a:r>
-                        <a:rPr lang="en-US" sz="900" u="none" strike="noStrike" dirty="0">
-                          <a:effectLst/>
-                        </a:rPr>
-                        <a:t> O18</a:t>
-                      </a:r>
-                      <a:endParaRPr lang="en-US" sz="900" b="1" i="1" u="none" strike="noStrike" dirty="0">
-                        <a:solidFill>
-                          <a:srgbClr val="000000"/>
-                        </a:solidFill>
-                        <a:effectLst/>
-                        <a:latin typeface="Calibri" panose="020F0502020204030204" pitchFamily="34" charset="0"/>
-                      </a:endParaRPr>
-                    </a:p>
-                  </a:txBody>
-                  <a:tcPr marL="7770" marR="7770" marT="7770" marB="0" anchor="ctr"/>
-                </a:tc>
-                <a:tc>
-                  <a:txBody>
-                    <a:bodyPr/>
-                    <a:lstStyle/>
-                    <a:p>
-                      <a:pPr algn="l" fontAlgn="ctr"/>
-                      <a:r>
-                        <a:rPr lang="en-US" sz="900" u="none" strike="noStrike">
-                          <a:effectLst/>
-                        </a:rPr>
-                        <a:t>26.510***</a:t>
-                      </a:r>
-                      <a:endParaRPr lang="en-US" sz="900" b="0" i="0" u="none" strike="noStrike">
-                        <a:solidFill>
-                          <a:srgbClr val="000000"/>
-                        </a:solidFill>
-                        <a:effectLst/>
-                        <a:latin typeface="Calibri" panose="020F0502020204030204" pitchFamily="34" charset="0"/>
-                      </a:endParaRPr>
-                    </a:p>
-                  </a:txBody>
-                  <a:tcPr marL="7770" marR="7770" marT="7770" marB="0" anchor="ctr"/>
-                </a:tc>
-                <a:tc>
-                  <a:txBody>
-                    <a:bodyPr/>
-                    <a:lstStyle/>
-                    <a:p>
-                      <a:pPr algn="l" fontAlgn="ctr"/>
-                      <a:r>
-                        <a:rPr lang="en-US" sz="900" u="none" strike="noStrike">
-                          <a:effectLst/>
-                        </a:rPr>
-                        <a:t>-1.316</a:t>
-                      </a:r>
-                      <a:endParaRPr lang="en-US" sz="900" b="0" i="0" u="none" strike="noStrike">
-                        <a:solidFill>
-                          <a:srgbClr val="000000"/>
-                        </a:solidFill>
-                        <a:effectLst/>
-                        <a:latin typeface="Calibri" panose="020F0502020204030204" pitchFamily="34" charset="0"/>
-                      </a:endParaRPr>
-                    </a:p>
-                  </a:txBody>
-                  <a:tcPr marL="7770" marR="7770" marT="7770" marB="0" anchor="ctr"/>
-                </a:tc>
-                <a:tc>
-                  <a:txBody>
-                    <a:bodyPr/>
-                    <a:lstStyle/>
-                    <a:p>
-                      <a:pPr algn="l" fontAlgn="ctr"/>
-                      <a:r>
-                        <a:rPr lang="en-US" sz="900" u="none" strike="noStrike">
-                          <a:effectLst/>
-                        </a:rPr>
-                        <a:t>4.719</a:t>
-                      </a:r>
-                      <a:endParaRPr lang="en-US" sz="900" b="0" i="0" u="none" strike="noStrike">
-                        <a:solidFill>
-                          <a:srgbClr val="000000"/>
-                        </a:solidFill>
-                        <a:effectLst/>
-                        <a:latin typeface="Calibri" panose="020F0502020204030204" pitchFamily="34" charset="0"/>
-                      </a:endParaRPr>
-                    </a:p>
-                  </a:txBody>
-                  <a:tcPr marL="7770" marR="7770" marT="7770" marB="0" anchor="ctr"/>
-                </a:tc>
-                <a:tc>
-                  <a:txBody>
-                    <a:bodyPr/>
-                    <a:lstStyle/>
-                    <a:p>
-                      <a:pPr algn="l" fontAlgn="ctr"/>
-                      <a:r>
-                        <a:rPr lang="en-US" sz="900" u="none" strike="noStrike" dirty="0">
-                          <a:effectLst/>
-                        </a:rPr>
-                        <a:t>-2.632</a:t>
-                      </a:r>
-                      <a:endParaRPr lang="en-US" sz="900" b="0" i="0" u="none" strike="noStrike" dirty="0">
-                        <a:solidFill>
-                          <a:srgbClr val="000000"/>
-                        </a:solidFill>
-                        <a:effectLst/>
-                        <a:latin typeface="Calibri" panose="020F0502020204030204" pitchFamily="34" charset="0"/>
-                      </a:endParaRPr>
-                    </a:p>
-                  </a:txBody>
-                  <a:tcPr marL="7770" marR="7770" marT="7770" marB="0" anchor="ctr"/>
-                </a:tc>
-                <a:tc>
-                  <a:txBody>
-                    <a:bodyPr/>
-                    <a:lstStyle/>
-                    <a:p>
-                      <a:pPr algn="l" fontAlgn="ctr"/>
-                      <a:r>
-                        <a:rPr lang="en-US" sz="900" u="none" strike="noStrike">
-                          <a:effectLst/>
-                        </a:rPr>
-                        <a:t>2.871</a:t>
-                      </a:r>
-                      <a:endParaRPr lang="en-US" sz="900" b="0" i="0" u="none" strike="noStrike">
-                        <a:solidFill>
-                          <a:srgbClr val="000000"/>
-                        </a:solidFill>
-                        <a:effectLst/>
-                        <a:latin typeface="Calibri" panose="020F0502020204030204" pitchFamily="34" charset="0"/>
-                      </a:endParaRPr>
-                    </a:p>
-                  </a:txBody>
-                  <a:tcPr marL="7770" marR="7770" marT="7770" marB="0" anchor="ctr"/>
-                </a:tc>
-                <a:tc>
-                  <a:txBody>
-                    <a:bodyPr/>
-                    <a:lstStyle/>
-                    <a:p>
-                      <a:pPr algn="l" fontAlgn="ctr"/>
-                      <a:r>
-                        <a:rPr lang="en-US" sz="900" u="none" strike="noStrike">
-                          <a:effectLst/>
-                        </a:rPr>
-                        <a:t>-1.891</a:t>
-                      </a:r>
-                      <a:endParaRPr lang="en-US" sz="900" b="0" i="0" u="none" strike="noStrike">
-                        <a:solidFill>
-                          <a:srgbClr val="000000"/>
-                        </a:solidFill>
-                        <a:effectLst/>
-                        <a:latin typeface="Calibri" panose="020F0502020204030204" pitchFamily="34" charset="0"/>
-                      </a:endParaRPr>
-                    </a:p>
-                  </a:txBody>
-                  <a:tcPr marL="7770" marR="7770" marT="7770" marB="0" anchor="ctr"/>
-                </a:tc>
-                <a:tc>
-                  <a:txBody>
-                    <a:bodyPr/>
-                    <a:lstStyle/>
-                    <a:p>
-                      <a:pPr algn="l" fontAlgn="ctr"/>
-                      <a:r>
-                        <a:rPr lang="en-US" sz="900" u="none" strike="noStrike">
-                          <a:effectLst/>
-                        </a:rPr>
-                        <a:t>-3.085</a:t>
-                      </a:r>
-                      <a:endParaRPr lang="en-US" sz="900" b="0" i="0" u="none" strike="noStrike">
-                        <a:solidFill>
-                          <a:srgbClr val="000000"/>
-                        </a:solidFill>
-                        <a:effectLst/>
-                        <a:latin typeface="Calibri" panose="020F0502020204030204" pitchFamily="34" charset="0"/>
-                      </a:endParaRPr>
-                    </a:p>
-                  </a:txBody>
-                  <a:tcPr marL="7770" marR="7770" marT="7770" marB="0" anchor="ctr"/>
-                </a:tc>
-                <a:tc>
-                  <a:txBody>
-                    <a:bodyPr/>
-                    <a:lstStyle/>
-                    <a:p>
-                      <a:pPr algn="l" fontAlgn="ctr"/>
-                      <a:r>
-                        <a:rPr lang="en-US" sz="900" u="none" strike="noStrike">
-                          <a:effectLst/>
-                        </a:rPr>
-                        <a:t>-3.202</a:t>
-                      </a:r>
-                      <a:endParaRPr lang="en-US" sz="900" b="0" i="0" u="none" strike="noStrike">
-                        <a:solidFill>
-                          <a:srgbClr val="000000"/>
-                        </a:solidFill>
-                        <a:effectLst/>
-                        <a:latin typeface="Calibri" panose="020F0502020204030204" pitchFamily="34" charset="0"/>
-                      </a:endParaRPr>
-                    </a:p>
-                  </a:txBody>
-                  <a:tcPr marL="7770" marR="7770" marT="7770" marB="0" anchor="ctr"/>
-                </a:tc>
-                <a:tc>
-                  <a:txBody>
-                    <a:bodyPr/>
-                    <a:lstStyle/>
-                    <a:p>
-                      <a:pPr algn="l" fontAlgn="ctr"/>
-                      <a:r>
-                        <a:rPr lang="en-US" sz="900" u="none" strike="noStrike">
-                          <a:effectLst/>
-                        </a:rPr>
-                        <a:t>1.302</a:t>
-                      </a:r>
-                      <a:endParaRPr lang="en-US" sz="900" b="0" i="0" u="none" strike="noStrike">
-                        <a:solidFill>
-                          <a:srgbClr val="000000"/>
-                        </a:solidFill>
-                        <a:effectLst/>
-                        <a:latin typeface="Calibri" panose="020F0502020204030204" pitchFamily="34" charset="0"/>
-                      </a:endParaRPr>
-                    </a:p>
-                  </a:txBody>
-                  <a:tcPr marL="7770" marR="7770" marT="7770" marB="0" anchor="ctr"/>
-                </a:tc>
-                <a:tc>
-                  <a:txBody>
-                    <a:bodyPr/>
-                    <a:lstStyle/>
-                    <a:p>
-                      <a:pPr algn="l" fontAlgn="ctr"/>
-                      <a:r>
-                        <a:rPr lang="en-US" sz="900" u="none" strike="noStrike">
-                          <a:effectLst/>
-                        </a:rPr>
-                        <a:t>0</a:t>
-                      </a:r>
-                      <a:endParaRPr lang="en-US" sz="900" b="0" i="0" u="none" strike="noStrike">
-                        <a:solidFill>
-                          <a:srgbClr val="000000"/>
-                        </a:solidFill>
-                        <a:effectLst/>
-                        <a:latin typeface="Calibri" panose="020F0502020204030204" pitchFamily="34" charset="0"/>
-                      </a:endParaRPr>
-                    </a:p>
-                  </a:txBody>
-                  <a:tcPr marL="7770" marR="7770" marT="7770" marB="0" anchor="ctr"/>
-                </a:tc>
-                <a:tc>
-                  <a:txBody>
-                    <a:bodyPr/>
-                    <a:lstStyle/>
-                    <a:p>
-                      <a:pPr algn="l" fontAlgn="ctr"/>
-                      <a:r>
-                        <a:rPr lang="en-US" sz="900" u="none" strike="noStrike">
-                          <a:effectLst/>
-                        </a:rPr>
-                        <a:t>1.87</a:t>
-                      </a:r>
-                      <a:endParaRPr lang="en-US" sz="900" b="0" i="0" u="none" strike="noStrike">
-                        <a:solidFill>
-                          <a:srgbClr val="000000"/>
-                        </a:solidFill>
-                        <a:effectLst/>
-                        <a:latin typeface="Calibri" panose="020F0502020204030204" pitchFamily="34" charset="0"/>
-                      </a:endParaRPr>
-                    </a:p>
-                  </a:txBody>
-                  <a:tcPr marL="7770" marR="7770" marT="7770" marB="0" anchor="ctr"/>
-                </a:tc>
-                <a:tc>
-                  <a:txBody>
-                    <a:bodyPr/>
-                    <a:lstStyle/>
-                    <a:p>
-                      <a:pPr algn="l" fontAlgn="ctr"/>
-                      <a:r>
-                        <a:rPr lang="en-US" sz="900" u="none" strike="noStrike">
-                          <a:effectLst/>
-                        </a:rPr>
-                        <a:t>12</a:t>
-                      </a:r>
-                      <a:endParaRPr lang="en-US" sz="900" b="0" i="0" u="none" strike="noStrike">
-                        <a:solidFill>
-                          <a:srgbClr val="000000"/>
-                        </a:solidFill>
-                        <a:effectLst/>
-                        <a:latin typeface="Calibri" panose="020F0502020204030204" pitchFamily="34" charset="0"/>
-                      </a:endParaRPr>
-                    </a:p>
-                  </a:txBody>
-                  <a:tcPr marL="7770" marR="7770" marT="7770" marB="0" anchor="ctr"/>
-                </a:tc>
-                <a:tc>
-                  <a:txBody>
-                    <a:bodyPr/>
-                    <a:lstStyle/>
-                    <a:p>
-                      <a:pPr algn="l" fontAlgn="ctr"/>
-                      <a:r>
-                        <a:rPr lang="en-US" sz="900" u="none" strike="noStrike">
-                          <a:effectLst/>
-                        </a:rPr>
-                        <a:t>52.9</a:t>
-                      </a:r>
-                      <a:endParaRPr lang="en-US" sz="900" b="0" i="0" u="none" strike="noStrike">
-                        <a:solidFill>
-                          <a:srgbClr val="000000"/>
-                        </a:solidFill>
-                        <a:effectLst/>
-                        <a:latin typeface="Calibri" panose="020F0502020204030204" pitchFamily="34" charset="0"/>
-                      </a:endParaRPr>
-                    </a:p>
-                  </a:txBody>
-                  <a:tcPr marL="7770" marR="7770" marT="7770" marB="0" anchor="ctr"/>
-                </a:tc>
-                <a:extLst>
-                  <a:ext uri="{0D108BD9-81ED-4DB2-BD59-A6C34878D82A}">
-                    <a16:rowId xmlns:a16="http://schemas.microsoft.com/office/drawing/2014/main" val="2541724834"/>
-                  </a:ext>
-                </a:extLst>
-              </a:tr>
-              <a:tr h="397111">
-                <a:tc>
-                  <a:txBody>
-                    <a:bodyPr/>
-                    <a:lstStyle/>
-                    <a:p>
-                      <a:pPr algn="l" fontAlgn="ctr"/>
-                      <a:r>
-                        <a:rPr lang="en-US" sz="900" u="none" strike="noStrike" dirty="0" err="1">
-                          <a:effectLst/>
-                        </a:rPr>
-                        <a:t>Alchornea</a:t>
-                      </a:r>
-                      <a:r>
-                        <a:rPr lang="en-US" sz="900" u="none" strike="noStrike" dirty="0">
-                          <a:effectLst/>
-                        </a:rPr>
-                        <a:t> </a:t>
-                      </a:r>
-                      <a:r>
-                        <a:rPr lang="en-US" sz="900" u="none" strike="noStrike" dirty="0" err="1">
-                          <a:effectLst/>
-                        </a:rPr>
-                        <a:t>iWUE</a:t>
-                      </a:r>
-                      <a:endParaRPr lang="en-US" sz="900" b="1" i="1" u="none" strike="noStrike" dirty="0">
-                        <a:solidFill>
-                          <a:srgbClr val="000000"/>
-                        </a:solidFill>
-                        <a:effectLst/>
-                        <a:latin typeface="Calibri" panose="020F0502020204030204" pitchFamily="34" charset="0"/>
-                      </a:endParaRPr>
-                    </a:p>
-                  </a:txBody>
-                  <a:tcPr marL="7770" marR="7770" marT="7770" marB="0" anchor="ctr"/>
-                </a:tc>
-                <a:tc>
-                  <a:txBody>
-                    <a:bodyPr/>
-                    <a:lstStyle/>
-                    <a:p>
-                      <a:pPr algn="l" fontAlgn="ctr"/>
-                      <a:r>
-                        <a:rPr lang="en-US" sz="900" u="none" strike="noStrike">
-                          <a:effectLst/>
-                        </a:rPr>
-                        <a:t>107.131***</a:t>
-                      </a:r>
-                      <a:endParaRPr lang="en-US" sz="900" b="0" i="0" u="none" strike="noStrike">
-                        <a:solidFill>
-                          <a:srgbClr val="000000"/>
-                        </a:solidFill>
-                        <a:effectLst/>
-                        <a:latin typeface="Calibri" panose="020F0502020204030204" pitchFamily="34" charset="0"/>
-                      </a:endParaRPr>
-                    </a:p>
-                  </a:txBody>
-                  <a:tcPr marL="7770" marR="7770" marT="7770" marB="0" anchor="ctr"/>
-                </a:tc>
-                <a:tc>
-                  <a:txBody>
-                    <a:bodyPr/>
-                    <a:lstStyle/>
-                    <a:p>
-                      <a:pPr algn="l" fontAlgn="ctr"/>
-                      <a:r>
-                        <a:rPr lang="en-US" sz="900" u="none" strike="noStrike">
-                          <a:effectLst/>
-                        </a:rPr>
-                        <a:t>-6.533</a:t>
-                      </a:r>
-                      <a:endParaRPr lang="en-US" sz="900" b="0" i="0" u="none" strike="noStrike">
-                        <a:solidFill>
-                          <a:srgbClr val="000000"/>
-                        </a:solidFill>
-                        <a:effectLst/>
-                        <a:latin typeface="Calibri" panose="020F0502020204030204" pitchFamily="34" charset="0"/>
-                      </a:endParaRPr>
-                    </a:p>
-                  </a:txBody>
-                  <a:tcPr marL="7770" marR="7770" marT="7770" marB="0" anchor="ctr"/>
-                </a:tc>
-                <a:tc>
-                  <a:txBody>
-                    <a:bodyPr/>
-                    <a:lstStyle/>
-                    <a:p>
-                      <a:pPr algn="l" fontAlgn="ctr"/>
-                      <a:r>
-                        <a:rPr lang="en-US" sz="900" u="none" strike="noStrike">
-                          <a:effectLst/>
-                        </a:rPr>
-                        <a:t>-3.013</a:t>
-                      </a:r>
-                      <a:endParaRPr lang="en-US" sz="900" b="0" i="0" u="none" strike="noStrike">
-                        <a:solidFill>
-                          <a:srgbClr val="000000"/>
-                        </a:solidFill>
-                        <a:effectLst/>
-                        <a:latin typeface="Calibri" panose="020F0502020204030204" pitchFamily="34" charset="0"/>
-                      </a:endParaRPr>
-                    </a:p>
-                  </a:txBody>
-                  <a:tcPr marL="7770" marR="7770" marT="7770" marB="0" anchor="ctr"/>
-                </a:tc>
-                <a:tc>
-                  <a:txBody>
-                    <a:bodyPr/>
-                    <a:lstStyle/>
-                    <a:p>
-                      <a:pPr algn="l" fontAlgn="ctr"/>
-                      <a:r>
-                        <a:rPr lang="en-US" sz="900" u="none" strike="noStrike">
-                          <a:effectLst/>
-                        </a:rPr>
-                        <a:t>-8.478</a:t>
-                      </a:r>
-                      <a:endParaRPr lang="en-US" sz="900" b="0" i="0" u="none" strike="noStrike">
-                        <a:solidFill>
-                          <a:srgbClr val="000000"/>
-                        </a:solidFill>
-                        <a:effectLst/>
-                        <a:latin typeface="Calibri" panose="020F0502020204030204" pitchFamily="34" charset="0"/>
-                      </a:endParaRPr>
-                    </a:p>
-                  </a:txBody>
-                  <a:tcPr marL="7770" marR="7770" marT="7770" marB="0" anchor="ctr"/>
-                </a:tc>
-                <a:tc>
-                  <a:txBody>
-                    <a:bodyPr/>
-                    <a:lstStyle/>
-                    <a:p>
-                      <a:pPr algn="l" fontAlgn="ctr"/>
-                      <a:r>
-                        <a:rPr lang="en-US" sz="900" u="none" strike="noStrike">
-                          <a:effectLst/>
-                        </a:rPr>
-                        <a:t>-8.036</a:t>
-                      </a:r>
-                      <a:endParaRPr lang="en-US" sz="900" b="0" i="0" u="none" strike="noStrike">
-                        <a:solidFill>
-                          <a:srgbClr val="000000"/>
-                        </a:solidFill>
-                        <a:effectLst/>
-                        <a:latin typeface="Calibri" panose="020F0502020204030204" pitchFamily="34" charset="0"/>
-                      </a:endParaRPr>
-                    </a:p>
-                  </a:txBody>
-                  <a:tcPr marL="7770" marR="7770" marT="7770" marB="0" anchor="ctr"/>
-                </a:tc>
-                <a:tc>
-                  <a:txBody>
-                    <a:bodyPr/>
-                    <a:lstStyle/>
-                    <a:p>
-                      <a:pPr algn="l" fontAlgn="ctr"/>
-                      <a:r>
-                        <a:rPr lang="en-US" sz="900" u="none" strike="noStrike" dirty="0">
-                          <a:effectLst/>
-                        </a:rPr>
-                        <a:t>-7.588</a:t>
-                      </a:r>
-                      <a:endParaRPr lang="en-US" sz="900" b="0" i="0" u="none" strike="noStrike" dirty="0">
-                        <a:solidFill>
-                          <a:srgbClr val="000000"/>
-                        </a:solidFill>
-                        <a:effectLst/>
-                        <a:latin typeface="Calibri" panose="020F0502020204030204" pitchFamily="34" charset="0"/>
-                      </a:endParaRPr>
-                    </a:p>
-                  </a:txBody>
-                  <a:tcPr marL="7770" marR="7770" marT="7770" marB="0" anchor="ctr"/>
-                </a:tc>
-                <a:tc>
-                  <a:txBody>
-                    <a:bodyPr/>
-                    <a:lstStyle/>
-                    <a:p>
-                      <a:pPr algn="l" fontAlgn="ctr"/>
-                      <a:r>
-                        <a:rPr lang="en-US" sz="900" u="none" strike="noStrike">
-                          <a:effectLst/>
-                        </a:rPr>
-                        <a:t>5.685</a:t>
-                      </a:r>
-                      <a:endParaRPr lang="en-US" sz="900" b="0" i="0" u="none" strike="noStrike">
-                        <a:solidFill>
-                          <a:srgbClr val="000000"/>
-                        </a:solidFill>
-                        <a:effectLst/>
-                        <a:latin typeface="Calibri" panose="020F0502020204030204" pitchFamily="34" charset="0"/>
-                      </a:endParaRPr>
-                    </a:p>
-                  </a:txBody>
-                  <a:tcPr marL="7770" marR="7770" marT="7770" marB="0" anchor="ctr"/>
-                </a:tc>
-                <a:tc>
-                  <a:txBody>
-                    <a:bodyPr/>
-                    <a:lstStyle/>
-                    <a:p>
-                      <a:pPr algn="l" fontAlgn="ctr"/>
-                      <a:r>
-                        <a:rPr lang="en-US" sz="900" u="none" strike="noStrike">
-                          <a:effectLst/>
-                        </a:rPr>
-                        <a:t>-11.874</a:t>
-                      </a:r>
-                      <a:endParaRPr lang="en-US" sz="900" b="0" i="0" u="none" strike="noStrike">
-                        <a:solidFill>
-                          <a:srgbClr val="000000"/>
-                        </a:solidFill>
-                        <a:effectLst/>
-                        <a:latin typeface="Calibri" panose="020F0502020204030204" pitchFamily="34" charset="0"/>
-                      </a:endParaRPr>
-                    </a:p>
-                  </a:txBody>
-                  <a:tcPr marL="7770" marR="7770" marT="7770" marB="0" anchor="ctr"/>
-                </a:tc>
-                <a:tc>
-                  <a:txBody>
-                    <a:bodyPr/>
-                    <a:lstStyle/>
-                    <a:p>
-                      <a:pPr algn="l" fontAlgn="ctr"/>
-                      <a:r>
-                        <a:rPr lang="en-US" sz="900" u="none" strike="noStrike">
-                          <a:effectLst/>
-                        </a:rPr>
-                        <a:t>7.04</a:t>
-                      </a:r>
-                      <a:endParaRPr lang="en-US" sz="900" b="0" i="0" u="none" strike="noStrike">
-                        <a:solidFill>
-                          <a:srgbClr val="000000"/>
-                        </a:solidFill>
-                        <a:effectLst/>
-                        <a:latin typeface="Calibri" panose="020F0502020204030204" pitchFamily="34" charset="0"/>
-                      </a:endParaRPr>
-                    </a:p>
-                  </a:txBody>
-                  <a:tcPr marL="7770" marR="7770" marT="7770" marB="0" anchor="ctr"/>
-                </a:tc>
-                <a:tc>
-                  <a:txBody>
-                    <a:bodyPr/>
-                    <a:lstStyle/>
-                    <a:p>
-                      <a:pPr algn="l" fontAlgn="ctr"/>
-                      <a:r>
-                        <a:rPr lang="en-US" sz="900" u="none" strike="noStrike">
-                          <a:effectLst/>
-                        </a:rPr>
-                        <a:t>7.079</a:t>
-                      </a:r>
-                      <a:endParaRPr lang="en-US" sz="900" b="0" i="0" u="none" strike="noStrike">
-                        <a:solidFill>
-                          <a:srgbClr val="000000"/>
-                        </a:solidFill>
-                        <a:effectLst/>
-                        <a:latin typeface="Calibri" panose="020F0502020204030204" pitchFamily="34" charset="0"/>
-                      </a:endParaRPr>
-                    </a:p>
-                  </a:txBody>
-                  <a:tcPr marL="7770" marR="7770" marT="7770" marB="0" anchor="ctr"/>
-                </a:tc>
-                <a:tc>
-                  <a:txBody>
-                    <a:bodyPr/>
-                    <a:lstStyle/>
-                    <a:p>
-                      <a:pPr algn="l" fontAlgn="ctr"/>
-                      <a:r>
-                        <a:rPr lang="en-US" sz="900" u="none" strike="noStrike">
-                          <a:effectLst/>
-                        </a:rPr>
-                        <a:t>14.39</a:t>
-                      </a:r>
-                      <a:endParaRPr lang="en-US" sz="900" b="0" i="0" u="none" strike="noStrike">
-                        <a:solidFill>
-                          <a:srgbClr val="000000"/>
-                        </a:solidFill>
-                        <a:effectLst/>
-                        <a:latin typeface="Calibri" panose="020F0502020204030204" pitchFamily="34" charset="0"/>
-                      </a:endParaRPr>
-                    </a:p>
-                  </a:txBody>
-                  <a:tcPr marL="7770" marR="7770" marT="7770" marB="0" anchor="ctr"/>
-                </a:tc>
-                <a:tc>
-                  <a:txBody>
-                    <a:bodyPr/>
-                    <a:lstStyle/>
-                    <a:p>
-                      <a:pPr algn="l" fontAlgn="ctr"/>
-                      <a:r>
-                        <a:rPr lang="en-US" sz="900" u="none" strike="noStrike">
-                          <a:effectLst/>
-                        </a:rPr>
-                        <a:t>44</a:t>
-                      </a:r>
-                      <a:endParaRPr lang="en-US" sz="900" b="0" i="0" u="none" strike="noStrike">
-                        <a:solidFill>
-                          <a:srgbClr val="000000"/>
-                        </a:solidFill>
-                        <a:effectLst/>
-                        <a:latin typeface="Calibri" panose="020F0502020204030204" pitchFamily="34" charset="0"/>
-                      </a:endParaRPr>
-                    </a:p>
-                  </a:txBody>
-                  <a:tcPr marL="7770" marR="7770" marT="7770" marB="0" anchor="ctr"/>
-                </a:tc>
-                <a:tc>
-                  <a:txBody>
-                    <a:bodyPr/>
-                    <a:lstStyle/>
-                    <a:p>
-                      <a:pPr algn="l" fontAlgn="ctr"/>
-                      <a:r>
-                        <a:rPr lang="en-US" sz="900" u="none" strike="noStrike">
-                          <a:effectLst/>
-                        </a:rPr>
-                        <a:t>358.5</a:t>
-                      </a:r>
-                      <a:endParaRPr lang="en-US" sz="900" b="0" i="0" u="none" strike="noStrike">
-                        <a:solidFill>
-                          <a:srgbClr val="000000"/>
-                        </a:solidFill>
-                        <a:effectLst/>
-                        <a:latin typeface="Calibri" panose="020F0502020204030204" pitchFamily="34" charset="0"/>
-                      </a:endParaRPr>
-                    </a:p>
-                  </a:txBody>
-                  <a:tcPr marL="7770" marR="7770" marT="7770" marB="0" anchor="ctr"/>
-                </a:tc>
-                <a:extLst>
-                  <a:ext uri="{0D108BD9-81ED-4DB2-BD59-A6C34878D82A}">
-                    <a16:rowId xmlns:a16="http://schemas.microsoft.com/office/drawing/2014/main" val="3039577987"/>
-                  </a:ext>
-                </a:extLst>
-              </a:tr>
-              <a:tr h="397111">
-                <a:tc>
-                  <a:txBody>
-                    <a:bodyPr/>
-                    <a:lstStyle/>
-                    <a:p>
-                      <a:pPr algn="l" fontAlgn="ctr"/>
-                      <a:r>
-                        <a:rPr lang="en-US" sz="900" u="none" strike="noStrike" dirty="0" err="1">
-                          <a:effectLst/>
-                        </a:rPr>
-                        <a:t>Alchornea</a:t>
-                      </a:r>
-                      <a:r>
-                        <a:rPr lang="en-US" sz="900" u="none" strike="noStrike" dirty="0">
-                          <a:effectLst/>
-                        </a:rPr>
-                        <a:t> O18</a:t>
-                      </a:r>
-                      <a:endParaRPr lang="en-US" sz="900" b="1" i="1" u="none" strike="noStrike" dirty="0">
-                        <a:solidFill>
-                          <a:srgbClr val="000000"/>
-                        </a:solidFill>
-                        <a:effectLst/>
-                        <a:latin typeface="Calibri" panose="020F0502020204030204" pitchFamily="34" charset="0"/>
-                      </a:endParaRPr>
-                    </a:p>
-                  </a:txBody>
-                  <a:tcPr marL="7770" marR="7770" marT="7770" marB="0" anchor="ctr"/>
-                </a:tc>
-                <a:tc>
-                  <a:txBody>
-                    <a:bodyPr/>
-                    <a:lstStyle/>
-                    <a:p>
-                      <a:pPr algn="l" fontAlgn="ctr"/>
-                      <a:r>
-                        <a:rPr lang="en-US" sz="900" u="none" strike="noStrike">
-                          <a:effectLst/>
-                        </a:rPr>
-                        <a:t>29.713***</a:t>
-                      </a:r>
-                      <a:endParaRPr lang="en-US" sz="900" b="0" i="0" u="none" strike="noStrike">
-                        <a:solidFill>
-                          <a:srgbClr val="000000"/>
-                        </a:solidFill>
-                        <a:effectLst/>
-                        <a:latin typeface="Calibri" panose="020F0502020204030204" pitchFamily="34" charset="0"/>
-                      </a:endParaRPr>
-                    </a:p>
-                  </a:txBody>
-                  <a:tcPr marL="7770" marR="7770" marT="7770" marB="0" anchor="ctr"/>
-                </a:tc>
-                <a:tc>
-                  <a:txBody>
-                    <a:bodyPr/>
-                    <a:lstStyle/>
-                    <a:p>
-                      <a:pPr algn="l" fontAlgn="ctr"/>
-                      <a:r>
-                        <a:rPr lang="en-US" sz="900" u="none" strike="noStrike">
-                          <a:effectLst/>
-                        </a:rPr>
-                        <a:t>-0.483</a:t>
-                      </a:r>
-                      <a:endParaRPr lang="en-US" sz="900" b="0" i="0" u="none" strike="noStrike">
-                        <a:solidFill>
-                          <a:srgbClr val="000000"/>
-                        </a:solidFill>
-                        <a:effectLst/>
-                        <a:latin typeface="Calibri" panose="020F0502020204030204" pitchFamily="34" charset="0"/>
-                      </a:endParaRPr>
-                    </a:p>
-                  </a:txBody>
-                  <a:tcPr marL="7770" marR="7770" marT="7770" marB="0" anchor="ctr"/>
-                </a:tc>
-                <a:tc>
-                  <a:txBody>
-                    <a:bodyPr/>
-                    <a:lstStyle/>
-                    <a:p>
-                      <a:pPr algn="l" fontAlgn="ctr"/>
-                      <a:r>
-                        <a:rPr lang="en-US" sz="900" u="none" strike="noStrike">
-                          <a:effectLst/>
-                        </a:rPr>
-                        <a:t>0.07</a:t>
-                      </a:r>
-                      <a:endParaRPr lang="en-US" sz="900" b="0" i="0" u="none" strike="noStrike">
-                        <a:solidFill>
-                          <a:srgbClr val="000000"/>
-                        </a:solidFill>
-                        <a:effectLst/>
-                        <a:latin typeface="Calibri" panose="020F0502020204030204" pitchFamily="34" charset="0"/>
-                      </a:endParaRPr>
-                    </a:p>
-                  </a:txBody>
-                  <a:tcPr marL="7770" marR="7770" marT="7770" marB="0" anchor="ctr"/>
-                </a:tc>
-                <a:tc>
-                  <a:txBody>
-                    <a:bodyPr/>
-                    <a:lstStyle/>
-                    <a:p>
-                      <a:pPr algn="l" fontAlgn="ctr"/>
-                      <a:r>
-                        <a:rPr lang="en-US" sz="900" u="none" strike="noStrike">
-                          <a:effectLst/>
-                        </a:rPr>
-                        <a:t>-0.749</a:t>
-                      </a:r>
-                      <a:endParaRPr lang="en-US" sz="900" b="0" i="0" u="none" strike="noStrike">
-                        <a:solidFill>
-                          <a:srgbClr val="000000"/>
-                        </a:solidFill>
-                        <a:effectLst/>
-                        <a:latin typeface="Calibri" panose="020F0502020204030204" pitchFamily="34" charset="0"/>
-                      </a:endParaRPr>
-                    </a:p>
-                  </a:txBody>
-                  <a:tcPr marL="7770" marR="7770" marT="7770" marB="0" anchor="ctr"/>
-                </a:tc>
-                <a:tc>
-                  <a:txBody>
-                    <a:bodyPr/>
-                    <a:lstStyle/>
-                    <a:p>
-                      <a:pPr algn="l" fontAlgn="ctr"/>
-                      <a:r>
-                        <a:rPr lang="en-US" sz="900" u="none" strike="noStrike">
-                          <a:effectLst/>
-                        </a:rPr>
-                        <a:t>-0.017</a:t>
-                      </a:r>
-                      <a:endParaRPr lang="en-US" sz="900" b="0" i="0" u="none" strike="noStrike">
-                        <a:solidFill>
-                          <a:srgbClr val="000000"/>
-                        </a:solidFill>
-                        <a:effectLst/>
-                        <a:latin typeface="Calibri" panose="020F0502020204030204" pitchFamily="34" charset="0"/>
-                      </a:endParaRPr>
-                    </a:p>
-                  </a:txBody>
-                  <a:tcPr marL="7770" marR="7770" marT="7770" marB="0" anchor="ctr"/>
-                </a:tc>
-                <a:tc>
-                  <a:txBody>
-                    <a:bodyPr/>
-                    <a:lstStyle/>
-                    <a:p>
-                      <a:pPr algn="l" fontAlgn="ctr"/>
-                      <a:r>
-                        <a:rPr lang="en-US" sz="900" u="none" strike="noStrike">
-                          <a:effectLst/>
-                        </a:rPr>
-                        <a:t>-0.671</a:t>
-                      </a:r>
-                      <a:endParaRPr lang="en-US" sz="900" b="0" i="0" u="none" strike="noStrike">
-                        <a:solidFill>
-                          <a:srgbClr val="000000"/>
-                        </a:solidFill>
-                        <a:effectLst/>
-                        <a:latin typeface="Calibri" panose="020F0502020204030204" pitchFamily="34" charset="0"/>
-                      </a:endParaRPr>
-                    </a:p>
-                  </a:txBody>
-                  <a:tcPr marL="7770" marR="7770" marT="7770" marB="0" anchor="ctr"/>
-                </a:tc>
-                <a:tc>
-                  <a:txBody>
-                    <a:bodyPr/>
-                    <a:lstStyle/>
-                    <a:p>
-                      <a:pPr algn="l" fontAlgn="ctr"/>
-                      <a:r>
-                        <a:rPr lang="en-US" sz="900" u="none" strike="noStrike">
-                          <a:effectLst/>
-                        </a:rPr>
-                        <a:t>-0.273</a:t>
-                      </a:r>
-                      <a:endParaRPr lang="en-US" sz="900" b="0" i="0" u="none" strike="noStrike">
-                        <a:solidFill>
-                          <a:srgbClr val="000000"/>
-                        </a:solidFill>
-                        <a:effectLst/>
-                        <a:latin typeface="Calibri" panose="020F0502020204030204" pitchFamily="34" charset="0"/>
-                      </a:endParaRPr>
-                    </a:p>
-                  </a:txBody>
-                  <a:tcPr marL="7770" marR="7770" marT="7770" marB="0" anchor="ctr"/>
-                </a:tc>
-                <a:tc>
-                  <a:txBody>
-                    <a:bodyPr/>
-                    <a:lstStyle/>
-                    <a:p>
-                      <a:pPr algn="l" fontAlgn="ctr"/>
-                      <a:r>
-                        <a:rPr lang="en-US" sz="900" u="none" strike="noStrike">
-                          <a:effectLst/>
-                        </a:rPr>
-                        <a:t>-1.043</a:t>
-                      </a:r>
-                      <a:endParaRPr lang="en-US" sz="900" b="0" i="0" u="none" strike="noStrike">
-                        <a:solidFill>
-                          <a:srgbClr val="000000"/>
-                        </a:solidFill>
-                        <a:effectLst/>
-                        <a:latin typeface="Calibri" panose="020F0502020204030204" pitchFamily="34" charset="0"/>
-                      </a:endParaRPr>
-                    </a:p>
-                  </a:txBody>
-                  <a:tcPr marL="7770" marR="7770" marT="7770" marB="0" anchor="ctr"/>
-                </a:tc>
-                <a:tc>
-                  <a:txBody>
-                    <a:bodyPr/>
-                    <a:lstStyle/>
-                    <a:p>
-                      <a:pPr algn="l" fontAlgn="ctr"/>
-                      <a:r>
-                        <a:rPr lang="en-US" sz="900" u="none" strike="noStrike">
-                          <a:effectLst/>
-                        </a:rPr>
-                        <a:t>0.694</a:t>
-                      </a:r>
-                      <a:endParaRPr lang="en-US" sz="900" b="0" i="0" u="none" strike="noStrike">
-                        <a:solidFill>
-                          <a:srgbClr val="000000"/>
-                        </a:solidFill>
-                        <a:effectLst/>
-                        <a:latin typeface="Calibri" panose="020F0502020204030204" pitchFamily="34" charset="0"/>
-                      </a:endParaRPr>
-                    </a:p>
-                  </a:txBody>
-                  <a:tcPr marL="7770" marR="7770" marT="7770" marB="0" anchor="ctr"/>
-                </a:tc>
-                <a:tc>
-                  <a:txBody>
-                    <a:bodyPr/>
-                    <a:lstStyle/>
-                    <a:p>
-                      <a:pPr algn="l" fontAlgn="ctr"/>
-                      <a:r>
-                        <a:rPr lang="en-US" sz="900" u="none" strike="noStrike">
-                          <a:effectLst/>
-                        </a:rPr>
-                        <a:t>0</a:t>
-                      </a:r>
-                      <a:endParaRPr lang="en-US" sz="900" b="0" i="0" u="none" strike="noStrike">
-                        <a:solidFill>
-                          <a:srgbClr val="000000"/>
-                        </a:solidFill>
-                        <a:effectLst/>
-                        <a:latin typeface="Calibri" panose="020F0502020204030204" pitchFamily="34" charset="0"/>
-                      </a:endParaRPr>
-                    </a:p>
-                  </a:txBody>
-                  <a:tcPr marL="7770" marR="7770" marT="7770" marB="0" anchor="ctr"/>
-                </a:tc>
-                <a:tc>
-                  <a:txBody>
-                    <a:bodyPr/>
-                    <a:lstStyle/>
-                    <a:p>
-                      <a:pPr algn="l" fontAlgn="ctr"/>
-                      <a:r>
-                        <a:rPr lang="en-US" sz="900" u="none" strike="noStrike">
-                          <a:effectLst/>
-                        </a:rPr>
-                        <a:t>1.147</a:t>
-                      </a:r>
-                      <a:endParaRPr lang="en-US" sz="900" b="0" i="0" u="none" strike="noStrike">
-                        <a:solidFill>
-                          <a:srgbClr val="000000"/>
-                        </a:solidFill>
-                        <a:effectLst/>
-                        <a:latin typeface="Calibri" panose="020F0502020204030204" pitchFamily="34" charset="0"/>
-                      </a:endParaRPr>
-                    </a:p>
-                  </a:txBody>
-                  <a:tcPr marL="7770" marR="7770" marT="7770" marB="0" anchor="ctr"/>
-                </a:tc>
-                <a:tc>
-                  <a:txBody>
-                    <a:bodyPr/>
-                    <a:lstStyle/>
-                    <a:p>
-                      <a:pPr algn="l" fontAlgn="ctr"/>
-                      <a:r>
-                        <a:rPr lang="en-US" sz="900" u="none" strike="noStrike">
-                          <a:effectLst/>
-                        </a:rPr>
-                        <a:t>43</a:t>
-                      </a:r>
-                      <a:endParaRPr lang="en-US" sz="900" b="0" i="0" u="none" strike="noStrike">
-                        <a:solidFill>
-                          <a:srgbClr val="000000"/>
-                        </a:solidFill>
-                        <a:effectLst/>
-                        <a:latin typeface="Calibri" panose="020F0502020204030204" pitchFamily="34" charset="0"/>
-                      </a:endParaRPr>
-                    </a:p>
-                  </a:txBody>
-                  <a:tcPr marL="7770" marR="7770" marT="7770" marB="0" anchor="ctr"/>
-                </a:tc>
-                <a:tc>
-                  <a:txBody>
-                    <a:bodyPr/>
-                    <a:lstStyle/>
-                    <a:p>
-                      <a:pPr algn="l" fontAlgn="ctr"/>
-                      <a:r>
-                        <a:rPr lang="en-US" sz="900" u="none" strike="noStrike">
-                          <a:effectLst/>
-                        </a:rPr>
-                        <a:t>152.2</a:t>
-                      </a:r>
-                      <a:endParaRPr lang="en-US" sz="900" b="0" i="0" u="none" strike="noStrike">
-                        <a:solidFill>
-                          <a:srgbClr val="000000"/>
-                        </a:solidFill>
-                        <a:effectLst/>
-                        <a:latin typeface="Calibri" panose="020F0502020204030204" pitchFamily="34" charset="0"/>
-                      </a:endParaRPr>
-                    </a:p>
-                  </a:txBody>
-                  <a:tcPr marL="7770" marR="7770" marT="7770" marB="0" anchor="ctr"/>
-                </a:tc>
-                <a:extLst>
-                  <a:ext uri="{0D108BD9-81ED-4DB2-BD59-A6C34878D82A}">
-                    <a16:rowId xmlns:a16="http://schemas.microsoft.com/office/drawing/2014/main" val="1019645502"/>
-                  </a:ext>
-                </a:extLst>
-              </a:tr>
-              <a:tr h="397111">
-                <a:tc>
-                  <a:txBody>
-                    <a:bodyPr/>
-                    <a:lstStyle/>
-                    <a:p>
-                      <a:pPr algn="l" fontAlgn="ctr"/>
-                      <a:r>
-                        <a:rPr lang="en-US" sz="900" u="none" strike="noStrike" dirty="0" err="1">
-                          <a:effectLst/>
-                        </a:rPr>
-                        <a:t>Myrcia</a:t>
-                      </a:r>
-                      <a:r>
-                        <a:rPr lang="en-US" sz="900" u="none" strike="noStrike" dirty="0">
-                          <a:effectLst/>
-                        </a:rPr>
-                        <a:t> </a:t>
-                      </a:r>
-                      <a:r>
-                        <a:rPr lang="en-US" sz="900" u="none" strike="noStrike" dirty="0" err="1">
-                          <a:effectLst/>
-                        </a:rPr>
-                        <a:t>iWUE</a:t>
-                      </a:r>
-                      <a:endParaRPr lang="en-US" sz="900" b="1" i="1" u="none" strike="noStrike" dirty="0">
-                        <a:solidFill>
-                          <a:srgbClr val="000000"/>
-                        </a:solidFill>
-                        <a:effectLst/>
-                        <a:latin typeface="Calibri" panose="020F0502020204030204" pitchFamily="34" charset="0"/>
-                      </a:endParaRPr>
-                    </a:p>
-                  </a:txBody>
-                  <a:tcPr marL="7770" marR="7770" marT="7770" marB="0" anchor="ctr"/>
-                </a:tc>
-                <a:tc>
-                  <a:txBody>
-                    <a:bodyPr/>
-                    <a:lstStyle/>
-                    <a:p>
-                      <a:pPr algn="l" fontAlgn="ctr"/>
-                      <a:r>
-                        <a:rPr lang="en-US" sz="900" u="none" strike="noStrike">
-                          <a:effectLst/>
-                        </a:rPr>
-                        <a:t>89.534***</a:t>
-                      </a:r>
-                      <a:endParaRPr lang="en-US" sz="900" b="0" i="0" u="none" strike="noStrike">
-                        <a:solidFill>
-                          <a:srgbClr val="000000"/>
-                        </a:solidFill>
-                        <a:effectLst/>
-                        <a:latin typeface="Calibri" panose="020F0502020204030204" pitchFamily="34" charset="0"/>
-                      </a:endParaRPr>
-                    </a:p>
-                  </a:txBody>
-                  <a:tcPr marL="7770" marR="7770" marT="7770" marB="0" anchor="ctr"/>
-                </a:tc>
-                <a:tc>
-                  <a:txBody>
-                    <a:bodyPr/>
-                    <a:lstStyle/>
-                    <a:p>
-                      <a:pPr algn="l" fontAlgn="ctr"/>
-                      <a:r>
-                        <a:rPr lang="en-US" sz="900" u="none" strike="noStrike">
-                          <a:effectLst/>
-                        </a:rPr>
-                        <a:t>-3.355</a:t>
-                      </a:r>
-                      <a:endParaRPr lang="en-US" sz="900" b="0" i="0" u="none" strike="noStrike">
-                        <a:solidFill>
-                          <a:srgbClr val="000000"/>
-                        </a:solidFill>
-                        <a:effectLst/>
-                        <a:latin typeface="Calibri" panose="020F0502020204030204" pitchFamily="34" charset="0"/>
-                      </a:endParaRPr>
-                    </a:p>
-                  </a:txBody>
-                  <a:tcPr marL="7770" marR="7770" marT="7770" marB="0" anchor="ctr"/>
-                </a:tc>
-                <a:tc>
-                  <a:txBody>
-                    <a:bodyPr/>
-                    <a:lstStyle/>
-                    <a:p>
-                      <a:pPr algn="l" fontAlgn="ctr"/>
-                      <a:r>
-                        <a:rPr lang="en-US" sz="900" u="none" strike="noStrike">
-                          <a:effectLst/>
-                        </a:rPr>
-                        <a:t>7.332</a:t>
-                      </a:r>
-                      <a:endParaRPr lang="en-US" sz="900" b="0" i="0" u="none" strike="noStrike">
-                        <a:solidFill>
-                          <a:srgbClr val="000000"/>
-                        </a:solidFill>
-                        <a:effectLst/>
-                        <a:latin typeface="Calibri" panose="020F0502020204030204" pitchFamily="34" charset="0"/>
-                      </a:endParaRPr>
-                    </a:p>
-                  </a:txBody>
-                  <a:tcPr marL="7770" marR="7770" marT="7770" marB="0" anchor="ctr"/>
-                </a:tc>
-                <a:tc>
-                  <a:txBody>
-                    <a:bodyPr/>
-                    <a:lstStyle/>
-                    <a:p>
-                      <a:pPr algn="l" fontAlgn="ctr"/>
-                      <a:r>
-                        <a:rPr lang="en-US" sz="900" u="none" strike="noStrike" dirty="0">
-                          <a:effectLst/>
-                        </a:rPr>
-                        <a:t>-5.305</a:t>
-                      </a:r>
-                      <a:endParaRPr lang="en-US" sz="900" b="0" i="0" u="none" strike="noStrike" dirty="0">
-                        <a:solidFill>
-                          <a:srgbClr val="000000"/>
-                        </a:solidFill>
-                        <a:effectLst/>
-                        <a:latin typeface="Calibri" panose="020F0502020204030204" pitchFamily="34" charset="0"/>
-                      </a:endParaRPr>
-                    </a:p>
-                  </a:txBody>
-                  <a:tcPr marL="7770" marR="7770" marT="7770" marB="0" anchor="ctr"/>
-                </a:tc>
-                <a:tc>
-                  <a:txBody>
-                    <a:bodyPr/>
-                    <a:lstStyle/>
-                    <a:p>
-                      <a:pPr algn="l" fontAlgn="ctr"/>
-                      <a:r>
-                        <a:rPr lang="en-US" sz="900" u="none" strike="noStrike">
-                          <a:effectLst/>
-                        </a:rPr>
-                        <a:t>5.987</a:t>
-                      </a:r>
-                      <a:endParaRPr lang="en-US" sz="900" b="0" i="0" u="none" strike="noStrike">
-                        <a:solidFill>
-                          <a:srgbClr val="000000"/>
-                        </a:solidFill>
-                        <a:effectLst/>
-                        <a:latin typeface="Calibri" panose="020F0502020204030204" pitchFamily="34" charset="0"/>
-                      </a:endParaRPr>
-                    </a:p>
-                  </a:txBody>
-                  <a:tcPr marL="7770" marR="7770" marT="7770" marB="0" anchor="ctr"/>
-                </a:tc>
-                <a:tc>
-                  <a:txBody>
-                    <a:bodyPr/>
-                    <a:lstStyle/>
-                    <a:p>
-                      <a:pPr algn="l" fontAlgn="ctr"/>
-                      <a:r>
-                        <a:rPr lang="en-US" sz="900" u="none" strike="noStrike">
-                          <a:effectLst/>
-                        </a:rPr>
-                        <a:t>-5.158</a:t>
-                      </a:r>
-                      <a:endParaRPr lang="en-US" sz="900" b="0" i="0" u="none" strike="noStrike">
-                        <a:solidFill>
-                          <a:srgbClr val="000000"/>
-                        </a:solidFill>
-                        <a:effectLst/>
-                        <a:latin typeface="Calibri" panose="020F0502020204030204" pitchFamily="34" charset="0"/>
-                      </a:endParaRPr>
-                    </a:p>
-                  </a:txBody>
-                  <a:tcPr marL="7770" marR="7770" marT="7770" marB="0" anchor="ctr"/>
-                </a:tc>
-                <a:tc>
-                  <a:txBody>
-                    <a:bodyPr/>
-                    <a:lstStyle/>
-                    <a:p>
-                      <a:pPr algn="l" fontAlgn="ctr"/>
-                      <a:r>
-                        <a:rPr lang="en-US" sz="900" u="none" strike="noStrike">
-                          <a:effectLst/>
-                        </a:rPr>
-                        <a:t>-6.368</a:t>
-                      </a:r>
-                      <a:endParaRPr lang="en-US" sz="900" b="0" i="0" u="none" strike="noStrike">
-                        <a:solidFill>
-                          <a:srgbClr val="000000"/>
-                        </a:solidFill>
-                        <a:effectLst/>
-                        <a:latin typeface="Calibri" panose="020F0502020204030204" pitchFamily="34" charset="0"/>
-                      </a:endParaRPr>
-                    </a:p>
-                  </a:txBody>
-                  <a:tcPr marL="7770" marR="7770" marT="7770" marB="0" anchor="ctr"/>
-                </a:tc>
-                <a:tc>
-                  <a:txBody>
-                    <a:bodyPr/>
-                    <a:lstStyle/>
-                    <a:p>
-                      <a:pPr algn="l" fontAlgn="ctr"/>
-                      <a:r>
-                        <a:rPr lang="en-US" sz="900" u="none" strike="noStrike">
-                          <a:effectLst/>
-                        </a:rPr>
-                        <a:t>-7.515</a:t>
-                      </a:r>
-                      <a:endParaRPr lang="en-US" sz="900" b="0" i="0" u="none" strike="noStrike">
-                        <a:solidFill>
-                          <a:srgbClr val="000000"/>
-                        </a:solidFill>
-                        <a:effectLst/>
-                        <a:latin typeface="Calibri" panose="020F0502020204030204" pitchFamily="34" charset="0"/>
-                      </a:endParaRPr>
-                    </a:p>
-                  </a:txBody>
-                  <a:tcPr marL="7770" marR="7770" marT="7770" marB="0" anchor="ctr"/>
-                </a:tc>
-                <a:tc>
-                  <a:txBody>
-                    <a:bodyPr/>
-                    <a:lstStyle/>
-                    <a:p>
-                      <a:pPr algn="l" fontAlgn="ctr"/>
-                      <a:r>
-                        <a:rPr lang="en-US" sz="900" u="none" strike="noStrike">
-                          <a:effectLst/>
-                        </a:rPr>
-                        <a:t>0</a:t>
-                      </a:r>
-                      <a:endParaRPr lang="en-US" sz="900" b="0" i="0" u="none" strike="noStrike">
-                        <a:solidFill>
-                          <a:srgbClr val="000000"/>
-                        </a:solidFill>
-                        <a:effectLst/>
-                        <a:latin typeface="Calibri" panose="020F0502020204030204" pitchFamily="34" charset="0"/>
-                      </a:endParaRPr>
-                    </a:p>
-                  </a:txBody>
-                  <a:tcPr marL="7770" marR="7770" marT="7770" marB="0" anchor="ctr"/>
-                </a:tc>
-                <a:tc>
-                  <a:txBody>
-                    <a:bodyPr/>
-                    <a:lstStyle/>
-                    <a:p>
-                      <a:pPr algn="l" fontAlgn="ctr"/>
-                      <a:r>
-                        <a:rPr lang="en-US" sz="900" u="none" strike="noStrike">
-                          <a:effectLst/>
-                        </a:rPr>
-                        <a:t>0</a:t>
-                      </a:r>
-                      <a:endParaRPr lang="en-US" sz="900" b="0" i="0" u="none" strike="noStrike">
-                        <a:solidFill>
-                          <a:srgbClr val="000000"/>
-                        </a:solidFill>
-                        <a:effectLst/>
-                        <a:latin typeface="Calibri" panose="020F0502020204030204" pitchFamily="34" charset="0"/>
-                      </a:endParaRPr>
-                    </a:p>
-                  </a:txBody>
-                  <a:tcPr marL="7770" marR="7770" marT="7770" marB="0" anchor="ctr"/>
-                </a:tc>
-                <a:tc>
-                  <a:txBody>
-                    <a:bodyPr/>
-                    <a:lstStyle/>
-                    <a:p>
-                      <a:pPr algn="l" fontAlgn="ctr"/>
-                      <a:r>
-                        <a:rPr lang="en-US" sz="900" u="none" strike="noStrike">
-                          <a:effectLst/>
-                        </a:rPr>
-                        <a:t>12.994</a:t>
-                      </a:r>
-                      <a:endParaRPr lang="en-US" sz="900" b="0" i="0" u="none" strike="noStrike">
-                        <a:solidFill>
-                          <a:srgbClr val="000000"/>
-                        </a:solidFill>
-                        <a:effectLst/>
-                        <a:latin typeface="Calibri" panose="020F0502020204030204" pitchFamily="34" charset="0"/>
-                      </a:endParaRPr>
-                    </a:p>
-                  </a:txBody>
-                  <a:tcPr marL="7770" marR="7770" marT="7770" marB="0" anchor="ctr"/>
-                </a:tc>
-                <a:tc>
-                  <a:txBody>
-                    <a:bodyPr/>
-                    <a:lstStyle/>
-                    <a:p>
-                      <a:pPr algn="l" fontAlgn="ctr"/>
-                      <a:r>
-                        <a:rPr lang="en-US" sz="900" u="none" strike="noStrike">
-                          <a:effectLst/>
-                        </a:rPr>
-                        <a:t>49</a:t>
-                      </a:r>
-                      <a:endParaRPr lang="en-US" sz="900" b="0" i="0" u="none" strike="noStrike">
-                        <a:solidFill>
-                          <a:srgbClr val="000000"/>
-                        </a:solidFill>
-                        <a:effectLst/>
-                        <a:latin typeface="Calibri" panose="020F0502020204030204" pitchFamily="34" charset="0"/>
-                      </a:endParaRPr>
-                    </a:p>
-                  </a:txBody>
-                  <a:tcPr marL="7770" marR="7770" marT="7770" marB="0" anchor="ctr"/>
-                </a:tc>
-                <a:tc>
-                  <a:txBody>
-                    <a:bodyPr/>
-                    <a:lstStyle/>
-                    <a:p>
-                      <a:pPr algn="l" fontAlgn="ctr"/>
-                      <a:r>
-                        <a:rPr lang="en-US" sz="900" u="none" strike="noStrike">
-                          <a:effectLst/>
-                        </a:rPr>
-                        <a:t>382.5</a:t>
-                      </a:r>
-                      <a:endParaRPr lang="en-US" sz="900" b="0" i="0" u="none" strike="noStrike">
-                        <a:solidFill>
-                          <a:srgbClr val="000000"/>
-                        </a:solidFill>
-                        <a:effectLst/>
-                        <a:latin typeface="Calibri" panose="020F0502020204030204" pitchFamily="34" charset="0"/>
-                      </a:endParaRPr>
-                    </a:p>
-                  </a:txBody>
-                  <a:tcPr marL="7770" marR="7770" marT="7770" marB="0" anchor="ctr"/>
-                </a:tc>
-                <a:extLst>
-                  <a:ext uri="{0D108BD9-81ED-4DB2-BD59-A6C34878D82A}">
-                    <a16:rowId xmlns:a16="http://schemas.microsoft.com/office/drawing/2014/main" val="972164676"/>
-                  </a:ext>
-                </a:extLst>
-              </a:tr>
-              <a:tr h="198555">
-                <a:tc>
-                  <a:txBody>
-                    <a:bodyPr/>
-                    <a:lstStyle/>
-                    <a:p>
-                      <a:pPr algn="l" fontAlgn="ctr"/>
-                      <a:r>
-                        <a:rPr lang="en-US" sz="900" u="none" strike="noStrike" dirty="0" err="1">
-                          <a:effectLst/>
-                        </a:rPr>
-                        <a:t>Myrcia</a:t>
-                      </a:r>
-                      <a:r>
-                        <a:rPr lang="en-US" sz="900" u="none" strike="noStrike" dirty="0">
-                          <a:effectLst/>
-                        </a:rPr>
-                        <a:t> O18</a:t>
-                      </a:r>
-                      <a:endParaRPr lang="en-US" sz="900" b="1" i="1" u="none" strike="noStrike" dirty="0">
-                        <a:solidFill>
-                          <a:srgbClr val="000000"/>
-                        </a:solidFill>
-                        <a:effectLst/>
-                        <a:latin typeface="Calibri" panose="020F0502020204030204" pitchFamily="34" charset="0"/>
-                      </a:endParaRPr>
-                    </a:p>
-                  </a:txBody>
-                  <a:tcPr marL="7770" marR="7770" marT="7770" marB="0" anchor="ctr"/>
-                </a:tc>
-                <a:tc>
-                  <a:txBody>
-                    <a:bodyPr/>
-                    <a:lstStyle/>
-                    <a:p>
-                      <a:pPr algn="l" fontAlgn="ctr"/>
-                      <a:r>
-                        <a:rPr lang="en-US" sz="900" u="none" strike="noStrike">
-                          <a:effectLst/>
-                        </a:rPr>
-                        <a:t>30.627***</a:t>
-                      </a:r>
-                      <a:endParaRPr lang="en-US" sz="900" b="0" i="0" u="none" strike="noStrike">
-                        <a:solidFill>
-                          <a:srgbClr val="000000"/>
-                        </a:solidFill>
-                        <a:effectLst/>
-                        <a:latin typeface="Calibri" panose="020F0502020204030204" pitchFamily="34" charset="0"/>
-                      </a:endParaRPr>
-                    </a:p>
-                  </a:txBody>
-                  <a:tcPr marL="7770" marR="7770" marT="7770" marB="0" anchor="ctr"/>
-                </a:tc>
-                <a:tc>
-                  <a:txBody>
-                    <a:bodyPr/>
-                    <a:lstStyle/>
-                    <a:p>
-                      <a:pPr algn="l" fontAlgn="ctr"/>
-                      <a:r>
-                        <a:rPr lang="en-US" sz="900" u="none" strike="noStrike">
-                          <a:effectLst/>
-                        </a:rPr>
-                        <a:t>-0.27</a:t>
-                      </a:r>
-                      <a:endParaRPr lang="en-US" sz="900" b="0" i="0" u="none" strike="noStrike">
-                        <a:solidFill>
-                          <a:srgbClr val="000000"/>
-                        </a:solidFill>
-                        <a:effectLst/>
-                        <a:latin typeface="Calibri" panose="020F0502020204030204" pitchFamily="34" charset="0"/>
-                      </a:endParaRPr>
-                    </a:p>
-                  </a:txBody>
-                  <a:tcPr marL="7770" marR="7770" marT="7770" marB="0" anchor="ctr"/>
-                </a:tc>
-                <a:tc>
-                  <a:txBody>
-                    <a:bodyPr/>
-                    <a:lstStyle/>
-                    <a:p>
-                      <a:pPr algn="l" fontAlgn="ctr"/>
-                      <a:r>
-                        <a:rPr lang="en-US" sz="900" u="none" strike="noStrike" dirty="0">
-                          <a:effectLst/>
-                        </a:rPr>
-                        <a:t>1.122*</a:t>
-                      </a:r>
-                      <a:endParaRPr lang="en-US" sz="900" b="0" i="0" u="none" strike="noStrike" dirty="0">
-                        <a:solidFill>
-                          <a:srgbClr val="FF0000"/>
-                        </a:solidFill>
-                        <a:effectLst/>
-                        <a:latin typeface="Calibri" panose="020F0502020204030204" pitchFamily="34" charset="0"/>
-                      </a:endParaRPr>
-                    </a:p>
-                  </a:txBody>
-                  <a:tcPr marL="7770" marR="7770" marT="7770" marB="0" anchor="ctr"/>
-                </a:tc>
-                <a:tc>
-                  <a:txBody>
-                    <a:bodyPr/>
-                    <a:lstStyle/>
-                    <a:p>
-                      <a:pPr algn="l" fontAlgn="ctr"/>
-                      <a:r>
-                        <a:rPr lang="en-US" sz="900" u="none" strike="noStrike">
-                          <a:effectLst/>
-                        </a:rPr>
-                        <a:t>-0.428</a:t>
-                      </a:r>
-                      <a:endParaRPr lang="en-US" sz="900" b="0" i="0" u="none" strike="noStrike">
-                        <a:solidFill>
-                          <a:srgbClr val="000000"/>
-                        </a:solidFill>
-                        <a:effectLst/>
-                        <a:latin typeface="Calibri" panose="020F0502020204030204" pitchFamily="34" charset="0"/>
-                      </a:endParaRPr>
-                    </a:p>
-                  </a:txBody>
-                  <a:tcPr marL="7770" marR="7770" marT="7770" marB="0" anchor="ctr"/>
-                </a:tc>
-                <a:tc>
-                  <a:txBody>
-                    <a:bodyPr/>
-                    <a:lstStyle/>
-                    <a:p>
-                      <a:pPr algn="l" fontAlgn="ctr"/>
-                      <a:r>
-                        <a:rPr lang="en-US" sz="900" u="none" strike="noStrike">
-                          <a:effectLst/>
-                        </a:rPr>
-                        <a:t>-0.316</a:t>
-                      </a:r>
-                      <a:endParaRPr lang="en-US" sz="900" b="0" i="0" u="none" strike="noStrike">
-                        <a:solidFill>
-                          <a:srgbClr val="000000"/>
-                        </a:solidFill>
-                        <a:effectLst/>
-                        <a:latin typeface="Calibri" panose="020F0502020204030204" pitchFamily="34" charset="0"/>
-                      </a:endParaRPr>
-                    </a:p>
-                  </a:txBody>
-                  <a:tcPr marL="7770" marR="7770" marT="7770" marB="0" anchor="ctr"/>
-                </a:tc>
-                <a:tc>
-                  <a:txBody>
-                    <a:bodyPr/>
-                    <a:lstStyle/>
-                    <a:p>
-                      <a:pPr algn="l" fontAlgn="ctr"/>
-                      <a:r>
-                        <a:rPr lang="en-US" sz="900" u="none" strike="noStrike">
-                          <a:effectLst/>
-                        </a:rPr>
-                        <a:t>-0.416</a:t>
-                      </a:r>
-                      <a:endParaRPr lang="en-US" sz="900" b="0" i="0" u="none" strike="noStrike">
-                        <a:solidFill>
-                          <a:srgbClr val="000000"/>
-                        </a:solidFill>
-                        <a:effectLst/>
-                        <a:latin typeface="Calibri" panose="020F0502020204030204" pitchFamily="34" charset="0"/>
-                      </a:endParaRPr>
-                    </a:p>
-                  </a:txBody>
-                  <a:tcPr marL="7770" marR="7770" marT="7770" marB="0" anchor="ctr"/>
-                </a:tc>
-                <a:tc>
-                  <a:txBody>
-                    <a:bodyPr/>
-                    <a:lstStyle/>
-                    <a:p>
-                      <a:pPr algn="l" fontAlgn="ctr"/>
-                      <a:r>
-                        <a:rPr lang="en-US" sz="900" u="none" strike="noStrike">
-                          <a:effectLst/>
-                        </a:rPr>
-                        <a:t>-0.46</a:t>
-                      </a:r>
-                      <a:endParaRPr lang="en-US" sz="900" b="0" i="0" u="none" strike="noStrike">
-                        <a:solidFill>
-                          <a:srgbClr val="000000"/>
-                        </a:solidFill>
-                        <a:effectLst/>
-                        <a:latin typeface="Calibri" panose="020F0502020204030204" pitchFamily="34" charset="0"/>
-                      </a:endParaRPr>
-                    </a:p>
-                  </a:txBody>
-                  <a:tcPr marL="7770" marR="7770" marT="7770" marB="0" anchor="ctr"/>
-                </a:tc>
-                <a:tc>
-                  <a:txBody>
-                    <a:bodyPr/>
-                    <a:lstStyle/>
-                    <a:p>
-                      <a:pPr algn="l" fontAlgn="ctr"/>
-                      <a:r>
-                        <a:rPr lang="en-US" sz="900" u="none" strike="noStrike">
-                          <a:effectLst/>
-                        </a:rPr>
-                        <a:t>-0.611</a:t>
-                      </a:r>
-                      <a:endParaRPr lang="en-US" sz="900" b="0" i="0" u="none" strike="noStrike">
-                        <a:solidFill>
-                          <a:srgbClr val="000000"/>
-                        </a:solidFill>
-                        <a:effectLst/>
-                        <a:latin typeface="Calibri" panose="020F0502020204030204" pitchFamily="34" charset="0"/>
-                      </a:endParaRPr>
-                    </a:p>
-                  </a:txBody>
-                  <a:tcPr marL="7770" marR="7770" marT="7770" marB="0" anchor="ctr"/>
-                </a:tc>
-                <a:tc>
-                  <a:txBody>
-                    <a:bodyPr/>
-                    <a:lstStyle/>
-                    <a:p>
-                      <a:pPr algn="l" fontAlgn="ctr"/>
-                      <a:r>
-                        <a:rPr lang="en-US" sz="900" u="none" strike="noStrike">
-                          <a:effectLst/>
-                        </a:rPr>
-                        <a:t>0</a:t>
-                      </a:r>
-                      <a:endParaRPr lang="en-US" sz="900" b="0" i="0" u="none" strike="noStrike">
-                        <a:solidFill>
-                          <a:srgbClr val="000000"/>
-                        </a:solidFill>
-                        <a:effectLst/>
-                        <a:latin typeface="Calibri" panose="020F0502020204030204" pitchFamily="34" charset="0"/>
-                      </a:endParaRPr>
-                    </a:p>
-                  </a:txBody>
-                  <a:tcPr marL="7770" marR="7770" marT="7770" marB="0" anchor="ctr"/>
-                </a:tc>
-                <a:tc>
-                  <a:txBody>
-                    <a:bodyPr/>
-                    <a:lstStyle/>
-                    <a:p>
-                      <a:pPr algn="l" fontAlgn="ctr"/>
-                      <a:r>
-                        <a:rPr lang="en-US" sz="900" u="none" strike="noStrike">
-                          <a:effectLst/>
-                        </a:rPr>
-                        <a:t>0</a:t>
-                      </a:r>
-                      <a:endParaRPr lang="en-US" sz="900" b="0" i="0" u="none" strike="noStrike">
-                        <a:solidFill>
-                          <a:srgbClr val="000000"/>
-                        </a:solidFill>
-                        <a:effectLst/>
-                        <a:latin typeface="Calibri" panose="020F0502020204030204" pitchFamily="34" charset="0"/>
-                      </a:endParaRPr>
-                    </a:p>
-                  </a:txBody>
-                  <a:tcPr marL="7770" marR="7770" marT="7770" marB="0" anchor="ctr"/>
-                </a:tc>
-                <a:tc>
-                  <a:txBody>
-                    <a:bodyPr/>
-                    <a:lstStyle/>
-                    <a:p>
-                      <a:pPr algn="l" fontAlgn="ctr"/>
-                      <a:r>
-                        <a:rPr lang="en-US" sz="900" u="none" strike="noStrike">
-                          <a:effectLst/>
-                        </a:rPr>
-                        <a:t>1.047</a:t>
-                      </a:r>
-                      <a:endParaRPr lang="en-US" sz="900" b="0" i="0" u="none" strike="noStrike">
-                        <a:solidFill>
-                          <a:srgbClr val="000000"/>
-                        </a:solidFill>
-                        <a:effectLst/>
-                        <a:latin typeface="Calibri" panose="020F0502020204030204" pitchFamily="34" charset="0"/>
-                      </a:endParaRPr>
-                    </a:p>
-                  </a:txBody>
-                  <a:tcPr marL="7770" marR="7770" marT="7770" marB="0" anchor="ctr"/>
-                </a:tc>
-                <a:tc>
-                  <a:txBody>
-                    <a:bodyPr/>
-                    <a:lstStyle/>
-                    <a:p>
-                      <a:pPr algn="l" fontAlgn="ctr"/>
-                      <a:r>
-                        <a:rPr lang="en-US" sz="900" u="none" strike="noStrike">
-                          <a:effectLst/>
-                        </a:rPr>
-                        <a:t>48</a:t>
-                      </a:r>
-                      <a:endParaRPr lang="en-US" sz="900" b="0" i="0" u="none" strike="noStrike">
-                        <a:solidFill>
-                          <a:srgbClr val="000000"/>
-                        </a:solidFill>
-                        <a:effectLst/>
-                        <a:latin typeface="Calibri" panose="020F0502020204030204" pitchFamily="34" charset="0"/>
-                      </a:endParaRPr>
-                    </a:p>
-                  </a:txBody>
-                  <a:tcPr marL="7770" marR="7770" marT="7770" marB="0" anchor="ctr"/>
-                </a:tc>
-                <a:tc>
-                  <a:txBody>
-                    <a:bodyPr/>
-                    <a:lstStyle/>
-                    <a:p>
-                      <a:pPr algn="l" fontAlgn="ctr"/>
-                      <a:r>
-                        <a:rPr lang="en-US" sz="900" u="none" strike="noStrike">
-                          <a:effectLst/>
-                        </a:rPr>
-                        <a:t>152.8</a:t>
-                      </a:r>
-                      <a:endParaRPr lang="en-US" sz="900" b="0" i="0" u="none" strike="noStrike">
-                        <a:solidFill>
-                          <a:srgbClr val="000000"/>
-                        </a:solidFill>
-                        <a:effectLst/>
-                        <a:latin typeface="Calibri" panose="020F0502020204030204" pitchFamily="34" charset="0"/>
-                      </a:endParaRPr>
-                    </a:p>
-                  </a:txBody>
-                  <a:tcPr marL="7770" marR="7770" marT="7770" marB="0" anchor="ctr"/>
-                </a:tc>
-                <a:extLst>
-                  <a:ext uri="{0D108BD9-81ED-4DB2-BD59-A6C34878D82A}">
-                    <a16:rowId xmlns:a16="http://schemas.microsoft.com/office/drawing/2014/main" val="2562072775"/>
-                  </a:ext>
-                </a:extLst>
-              </a:tr>
-              <a:tr h="397111">
-                <a:tc>
-                  <a:txBody>
-                    <a:bodyPr/>
-                    <a:lstStyle/>
-                    <a:p>
-                      <a:pPr algn="l" fontAlgn="ctr"/>
-                      <a:r>
-                        <a:rPr lang="en-US" sz="900" u="none" strike="noStrike" dirty="0" err="1">
-                          <a:effectLst/>
-                        </a:rPr>
-                        <a:t>Hedyosmum</a:t>
-                      </a:r>
-                      <a:r>
-                        <a:rPr lang="en-US" sz="900" u="none" strike="noStrike" dirty="0">
-                          <a:effectLst/>
-                        </a:rPr>
-                        <a:t> </a:t>
-                      </a:r>
-                      <a:r>
-                        <a:rPr lang="en-US" sz="900" u="none" strike="noStrike" dirty="0" err="1">
-                          <a:effectLst/>
-                        </a:rPr>
-                        <a:t>iWUE</a:t>
-                      </a:r>
-                      <a:endParaRPr lang="en-US" sz="900" b="1" i="1" u="none" strike="noStrike" dirty="0">
-                        <a:solidFill>
-                          <a:srgbClr val="000000"/>
-                        </a:solidFill>
-                        <a:effectLst/>
-                        <a:latin typeface="Calibri" panose="020F0502020204030204" pitchFamily="34" charset="0"/>
-                      </a:endParaRPr>
-                    </a:p>
-                  </a:txBody>
-                  <a:tcPr marL="7770" marR="7770" marT="7770" marB="0" anchor="ctr"/>
-                </a:tc>
-                <a:tc>
-                  <a:txBody>
-                    <a:bodyPr/>
-                    <a:lstStyle/>
-                    <a:p>
-                      <a:pPr algn="l" fontAlgn="ctr"/>
-                      <a:r>
-                        <a:rPr lang="en-US" sz="900" u="none" strike="noStrike">
-                          <a:effectLst/>
-                        </a:rPr>
-                        <a:t>102.657***</a:t>
-                      </a:r>
-                      <a:endParaRPr lang="en-US" sz="900" b="0" i="0" u="none" strike="noStrike">
-                        <a:solidFill>
-                          <a:srgbClr val="000000"/>
-                        </a:solidFill>
-                        <a:effectLst/>
-                        <a:latin typeface="Calibri" panose="020F0502020204030204" pitchFamily="34" charset="0"/>
-                      </a:endParaRPr>
-                    </a:p>
-                  </a:txBody>
-                  <a:tcPr marL="7770" marR="7770" marT="7770" marB="0" anchor="ctr"/>
-                </a:tc>
-                <a:tc>
-                  <a:txBody>
-                    <a:bodyPr/>
-                    <a:lstStyle/>
-                    <a:p>
-                      <a:pPr algn="l" fontAlgn="ctr"/>
-                      <a:r>
-                        <a:rPr lang="en-US" sz="900" u="none" strike="noStrike">
-                          <a:effectLst/>
-                        </a:rPr>
-                        <a:t>-9.956</a:t>
-                      </a:r>
-                      <a:endParaRPr lang="en-US" sz="900" b="0" i="0" u="none" strike="noStrike">
-                        <a:solidFill>
-                          <a:srgbClr val="000000"/>
-                        </a:solidFill>
-                        <a:effectLst/>
-                        <a:latin typeface="Calibri" panose="020F0502020204030204" pitchFamily="34" charset="0"/>
-                      </a:endParaRPr>
-                    </a:p>
-                  </a:txBody>
-                  <a:tcPr marL="7770" marR="7770" marT="7770" marB="0" anchor="ctr"/>
-                </a:tc>
-                <a:tc>
-                  <a:txBody>
-                    <a:bodyPr/>
-                    <a:lstStyle/>
-                    <a:p>
-                      <a:pPr algn="l" fontAlgn="ctr"/>
-                      <a:r>
-                        <a:rPr lang="en-US" sz="900" u="none" strike="noStrike">
-                          <a:effectLst/>
-                        </a:rPr>
-                        <a:t>5.981</a:t>
-                      </a:r>
-                      <a:endParaRPr lang="en-US" sz="900" b="0" i="0" u="none" strike="noStrike">
-                        <a:solidFill>
-                          <a:srgbClr val="000000"/>
-                        </a:solidFill>
-                        <a:effectLst/>
-                        <a:latin typeface="Calibri" panose="020F0502020204030204" pitchFamily="34" charset="0"/>
-                      </a:endParaRPr>
-                    </a:p>
-                  </a:txBody>
-                  <a:tcPr marL="7770" marR="7770" marT="7770" marB="0" anchor="ctr"/>
-                </a:tc>
-                <a:tc>
-                  <a:txBody>
-                    <a:bodyPr/>
-                    <a:lstStyle/>
-                    <a:p>
-                      <a:pPr algn="l" fontAlgn="ctr"/>
-                      <a:r>
-                        <a:rPr lang="en-US" sz="900" u="none" strike="noStrike">
-                          <a:effectLst/>
-                        </a:rPr>
-                        <a:t>-13.481</a:t>
-                      </a:r>
-                      <a:endParaRPr lang="en-US" sz="900" b="0" i="0" u="none" strike="noStrike">
-                        <a:solidFill>
-                          <a:srgbClr val="000000"/>
-                        </a:solidFill>
-                        <a:effectLst/>
-                        <a:latin typeface="Calibri" panose="020F0502020204030204" pitchFamily="34" charset="0"/>
-                      </a:endParaRPr>
-                    </a:p>
-                  </a:txBody>
-                  <a:tcPr marL="7770" marR="7770" marT="7770" marB="0" anchor="ctr"/>
-                </a:tc>
-                <a:tc>
-                  <a:txBody>
-                    <a:bodyPr/>
-                    <a:lstStyle/>
-                    <a:p>
-                      <a:pPr algn="l" fontAlgn="ctr"/>
-                      <a:r>
-                        <a:rPr lang="en-US" sz="900" u="none" strike="noStrike" dirty="0">
-                          <a:effectLst/>
-                        </a:rPr>
-                        <a:t>-6.416</a:t>
-                      </a:r>
-                      <a:endParaRPr lang="en-US" sz="900" b="0" i="0" u="none" strike="noStrike" dirty="0">
-                        <a:solidFill>
-                          <a:srgbClr val="000000"/>
-                        </a:solidFill>
-                        <a:effectLst/>
-                        <a:latin typeface="Calibri" panose="020F0502020204030204" pitchFamily="34" charset="0"/>
-                      </a:endParaRPr>
-                    </a:p>
-                  </a:txBody>
-                  <a:tcPr marL="7770" marR="7770" marT="7770" marB="0" anchor="ctr"/>
-                </a:tc>
-                <a:tc>
-                  <a:txBody>
-                    <a:bodyPr/>
-                    <a:lstStyle/>
-                    <a:p>
-                      <a:pPr algn="l" fontAlgn="ctr"/>
-                      <a:r>
-                        <a:rPr lang="en-US" sz="900" u="none" strike="noStrike">
-                          <a:effectLst/>
-                        </a:rPr>
-                        <a:t>-13.036</a:t>
-                      </a:r>
-                      <a:endParaRPr lang="en-US" sz="900" b="0" i="0" u="none" strike="noStrike">
-                        <a:solidFill>
-                          <a:srgbClr val="000000"/>
-                        </a:solidFill>
-                        <a:effectLst/>
-                        <a:latin typeface="Calibri" panose="020F0502020204030204" pitchFamily="34" charset="0"/>
-                      </a:endParaRPr>
-                    </a:p>
-                  </a:txBody>
-                  <a:tcPr marL="7770" marR="7770" marT="7770" marB="0" anchor="ctr"/>
-                </a:tc>
-                <a:tc>
-                  <a:txBody>
-                    <a:bodyPr/>
-                    <a:lstStyle/>
-                    <a:p>
-                      <a:pPr algn="l" fontAlgn="ctr"/>
-                      <a:r>
-                        <a:rPr lang="en-US" sz="900" u="none" strike="noStrike">
-                          <a:effectLst/>
-                        </a:rPr>
-                        <a:t>26.357</a:t>
-                      </a:r>
-                      <a:endParaRPr lang="en-US" sz="900" b="0" i="0" u="none" strike="noStrike">
-                        <a:solidFill>
-                          <a:srgbClr val="000000"/>
-                        </a:solidFill>
-                        <a:effectLst/>
-                        <a:latin typeface="Calibri" panose="020F0502020204030204" pitchFamily="34" charset="0"/>
-                      </a:endParaRPr>
-                    </a:p>
-                  </a:txBody>
-                  <a:tcPr marL="7770" marR="7770" marT="7770" marB="0" anchor="ctr"/>
-                </a:tc>
-                <a:tc>
-                  <a:txBody>
-                    <a:bodyPr/>
-                    <a:lstStyle/>
-                    <a:p>
-                      <a:pPr algn="l" fontAlgn="ctr"/>
-                      <a:r>
-                        <a:rPr lang="en-US" sz="900" u="none" strike="noStrike">
-                          <a:effectLst/>
-                        </a:rPr>
-                        <a:t>-20.439</a:t>
-                      </a:r>
-                      <a:endParaRPr lang="en-US" sz="900" b="0" i="0" u="none" strike="noStrike">
-                        <a:solidFill>
-                          <a:srgbClr val="000000"/>
-                        </a:solidFill>
-                        <a:effectLst/>
-                        <a:latin typeface="Calibri" panose="020F0502020204030204" pitchFamily="34" charset="0"/>
-                      </a:endParaRPr>
-                    </a:p>
-                  </a:txBody>
-                  <a:tcPr marL="7770" marR="7770" marT="7770" marB="0" anchor="ctr"/>
-                </a:tc>
-                <a:tc>
-                  <a:txBody>
-                    <a:bodyPr/>
-                    <a:lstStyle/>
-                    <a:p>
-                      <a:pPr algn="l" fontAlgn="ctr"/>
-                      <a:r>
-                        <a:rPr lang="en-US" sz="900" u="none" strike="noStrike">
-                          <a:effectLst/>
-                        </a:rPr>
-                        <a:t>0</a:t>
-                      </a:r>
-                      <a:endParaRPr lang="en-US" sz="900" b="0" i="0" u="none" strike="noStrike">
-                        <a:solidFill>
-                          <a:srgbClr val="000000"/>
-                        </a:solidFill>
-                        <a:effectLst/>
-                        <a:latin typeface="Calibri" panose="020F0502020204030204" pitchFamily="34" charset="0"/>
-                      </a:endParaRPr>
-                    </a:p>
-                  </a:txBody>
-                  <a:tcPr marL="7770" marR="7770" marT="7770" marB="0" anchor="ctr"/>
-                </a:tc>
-                <a:tc>
-                  <a:txBody>
-                    <a:bodyPr/>
-                    <a:lstStyle/>
-                    <a:p>
-                      <a:pPr algn="l" fontAlgn="ctr"/>
-                      <a:r>
-                        <a:rPr lang="en-US" sz="900" u="none" strike="noStrike">
-                          <a:effectLst/>
-                        </a:rPr>
-                        <a:t>0</a:t>
-                      </a:r>
-                      <a:endParaRPr lang="en-US" sz="900" b="0" i="0" u="none" strike="noStrike">
-                        <a:solidFill>
-                          <a:srgbClr val="000000"/>
-                        </a:solidFill>
-                        <a:effectLst/>
-                        <a:latin typeface="Calibri" panose="020F0502020204030204" pitchFamily="34" charset="0"/>
-                      </a:endParaRPr>
-                    </a:p>
-                  </a:txBody>
-                  <a:tcPr marL="7770" marR="7770" marT="7770" marB="0" anchor="ctr"/>
-                </a:tc>
-                <a:tc>
-                  <a:txBody>
-                    <a:bodyPr/>
-                    <a:lstStyle/>
-                    <a:p>
-                      <a:pPr algn="l" fontAlgn="ctr"/>
-                      <a:r>
-                        <a:rPr lang="en-US" sz="900" u="none" strike="noStrike">
-                          <a:effectLst/>
-                        </a:rPr>
-                        <a:t>22.263</a:t>
-                      </a:r>
-                      <a:endParaRPr lang="en-US" sz="900" b="0" i="0" u="none" strike="noStrike">
-                        <a:solidFill>
-                          <a:srgbClr val="000000"/>
-                        </a:solidFill>
-                        <a:effectLst/>
-                        <a:latin typeface="Calibri" panose="020F0502020204030204" pitchFamily="34" charset="0"/>
-                      </a:endParaRPr>
-                    </a:p>
-                  </a:txBody>
-                  <a:tcPr marL="7770" marR="7770" marT="7770" marB="0" anchor="ctr"/>
-                </a:tc>
-                <a:tc>
-                  <a:txBody>
-                    <a:bodyPr/>
-                    <a:lstStyle/>
-                    <a:p>
-                      <a:pPr algn="l" fontAlgn="ctr"/>
-                      <a:r>
-                        <a:rPr lang="en-US" sz="900" u="none" strike="noStrike">
-                          <a:effectLst/>
-                        </a:rPr>
-                        <a:t>21</a:t>
-                      </a:r>
-                      <a:endParaRPr lang="en-US" sz="900" b="0" i="0" u="none" strike="noStrike">
-                        <a:solidFill>
-                          <a:srgbClr val="000000"/>
-                        </a:solidFill>
-                        <a:effectLst/>
-                        <a:latin typeface="Calibri" panose="020F0502020204030204" pitchFamily="34" charset="0"/>
-                      </a:endParaRPr>
-                    </a:p>
-                  </a:txBody>
-                  <a:tcPr marL="7770" marR="7770" marT="7770" marB="0" anchor="ctr"/>
-                </a:tc>
-                <a:tc>
-                  <a:txBody>
-                    <a:bodyPr/>
-                    <a:lstStyle/>
-                    <a:p>
-                      <a:pPr algn="l" fontAlgn="ctr"/>
-                      <a:r>
-                        <a:rPr lang="en-US" sz="900" u="none" strike="noStrike">
-                          <a:effectLst/>
-                        </a:rPr>
-                        <a:t>174.2</a:t>
-                      </a:r>
-                      <a:endParaRPr lang="en-US" sz="900" b="0" i="0" u="none" strike="noStrike">
-                        <a:solidFill>
-                          <a:srgbClr val="000000"/>
-                        </a:solidFill>
-                        <a:effectLst/>
-                        <a:latin typeface="Calibri" panose="020F0502020204030204" pitchFamily="34" charset="0"/>
-                      </a:endParaRPr>
-                    </a:p>
-                  </a:txBody>
-                  <a:tcPr marL="7770" marR="7770" marT="7770" marB="0" anchor="ctr"/>
-                </a:tc>
-                <a:extLst>
-                  <a:ext uri="{0D108BD9-81ED-4DB2-BD59-A6C34878D82A}">
-                    <a16:rowId xmlns:a16="http://schemas.microsoft.com/office/drawing/2014/main" val="1513454980"/>
-                  </a:ext>
-                </a:extLst>
-              </a:tr>
-              <a:tr h="397111">
-                <a:tc>
-                  <a:txBody>
-                    <a:bodyPr/>
-                    <a:lstStyle/>
-                    <a:p>
-                      <a:pPr algn="l" fontAlgn="ctr"/>
-                      <a:r>
-                        <a:rPr lang="en-US" sz="900" u="none" strike="noStrike" dirty="0" err="1">
-                          <a:effectLst/>
-                        </a:rPr>
-                        <a:t>Hedyosmum</a:t>
-                      </a:r>
-                      <a:r>
-                        <a:rPr lang="en-US" sz="900" u="none" strike="noStrike" dirty="0">
-                          <a:effectLst/>
-                        </a:rPr>
-                        <a:t> O18</a:t>
-                      </a:r>
-                      <a:endParaRPr lang="en-US" sz="900" b="1" i="1" u="none" strike="noStrike" dirty="0">
-                        <a:solidFill>
-                          <a:srgbClr val="000000"/>
-                        </a:solidFill>
-                        <a:effectLst/>
-                        <a:latin typeface="Calibri" panose="020F0502020204030204" pitchFamily="34" charset="0"/>
-                      </a:endParaRPr>
-                    </a:p>
-                  </a:txBody>
-                  <a:tcPr marL="7770" marR="7770" marT="7770" marB="0" anchor="ctr"/>
-                </a:tc>
-                <a:tc>
-                  <a:txBody>
-                    <a:bodyPr/>
-                    <a:lstStyle/>
-                    <a:p>
-                      <a:pPr algn="l" fontAlgn="ctr"/>
-                      <a:r>
-                        <a:rPr lang="en-US" sz="900" u="none" strike="noStrike">
-                          <a:effectLst/>
-                        </a:rPr>
-                        <a:t>26.293***</a:t>
-                      </a:r>
-                      <a:endParaRPr lang="en-US" sz="900" b="0" i="0" u="none" strike="noStrike">
-                        <a:solidFill>
-                          <a:srgbClr val="000000"/>
-                        </a:solidFill>
-                        <a:effectLst/>
-                        <a:latin typeface="Calibri" panose="020F0502020204030204" pitchFamily="34" charset="0"/>
-                      </a:endParaRPr>
-                    </a:p>
-                  </a:txBody>
-                  <a:tcPr marL="7770" marR="7770" marT="7770" marB="0" anchor="ctr"/>
-                </a:tc>
-                <a:tc>
-                  <a:txBody>
-                    <a:bodyPr/>
-                    <a:lstStyle/>
-                    <a:p>
-                      <a:pPr algn="l" fontAlgn="ctr"/>
-                      <a:r>
-                        <a:rPr lang="en-US" sz="900" u="none" strike="noStrike">
-                          <a:effectLst/>
-                        </a:rPr>
-                        <a:t>-0.69</a:t>
-                      </a:r>
-                      <a:endParaRPr lang="en-US" sz="900" b="0" i="0" u="none" strike="noStrike">
-                        <a:solidFill>
-                          <a:srgbClr val="000000"/>
-                        </a:solidFill>
-                        <a:effectLst/>
-                        <a:latin typeface="Calibri" panose="020F0502020204030204" pitchFamily="34" charset="0"/>
-                      </a:endParaRPr>
-                    </a:p>
-                  </a:txBody>
-                  <a:tcPr marL="7770" marR="7770" marT="7770" marB="0" anchor="ctr"/>
-                </a:tc>
-                <a:tc>
-                  <a:txBody>
-                    <a:bodyPr/>
-                    <a:lstStyle/>
-                    <a:p>
-                      <a:pPr algn="l" fontAlgn="ctr"/>
-                      <a:r>
-                        <a:rPr lang="en-US" sz="900" u="none" strike="noStrike" dirty="0">
-                          <a:effectLst/>
-                        </a:rPr>
-                        <a:t>1.224</a:t>
-                      </a:r>
-                      <a:endParaRPr lang="en-US" sz="900" b="0" i="0" u="none" strike="noStrike" dirty="0">
-                        <a:solidFill>
-                          <a:srgbClr val="000000"/>
-                        </a:solidFill>
-                        <a:effectLst/>
-                        <a:latin typeface="Calibri" panose="020F0502020204030204" pitchFamily="34" charset="0"/>
-                      </a:endParaRPr>
-                    </a:p>
-                  </a:txBody>
-                  <a:tcPr marL="7770" marR="7770" marT="7770" marB="0" anchor="ctr"/>
-                </a:tc>
-                <a:tc>
-                  <a:txBody>
-                    <a:bodyPr/>
-                    <a:lstStyle/>
-                    <a:p>
-                      <a:pPr algn="l" fontAlgn="ctr"/>
-                      <a:r>
-                        <a:rPr lang="en-US" sz="900" u="none" strike="noStrike">
-                          <a:effectLst/>
-                        </a:rPr>
-                        <a:t>-0.929</a:t>
-                      </a:r>
-                      <a:endParaRPr lang="en-US" sz="900" b="0" i="0" u="none" strike="noStrike">
-                        <a:solidFill>
-                          <a:srgbClr val="000000"/>
-                        </a:solidFill>
-                        <a:effectLst/>
-                        <a:latin typeface="Calibri" panose="020F0502020204030204" pitchFamily="34" charset="0"/>
-                      </a:endParaRPr>
-                    </a:p>
-                  </a:txBody>
-                  <a:tcPr marL="7770" marR="7770" marT="7770" marB="0" anchor="ctr"/>
-                </a:tc>
-                <a:tc>
-                  <a:txBody>
-                    <a:bodyPr/>
-                    <a:lstStyle/>
-                    <a:p>
-                      <a:pPr algn="l" fontAlgn="ctr"/>
-                      <a:r>
-                        <a:rPr lang="en-US" sz="900" u="none" strike="noStrike" dirty="0">
-                          <a:effectLst/>
-                        </a:rPr>
-                        <a:t>0.914</a:t>
-                      </a:r>
-                      <a:endParaRPr lang="en-US" sz="900" b="0" i="0" u="none" strike="noStrike" dirty="0">
-                        <a:solidFill>
-                          <a:srgbClr val="000000"/>
-                        </a:solidFill>
-                        <a:effectLst/>
-                        <a:latin typeface="Calibri" panose="020F0502020204030204" pitchFamily="34" charset="0"/>
-                      </a:endParaRPr>
-                    </a:p>
-                  </a:txBody>
-                  <a:tcPr marL="7770" marR="7770" marT="7770" marB="0" anchor="ctr"/>
-                </a:tc>
-                <a:tc>
-                  <a:txBody>
-                    <a:bodyPr/>
-                    <a:lstStyle/>
-                    <a:p>
-                      <a:pPr algn="l" fontAlgn="ctr"/>
-                      <a:r>
-                        <a:rPr lang="en-US" sz="900" u="none" strike="noStrike">
-                          <a:effectLst/>
-                        </a:rPr>
-                        <a:t>-0.874</a:t>
-                      </a:r>
-                      <a:endParaRPr lang="en-US" sz="900" b="0" i="0" u="none" strike="noStrike">
-                        <a:solidFill>
-                          <a:srgbClr val="000000"/>
-                        </a:solidFill>
-                        <a:effectLst/>
-                        <a:latin typeface="Calibri" panose="020F0502020204030204" pitchFamily="34" charset="0"/>
-                      </a:endParaRPr>
-                    </a:p>
-                  </a:txBody>
-                  <a:tcPr marL="7770" marR="7770" marT="7770" marB="0" anchor="ctr"/>
-                </a:tc>
-                <a:tc>
-                  <a:txBody>
-                    <a:bodyPr/>
-                    <a:lstStyle/>
-                    <a:p>
-                      <a:pPr algn="l" fontAlgn="ctr"/>
-                      <a:r>
-                        <a:rPr lang="en-US" sz="900" u="none" strike="noStrike">
-                          <a:effectLst/>
-                        </a:rPr>
-                        <a:t>-1.825</a:t>
-                      </a:r>
-                      <a:endParaRPr lang="en-US" sz="900" b="0" i="0" u="none" strike="noStrike">
-                        <a:solidFill>
-                          <a:srgbClr val="000000"/>
-                        </a:solidFill>
-                        <a:effectLst/>
-                        <a:latin typeface="Calibri" panose="020F0502020204030204" pitchFamily="34" charset="0"/>
-                      </a:endParaRPr>
-                    </a:p>
-                  </a:txBody>
-                  <a:tcPr marL="7770" marR="7770" marT="7770" marB="0" anchor="ctr"/>
-                </a:tc>
-                <a:tc>
-                  <a:txBody>
-                    <a:bodyPr/>
-                    <a:lstStyle/>
-                    <a:p>
-                      <a:pPr algn="l" fontAlgn="ctr"/>
-                      <a:r>
-                        <a:rPr lang="en-US" sz="900" u="none" strike="noStrike">
-                          <a:effectLst/>
-                        </a:rPr>
-                        <a:t>-1.37</a:t>
-                      </a:r>
-                      <a:endParaRPr lang="en-US" sz="900" b="0" i="0" u="none" strike="noStrike">
-                        <a:solidFill>
-                          <a:srgbClr val="000000"/>
-                        </a:solidFill>
-                        <a:effectLst/>
-                        <a:latin typeface="Calibri" panose="020F0502020204030204" pitchFamily="34" charset="0"/>
-                      </a:endParaRPr>
-                    </a:p>
-                  </a:txBody>
-                  <a:tcPr marL="7770" marR="7770" marT="7770" marB="0" anchor="ctr"/>
-                </a:tc>
-                <a:tc>
-                  <a:txBody>
-                    <a:bodyPr/>
-                    <a:lstStyle/>
-                    <a:p>
-                      <a:pPr algn="l" fontAlgn="ctr"/>
-                      <a:r>
-                        <a:rPr lang="en-US" sz="900" u="none" strike="noStrike">
-                          <a:effectLst/>
-                        </a:rPr>
-                        <a:t>0.589</a:t>
-                      </a:r>
-                      <a:endParaRPr lang="en-US" sz="900" b="0" i="0" u="none" strike="noStrike">
-                        <a:solidFill>
-                          <a:srgbClr val="000000"/>
-                        </a:solidFill>
-                        <a:effectLst/>
-                        <a:latin typeface="Calibri" panose="020F0502020204030204" pitchFamily="34" charset="0"/>
-                      </a:endParaRPr>
-                    </a:p>
-                  </a:txBody>
-                  <a:tcPr marL="7770" marR="7770" marT="7770" marB="0" anchor="ctr"/>
-                </a:tc>
-                <a:tc>
-                  <a:txBody>
-                    <a:bodyPr/>
-                    <a:lstStyle/>
-                    <a:p>
-                      <a:pPr algn="l" fontAlgn="ctr"/>
-                      <a:r>
-                        <a:rPr lang="en-US" sz="900" u="none" strike="noStrike">
-                          <a:effectLst/>
-                        </a:rPr>
-                        <a:t>0.38</a:t>
-                      </a:r>
-                      <a:endParaRPr lang="en-US" sz="900" b="0" i="0" u="none" strike="noStrike">
-                        <a:solidFill>
-                          <a:srgbClr val="000000"/>
-                        </a:solidFill>
-                        <a:effectLst/>
-                        <a:latin typeface="Calibri" panose="020F0502020204030204" pitchFamily="34" charset="0"/>
-                      </a:endParaRPr>
-                    </a:p>
-                  </a:txBody>
-                  <a:tcPr marL="7770" marR="7770" marT="7770" marB="0" anchor="ctr"/>
-                </a:tc>
-                <a:tc>
-                  <a:txBody>
-                    <a:bodyPr/>
-                    <a:lstStyle/>
-                    <a:p>
-                      <a:pPr algn="l" fontAlgn="ctr"/>
-                      <a:r>
-                        <a:rPr lang="en-US" sz="900" u="none" strike="noStrike">
-                          <a:effectLst/>
-                        </a:rPr>
-                        <a:t>1.312</a:t>
-                      </a:r>
-                      <a:endParaRPr lang="en-US" sz="900" b="0" i="0" u="none" strike="noStrike">
-                        <a:solidFill>
-                          <a:srgbClr val="000000"/>
-                        </a:solidFill>
-                        <a:effectLst/>
-                        <a:latin typeface="Calibri" panose="020F0502020204030204" pitchFamily="34" charset="0"/>
-                      </a:endParaRPr>
-                    </a:p>
-                  </a:txBody>
-                  <a:tcPr marL="7770" marR="7770" marT="7770" marB="0" anchor="ctr"/>
-                </a:tc>
-                <a:tc>
-                  <a:txBody>
-                    <a:bodyPr/>
-                    <a:lstStyle/>
-                    <a:p>
-                      <a:pPr algn="l" fontAlgn="ctr"/>
-                      <a:r>
-                        <a:rPr lang="en-US" sz="900" u="none" strike="noStrike">
-                          <a:effectLst/>
-                        </a:rPr>
-                        <a:t>21</a:t>
-                      </a:r>
-                      <a:endParaRPr lang="en-US" sz="900" b="0" i="0" u="none" strike="noStrike">
-                        <a:solidFill>
-                          <a:srgbClr val="000000"/>
-                        </a:solidFill>
-                        <a:effectLst/>
-                        <a:latin typeface="Calibri" panose="020F0502020204030204" pitchFamily="34" charset="0"/>
-                      </a:endParaRPr>
-                    </a:p>
-                  </a:txBody>
-                  <a:tcPr marL="7770" marR="7770" marT="7770" marB="0" anchor="ctr"/>
-                </a:tc>
-                <a:tc>
-                  <a:txBody>
-                    <a:bodyPr/>
-                    <a:lstStyle/>
-                    <a:p>
-                      <a:pPr algn="l" fontAlgn="ctr"/>
-                      <a:r>
-                        <a:rPr lang="en-US" sz="900" u="none" strike="noStrike">
-                          <a:effectLst/>
-                        </a:rPr>
-                        <a:t>81.3</a:t>
-                      </a:r>
-                      <a:endParaRPr lang="en-US" sz="900" b="0" i="0" u="none" strike="noStrike">
-                        <a:solidFill>
-                          <a:srgbClr val="000000"/>
-                        </a:solidFill>
-                        <a:effectLst/>
-                        <a:latin typeface="Calibri" panose="020F0502020204030204" pitchFamily="34" charset="0"/>
-                      </a:endParaRPr>
-                    </a:p>
-                  </a:txBody>
-                  <a:tcPr marL="7770" marR="7770" marT="7770" marB="0" anchor="ctr"/>
-                </a:tc>
-                <a:extLst>
-                  <a:ext uri="{0D108BD9-81ED-4DB2-BD59-A6C34878D82A}">
-                    <a16:rowId xmlns:a16="http://schemas.microsoft.com/office/drawing/2014/main" val="2704535307"/>
-                  </a:ext>
-                </a:extLst>
-              </a:tr>
-              <a:tr h="397111">
-                <a:tc>
-                  <a:txBody>
-                    <a:bodyPr/>
-                    <a:lstStyle/>
-                    <a:p>
-                      <a:pPr algn="l" fontAlgn="ctr"/>
-                      <a:r>
-                        <a:rPr lang="en-US" sz="900" u="none" strike="noStrike" dirty="0" err="1">
-                          <a:effectLst/>
-                        </a:rPr>
-                        <a:t>Weinmania</a:t>
-                      </a:r>
-                      <a:r>
-                        <a:rPr lang="en-US" sz="900" u="none" strike="noStrike" dirty="0">
-                          <a:effectLst/>
-                        </a:rPr>
-                        <a:t> </a:t>
-                      </a:r>
-                      <a:r>
-                        <a:rPr lang="en-US" sz="900" u="none" strike="noStrike" dirty="0" err="1">
-                          <a:effectLst/>
-                        </a:rPr>
-                        <a:t>iWUE</a:t>
-                      </a:r>
-                      <a:endParaRPr lang="en-US" sz="900" b="1" i="1" u="none" strike="noStrike" dirty="0">
-                        <a:solidFill>
-                          <a:srgbClr val="000000"/>
-                        </a:solidFill>
-                        <a:effectLst/>
-                        <a:latin typeface="Calibri" panose="020F0502020204030204" pitchFamily="34" charset="0"/>
-                      </a:endParaRPr>
-                    </a:p>
-                  </a:txBody>
-                  <a:tcPr marL="7770" marR="7770" marT="7770" marB="0" anchor="ctr"/>
-                </a:tc>
-                <a:tc>
-                  <a:txBody>
-                    <a:bodyPr/>
-                    <a:lstStyle/>
-                    <a:p>
-                      <a:pPr algn="l" fontAlgn="ctr"/>
-                      <a:r>
-                        <a:rPr lang="en-US" sz="900" u="none" strike="noStrike">
-                          <a:effectLst/>
-                        </a:rPr>
-                        <a:t>90.481***</a:t>
-                      </a:r>
-                      <a:endParaRPr lang="en-US" sz="900" b="0" i="0" u="none" strike="noStrike">
-                        <a:solidFill>
-                          <a:srgbClr val="000000"/>
-                        </a:solidFill>
-                        <a:effectLst/>
-                        <a:latin typeface="Calibri" panose="020F0502020204030204" pitchFamily="34" charset="0"/>
-                      </a:endParaRPr>
-                    </a:p>
-                  </a:txBody>
-                  <a:tcPr marL="7770" marR="7770" marT="7770" marB="0" anchor="ctr"/>
-                </a:tc>
-                <a:tc>
-                  <a:txBody>
-                    <a:bodyPr/>
-                    <a:lstStyle/>
-                    <a:p>
-                      <a:pPr algn="l" fontAlgn="ctr"/>
-                      <a:r>
-                        <a:rPr lang="en-US" sz="900" u="none" strike="noStrike">
-                          <a:effectLst/>
-                        </a:rPr>
-                        <a:t>-5.404</a:t>
-                      </a:r>
-                      <a:endParaRPr lang="en-US" sz="900" b="0" i="0" u="none" strike="noStrike">
-                        <a:solidFill>
-                          <a:srgbClr val="000000"/>
-                        </a:solidFill>
-                        <a:effectLst/>
-                        <a:latin typeface="Calibri" panose="020F0502020204030204" pitchFamily="34" charset="0"/>
-                      </a:endParaRPr>
-                    </a:p>
-                  </a:txBody>
-                  <a:tcPr marL="7770" marR="7770" marT="7770" marB="0" anchor="ctr"/>
-                </a:tc>
-                <a:tc>
-                  <a:txBody>
-                    <a:bodyPr/>
-                    <a:lstStyle/>
-                    <a:p>
-                      <a:pPr algn="l" fontAlgn="ctr"/>
-                      <a:r>
-                        <a:rPr lang="en-US" sz="900" u="none" strike="noStrike">
-                          <a:effectLst/>
-                        </a:rPr>
-                        <a:t>-4.607</a:t>
-                      </a:r>
-                      <a:endParaRPr lang="en-US" sz="900" b="0" i="0" u="none" strike="noStrike">
-                        <a:solidFill>
-                          <a:srgbClr val="000000"/>
-                        </a:solidFill>
-                        <a:effectLst/>
-                        <a:latin typeface="Calibri" panose="020F0502020204030204" pitchFamily="34" charset="0"/>
-                      </a:endParaRPr>
-                    </a:p>
-                  </a:txBody>
-                  <a:tcPr marL="7770" marR="7770" marT="7770" marB="0" anchor="ctr"/>
-                </a:tc>
-                <a:tc>
-                  <a:txBody>
-                    <a:bodyPr/>
-                    <a:lstStyle/>
-                    <a:p>
-                      <a:pPr algn="l" fontAlgn="ctr"/>
-                      <a:r>
-                        <a:rPr lang="en-US" sz="900" u="none" strike="noStrike" dirty="0">
-                          <a:effectLst/>
-                        </a:rPr>
-                        <a:t>-7.062</a:t>
-                      </a:r>
-                      <a:endParaRPr lang="en-US" sz="900" b="0" i="0" u="none" strike="noStrike" dirty="0">
-                        <a:solidFill>
-                          <a:srgbClr val="000000"/>
-                        </a:solidFill>
-                        <a:effectLst/>
-                        <a:latin typeface="Calibri" panose="020F0502020204030204" pitchFamily="34" charset="0"/>
-                      </a:endParaRPr>
-                    </a:p>
-                  </a:txBody>
-                  <a:tcPr marL="7770" marR="7770" marT="7770" marB="0" anchor="ctr"/>
-                </a:tc>
-                <a:tc>
-                  <a:txBody>
-                    <a:bodyPr/>
-                    <a:lstStyle/>
-                    <a:p>
-                      <a:pPr algn="l" fontAlgn="ctr"/>
-                      <a:r>
-                        <a:rPr lang="en-US" sz="900" u="none" strike="noStrike">
-                          <a:effectLst/>
-                        </a:rPr>
-                        <a:t>-8.175</a:t>
-                      </a:r>
-                      <a:endParaRPr lang="en-US" sz="900" b="0" i="0" u="none" strike="noStrike">
-                        <a:solidFill>
-                          <a:srgbClr val="000000"/>
-                        </a:solidFill>
-                        <a:effectLst/>
-                        <a:latin typeface="Calibri" panose="020F0502020204030204" pitchFamily="34" charset="0"/>
-                      </a:endParaRPr>
-                    </a:p>
-                  </a:txBody>
-                  <a:tcPr marL="7770" marR="7770" marT="7770" marB="0" anchor="ctr"/>
-                </a:tc>
-                <a:tc>
-                  <a:txBody>
-                    <a:bodyPr/>
-                    <a:lstStyle/>
-                    <a:p>
-                      <a:pPr algn="l" fontAlgn="ctr"/>
-                      <a:r>
-                        <a:rPr lang="en-US" sz="900" u="none" strike="noStrike">
-                          <a:effectLst/>
-                        </a:rPr>
-                        <a:t>-6.771</a:t>
-                      </a:r>
-                      <a:endParaRPr lang="en-US" sz="900" b="0" i="0" u="none" strike="noStrike">
-                        <a:solidFill>
-                          <a:srgbClr val="000000"/>
-                        </a:solidFill>
-                        <a:effectLst/>
-                        <a:latin typeface="Calibri" panose="020F0502020204030204" pitchFamily="34" charset="0"/>
-                      </a:endParaRPr>
-                    </a:p>
-                  </a:txBody>
-                  <a:tcPr marL="7770" marR="7770" marT="7770" marB="0" anchor="ctr"/>
-                </a:tc>
-                <a:tc>
-                  <a:txBody>
-                    <a:bodyPr/>
-                    <a:lstStyle/>
-                    <a:p>
-                      <a:pPr algn="l" fontAlgn="ctr"/>
-                      <a:r>
-                        <a:rPr lang="en-US" sz="900" u="none" strike="noStrike">
-                          <a:effectLst/>
-                        </a:rPr>
-                        <a:t>-3.361</a:t>
-                      </a:r>
-                      <a:endParaRPr lang="en-US" sz="900" b="0" i="0" u="none" strike="noStrike">
-                        <a:solidFill>
-                          <a:srgbClr val="000000"/>
-                        </a:solidFill>
-                        <a:effectLst/>
-                        <a:latin typeface="Calibri" panose="020F0502020204030204" pitchFamily="34" charset="0"/>
-                      </a:endParaRPr>
-                    </a:p>
-                  </a:txBody>
-                  <a:tcPr marL="7770" marR="7770" marT="7770" marB="0" anchor="ctr"/>
-                </a:tc>
-                <a:tc>
-                  <a:txBody>
-                    <a:bodyPr/>
-                    <a:lstStyle/>
-                    <a:p>
-                      <a:pPr algn="l" fontAlgn="ctr"/>
-                      <a:r>
-                        <a:rPr lang="en-US" sz="900" u="none" strike="noStrike">
-                          <a:effectLst/>
-                        </a:rPr>
-                        <a:t>-11.484</a:t>
-                      </a:r>
-                      <a:endParaRPr lang="en-US" sz="900" b="0" i="0" u="none" strike="noStrike">
-                        <a:solidFill>
-                          <a:srgbClr val="000000"/>
-                        </a:solidFill>
-                        <a:effectLst/>
-                        <a:latin typeface="Calibri" panose="020F0502020204030204" pitchFamily="34" charset="0"/>
-                      </a:endParaRPr>
-                    </a:p>
-                  </a:txBody>
-                  <a:tcPr marL="7770" marR="7770" marT="7770" marB="0" anchor="ctr"/>
-                </a:tc>
-                <a:tc>
-                  <a:txBody>
-                    <a:bodyPr/>
-                    <a:lstStyle/>
-                    <a:p>
-                      <a:pPr algn="l" fontAlgn="ctr"/>
-                      <a:r>
-                        <a:rPr lang="en-US" sz="900" u="none" strike="noStrike">
-                          <a:effectLst/>
-                        </a:rPr>
-                        <a:t>0</a:t>
-                      </a:r>
-                      <a:endParaRPr lang="en-US" sz="900" b="0" i="0" u="none" strike="noStrike">
-                        <a:solidFill>
-                          <a:srgbClr val="000000"/>
-                        </a:solidFill>
-                        <a:effectLst/>
-                        <a:latin typeface="Calibri" panose="020F0502020204030204" pitchFamily="34" charset="0"/>
-                      </a:endParaRPr>
-                    </a:p>
-                  </a:txBody>
-                  <a:tcPr marL="7770" marR="7770" marT="7770" marB="0" anchor="ctr"/>
-                </a:tc>
-                <a:tc>
-                  <a:txBody>
-                    <a:bodyPr/>
-                    <a:lstStyle/>
-                    <a:p>
-                      <a:pPr algn="l" fontAlgn="ctr"/>
-                      <a:r>
-                        <a:rPr lang="en-US" sz="900" u="none" strike="noStrike">
-                          <a:effectLst/>
-                        </a:rPr>
-                        <a:t>3.618</a:t>
-                      </a:r>
-                      <a:endParaRPr lang="en-US" sz="900" b="0" i="0" u="none" strike="noStrike">
-                        <a:solidFill>
-                          <a:srgbClr val="000000"/>
-                        </a:solidFill>
-                        <a:effectLst/>
-                        <a:latin typeface="Calibri" panose="020F0502020204030204" pitchFamily="34" charset="0"/>
-                      </a:endParaRPr>
-                    </a:p>
-                  </a:txBody>
-                  <a:tcPr marL="7770" marR="7770" marT="7770" marB="0" anchor="ctr"/>
-                </a:tc>
-                <a:tc>
-                  <a:txBody>
-                    <a:bodyPr/>
-                    <a:lstStyle/>
-                    <a:p>
-                      <a:pPr algn="l" fontAlgn="ctr"/>
-                      <a:r>
-                        <a:rPr lang="en-US" sz="900" u="none" strike="noStrike">
-                          <a:effectLst/>
-                        </a:rPr>
-                        <a:t>11.095</a:t>
-                      </a:r>
-                      <a:endParaRPr lang="en-US" sz="900" b="0" i="0" u="none" strike="noStrike">
-                        <a:solidFill>
-                          <a:srgbClr val="000000"/>
-                        </a:solidFill>
-                        <a:effectLst/>
-                        <a:latin typeface="Calibri" panose="020F0502020204030204" pitchFamily="34" charset="0"/>
-                      </a:endParaRPr>
-                    </a:p>
-                  </a:txBody>
-                  <a:tcPr marL="7770" marR="7770" marT="7770" marB="0" anchor="ctr"/>
-                </a:tc>
-                <a:tc>
-                  <a:txBody>
-                    <a:bodyPr/>
-                    <a:lstStyle/>
-                    <a:p>
-                      <a:pPr algn="l" fontAlgn="ctr"/>
-                      <a:r>
-                        <a:rPr lang="en-US" sz="900" u="none" strike="noStrike">
-                          <a:effectLst/>
-                        </a:rPr>
-                        <a:t>18</a:t>
-                      </a:r>
-                      <a:endParaRPr lang="en-US" sz="900" b="0" i="0" u="none" strike="noStrike">
-                        <a:solidFill>
-                          <a:srgbClr val="000000"/>
-                        </a:solidFill>
-                        <a:effectLst/>
-                        <a:latin typeface="Calibri" panose="020F0502020204030204" pitchFamily="34" charset="0"/>
-                      </a:endParaRPr>
-                    </a:p>
-                  </a:txBody>
-                  <a:tcPr marL="7770" marR="7770" marT="7770" marB="0" anchor="ctr"/>
-                </a:tc>
-                <a:tc>
-                  <a:txBody>
-                    <a:bodyPr/>
-                    <a:lstStyle/>
-                    <a:p>
-                      <a:pPr algn="l" fontAlgn="ctr"/>
-                      <a:r>
-                        <a:rPr lang="en-US" sz="900" u="none" strike="noStrike">
-                          <a:effectLst/>
-                        </a:rPr>
-                        <a:t>127.7</a:t>
-                      </a:r>
-                      <a:endParaRPr lang="en-US" sz="900" b="0" i="0" u="none" strike="noStrike">
-                        <a:solidFill>
-                          <a:srgbClr val="000000"/>
-                        </a:solidFill>
-                        <a:effectLst/>
-                        <a:latin typeface="Calibri" panose="020F0502020204030204" pitchFamily="34" charset="0"/>
-                      </a:endParaRPr>
-                    </a:p>
-                  </a:txBody>
-                  <a:tcPr marL="7770" marR="7770" marT="7770" marB="0" anchor="ctr"/>
-                </a:tc>
-                <a:extLst>
-                  <a:ext uri="{0D108BD9-81ED-4DB2-BD59-A6C34878D82A}">
-                    <a16:rowId xmlns:a16="http://schemas.microsoft.com/office/drawing/2014/main" val="3819921202"/>
-                  </a:ext>
-                </a:extLst>
-              </a:tr>
-              <a:tr h="397111">
-                <a:tc>
-                  <a:txBody>
-                    <a:bodyPr/>
-                    <a:lstStyle/>
-                    <a:p>
-                      <a:pPr algn="l" fontAlgn="ctr"/>
-                      <a:r>
-                        <a:rPr lang="en-US" sz="900" u="none" strike="noStrike" dirty="0" err="1">
-                          <a:effectLst/>
-                        </a:rPr>
-                        <a:t>Weinmania</a:t>
-                      </a:r>
-                      <a:r>
-                        <a:rPr lang="en-US" sz="900" u="none" strike="noStrike" dirty="0">
-                          <a:effectLst/>
-                        </a:rPr>
-                        <a:t> O18</a:t>
-                      </a:r>
-                      <a:endParaRPr lang="en-US" sz="900" b="1" i="1" u="none" strike="noStrike" dirty="0">
-                        <a:solidFill>
-                          <a:srgbClr val="000000"/>
-                        </a:solidFill>
-                        <a:effectLst/>
-                        <a:latin typeface="Calibri" panose="020F0502020204030204" pitchFamily="34" charset="0"/>
-                      </a:endParaRPr>
-                    </a:p>
-                  </a:txBody>
-                  <a:tcPr marL="7770" marR="7770" marT="7770" marB="0" anchor="ctr"/>
-                </a:tc>
-                <a:tc>
-                  <a:txBody>
-                    <a:bodyPr/>
-                    <a:lstStyle/>
-                    <a:p>
-                      <a:pPr algn="l" fontAlgn="ctr"/>
-                      <a:r>
-                        <a:rPr lang="en-US" sz="900" u="none" strike="noStrike">
-                          <a:effectLst/>
-                        </a:rPr>
-                        <a:t>26.557***</a:t>
-                      </a:r>
-                      <a:endParaRPr lang="en-US" sz="900" b="0" i="0" u="none" strike="noStrike">
-                        <a:solidFill>
-                          <a:srgbClr val="000000"/>
-                        </a:solidFill>
-                        <a:effectLst/>
-                        <a:latin typeface="Calibri" panose="020F0502020204030204" pitchFamily="34" charset="0"/>
-                      </a:endParaRPr>
-                    </a:p>
-                  </a:txBody>
-                  <a:tcPr marL="7770" marR="7770" marT="7770" marB="0" anchor="ctr"/>
-                </a:tc>
-                <a:tc>
-                  <a:txBody>
-                    <a:bodyPr/>
-                    <a:lstStyle/>
-                    <a:p>
-                      <a:pPr algn="l" fontAlgn="ctr"/>
-                      <a:r>
-                        <a:rPr lang="en-US" sz="900" u="none" strike="noStrike">
-                          <a:effectLst/>
-                        </a:rPr>
-                        <a:t>-0.503</a:t>
-                      </a:r>
-                      <a:endParaRPr lang="en-US" sz="900" b="0" i="0" u="none" strike="noStrike">
-                        <a:solidFill>
-                          <a:srgbClr val="000000"/>
-                        </a:solidFill>
-                        <a:effectLst/>
-                        <a:latin typeface="Calibri" panose="020F0502020204030204" pitchFamily="34" charset="0"/>
-                      </a:endParaRPr>
-                    </a:p>
-                  </a:txBody>
-                  <a:tcPr marL="7770" marR="7770" marT="7770" marB="0" anchor="ctr"/>
-                </a:tc>
-                <a:tc>
-                  <a:txBody>
-                    <a:bodyPr/>
-                    <a:lstStyle/>
-                    <a:p>
-                      <a:pPr algn="l" fontAlgn="ctr"/>
-                      <a:r>
-                        <a:rPr lang="en-US" sz="900" u="none" strike="noStrike">
-                          <a:effectLst/>
-                        </a:rPr>
-                        <a:t>-0.099</a:t>
-                      </a:r>
-                      <a:endParaRPr lang="en-US" sz="900" b="0" i="0" u="none" strike="noStrike">
-                        <a:solidFill>
-                          <a:srgbClr val="000000"/>
-                        </a:solidFill>
-                        <a:effectLst/>
-                        <a:latin typeface="Calibri" panose="020F0502020204030204" pitchFamily="34" charset="0"/>
-                      </a:endParaRPr>
-                    </a:p>
-                  </a:txBody>
-                  <a:tcPr marL="7770" marR="7770" marT="7770" marB="0" anchor="ctr"/>
-                </a:tc>
-                <a:tc>
-                  <a:txBody>
-                    <a:bodyPr/>
-                    <a:lstStyle/>
-                    <a:p>
-                      <a:pPr algn="l" fontAlgn="ctr"/>
-                      <a:r>
-                        <a:rPr lang="en-US" sz="900" u="none" strike="noStrike">
-                          <a:effectLst/>
-                        </a:rPr>
-                        <a:t>-0.711</a:t>
-                      </a:r>
-                      <a:endParaRPr lang="en-US" sz="900" b="0" i="0" u="none" strike="noStrike">
-                        <a:solidFill>
-                          <a:srgbClr val="000000"/>
-                        </a:solidFill>
-                        <a:effectLst/>
-                        <a:latin typeface="Calibri" panose="020F0502020204030204" pitchFamily="34" charset="0"/>
-                      </a:endParaRPr>
-                    </a:p>
-                  </a:txBody>
-                  <a:tcPr marL="7770" marR="7770" marT="7770" marB="0" anchor="ctr"/>
-                </a:tc>
-                <a:tc>
-                  <a:txBody>
-                    <a:bodyPr/>
-                    <a:lstStyle/>
-                    <a:p>
-                      <a:pPr algn="l" fontAlgn="ctr"/>
-                      <a:r>
-                        <a:rPr lang="en-US" sz="900" u="none" strike="noStrike" dirty="0">
-                          <a:effectLst/>
-                        </a:rPr>
-                        <a:t>-0.433</a:t>
-                      </a:r>
-                      <a:endParaRPr lang="en-US" sz="900" b="0" i="0" u="none" strike="noStrike" dirty="0">
-                        <a:solidFill>
-                          <a:srgbClr val="000000"/>
-                        </a:solidFill>
-                        <a:effectLst/>
-                        <a:latin typeface="Calibri" panose="020F0502020204030204" pitchFamily="34" charset="0"/>
-                      </a:endParaRPr>
-                    </a:p>
-                  </a:txBody>
-                  <a:tcPr marL="7770" marR="7770" marT="7770" marB="0" anchor="ctr"/>
-                </a:tc>
-                <a:tc>
-                  <a:txBody>
-                    <a:bodyPr/>
-                    <a:lstStyle/>
-                    <a:p>
-                      <a:pPr algn="l" fontAlgn="ctr"/>
-                      <a:r>
-                        <a:rPr lang="en-US" sz="900" u="none" strike="noStrike" dirty="0">
-                          <a:effectLst/>
-                        </a:rPr>
-                        <a:t>-0.681</a:t>
-                      </a:r>
-                      <a:endParaRPr lang="en-US" sz="900" b="0" i="0" u="none" strike="noStrike" dirty="0">
-                        <a:solidFill>
-                          <a:srgbClr val="000000"/>
-                        </a:solidFill>
-                        <a:effectLst/>
-                        <a:latin typeface="Calibri" panose="020F0502020204030204" pitchFamily="34" charset="0"/>
-                      </a:endParaRPr>
-                    </a:p>
-                  </a:txBody>
-                  <a:tcPr marL="7770" marR="7770" marT="7770" marB="0" anchor="ctr"/>
-                </a:tc>
-                <a:tc>
-                  <a:txBody>
-                    <a:bodyPr/>
-                    <a:lstStyle/>
-                    <a:p>
-                      <a:pPr algn="l" fontAlgn="ctr"/>
-                      <a:r>
-                        <a:rPr lang="en-US" sz="900" u="none" strike="noStrike">
-                          <a:effectLst/>
-                        </a:rPr>
-                        <a:t>-0.409</a:t>
-                      </a:r>
-                      <a:endParaRPr lang="en-US" sz="900" b="0" i="0" u="none" strike="noStrike">
-                        <a:solidFill>
-                          <a:srgbClr val="000000"/>
-                        </a:solidFill>
-                        <a:effectLst/>
-                        <a:latin typeface="Calibri" panose="020F0502020204030204" pitchFamily="34" charset="0"/>
-                      </a:endParaRPr>
-                    </a:p>
-                  </a:txBody>
-                  <a:tcPr marL="7770" marR="7770" marT="7770" marB="0" anchor="ctr"/>
-                </a:tc>
-                <a:tc>
-                  <a:txBody>
-                    <a:bodyPr/>
-                    <a:lstStyle/>
-                    <a:p>
-                      <a:pPr algn="l" fontAlgn="ctr"/>
-                      <a:r>
-                        <a:rPr lang="en-US" sz="900" u="none" strike="noStrike">
-                          <a:effectLst/>
-                        </a:rPr>
-                        <a:t>-1.162</a:t>
-                      </a:r>
-                      <a:endParaRPr lang="en-US" sz="900" b="0" i="0" u="none" strike="noStrike">
-                        <a:solidFill>
-                          <a:srgbClr val="000000"/>
-                        </a:solidFill>
-                        <a:effectLst/>
-                        <a:latin typeface="Calibri" panose="020F0502020204030204" pitchFamily="34" charset="0"/>
-                      </a:endParaRPr>
-                    </a:p>
-                  </a:txBody>
-                  <a:tcPr marL="7770" marR="7770" marT="7770" marB="0" anchor="ctr"/>
-                </a:tc>
-                <a:tc>
-                  <a:txBody>
-                    <a:bodyPr/>
-                    <a:lstStyle/>
-                    <a:p>
-                      <a:pPr algn="l" fontAlgn="ctr"/>
-                      <a:r>
-                        <a:rPr lang="en-US" sz="900" u="none" strike="noStrike">
-                          <a:effectLst/>
-                        </a:rPr>
-                        <a:t>0</a:t>
-                      </a:r>
-                      <a:endParaRPr lang="en-US" sz="900" b="0" i="0" u="none" strike="noStrike">
-                        <a:solidFill>
-                          <a:srgbClr val="000000"/>
-                        </a:solidFill>
-                        <a:effectLst/>
-                        <a:latin typeface="Calibri" panose="020F0502020204030204" pitchFamily="34" charset="0"/>
-                      </a:endParaRPr>
-                    </a:p>
-                  </a:txBody>
-                  <a:tcPr marL="7770" marR="7770" marT="7770" marB="0" anchor="ctr"/>
-                </a:tc>
-                <a:tc>
-                  <a:txBody>
-                    <a:bodyPr/>
-                    <a:lstStyle/>
-                    <a:p>
-                      <a:pPr algn="l" fontAlgn="ctr"/>
-                      <a:r>
-                        <a:rPr lang="en-US" sz="900" u="none" strike="noStrike">
-                          <a:effectLst/>
-                        </a:rPr>
-                        <a:t>0</a:t>
-                      </a:r>
-                      <a:endParaRPr lang="en-US" sz="900" b="0" i="0" u="none" strike="noStrike">
-                        <a:solidFill>
-                          <a:srgbClr val="000000"/>
-                        </a:solidFill>
-                        <a:effectLst/>
-                        <a:latin typeface="Calibri" panose="020F0502020204030204" pitchFamily="34" charset="0"/>
-                      </a:endParaRPr>
-                    </a:p>
-                  </a:txBody>
-                  <a:tcPr marL="7770" marR="7770" marT="7770" marB="0" anchor="ctr"/>
-                </a:tc>
-                <a:tc>
-                  <a:txBody>
-                    <a:bodyPr/>
-                    <a:lstStyle/>
-                    <a:p>
-                      <a:pPr algn="l" fontAlgn="ctr"/>
-                      <a:r>
-                        <a:rPr lang="en-US" sz="900" u="none" strike="noStrike">
-                          <a:effectLst/>
-                        </a:rPr>
-                        <a:t>1.125</a:t>
-                      </a:r>
-                      <a:endParaRPr lang="en-US" sz="900" b="0" i="0" u="none" strike="noStrike">
-                        <a:solidFill>
-                          <a:srgbClr val="000000"/>
-                        </a:solidFill>
-                        <a:effectLst/>
-                        <a:latin typeface="Calibri" panose="020F0502020204030204" pitchFamily="34" charset="0"/>
-                      </a:endParaRPr>
-                    </a:p>
-                  </a:txBody>
-                  <a:tcPr marL="7770" marR="7770" marT="7770" marB="0" anchor="ctr"/>
-                </a:tc>
-                <a:tc>
-                  <a:txBody>
-                    <a:bodyPr/>
-                    <a:lstStyle/>
-                    <a:p>
-                      <a:pPr algn="l" fontAlgn="ctr"/>
-                      <a:r>
-                        <a:rPr lang="en-US" sz="900" u="none" strike="noStrike">
-                          <a:effectLst/>
-                        </a:rPr>
-                        <a:t>18</a:t>
-                      </a:r>
-                      <a:endParaRPr lang="en-US" sz="900" b="0" i="0" u="none" strike="noStrike">
-                        <a:solidFill>
-                          <a:srgbClr val="000000"/>
-                        </a:solidFill>
-                        <a:effectLst/>
-                        <a:latin typeface="Calibri" panose="020F0502020204030204" pitchFamily="34" charset="0"/>
-                      </a:endParaRPr>
-                    </a:p>
-                  </a:txBody>
-                  <a:tcPr marL="7770" marR="7770" marT="7770" marB="0" anchor="ctr"/>
-                </a:tc>
-                <a:tc>
-                  <a:txBody>
-                    <a:bodyPr/>
-                    <a:lstStyle/>
-                    <a:p>
-                      <a:pPr algn="l" fontAlgn="ctr"/>
-                      <a:r>
-                        <a:rPr lang="en-US" sz="900" u="none" strike="noStrike" dirty="0">
-                          <a:effectLst/>
-                        </a:rPr>
-                        <a:t>62.7</a:t>
-                      </a:r>
-                      <a:endParaRPr lang="en-US" sz="900" b="0" i="0" u="none" strike="noStrike" dirty="0">
-                        <a:solidFill>
-                          <a:srgbClr val="000000"/>
-                        </a:solidFill>
-                        <a:effectLst/>
-                        <a:latin typeface="Calibri" panose="020F0502020204030204" pitchFamily="34" charset="0"/>
-                      </a:endParaRPr>
-                    </a:p>
-                  </a:txBody>
-                  <a:tcPr marL="7770" marR="7770" marT="7770" marB="0" anchor="ctr"/>
-                </a:tc>
-                <a:extLst>
-                  <a:ext uri="{0D108BD9-81ED-4DB2-BD59-A6C34878D82A}">
-                    <a16:rowId xmlns:a16="http://schemas.microsoft.com/office/drawing/2014/main" val="1463248249"/>
-                  </a:ext>
-                </a:extLst>
-              </a:tr>
-            </a:tbl>
-          </a:graphicData>
-        </a:graphic>
-      </p:graphicFrame>
+        </p:nvSpPr>
+        <p:spPr/>
+        <p:txBody>
+          <a:bodyPr/>
+          <a:lstStyle/>
+          <a:p>
+            <a:endParaRPr lang="en-US"/>
+          </a:p>
+        </p:txBody>
+      </p:sp>
     </p:spTree>
     <p:extLst>
       <p:ext uri="{BB962C8B-B14F-4D97-AF65-F5344CB8AC3E}">
@@ -11280,11 +6249,11 @@
   <p:clrMapOvr>
     <a:masterClrMapping/>
   </p:clrMapOvr>
-  <mc:AlternateContent xmlns:mc="http://schemas.openxmlformats.org/markup-compatibility/2006">
-    <mc:Choice xmlns:p14="http://schemas.microsoft.com/office/powerpoint/2010/main" Requires="p14">
+  <mc:AlternateContent xmlns:mc="http://schemas.openxmlformats.org/markup-compatibility/2006" xmlns:p14="http://schemas.microsoft.com/office/powerpoint/2010/main">
+    <mc:Choice Requires="p14">
       <p:transition spd="slow" p14:dur="2000"/>
     </mc:Choice>
-    <mc:Fallback>
+    <mc:Fallback xmlns="">
       <p:transition spd="slow"/>
     </mc:Fallback>
   </mc:AlternateContent>
@@ -11299,7 +6268,7 @@
 </file>
 
 <file path=ppt/slides/slide13.xml><?xml version="1.0" encoding="utf-8"?>
-<p:sld xmlns:a="http://schemas.openxmlformats.org/drawingml/2006/main" xmlns:r="http://schemas.openxmlformats.org/officeDocument/2006/relationships" xmlns:p="http://schemas.openxmlformats.org/presentationml/2006/main">
+<p:sld xmlns:a="http://schemas.openxmlformats.org/drawingml/2006/main" xmlns:r="http://schemas.openxmlformats.org/officeDocument/2006/relationships" xmlns:p="http://schemas.openxmlformats.org/presentationml/2006/main" show="0">
   <p:cSld>
     <p:spTree>
       <p:nvGrpSpPr>
@@ -11566,6 +6535,14 @@
   <p:clrMapOvr>
     <a:masterClrMapping/>
   </p:clrMapOvr>
+  <mc:AlternateContent xmlns:mc="http://schemas.openxmlformats.org/markup-compatibility/2006" xmlns:p14="http://schemas.microsoft.com/office/powerpoint/2010/main">
+    <mc:Choice Requires="p14">
+      <p:transition spd="slow" p14:dur="2000"/>
+    </mc:Choice>
+    <mc:Fallback xmlns="">
+      <p:transition spd="slow"/>
+    </mc:Fallback>
+  </mc:AlternateContent>
   <p:timing>
     <p:tnLst>
       <p:par>
@@ -20701,29 +15678,6 @@
           <a:chExt cx="0" cy="0"/>
         </a:xfrm>
       </p:grpSpPr>
-      <p:sp>
-        <p:nvSpPr>
-          <p:cNvPr id="2" name="Título 1"/>
-          <p:cNvSpPr>
-            <a:spLocks noGrp="1"/>
-          </p:cNvSpPr>
-          <p:nvPr>
-            <p:ph type="title"/>
-          </p:nvPr>
-        </p:nvSpPr>
-        <p:spPr/>
-        <p:txBody>
-          <a:bodyPr/>
-          <a:lstStyle/>
-          <a:p>
-            <a:r>
-              <a:rPr lang="es-MX" dirty="0" err="1" smtClean="0"/>
-              <a:t>Overview</a:t>
-            </a:r>
-            <a:endParaRPr lang="en-US" dirty="0"/>
-          </a:p>
-        </p:txBody>
-      </p:sp>
       <p:graphicFrame>
         <p:nvGraphicFramePr>
           <p:cNvPr id="6" name="Marcador de contenido 5"/>
@@ -20734,13 +15688,13 @@
             <p:ph idx="1"/>
             <p:extLst>
               <p:ext uri="{D42A27DB-BD31-4B8C-83A1-F6EECF244321}">
-                <p14:modId xmlns:p14="http://schemas.microsoft.com/office/powerpoint/2010/main" val="3952438916"/>
+                <p14:modId xmlns:p14="http://schemas.microsoft.com/office/powerpoint/2010/main" val="181025777"/>
               </p:ext>
             </p:extLst>
           </p:nvPr>
         </p:nvGraphicFramePr>
         <p:xfrm>
-          <a:off x="838200" y="2050574"/>
+          <a:off x="838200" y="3429000"/>
           <a:ext cx="10515600" cy="2956560"/>
         </p:xfrm>
         <a:graphic>
@@ -21724,7 +16678,7 @@
                     <a:lstStyle/>
                     <a:p>
                       <a:r>
-                        <a:rPr lang="en-US">
+                        <a:rPr lang="en-US" dirty="0">
                           <a:effectLst/>
                         </a:rPr>
                         <a:t>9</a:t>
@@ -21758,7 +16712,7 @@
                     <a:lstStyle/>
                     <a:p>
                       <a:r>
-                        <a:rPr lang="en-US">
+                        <a:rPr lang="en-US" dirty="0">
                           <a:effectLst/>
                         </a:rPr>
                         <a:t>8</a:t>
@@ -21792,7 +16746,7 @@
                     <a:lstStyle/>
                     <a:p>
                       <a:r>
-                        <a:rPr lang="en-US">
+                        <a:rPr lang="en-US" dirty="0">
                           <a:effectLst/>
                         </a:rPr>
                         <a:t>15</a:t>
@@ -22425,6 +17379,25 @@
           </a:graphicData>
         </a:graphic>
       </p:graphicFrame>
+      <p:sp>
+        <p:nvSpPr>
+          <p:cNvPr id="3" name="Título 2"/>
+          <p:cNvSpPr>
+            <a:spLocks noGrp="1"/>
+          </p:cNvSpPr>
+          <p:nvPr>
+            <p:ph type="title"/>
+          </p:nvPr>
+        </p:nvSpPr>
+        <p:spPr/>
+        <p:txBody>
+          <a:bodyPr/>
+          <a:lstStyle/>
+          <a:p>
+            <a:endParaRPr lang="en-US"/>
+          </a:p>
+        </p:txBody>
+      </p:sp>
     </p:spTree>
     <p:extLst>
       <p:ext uri="{BB962C8B-B14F-4D97-AF65-F5344CB8AC3E}">

--- a/NUMEX_pre_RStudio/NUMEX results.pptx
+++ b/NUMEX_pre_RStudio/NUMEX results.pptx
@@ -136,6 +136,47 @@
     </a:lvl9pPr>
   </p:defaultTextStyle>
   <p:extLst>
+    <p:ext uri="{521415D9-36F7-43E2-AB2F-B90AF26B5E84}">
+      <p14:sectionLst xmlns:p14="http://schemas.microsoft.com/office/powerpoint/2010/main">
+        <p14:section name="Sección predeterminada" id="{280FA906-43C6-4670-94C4-13E5EA7AB40E}">
+          <p14:sldIdLst>
+            <p14:sldId id="266"/>
+            <p14:sldId id="282"/>
+            <p14:sldId id="268"/>
+            <p14:sldId id="285"/>
+            <p14:sldId id="271"/>
+          </p14:sldIdLst>
+        </p14:section>
+        <p14:section name="Sección sin título" id="{595CF41D-8C0D-40C1-B144-596D817172A6}">
+          <p14:sldIdLst>
+            <p14:sldId id="292"/>
+            <p14:sldId id="291"/>
+            <p14:sldId id="283"/>
+            <p14:sldId id="269"/>
+            <p14:sldId id="272"/>
+            <p14:sldId id="259"/>
+            <p14:sldId id="287"/>
+            <p14:sldId id="284"/>
+            <p14:sldId id="261"/>
+            <p14:sldId id="260"/>
+            <p14:sldId id="273"/>
+            <p14:sldId id="274"/>
+            <p14:sldId id="275"/>
+            <p14:sldId id="288"/>
+            <p14:sldId id="276"/>
+            <p14:sldId id="277"/>
+            <p14:sldId id="281"/>
+            <p14:sldId id="278"/>
+            <p14:sldId id="289"/>
+            <p14:sldId id="290"/>
+            <p14:sldId id="270"/>
+            <p14:sldId id="257"/>
+            <p14:sldId id="256"/>
+            <p14:sldId id="280"/>
+          </p14:sldIdLst>
+        </p14:section>
+      </p14:sectionLst>
+    </p:ext>
     <p:ext uri="{EFAFB233-063F-42B5-8137-9DF3F51BA10A}">
       <p15:sldGuideLst xmlns:p15="http://schemas.microsoft.com/office/powerpoint/2012/main">
         <p15:guide id="1" orient="horz" pos="2160" userDrawn="1">
@@ -236,7 +277,7 @@
           <a:p>
             <a:fld id="{99ADAB2D-2438-4DAF-8EF0-78196AA5F544}" type="datetimeFigureOut">
               <a:rPr lang="en-US" smtClean="0"/>
-              <a:t>2/24/2026</a:t>
+              <a:t>3/1/2026</a:t>
             </a:fld>
             <a:endParaRPr lang="en-US"/>
           </a:p>
@@ -2791,7 +2832,7 @@
           <a:p>
             <a:fld id="{742CBFA1-BD22-4292-9851-D341668FFB9E}" type="datetimeFigureOut">
               <a:rPr lang="en-US" smtClean="0"/>
-              <a:t>2/24/2026</a:t>
+              <a:t>3/1/2026</a:t>
             </a:fld>
             <a:endParaRPr lang="en-US"/>
           </a:p>
@@ -2961,7 +3002,7 @@
           <a:p>
             <a:fld id="{742CBFA1-BD22-4292-9851-D341668FFB9E}" type="datetimeFigureOut">
               <a:rPr lang="en-US" smtClean="0"/>
-              <a:t>2/24/2026</a:t>
+              <a:t>3/1/2026</a:t>
             </a:fld>
             <a:endParaRPr lang="en-US"/>
           </a:p>
@@ -3141,7 +3182,7 @@
           <a:p>
             <a:fld id="{742CBFA1-BD22-4292-9851-D341668FFB9E}" type="datetimeFigureOut">
               <a:rPr lang="en-US" smtClean="0"/>
-              <a:t>2/24/2026</a:t>
+              <a:t>3/1/2026</a:t>
             </a:fld>
             <a:endParaRPr lang="en-US"/>
           </a:p>
@@ -3311,7 +3352,7 @@
           <a:p>
             <a:fld id="{742CBFA1-BD22-4292-9851-D341668FFB9E}" type="datetimeFigureOut">
               <a:rPr lang="en-US" smtClean="0"/>
-              <a:t>2/24/2026</a:t>
+              <a:t>3/1/2026</a:t>
             </a:fld>
             <a:endParaRPr lang="en-US"/>
           </a:p>
@@ -3557,7 +3598,7 @@
           <a:p>
             <a:fld id="{742CBFA1-BD22-4292-9851-D341668FFB9E}" type="datetimeFigureOut">
               <a:rPr lang="en-US" smtClean="0"/>
-              <a:t>2/24/2026</a:t>
+              <a:t>3/1/2026</a:t>
             </a:fld>
             <a:endParaRPr lang="en-US"/>
           </a:p>
@@ -3789,7 +3830,7 @@
           <a:p>
             <a:fld id="{742CBFA1-BD22-4292-9851-D341668FFB9E}" type="datetimeFigureOut">
               <a:rPr lang="en-US" smtClean="0"/>
-              <a:t>2/24/2026</a:t>
+              <a:t>3/1/2026</a:t>
             </a:fld>
             <a:endParaRPr lang="en-US"/>
           </a:p>
@@ -4156,7 +4197,7 @@
           <a:p>
             <a:fld id="{742CBFA1-BD22-4292-9851-D341668FFB9E}" type="datetimeFigureOut">
               <a:rPr lang="en-US" smtClean="0"/>
-              <a:t>2/24/2026</a:t>
+              <a:t>3/1/2026</a:t>
             </a:fld>
             <a:endParaRPr lang="en-US"/>
           </a:p>
@@ -4274,7 +4315,7 @@
           <a:p>
             <a:fld id="{742CBFA1-BD22-4292-9851-D341668FFB9E}" type="datetimeFigureOut">
               <a:rPr lang="en-US" smtClean="0"/>
-              <a:t>2/24/2026</a:t>
+              <a:t>3/1/2026</a:t>
             </a:fld>
             <a:endParaRPr lang="en-US"/>
           </a:p>
@@ -4369,7 +4410,7 @@
           <a:p>
             <a:fld id="{742CBFA1-BD22-4292-9851-D341668FFB9E}" type="datetimeFigureOut">
               <a:rPr lang="en-US" smtClean="0"/>
-              <a:t>2/24/2026</a:t>
+              <a:t>3/1/2026</a:t>
             </a:fld>
             <a:endParaRPr lang="en-US"/>
           </a:p>
@@ -4646,7 +4687,7 @@
           <a:p>
             <a:fld id="{742CBFA1-BD22-4292-9851-D341668FFB9E}" type="datetimeFigureOut">
               <a:rPr lang="en-US" smtClean="0"/>
-              <a:t>2/24/2026</a:t>
+              <a:t>3/1/2026</a:t>
             </a:fld>
             <a:endParaRPr lang="en-US"/>
           </a:p>
@@ -4899,7 +4940,7 @@
           <a:p>
             <a:fld id="{742CBFA1-BD22-4292-9851-D341668FFB9E}" type="datetimeFigureOut">
               <a:rPr lang="en-US" smtClean="0"/>
-              <a:t>2/24/2026</a:t>
+              <a:t>3/1/2026</a:t>
             </a:fld>
             <a:endParaRPr lang="en-US"/>
           </a:p>
@@ -5112,7 +5153,7 @@
           <a:p>
             <a:fld id="{742CBFA1-BD22-4292-9851-D341668FFB9E}" type="datetimeFigureOut">
               <a:rPr lang="en-US" smtClean="0"/>
-              <a:t>2/24/2026</a:t>
+              <a:t>3/1/2026</a:t>
             </a:fld>
             <a:endParaRPr lang="en-US"/>
           </a:p>
@@ -12994,8 +13035,8 @@
         </p:blipFill>
         <p:spPr>
           <a:xfrm>
-            <a:off x="5683523" y="949713"/>
-            <a:ext cx="6666667" cy="4114286"/>
+            <a:off x="8554065" y="934040"/>
+            <a:ext cx="5070495" cy="3129220"/>
           </a:xfrm>
           <a:prstGeom prst="rect">
             <a:avLst/>
@@ -13018,8 +13059,8 @@
         </p:blipFill>
         <p:spPr>
           <a:xfrm>
-            <a:off x="268657" y="1227190"/>
-            <a:ext cx="4845323" cy="3559332"/>
+            <a:off x="-158190" y="192955"/>
+            <a:ext cx="8521382" cy="6259732"/>
           </a:xfrm>
           <a:prstGeom prst="rect">
             <a:avLst/>
